--- a/Programacion II/Clases/Clase 6 - Eventos y controladores ActionListener/Presentacion.pptx
+++ b/Programacion II/Clases/Clase 6 - Eventos y controladores ActionListener/Presentacion.pptx
@@ -18,6 +18,10 @@
     <p:sldId id="266" r:id="rId17"/>
     <p:sldId id="267" r:id="rId18"/>
     <p:sldId id="268" r:id="rId19"/>
+    <p:sldId id="269" r:id="rId20"/>
+    <p:sldId id="270" r:id="rId21"/>
+    <p:sldId id="271" r:id="rId22"/>
+    <p:sldId id="272" r:id="rId23"/>
   </p:sldIdLst>
   <p:sldSz cx="12191695" cy="6858000" type="screen4x3"/>
   <p:notesSz cx="6858000" cy="9144000"/>
@@ -3618,154 +3622,21 @@
                 </a:solidFill>
                 <a:latin typeface="Calibri"/>
               </a:rPr>
-              <a:t>Antes de entregar — autochequeo</a:t>
-            </a:r>
-          </a:p>
-        </p:txBody>
-      </p:sp>
-      <p:sp>
-        <p:nvSpPr>
-          <p:cNvPr id="5" name="Rounded Rectangle 4"/>
-          <p:cNvSpPr/>
-          <p:nvPr/>
-        </p:nvSpPr>
-        <p:spPr>
-          <a:xfrm>
-            <a:off x="457200" y="1261872"/>
-            <a:ext cx="11277295" cy="566928"/>
-          </a:xfrm>
-          <a:prstGeom prst="roundRect">
-            <a:avLst>
-              <a:gd name="adj" fmla="val 12000"/>
-            </a:avLst>
-          </a:prstGeom>
-          <a:solidFill>
-            <a:srgbClr val="F2F2F2"/>
-          </a:solidFill>
-          <a:ln>
-            <a:noFill/>
-          </a:ln>
-        </p:spPr>
-        <p:style>
-          <a:lnRef idx="1">
-            <a:schemeClr val="accent1"/>
-          </a:lnRef>
-          <a:fillRef idx="3">
-            <a:schemeClr val="accent1"/>
-          </a:fillRef>
-          <a:effectRef idx="2">
-            <a:schemeClr val="accent1"/>
-          </a:effectRef>
-          <a:fontRef idx="minor">
-            <a:schemeClr val="lt1"/>
-          </a:fontRef>
-        </p:style>
-        <p:txBody>
-          <a:bodyPr rtlCol="0" anchor="ctr"/>
-          <a:lstStyle/>
-          <a:p>
-            <a:pPr algn="ctr"/>
-          </a:p>
-        </p:txBody>
-      </p:sp>
-      <p:sp>
-        <p:nvSpPr>
-          <p:cNvPr id="6" name="Rectangle 5"/>
-          <p:cNvSpPr/>
-          <p:nvPr/>
-        </p:nvSpPr>
-        <p:spPr>
-          <a:xfrm>
-            <a:off x="640080" y="1408175"/>
-            <a:ext cx="274320" cy="274320"/>
-          </a:xfrm>
-          <a:prstGeom prst="rect">
-            <a:avLst/>
-          </a:prstGeom>
-          <a:solidFill>
-            <a:srgbClr val="FFFFFF"/>
-          </a:solidFill>
-          <a:ln>
-            <a:solidFill>
-              <a:srgbClr val="333333"/>
-            </a:solidFill>
-          </a:ln>
-        </p:spPr>
-        <p:style>
-          <a:lnRef idx="1">
-            <a:schemeClr val="accent1"/>
-          </a:lnRef>
-          <a:fillRef idx="3">
-            <a:schemeClr val="accent1"/>
-          </a:fillRef>
-          <a:effectRef idx="2">
-            <a:schemeClr val="accent1"/>
-          </a:effectRef>
-          <a:fontRef idx="minor">
-            <a:schemeClr val="lt1"/>
-          </a:fontRef>
-        </p:style>
-        <p:txBody>
-          <a:bodyPr rtlCol="0" anchor="ctr"/>
-          <a:lstStyle/>
-          <a:p>
-            <a:pPr algn="ctr"/>
-          </a:p>
-        </p:txBody>
-      </p:sp>
-      <p:sp>
-        <p:nvSpPr>
-          <p:cNvPr id="7" name="Rectangle 6"/>
-          <p:cNvSpPr/>
-          <p:nvPr/>
-        </p:nvSpPr>
-        <p:spPr>
-          <a:xfrm>
-            <a:off x="640080" y="1408175"/>
-            <a:ext cx="73152" cy="274320"/>
-          </a:xfrm>
-          <a:prstGeom prst="rect">
-            <a:avLst/>
-          </a:prstGeom>
-          <a:solidFill>
-            <a:srgbClr val="269CCB"/>
-          </a:solidFill>
-          <a:ln>
-            <a:noFill/>
-          </a:ln>
-        </p:spPr>
-        <p:style>
-          <a:lnRef idx="1">
-            <a:schemeClr val="accent1"/>
-          </a:lnRef>
-          <a:fillRef idx="3">
-            <a:schemeClr val="accent1"/>
-          </a:fillRef>
-          <a:effectRef idx="2">
-            <a:schemeClr val="accent1"/>
-          </a:effectRef>
-          <a:fontRef idx="minor">
-            <a:schemeClr val="lt1"/>
-          </a:fontRef>
-        </p:style>
-        <p:txBody>
-          <a:bodyPr rtlCol="0" anchor="ctr"/>
-          <a:lstStyle/>
-          <a:p>
-            <a:pPr algn="ctr"/>
-          </a:p>
-        </p:txBody>
-      </p:sp>
-      <p:sp>
-        <p:nvSpPr>
-          <p:cNvPr id="8" name="TextBox 7"/>
+              <a:t>Demo del dia</a:t>
+            </a:r>
+          </a:p>
+        </p:txBody>
+      </p:sp>
+      <p:sp>
+        <p:nvSpPr>
+          <p:cNvPr id="5" name="TextBox 4"/>
           <p:cNvSpPr txBox="1"/>
           <p:nvPr/>
         </p:nvSpPr>
         <p:spPr>
           <a:xfrm>
-            <a:off x="1097280" y="1353312"/>
-            <a:ext cx="10362895" cy="402336"/>
+            <a:off x="457200" y="1170432"/>
+            <a:ext cx="11277295" cy="5230368"/>
           </a:xfrm>
           <a:prstGeom prst="rect">
             <a:avLst/>
@@ -3773,354 +3644,99 @@
           <a:noFill/>
         </p:spPr>
         <p:txBody>
-          <a:bodyPr wrap="square" anchor="ctr"/>
-          <a:lstStyle/>
-          <a:p>
-            <a:r>
-              <a:rPr sz="1500" b="0" i="0">
+          <a:bodyPr wrap="square">
+            <a:spAutoFit/>
+          </a:bodyPr>
+          <a:lstStyle/>
+          <a:p>
+            <a:pPr>
+              <a:spcAft>
+                <a:spcPts val="800"/>
+              </a:spcAft>
+            </a:pPr>
+            <a:r>
+              <a:rPr sz="2000" b="0" i="0">
                 <a:solidFill>
                   <a:srgbClr val="333333"/>
                 </a:solidFill>
                 <a:latin typeface="Calibri"/>
               </a:rPr>
-              <a:t>Si oprime el boton dos veces y el listado siempre muestra un solo registro: en que linea exacta se esta creando el ArrayList y cuantas veces se ejecuta esa linea?</a:t>
-            </a:r>
-          </a:p>
-        </p:txBody>
-      </p:sp>
-      <p:sp>
-        <p:nvSpPr>
-          <p:cNvPr id="9" name="Rounded Rectangle 8"/>
-          <p:cNvSpPr/>
-          <p:nvPr/>
-        </p:nvSpPr>
-        <p:spPr>
-          <a:xfrm>
-            <a:off x="457200" y="1938528"/>
-            <a:ext cx="11277295" cy="566928"/>
-          </a:xfrm>
-          <a:prstGeom prst="roundRect">
-            <a:avLst>
-              <a:gd name="adj" fmla="val 12000"/>
-            </a:avLst>
-          </a:prstGeom>
-          <a:solidFill>
-            <a:srgbClr val="F2F2F2"/>
-          </a:solidFill>
-          <a:ln>
-            <a:noFill/>
-          </a:ln>
-        </p:spPr>
-        <p:style>
-          <a:lnRef idx="1">
-            <a:schemeClr val="accent1"/>
-          </a:lnRef>
-          <a:fillRef idx="3">
-            <a:schemeClr val="accent1"/>
-          </a:fillRef>
-          <a:effectRef idx="2">
-            <a:schemeClr val="accent1"/>
-          </a:effectRef>
-          <a:fontRef idx="minor">
-            <a:schemeClr val="lt1"/>
-          </a:fontRef>
-        </p:style>
-        <p:txBody>
-          <a:bodyPr rtlCol="0" anchor="ctr"/>
-          <a:lstStyle/>
-          <a:p>
-            <a:pPr algn="ctr"/>
-          </a:p>
-        </p:txBody>
-      </p:sp>
-      <p:sp>
-        <p:nvSpPr>
-          <p:cNvPr id="10" name="Rectangle 9"/>
-          <p:cNvSpPr/>
-          <p:nvPr/>
-        </p:nvSpPr>
-        <p:spPr>
-          <a:xfrm>
-            <a:off x="640080" y="2084832"/>
-            <a:ext cx="274320" cy="274320"/>
-          </a:xfrm>
-          <a:prstGeom prst="rect">
-            <a:avLst/>
-          </a:prstGeom>
-          <a:solidFill>
-            <a:srgbClr val="FFFFFF"/>
-          </a:solidFill>
-          <a:ln>
-            <a:solidFill>
-              <a:srgbClr val="333333"/>
-            </a:solidFill>
-          </a:ln>
-        </p:spPr>
-        <p:style>
-          <a:lnRef idx="1">
-            <a:schemeClr val="accent1"/>
-          </a:lnRef>
-          <a:fillRef idx="3">
-            <a:schemeClr val="accent1"/>
-          </a:fillRef>
-          <a:effectRef idx="2">
-            <a:schemeClr val="accent1"/>
-          </a:effectRef>
-          <a:fontRef idx="minor">
-            <a:schemeClr val="lt1"/>
-          </a:fontRef>
-        </p:style>
-        <p:txBody>
-          <a:bodyPr rtlCol="0" anchor="ctr"/>
-          <a:lstStyle/>
-          <a:p>
-            <a:pPr algn="ctr"/>
-          </a:p>
-        </p:txBody>
-      </p:sp>
-      <p:sp>
-        <p:nvSpPr>
-          <p:cNvPr id="11" name="Rectangle 10"/>
-          <p:cNvSpPr/>
-          <p:nvPr/>
-        </p:nvSpPr>
-        <p:spPr>
-          <a:xfrm>
-            <a:off x="640080" y="2084832"/>
-            <a:ext cx="73152" cy="274320"/>
-          </a:xfrm>
-          <a:prstGeom prst="rect">
-            <a:avLst/>
-          </a:prstGeom>
-          <a:solidFill>
-            <a:srgbClr val="269CCB"/>
-          </a:solidFill>
-          <a:ln>
-            <a:noFill/>
-          </a:ln>
-        </p:spPr>
-        <p:style>
-          <a:lnRef idx="1">
-            <a:schemeClr val="accent1"/>
-          </a:lnRef>
-          <a:fillRef idx="3">
-            <a:schemeClr val="accent1"/>
-          </a:fillRef>
-          <a:effectRef idx="2">
-            <a:schemeClr val="accent1"/>
-          </a:effectRef>
-          <a:fontRef idx="minor">
-            <a:schemeClr val="lt1"/>
-          </a:fontRef>
-        </p:style>
-        <p:txBody>
-          <a:bodyPr rtlCol="0" anchor="ctr"/>
-          <a:lstStyle/>
-          <a:p>
-            <a:pPr algn="ctr"/>
-          </a:p>
-        </p:txBody>
-      </p:sp>
-      <p:sp>
-        <p:nvSpPr>
-          <p:cNvPr id="12" name="TextBox 11"/>
-          <p:cNvSpPr txBox="1"/>
-          <p:nvPr/>
-        </p:nvSpPr>
-        <p:spPr>
-          <a:xfrm>
-            <a:off x="1097280" y="2029968"/>
-            <a:ext cx="10362895" cy="402336"/>
-          </a:xfrm>
-          <a:prstGeom prst="rect">
-            <a:avLst/>
-          </a:prstGeom>
-          <a:noFill/>
-        </p:spPr>
-        <p:txBody>
-          <a:bodyPr wrap="square" anchor="ctr"/>
-          <a:lstStyle/>
-          <a:p>
-            <a:r>
-              <a:rPr sz="1500" b="0" i="0">
+              <a:t>–   </a:t>
+            </a:r>
+            <a:r>
+              <a:rPr sz="2000" b="1" i="0">
                 <a:solidFill>
                   <a:srgbClr val="333333"/>
                 </a:solidFill>
                 <a:latin typeface="Calibri"/>
               </a:rPr>
-              <a:t>Si borra el import de javax.swing de su controlador, el proyecto sigue compilando? Que le dice esa respuesta sobre donde quedo la logica?</a:t>
-            </a:r>
-          </a:p>
-        </p:txBody>
-      </p:sp>
-      <p:sp>
-        <p:nvSpPr>
-          <p:cNvPr id="13" name="Rounded Rectangle 12"/>
-          <p:cNvSpPr/>
-          <p:nvPr/>
-        </p:nvSpPr>
-        <p:spPr>
-          <a:xfrm>
-            <a:off x="457200" y="2615184"/>
-            <a:ext cx="11277295" cy="566928"/>
-          </a:xfrm>
-          <a:prstGeom prst="roundRect">
-            <a:avLst>
-              <a:gd name="adj" fmla="val 12000"/>
-            </a:avLst>
-          </a:prstGeom>
-          <a:solidFill>
-            <a:srgbClr val="F2F2F2"/>
-          </a:solidFill>
-          <a:ln>
-            <a:noFill/>
-          </a:ln>
-        </p:spPr>
-        <p:style>
-          <a:lnRef idx="1">
-            <a:schemeClr val="accent1"/>
-          </a:lnRef>
-          <a:fillRef idx="3">
-            <a:schemeClr val="accent1"/>
-          </a:fillRef>
-          <a:effectRef idx="2">
-            <a:schemeClr val="accent1"/>
-          </a:effectRef>
-          <a:fontRef idx="minor">
-            <a:schemeClr val="lt1"/>
-          </a:fontRef>
-        </p:style>
-        <p:txBody>
-          <a:bodyPr rtlCol="0" anchor="ctr"/>
-          <a:lstStyle/>
-          <a:p>
-            <a:pPr algn="ctr"/>
-          </a:p>
-        </p:txBody>
-      </p:sp>
-      <p:sp>
-        <p:nvSpPr>
-          <p:cNvPr id="14" name="Rectangle 13"/>
-          <p:cNvSpPr/>
-          <p:nvPr/>
-        </p:nvSpPr>
-        <p:spPr>
-          <a:xfrm>
-            <a:off x="640080" y="2761488"/>
-            <a:ext cx="274320" cy="274320"/>
-          </a:xfrm>
-          <a:prstGeom prst="rect">
-            <a:avLst/>
-          </a:prstGeom>
-          <a:solidFill>
-            <a:srgbClr val="FFFFFF"/>
-          </a:solidFill>
-          <a:ln>
-            <a:solidFill>
-              <a:srgbClr val="333333"/>
-            </a:solidFill>
-          </a:ln>
-        </p:spPr>
-        <p:style>
-          <a:lnRef idx="1">
-            <a:schemeClr val="accent1"/>
-          </a:lnRef>
-          <a:fillRef idx="3">
-            <a:schemeClr val="accent1"/>
-          </a:fillRef>
-          <a:effectRef idx="2">
-            <a:schemeClr val="accent1"/>
-          </a:effectRef>
-          <a:fontRef idx="minor">
-            <a:schemeClr val="lt1"/>
-          </a:fontRef>
-        </p:style>
-        <p:txBody>
-          <a:bodyPr rtlCol="0" anchor="ctr"/>
-          <a:lstStyle/>
-          <a:p>
-            <a:pPr algn="ctr"/>
-          </a:p>
-        </p:txBody>
-      </p:sp>
-      <p:sp>
-        <p:nvSpPr>
-          <p:cNvPr id="15" name="Rectangle 14"/>
-          <p:cNvSpPr/>
-          <p:nvPr/>
-        </p:nvSpPr>
-        <p:spPr>
-          <a:xfrm>
-            <a:off x="640080" y="2761488"/>
-            <a:ext cx="73152" cy="274320"/>
-          </a:xfrm>
-          <a:prstGeom prst="rect">
-            <a:avLst/>
-          </a:prstGeom>
-          <a:solidFill>
-            <a:srgbClr val="269CCB"/>
-          </a:solidFill>
-          <a:ln>
-            <a:noFill/>
-          </a:ln>
-        </p:spPr>
-        <p:style>
-          <a:lnRef idx="1">
-            <a:schemeClr val="accent1"/>
-          </a:lnRef>
-          <a:fillRef idx="3">
-            <a:schemeClr val="accent1"/>
-          </a:fillRef>
-          <a:effectRef idx="2">
-            <a:schemeClr val="accent1"/>
-          </a:effectRef>
-          <a:fontRef idx="minor">
-            <a:schemeClr val="lt1"/>
-          </a:fontRef>
-        </p:style>
-        <p:txBody>
-          <a:bodyPr rtlCol="0" anchor="ctr"/>
-          <a:lstStyle/>
-          <a:p>
-            <a:pPr algn="ctr"/>
-          </a:p>
-        </p:txBody>
-      </p:sp>
-      <p:sp>
-        <p:nvSpPr>
-          <p:cNvPr id="16" name="TextBox 15"/>
-          <p:cNvSpPr txBox="1"/>
-          <p:nvPr/>
-        </p:nvSpPr>
-        <p:spPr>
-          <a:xfrm>
-            <a:off x="1097280" y="2706624"/>
-            <a:ext cx="10362895" cy="402336"/>
-          </a:xfrm>
-          <a:prstGeom prst="rect">
-            <a:avLst/>
-          </a:prstGeom>
-          <a:noFill/>
-        </p:spPr>
-        <p:txBody>
-          <a:bodyPr wrap="square" anchor="ctr"/>
-          <a:lstStyle/>
-          <a:p>
-            <a:r>
-              <a:rPr sz="1500" b="0" i="0">
+              <a:t>Herramienta:</a:t>
+            </a:r>
+            <a:r>
+              <a:rPr sz="2000" b="0" i="0">
                 <a:solidFill>
                   <a:srgbClr val="333333"/>
                 </a:solidFill>
                 <a:latin typeface="Calibri"/>
               </a:rPr>
-              <a:t>Cuando la edad llega como 'tres', quien deberia darse cuenta primero del problema (el JTextField, el controlador o el usuario) y en que orden viajan la excepcion y el mensaje?</a:t>
-            </a:r>
-          </a:p>
-        </p:txBody>
-      </p:sp>
-      <p:sp>
-        <p:nvSpPr>
-          <p:cNvPr id="17" name="TextBox 16"/>
+              <a:t> Visual Studio Code (Java)</a:t>
+            </a:r>
+          </a:p>
+          <a:p>
+            <a:pPr>
+              <a:spcAft>
+                <a:spcPts val="800"/>
+              </a:spcAft>
+            </a:pPr>
+            <a:r>
+              <a:rPr sz="2000" b="0" i="0">
+                <a:solidFill>
+                  <a:srgbClr val="333333"/>
+                </a:solidFill>
+                <a:latin typeface="Calibri"/>
+              </a:rPr>
+              <a:t>–   </a:t>
+            </a:r>
+            <a:r>
+              <a:rPr sz="2000" b="1" i="0">
+                <a:solidFill>
+                  <a:srgbClr val="333333"/>
+                </a:solidFill>
+                <a:latin typeface="Calibri"/>
+              </a:rPr>
+              <a:t>Demo:</a:t>
+            </a:r>
+            <a:r>
+              <a:rPr sz="2000" b="0" i="0">
+                <a:solidFill>
+                  <a:srgbClr val="333333"/>
+                </a:solidFill>
+                <a:latin typeface="Calibri"/>
+              </a:rPr>
+              <a:t> El docente oprime el boton de la ventana ya corriendo y muestra en vivo como la mascota pasa del formulario al ArrayList, incluyendo que pasa cuando la edad se escribe como texto.</a:t>
+            </a:r>
+          </a:p>
+          <a:p>
+            <a:pPr>
+              <a:spcAft>
+                <a:spcPts val="800"/>
+              </a:spcAft>
+            </a:pPr>
+            <a:r>
+              <a:rPr sz="2000" b="0" i="0">
+                <a:solidFill>
+                  <a:srgbClr val="333333"/>
+                </a:solidFill>
+                <a:latin typeface="Calibri"/>
+              </a:rPr>
+              <a:t>–   Mismo dominio VetCare — no otro ejemplo.</a:t>
+            </a:r>
+          </a:p>
+        </p:txBody>
+      </p:sp>
+      <p:sp>
+        <p:nvSpPr>
+          <p:cNvPr id="6" name="TextBox 5"/>
           <p:cNvSpPr txBox="1"/>
           <p:nvPr/>
         </p:nvSpPr>
@@ -4294,7 +3910,7 @@
                 </a:solidFill>
                 <a:latin typeface="Calibri"/>
               </a:rPr>
-              <a:t>Criterios de exito / entregable</a:t>
+              <a:t>Taller PI — por que importa</a:t>
             </a:r>
           </a:p>
         </p:txBody>
@@ -4342,7 +3958,7 @@
                 </a:solidFill>
                 <a:latin typeface="Calibri"/>
               </a:rPr>
-              <a:t>Entregable:</a:t>
+              <a:t>Por que importa al PI:</a:t>
             </a:r>
             <a:r>
               <a:rPr sz="2000" b="0" i="0">
@@ -4351,7 +3967,7 @@
                 </a:solidFill>
                 <a:latin typeface="Calibri"/>
               </a:rPr>
-              <a:t> Proyecto VetCare con la ventana de registro operativa y la clase ControladorRegistro separada de la vista, comprimido y subido a la plataforma del curso.</a:t>
+              <a:t> el PI exige interfaz grafica y manejo de errores con try-catch; hoy es la clase donde la ventana deja de ser un dibujo bonito y empieza a mover datos reales de la coleccion de mascotas.</a:t>
             </a:r>
           </a:p>
           <a:p>
@@ -4367,25 +3983,7 @@
                 </a:solidFill>
                 <a:latin typeface="Calibri"/>
               </a:rPr>
-              <a:t>–   </a:t>
-            </a:r>
-            <a:r>
-              <a:rPr sz="2000" b="1" i="0">
-                <a:solidFill>
-                  <a:srgbClr val="333333"/>
-                </a:solidFill>
-                <a:latin typeface="Calibri"/>
-              </a:rPr>
-              <a:t>Exito:</a:t>
-            </a:r>
-            <a:r>
-              <a:rPr sz="2000" b="0" i="0">
-                <a:solidFill>
-                  <a:srgbClr val="333333"/>
-                </a:solidFill>
-                <a:latin typeface="Calibri"/>
-              </a:rPr>
-              <a:t> Al oprimir 'Registrar mascota' la mascota aparece en el listado y el total aumenta en uno por cada registro exitoso.</a:t>
+              <a:t>–   La separacion vista-controlador que hacemos hoy es la que permitira, en la clase 8, escribir pruebas automaticas sin abrir una sola ventana.</a:t>
             </a:r>
           </a:p>
           <a:p>
@@ -4401,127 +3999,7 @@
                 </a:solidFill>
                 <a:latin typeface="Calibri"/>
               </a:rPr>
-              <a:t>–   </a:t>
-            </a:r>
-            <a:r>
-              <a:rPr sz="2000" b="1" i="0">
-                <a:solidFill>
-                  <a:srgbClr val="333333"/>
-                </a:solidFill>
-                <a:latin typeface="Calibri"/>
-              </a:rPr>
-              <a:t>Exito:</a:t>
-            </a:r>
-            <a:r>
-              <a:rPr sz="2000" b="0" i="0">
-                <a:solidFill>
-                  <a:srgbClr val="333333"/>
-                </a:solidFill>
-                <a:latin typeface="Calibri"/>
-              </a:rPr>
-              <a:t> Ninguna clase de los paquetes modelo o servicio importa javax.swing, y el cuerpo del listener no contiene ninguna validacion ni conversion de datos.</a:t>
-            </a:r>
-          </a:p>
-          <a:p>
-            <a:pPr>
-              <a:spcAft>
-                <a:spcPts val="800"/>
-              </a:spcAft>
-            </a:pPr>
-            <a:r>
-              <a:rPr sz="2000" b="0" i="0">
-                <a:solidFill>
-                  <a:srgbClr val="333333"/>
-                </a:solidFill>
-                <a:latin typeface="Calibri"/>
-              </a:rPr>
-              <a:t>–   </a:t>
-            </a:r>
-            <a:r>
-              <a:rPr sz="2000" b="1" i="0">
-                <a:solidFill>
-                  <a:srgbClr val="333333"/>
-                </a:solidFill>
-                <a:latin typeface="Calibri"/>
-              </a:rPr>
-              <a:t>Exito:</a:t>
-            </a:r>
-            <a:r>
-              <a:rPr sz="2000" b="0" i="0">
-                <a:solidFill>
-                  <a:srgbClr val="333333"/>
-                </a:solidFill>
-                <a:latin typeface="Calibri"/>
-              </a:rPr>
-              <a:t> Escribir 'tres' en el campo edad muestra un mensaje entendible en un JOptionPane y la aplicacion sigue funcionando, sin traza roja en la consola de VS Code.</a:t>
-            </a:r>
-          </a:p>
-          <a:p>
-            <a:pPr>
-              <a:spcAft>
-                <a:spcPts val="800"/>
-              </a:spcAft>
-            </a:pPr>
-            <a:r>
-              <a:rPr sz="2000" b="0" i="0">
-                <a:solidFill>
-                  <a:srgbClr val="333333"/>
-                </a:solidFill>
-                <a:latin typeface="Calibri"/>
-              </a:rPr>
-              <a:t>–   </a:t>
-            </a:r>
-            <a:r>
-              <a:rPr sz="2000" b="1" i="0">
-                <a:solidFill>
-                  <a:srgbClr val="333333"/>
-                </a:solidFill>
-                <a:latin typeface="Calibri"/>
-              </a:rPr>
-              <a:t>Exito:</a:t>
-            </a:r>
-            <a:r>
-              <a:rPr sz="2000" b="0" i="0">
-                <a:solidFill>
-                  <a:srgbClr val="333333"/>
-                </a:solidFill>
-                <a:latin typeface="Calibri"/>
-              </a:rPr>
-              <a:t> Intentar registrar un ID que ya existe es rechazado con mensaje y la lista no queda con dos mascotas con el mismo ID.</a:t>
-            </a:r>
-          </a:p>
-          <a:p>
-            <a:pPr>
-              <a:spcAft>
-                <a:spcPts val="800"/>
-              </a:spcAft>
-            </a:pPr>
-            <a:r>
-              <a:rPr sz="2000" b="0" i="0">
-                <a:solidFill>
-                  <a:srgbClr val="333333"/>
-                </a:solidFill>
-                <a:latin typeface="Calibri"/>
-              </a:rPr>
-              <a:t>–   </a:t>
-            </a:r>
-            <a:r>
-              <a:rPr sz="2000" b="1" i="0">
-                <a:solidFill>
-                  <a:srgbClr val="333333"/>
-                </a:solidFill>
-                <a:latin typeface="Calibri"/>
-              </a:rPr>
-              <a:t>Entrega en la plataforma del curso</a:t>
-            </a:r>
-            <a:r>
-              <a:rPr sz="2000" b="0" i="0">
-                <a:solidFill>
-                  <a:srgbClr val="333333"/>
-                </a:solidFill>
-                <a:latin typeface="Calibri"/>
-              </a:rPr>
-              <a:t> — en la fecha que indique el docente.</a:t>
+              <a:t>–   Todo lo que falta del PI (agendar cita, buscar expediente por ID, guardar en archivo) repite exactamente el mismo ciclo: leer, validar, delegar, refrescar.</a:t>
             </a:r>
           </a:p>
         </p:txBody>
@@ -4702,109 +4180,21 @@
                 </a:solidFill>
                 <a:latin typeface="Calibri"/>
               </a:rPr>
-              <a:t>Para el PI esta semana</a:t>
-            </a:r>
-          </a:p>
-        </p:txBody>
-      </p:sp>
-      <p:sp>
-        <p:nvSpPr>
-          <p:cNvPr id="5" name="Rounded Rectangle 4"/>
-          <p:cNvSpPr/>
-          <p:nvPr/>
-        </p:nvSpPr>
-        <p:spPr>
-          <a:xfrm>
-            <a:off x="457200" y="1261872"/>
-            <a:ext cx="11277295" cy="1051560"/>
-          </a:xfrm>
-          <a:prstGeom prst="roundRect">
-            <a:avLst>
-              <a:gd name="adj" fmla="val 12000"/>
-            </a:avLst>
-          </a:prstGeom>
-          <a:solidFill>
-            <a:srgbClr val="E8F4FA"/>
-          </a:solidFill>
-          <a:ln>
-            <a:noFill/>
-          </a:ln>
-        </p:spPr>
-        <p:style>
-          <a:lnRef idx="1">
-            <a:schemeClr val="accent1"/>
-          </a:lnRef>
-          <a:fillRef idx="3">
-            <a:schemeClr val="accent1"/>
-          </a:fillRef>
-          <a:effectRef idx="2">
-            <a:schemeClr val="accent1"/>
-          </a:effectRef>
-          <a:fontRef idx="minor">
-            <a:schemeClr val="lt1"/>
-          </a:fontRef>
-        </p:style>
-        <p:txBody>
-          <a:bodyPr rtlCol="0" anchor="ctr"/>
-          <a:lstStyle/>
-          <a:p>
-            <a:pPr algn="ctr"/>
-          </a:p>
-        </p:txBody>
-      </p:sp>
-      <p:sp>
-        <p:nvSpPr>
-          <p:cNvPr id="6" name="Rectangle 5"/>
-          <p:cNvSpPr/>
-          <p:nvPr/>
-        </p:nvSpPr>
-        <p:spPr>
-          <a:xfrm>
-            <a:off x="457200" y="1261872"/>
-            <a:ext cx="128016" cy="1051560"/>
-          </a:xfrm>
-          <a:prstGeom prst="rect">
-            <a:avLst/>
-          </a:prstGeom>
-          <a:solidFill>
-            <a:srgbClr val="269CCB"/>
-          </a:solidFill>
-          <a:ln>
-            <a:noFill/>
-          </a:ln>
-        </p:spPr>
-        <p:style>
-          <a:lnRef idx="1">
-            <a:schemeClr val="accent1"/>
-          </a:lnRef>
-          <a:fillRef idx="3">
-            <a:schemeClr val="accent1"/>
-          </a:fillRef>
-          <a:effectRef idx="2">
-            <a:schemeClr val="accent1"/>
-          </a:effectRef>
-          <a:fontRef idx="minor">
-            <a:schemeClr val="lt1"/>
-          </a:fontRef>
-        </p:style>
-        <p:txBody>
-          <a:bodyPr rtlCol="0" anchor="ctr"/>
-          <a:lstStyle/>
-          <a:p>
-            <a:pPr algn="ctr"/>
-          </a:p>
-        </p:txBody>
-      </p:sp>
-      <p:sp>
-        <p:nvSpPr>
-          <p:cNvPr id="7" name="TextBox 6"/>
+              <a:t>Taller PI — punto de partida</a:t>
+            </a:r>
+          </a:p>
+        </p:txBody>
+      </p:sp>
+      <p:sp>
+        <p:nvSpPr>
+          <p:cNvPr id="5" name="TextBox 4"/>
           <p:cNvSpPr txBox="1"/>
           <p:nvPr/>
         </p:nvSpPr>
         <p:spPr>
           <a:xfrm>
-            <a:off x="777240" y="1399031"/>
-            <a:ext cx="10774375" cy="822959"/>
+            <a:off x="457200" y="1170432"/>
+            <a:ext cx="11277295" cy="5230368"/>
           </a:xfrm>
           <a:prstGeom prst="rect">
             <a:avLst/>
@@ -4817,313 +4207,58 @@
           </a:bodyPr>
           <a:lstStyle/>
           <a:p>
-            <a:r>
-              <a:rPr sz="1200" b="1" i="0">
-                <a:solidFill>
-                  <a:srgbClr val="269CCB"/>
-                </a:solidFill>
-                <a:latin typeface="Calibri"/>
-              </a:rPr>
-              <a:t>Info</a:t>
-            </a:r>
-          </a:p>
-          <a:p>
             <a:pPr>
-              <a:spcBef>
-                <a:spcPts val="400"/>
-              </a:spcBef>
+              <a:spcAft>
+                <a:spcPts val="800"/>
+              </a:spcAft>
             </a:pPr>
             <a:r>
-              <a:rPr sz="1400" b="0" i="0">
+              <a:rPr sz="2000" b="0" i="0">
                 <a:solidFill>
                   <a:srgbClr val="333333"/>
                 </a:solidFill>
                 <a:latin typeface="Calibri"/>
               </a:rPr>
-              <a:t>Hito: El formulario de VetCare queda conectado: al oprimir 'Registrar mascota' el objeto entra al ArrayList y el listado en pantalla se actualiza.</a:t>
-            </a:r>
-          </a:p>
-        </p:txBody>
-      </p:sp>
-      <p:sp>
-        <p:nvSpPr>
-          <p:cNvPr id="8" name="Rounded Rectangle 7"/>
-          <p:cNvSpPr/>
-          <p:nvPr/>
-        </p:nvSpPr>
-        <p:spPr>
-          <a:xfrm>
-            <a:off x="457200" y="2478024"/>
-            <a:ext cx="11277295" cy="1051560"/>
-          </a:xfrm>
-          <a:prstGeom prst="roundRect">
-            <a:avLst>
-              <a:gd name="adj" fmla="val 12000"/>
-            </a:avLst>
-          </a:prstGeom>
-          <a:solidFill>
-            <a:srgbClr val="FFF8E1"/>
-          </a:solidFill>
-          <a:ln>
-            <a:noFill/>
-          </a:ln>
-        </p:spPr>
-        <p:style>
-          <a:lnRef idx="1">
-            <a:schemeClr val="accent1"/>
-          </a:lnRef>
-          <a:fillRef idx="3">
-            <a:schemeClr val="accent1"/>
-          </a:fillRef>
-          <a:effectRef idx="2">
-            <a:schemeClr val="accent1"/>
-          </a:effectRef>
-          <a:fontRef idx="minor">
-            <a:schemeClr val="lt1"/>
-          </a:fontRef>
-        </p:style>
-        <p:txBody>
-          <a:bodyPr rtlCol="0" anchor="ctr"/>
-          <a:lstStyle/>
-          <a:p>
-            <a:pPr algn="ctr"/>
-          </a:p>
-        </p:txBody>
-      </p:sp>
-      <p:sp>
-        <p:nvSpPr>
-          <p:cNvPr id="9" name="Rectangle 8"/>
-          <p:cNvSpPr/>
-          <p:nvPr/>
-        </p:nvSpPr>
-        <p:spPr>
-          <a:xfrm>
-            <a:off x="457200" y="2478024"/>
-            <a:ext cx="128016" cy="1051560"/>
-          </a:xfrm>
-          <a:prstGeom prst="rect">
-            <a:avLst/>
-          </a:prstGeom>
-          <a:solidFill>
-            <a:srgbClr val="FFD000"/>
-          </a:solidFill>
-          <a:ln>
-            <a:noFill/>
-          </a:ln>
-        </p:spPr>
-        <p:style>
-          <a:lnRef idx="1">
-            <a:schemeClr val="accent1"/>
-          </a:lnRef>
-          <a:fillRef idx="3">
-            <a:schemeClr val="accent1"/>
-          </a:fillRef>
-          <a:effectRef idx="2">
-            <a:schemeClr val="accent1"/>
-          </a:effectRef>
-          <a:fontRef idx="minor">
-            <a:schemeClr val="lt1"/>
-          </a:fontRef>
-        </p:style>
-        <p:txBody>
-          <a:bodyPr rtlCol="0" anchor="ctr"/>
-          <a:lstStyle/>
-          <a:p>
-            <a:pPr algn="ctr"/>
-          </a:p>
-        </p:txBody>
-      </p:sp>
-      <p:sp>
-        <p:nvSpPr>
-          <p:cNvPr id="10" name="TextBox 9"/>
-          <p:cNvSpPr txBox="1"/>
-          <p:nvPr/>
-        </p:nvSpPr>
-        <p:spPr>
-          <a:xfrm>
-            <a:off x="777240" y="2615184"/>
-            <a:ext cx="10774375" cy="822959"/>
-          </a:xfrm>
-          <a:prstGeom prst="rect">
-            <a:avLst/>
-          </a:prstGeom>
-          <a:noFill/>
-        </p:spPr>
-        <p:txBody>
-          <a:bodyPr wrap="square">
-            <a:spAutoFit/>
-          </a:bodyPr>
-          <a:lstStyle/>
-          <a:p>
-            <a:r>
-              <a:rPr sz="1200" b="1" i="0">
-                <a:solidFill>
-                  <a:srgbClr val="FFD000"/>
-                </a:solidFill>
-                <a:latin typeface="Calibri"/>
-              </a:rPr>
-              <a:t>Aclaración</a:t>
+              <a:t>–   El proyecto VetCare ya tiene la clase Mascota (id, nombre, especie, edad) y un ArrayList que hasta hoy se llenaba con datos quemados dentro del main.</a:t>
             </a:r>
           </a:p>
           <a:p>
             <a:pPr>
-              <a:spcBef>
-                <a:spcPts val="400"/>
-              </a:spcBef>
+              <a:spcAft>
+                <a:spcPts val="800"/>
+              </a:spcAft>
             </a:pPr>
             <a:r>
-              <a:rPr sz="1400" b="0" i="0">
+              <a:rPr sz="2000" b="0" i="0">
                 <a:solidFill>
                   <a:srgbClr val="333333"/>
                 </a:solidFill>
                 <a:latin typeface="Calibri"/>
               </a:rPr>
-              <a:t>Enunciado completo: Clases/Proyecto Integrador/ (VetCare).</a:t>
-            </a:r>
-          </a:p>
-        </p:txBody>
-      </p:sp>
-      <p:sp>
-        <p:nvSpPr>
-          <p:cNvPr id="11" name="Rounded Rectangle 10"/>
-          <p:cNvSpPr/>
-          <p:nvPr/>
-        </p:nvSpPr>
-        <p:spPr>
-          <a:xfrm>
-            <a:off x="457200" y="3694176"/>
-            <a:ext cx="11277295" cy="1051560"/>
-          </a:xfrm>
-          <a:prstGeom prst="roundRect">
-            <a:avLst>
-              <a:gd name="adj" fmla="val 12000"/>
-            </a:avLst>
-          </a:prstGeom>
-          <a:solidFill>
-            <a:srgbClr val="FBE4E4"/>
-          </a:solidFill>
-          <a:ln>
-            <a:noFill/>
-          </a:ln>
-        </p:spPr>
-        <p:style>
-          <a:lnRef idx="1">
-            <a:schemeClr val="accent1"/>
-          </a:lnRef>
-          <a:fillRef idx="3">
-            <a:schemeClr val="accent1"/>
-          </a:fillRef>
-          <a:effectRef idx="2">
-            <a:schemeClr val="accent1"/>
-          </a:effectRef>
-          <a:fontRef idx="minor">
-            <a:schemeClr val="lt1"/>
-          </a:fontRef>
-        </p:style>
-        <p:txBody>
-          <a:bodyPr rtlCol="0" anchor="ctr"/>
-          <a:lstStyle/>
-          <a:p>
-            <a:pPr algn="ctr"/>
-          </a:p>
-        </p:txBody>
-      </p:sp>
-      <p:sp>
-        <p:nvSpPr>
-          <p:cNvPr id="12" name="Rectangle 11"/>
-          <p:cNvSpPr/>
-          <p:nvPr/>
-        </p:nvSpPr>
-        <p:spPr>
-          <a:xfrm>
-            <a:off x="457200" y="3694176"/>
-            <a:ext cx="128016" cy="1051560"/>
-          </a:xfrm>
-          <a:prstGeom prst="rect">
-            <a:avLst/>
-          </a:prstGeom>
-          <a:solidFill>
-            <a:srgbClr val="A02030"/>
-          </a:solidFill>
-          <a:ln>
-            <a:noFill/>
-          </a:ln>
-        </p:spPr>
-        <p:style>
-          <a:lnRef idx="1">
-            <a:schemeClr val="accent1"/>
-          </a:lnRef>
-          <a:fillRef idx="3">
-            <a:schemeClr val="accent1"/>
-          </a:fillRef>
-          <a:effectRef idx="2">
-            <a:schemeClr val="accent1"/>
-          </a:effectRef>
-          <a:fontRef idx="minor">
-            <a:schemeClr val="lt1"/>
-          </a:fontRef>
-        </p:style>
-        <p:txBody>
-          <a:bodyPr rtlCol="0" anchor="ctr"/>
-          <a:lstStyle/>
-          <a:p>
-            <a:pPr algn="ctr"/>
-          </a:p>
-        </p:txBody>
-      </p:sp>
-      <p:sp>
-        <p:nvSpPr>
-          <p:cNvPr id="13" name="TextBox 12"/>
-          <p:cNvSpPr txBox="1"/>
-          <p:nvPr/>
-        </p:nvSpPr>
-        <p:spPr>
-          <a:xfrm>
-            <a:off x="777240" y="3831336"/>
-            <a:ext cx="10774375" cy="822959"/>
-          </a:xfrm>
-          <a:prstGeom prst="rect">
-            <a:avLst/>
-          </a:prstGeom>
-          <a:noFill/>
-        </p:spPr>
-        <p:txBody>
-          <a:bodyPr wrap="square">
-            <a:spAutoFit/>
-          </a:bodyPr>
-          <a:lstStyle/>
-          <a:p>
-            <a:r>
-              <a:rPr sz="1200" b="1" i="0">
-                <a:solidFill>
-                  <a:srgbClr val="A02030"/>
-                </a:solidFill>
-                <a:latin typeface="Calibri"/>
-              </a:rPr>
-              <a:t>Atención</a:t>
+              <a:t>–   La ventana de registro ya existe pero el boton 'Registrar mascota' no hace nada: se oprime y la pantalla queda igualita.</a:t>
             </a:r>
           </a:p>
           <a:p>
             <a:pPr>
-              <a:spcBef>
-                <a:spcPts val="400"/>
-              </a:spcBef>
+              <a:spcAft>
+                <a:spcPts val="800"/>
+              </a:spcAft>
             </a:pPr>
             <a:r>
-              <a:rPr sz="1400" b="0" i="0">
+              <a:rPr sz="2000" b="0" i="0">
                 <a:solidFill>
                   <a:srgbClr val="333333"/>
                 </a:solidFill>
                 <a:latin typeface="Calibri"/>
               </a:rPr>
-              <a:t>Entrega del taller, si el docente lo asigna · en la fecha que indique el docente.</a:t>
-            </a:r>
-          </a:p>
-        </p:txBody>
-      </p:sp>
-      <p:sp>
-        <p:nvSpPr>
-          <p:cNvPr id="14" name="TextBox 13"/>
+              <a:t>–   Datos de partida para las pruebas de hoy: la clinica Huellitas necesita registrar a M-001 Kira (perro, 4), M-002 Michi (gato, 2) y M-003 Rocky (perro, 7).</a:t>
+            </a:r>
+          </a:p>
+        </p:txBody>
+      </p:sp>
+      <p:sp>
+        <p:nvSpPr>
+          <p:cNvPr id="6" name="TextBox 5"/>
           <p:cNvSpPr txBox="1"/>
           <p:nvPr/>
         </p:nvSpPr>
@@ -5191,6 +4326,2641 @@
         <p:spPr>
           <a:xfrm>
             <a:off x="0" y="0"/>
+            <a:ext cx="12191695" cy="960120"/>
+          </a:xfrm>
+          <a:prstGeom prst="rect">
+            <a:avLst/>
+          </a:prstGeom>
+          <a:solidFill>
+            <a:srgbClr val="095292"/>
+          </a:solidFill>
+          <a:ln>
+            <a:noFill/>
+          </a:ln>
+        </p:spPr>
+        <p:style>
+          <a:lnRef idx="1">
+            <a:schemeClr val="accent1"/>
+          </a:lnRef>
+          <a:fillRef idx="3">
+            <a:schemeClr val="accent1"/>
+          </a:fillRef>
+          <a:effectRef idx="2">
+            <a:schemeClr val="accent1"/>
+          </a:effectRef>
+          <a:fontRef idx="minor">
+            <a:schemeClr val="lt1"/>
+          </a:fontRef>
+        </p:style>
+        <p:txBody>
+          <a:bodyPr rtlCol="0" anchor="ctr"/>
+          <a:lstStyle/>
+          <a:p>
+            <a:pPr algn="ctr"/>
+          </a:p>
+        </p:txBody>
+      </p:sp>
+      <p:sp>
+        <p:nvSpPr>
+          <p:cNvPr id="3" name="Rectangle 2"/>
+          <p:cNvSpPr/>
+          <p:nvPr/>
+        </p:nvSpPr>
+        <p:spPr>
+          <a:xfrm>
+            <a:off x="0" y="960120"/>
+            <a:ext cx="12191695" cy="41148"/>
+          </a:xfrm>
+          <a:prstGeom prst="rect">
+            <a:avLst/>
+          </a:prstGeom>
+          <a:solidFill>
+            <a:srgbClr val="FFD000"/>
+          </a:solidFill>
+          <a:ln>
+            <a:noFill/>
+          </a:ln>
+        </p:spPr>
+        <p:style>
+          <a:lnRef idx="1">
+            <a:schemeClr val="accent1"/>
+          </a:lnRef>
+          <a:fillRef idx="3">
+            <a:schemeClr val="accent1"/>
+          </a:fillRef>
+          <a:effectRef idx="2">
+            <a:schemeClr val="accent1"/>
+          </a:effectRef>
+          <a:fontRef idx="minor">
+            <a:schemeClr val="lt1"/>
+          </a:fontRef>
+        </p:style>
+        <p:txBody>
+          <a:bodyPr rtlCol="0" anchor="ctr"/>
+          <a:lstStyle/>
+          <a:p>
+            <a:pPr algn="ctr"/>
+          </a:p>
+        </p:txBody>
+      </p:sp>
+      <p:sp>
+        <p:nvSpPr>
+          <p:cNvPr id="4" name="TextBox 3"/>
+          <p:cNvSpPr txBox="1"/>
+          <p:nvPr/>
+        </p:nvSpPr>
+        <p:spPr>
+          <a:xfrm>
+            <a:off x="457200" y="164592"/>
+            <a:ext cx="11277295" cy="502920"/>
+          </a:xfrm>
+          <a:prstGeom prst="rect">
+            <a:avLst/>
+          </a:prstGeom>
+          <a:noFill/>
+        </p:spPr>
+        <p:txBody>
+          <a:bodyPr wrap="square">
+            <a:spAutoFit/>
+          </a:bodyPr>
+          <a:lstStyle/>
+          <a:p>
+            <a:r>
+              <a:rPr sz="2600" b="1" i="0">
+                <a:solidFill>
+                  <a:srgbClr val="FFFFFF"/>
+                </a:solidFill>
+                <a:latin typeface="Calibri"/>
+              </a:rPr>
+              <a:t>Taller PI — pasos guiados</a:t>
+            </a:r>
+          </a:p>
+        </p:txBody>
+      </p:sp>
+      <p:sp>
+        <p:nvSpPr>
+          <p:cNvPr id="5" name="Rounded Rectangle 4"/>
+          <p:cNvSpPr/>
+          <p:nvPr/>
+        </p:nvSpPr>
+        <p:spPr>
+          <a:xfrm>
+            <a:off x="457200" y="1234440"/>
+            <a:ext cx="11277295" cy="950976"/>
+          </a:xfrm>
+          <a:prstGeom prst="roundRect">
+            <a:avLst>
+              <a:gd name="adj" fmla="val 12000"/>
+            </a:avLst>
+          </a:prstGeom>
+          <a:solidFill>
+            <a:srgbClr val="F2F2F2"/>
+          </a:solidFill>
+          <a:ln>
+            <a:noFill/>
+          </a:ln>
+        </p:spPr>
+        <p:style>
+          <a:lnRef idx="1">
+            <a:schemeClr val="accent1"/>
+          </a:lnRef>
+          <a:fillRef idx="3">
+            <a:schemeClr val="accent1"/>
+          </a:fillRef>
+          <a:effectRef idx="2">
+            <a:schemeClr val="accent1"/>
+          </a:effectRef>
+          <a:fontRef idx="minor">
+            <a:schemeClr val="lt1"/>
+          </a:fontRef>
+        </p:style>
+        <p:txBody>
+          <a:bodyPr rtlCol="0" anchor="ctr"/>
+          <a:lstStyle/>
+          <a:p>
+            <a:pPr algn="ctr"/>
+          </a:p>
+        </p:txBody>
+      </p:sp>
+      <p:sp>
+        <p:nvSpPr>
+          <p:cNvPr id="6" name="Rounded Rectangle 5"/>
+          <p:cNvSpPr/>
+          <p:nvPr/>
+        </p:nvSpPr>
+        <p:spPr>
+          <a:xfrm>
+            <a:off x="594360" y="1490472"/>
+            <a:ext cx="438912" cy="438912"/>
+          </a:xfrm>
+          <a:prstGeom prst="roundRect">
+            <a:avLst>
+              <a:gd name="adj" fmla="val 12000"/>
+            </a:avLst>
+          </a:prstGeom>
+          <a:solidFill>
+            <a:srgbClr val="095292"/>
+          </a:solidFill>
+          <a:ln>
+            <a:noFill/>
+          </a:ln>
+        </p:spPr>
+        <p:style>
+          <a:lnRef idx="1">
+            <a:schemeClr val="accent1"/>
+          </a:lnRef>
+          <a:fillRef idx="3">
+            <a:schemeClr val="accent1"/>
+          </a:fillRef>
+          <a:effectRef idx="2">
+            <a:schemeClr val="accent1"/>
+          </a:effectRef>
+          <a:fontRef idx="minor">
+            <a:schemeClr val="lt1"/>
+          </a:fontRef>
+        </p:style>
+        <p:txBody>
+          <a:bodyPr rtlCol="0" anchor="ctr"/>
+          <a:lstStyle/>
+          <a:p>
+            <a:pPr algn="ctr"/>
+          </a:p>
+        </p:txBody>
+      </p:sp>
+      <p:sp>
+        <p:nvSpPr>
+          <p:cNvPr id="7" name="TextBox 6"/>
+          <p:cNvSpPr txBox="1"/>
+          <p:nvPr/>
+        </p:nvSpPr>
+        <p:spPr>
+          <a:xfrm>
+            <a:off x="594360" y="1490472"/>
+            <a:ext cx="438912" cy="438912"/>
+          </a:xfrm>
+          <a:prstGeom prst="rect">
+            <a:avLst/>
+          </a:prstGeom>
+          <a:noFill/>
+        </p:spPr>
+        <p:txBody>
+          <a:bodyPr wrap="square" anchor="ctr"/>
+          <a:lstStyle/>
+          <a:p>
+            <a:pPr algn="ctr"/>
+            <a:r>
+              <a:rPr sz="1600" b="1" i="0">
+                <a:solidFill>
+                  <a:srgbClr val="FFFFFF"/>
+                </a:solidFill>
+                <a:latin typeface="Calibri"/>
+              </a:rPr>
+              <a:t>1</a:t>
+            </a:r>
+          </a:p>
+        </p:txBody>
+      </p:sp>
+      <p:sp>
+        <p:nvSpPr>
+          <p:cNvPr id="8" name="TextBox 7"/>
+          <p:cNvSpPr txBox="1"/>
+          <p:nvPr/>
+        </p:nvSpPr>
+        <p:spPr>
+          <a:xfrm>
+            <a:off x="1188720" y="1325880"/>
+            <a:ext cx="10271455" cy="786384"/>
+          </a:xfrm>
+          <a:prstGeom prst="rect">
+            <a:avLst/>
+          </a:prstGeom>
+          <a:noFill/>
+        </p:spPr>
+        <p:txBody>
+          <a:bodyPr wrap="square" anchor="ctr"/>
+          <a:lstStyle/>
+          <a:p>
+            <a:r>
+              <a:rPr sz="1400" b="1" i="0">
+                <a:solidFill>
+                  <a:srgbClr val="095292"/>
+                </a:solidFill>
+                <a:latin typeface="Calibri"/>
+              </a:rPr>
+              <a:t>Cree el paquete vetcare.vista y dentro la clase VentanaRegistroMascota que extiende JFrame, con los campos ID, nombre, especie y edad, el boton 'Registrar mascota' y un JTextArea de solo lectura para el listado; ejecutela y verifique que abre centrada y que cierra con EXIT_ON_CLOSE.</a:t>
+            </a:r>
+          </a:p>
+        </p:txBody>
+      </p:sp>
+      <p:sp>
+        <p:nvSpPr>
+          <p:cNvPr id="9" name="Rounded Rectangle 8"/>
+          <p:cNvSpPr/>
+          <p:nvPr/>
+        </p:nvSpPr>
+        <p:spPr>
+          <a:xfrm>
+            <a:off x="457200" y="2276856"/>
+            <a:ext cx="11277295" cy="950976"/>
+          </a:xfrm>
+          <a:prstGeom prst="roundRect">
+            <a:avLst>
+              <a:gd name="adj" fmla="val 12000"/>
+            </a:avLst>
+          </a:prstGeom>
+          <a:solidFill>
+            <a:srgbClr val="E8F4FA"/>
+          </a:solidFill>
+          <a:ln>
+            <a:noFill/>
+          </a:ln>
+        </p:spPr>
+        <p:style>
+          <a:lnRef idx="1">
+            <a:schemeClr val="accent1"/>
+          </a:lnRef>
+          <a:fillRef idx="3">
+            <a:schemeClr val="accent1"/>
+          </a:fillRef>
+          <a:effectRef idx="2">
+            <a:schemeClr val="accent1"/>
+          </a:effectRef>
+          <a:fontRef idx="minor">
+            <a:schemeClr val="lt1"/>
+          </a:fontRef>
+        </p:style>
+        <p:txBody>
+          <a:bodyPr rtlCol="0" anchor="ctr"/>
+          <a:lstStyle/>
+          <a:p>
+            <a:pPr algn="ctr"/>
+          </a:p>
+        </p:txBody>
+      </p:sp>
+      <p:sp>
+        <p:nvSpPr>
+          <p:cNvPr id="10" name="Rounded Rectangle 9"/>
+          <p:cNvSpPr/>
+          <p:nvPr/>
+        </p:nvSpPr>
+        <p:spPr>
+          <a:xfrm>
+            <a:off x="594360" y="2532888"/>
+            <a:ext cx="438912" cy="438912"/>
+          </a:xfrm>
+          <a:prstGeom prst="roundRect">
+            <a:avLst>
+              <a:gd name="adj" fmla="val 12000"/>
+            </a:avLst>
+          </a:prstGeom>
+          <a:solidFill>
+            <a:srgbClr val="095292"/>
+          </a:solidFill>
+          <a:ln>
+            <a:noFill/>
+          </a:ln>
+        </p:spPr>
+        <p:style>
+          <a:lnRef idx="1">
+            <a:schemeClr val="accent1"/>
+          </a:lnRef>
+          <a:fillRef idx="3">
+            <a:schemeClr val="accent1"/>
+          </a:fillRef>
+          <a:effectRef idx="2">
+            <a:schemeClr val="accent1"/>
+          </a:effectRef>
+          <a:fontRef idx="minor">
+            <a:schemeClr val="lt1"/>
+          </a:fontRef>
+        </p:style>
+        <p:txBody>
+          <a:bodyPr rtlCol="0" anchor="ctr"/>
+          <a:lstStyle/>
+          <a:p>
+            <a:pPr algn="ctr"/>
+          </a:p>
+        </p:txBody>
+      </p:sp>
+      <p:sp>
+        <p:nvSpPr>
+          <p:cNvPr id="11" name="TextBox 10"/>
+          <p:cNvSpPr txBox="1"/>
+          <p:nvPr/>
+        </p:nvSpPr>
+        <p:spPr>
+          <a:xfrm>
+            <a:off x="594360" y="2532888"/>
+            <a:ext cx="438912" cy="438912"/>
+          </a:xfrm>
+          <a:prstGeom prst="rect">
+            <a:avLst/>
+          </a:prstGeom>
+          <a:noFill/>
+        </p:spPr>
+        <p:txBody>
+          <a:bodyPr wrap="square" anchor="ctr"/>
+          <a:lstStyle/>
+          <a:p>
+            <a:pPr algn="ctr"/>
+            <a:r>
+              <a:rPr sz="1600" b="1" i="0">
+                <a:solidFill>
+                  <a:srgbClr val="FFFFFF"/>
+                </a:solidFill>
+                <a:latin typeface="Calibri"/>
+              </a:rPr>
+              <a:t>2</a:t>
+            </a:r>
+          </a:p>
+        </p:txBody>
+      </p:sp>
+      <p:sp>
+        <p:nvSpPr>
+          <p:cNvPr id="12" name="TextBox 11"/>
+          <p:cNvSpPr txBox="1"/>
+          <p:nvPr/>
+        </p:nvSpPr>
+        <p:spPr>
+          <a:xfrm>
+            <a:off x="1188720" y="2368296"/>
+            <a:ext cx="10271455" cy="786384"/>
+          </a:xfrm>
+          <a:prstGeom prst="rect">
+            <a:avLst/>
+          </a:prstGeom>
+          <a:noFill/>
+        </p:spPr>
+        <p:txBody>
+          <a:bodyPr wrap="square" anchor="ctr"/>
+          <a:lstStyle/>
+          <a:p>
+            <a:r>
+              <a:rPr sz="1400" b="1" i="0">
+                <a:solidFill>
+                  <a:srgbClr val="095292"/>
+                </a:solidFill>
+                <a:latin typeface="Calibri"/>
+              </a:rPr>
+              <a:t>Deje Mascota en vetcare.modelo y cree en vetcare.servicio la clase RepositorioMascotas con un ArrayList&lt;Mascota&gt; privado y los metodos registrar, buscarPorId, listar y total; compruebe con Ctrl+F que ninguna de esas dos clases tiene un import de javax.swing.</a:t>
+            </a:r>
+          </a:p>
+        </p:txBody>
+      </p:sp>
+      <p:sp>
+        <p:nvSpPr>
+          <p:cNvPr id="13" name="Rounded Rectangle 12"/>
+          <p:cNvSpPr/>
+          <p:nvPr/>
+        </p:nvSpPr>
+        <p:spPr>
+          <a:xfrm>
+            <a:off x="457200" y="3319272"/>
+            <a:ext cx="11277295" cy="950976"/>
+          </a:xfrm>
+          <a:prstGeom prst="roundRect">
+            <a:avLst>
+              <a:gd name="adj" fmla="val 12000"/>
+            </a:avLst>
+          </a:prstGeom>
+          <a:solidFill>
+            <a:srgbClr val="F2F2F2"/>
+          </a:solidFill>
+          <a:ln>
+            <a:noFill/>
+          </a:ln>
+        </p:spPr>
+        <p:style>
+          <a:lnRef idx="1">
+            <a:schemeClr val="accent1"/>
+          </a:lnRef>
+          <a:fillRef idx="3">
+            <a:schemeClr val="accent1"/>
+          </a:fillRef>
+          <a:effectRef idx="2">
+            <a:schemeClr val="accent1"/>
+          </a:effectRef>
+          <a:fontRef idx="minor">
+            <a:schemeClr val="lt1"/>
+          </a:fontRef>
+        </p:style>
+        <p:txBody>
+          <a:bodyPr rtlCol="0" anchor="ctr"/>
+          <a:lstStyle/>
+          <a:p>
+            <a:pPr algn="ctr"/>
+          </a:p>
+        </p:txBody>
+      </p:sp>
+      <p:sp>
+        <p:nvSpPr>
+          <p:cNvPr id="14" name="Rounded Rectangle 13"/>
+          <p:cNvSpPr/>
+          <p:nvPr/>
+        </p:nvSpPr>
+        <p:spPr>
+          <a:xfrm>
+            <a:off x="594360" y="3575304"/>
+            <a:ext cx="438912" cy="438912"/>
+          </a:xfrm>
+          <a:prstGeom prst="roundRect">
+            <a:avLst>
+              <a:gd name="adj" fmla="val 12000"/>
+            </a:avLst>
+          </a:prstGeom>
+          <a:solidFill>
+            <a:srgbClr val="095292"/>
+          </a:solidFill>
+          <a:ln>
+            <a:noFill/>
+          </a:ln>
+        </p:spPr>
+        <p:style>
+          <a:lnRef idx="1">
+            <a:schemeClr val="accent1"/>
+          </a:lnRef>
+          <a:fillRef idx="3">
+            <a:schemeClr val="accent1"/>
+          </a:fillRef>
+          <a:effectRef idx="2">
+            <a:schemeClr val="accent1"/>
+          </a:effectRef>
+          <a:fontRef idx="minor">
+            <a:schemeClr val="lt1"/>
+          </a:fontRef>
+        </p:style>
+        <p:txBody>
+          <a:bodyPr rtlCol="0" anchor="ctr"/>
+          <a:lstStyle/>
+          <a:p>
+            <a:pPr algn="ctr"/>
+          </a:p>
+        </p:txBody>
+      </p:sp>
+      <p:sp>
+        <p:nvSpPr>
+          <p:cNvPr id="15" name="TextBox 14"/>
+          <p:cNvSpPr txBox="1"/>
+          <p:nvPr/>
+        </p:nvSpPr>
+        <p:spPr>
+          <a:xfrm>
+            <a:off x="594360" y="3575304"/>
+            <a:ext cx="438912" cy="438912"/>
+          </a:xfrm>
+          <a:prstGeom prst="rect">
+            <a:avLst/>
+          </a:prstGeom>
+          <a:noFill/>
+        </p:spPr>
+        <p:txBody>
+          <a:bodyPr wrap="square" anchor="ctr"/>
+          <a:lstStyle/>
+          <a:p>
+            <a:pPr algn="ctr"/>
+            <a:r>
+              <a:rPr sz="1600" b="1" i="0">
+                <a:solidFill>
+                  <a:srgbClr val="FFFFFF"/>
+                </a:solidFill>
+                <a:latin typeface="Calibri"/>
+              </a:rPr>
+              <a:t>3</a:t>
+            </a:r>
+          </a:p>
+        </p:txBody>
+      </p:sp>
+      <p:sp>
+        <p:nvSpPr>
+          <p:cNvPr id="16" name="TextBox 15"/>
+          <p:cNvSpPr txBox="1"/>
+          <p:nvPr/>
+        </p:nvSpPr>
+        <p:spPr>
+          <a:xfrm>
+            <a:off x="1188720" y="3410712"/>
+            <a:ext cx="10271455" cy="786384"/>
+          </a:xfrm>
+          <a:prstGeom prst="rect">
+            <a:avLst/>
+          </a:prstGeom>
+          <a:noFill/>
+        </p:spPr>
+        <p:txBody>
+          <a:bodyPr wrap="square" anchor="ctr"/>
+          <a:lstStyle/>
+          <a:p>
+            <a:r>
+              <a:rPr sz="1400" b="1" i="0">
+                <a:solidFill>
+                  <a:srgbClr val="095292"/>
+                </a:solidFill>
+                <a:latin typeface="Calibri"/>
+              </a:rPr>
+              <a:t>Cree ControladorRegistro con el metodo registrarMascota(String id, String nombre, String especie, String edadTexto) que valide obligatorios, convierta la edad con Integer.parseInt dentro de try-catch y lance IllegalArgumentException con mensajes en español; el repositorio debe recibirse por el constructor, no crearse adentro del metodo.</a:t>
+            </a:r>
+          </a:p>
+        </p:txBody>
+      </p:sp>
+      <p:sp>
+        <p:nvSpPr>
+          <p:cNvPr id="17" name="Rounded Rectangle 16"/>
+          <p:cNvSpPr/>
+          <p:nvPr/>
+        </p:nvSpPr>
+        <p:spPr>
+          <a:xfrm>
+            <a:off x="457200" y="4361688"/>
+            <a:ext cx="11277295" cy="950976"/>
+          </a:xfrm>
+          <a:prstGeom prst="roundRect">
+            <a:avLst>
+              <a:gd name="adj" fmla="val 12000"/>
+            </a:avLst>
+          </a:prstGeom>
+          <a:solidFill>
+            <a:srgbClr val="E8F4FA"/>
+          </a:solidFill>
+          <a:ln>
+            <a:noFill/>
+          </a:ln>
+        </p:spPr>
+        <p:style>
+          <a:lnRef idx="1">
+            <a:schemeClr val="accent1"/>
+          </a:lnRef>
+          <a:fillRef idx="3">
+            <a:schemeClr val="accent1"/>
+          </a:fillRef>
+          <a:effectRef idx="2">
+            <a:schemeClr val="accent1"/>
+          </a:effectRef>
+          <a:fontRef idx="minor">
+            <a:schemeClr val="lt1"/>
+          </a:fontRef>
+        </p:style>
+        <p:txBody>
+          <a:bodyPr rtlCol="0" anchor="ctr"/>
+          <a:lstStyle/>
+          <a:p>
+            <a:pPr algn="ctr"/>
+          </a:p>
+        </p:txBody>
+      </p:sp>
+      <p:sp>
+        <p:nvSpPr>
+          <p:cNvPr id="18" name="Rounded Rectangle 17"/>
+          <p:cNvSpPr/>
+          <p:nvPr/>
+        </p:nvSpPr>
+        <p:spPr>
+          <a:xfrm>
+            <a:off x="594360" y="4617720"/>
+            <a:ext cx="438912" cy="438912"/>
+          </a:xfrm>
+          <a:prstGeom prst="roundRect">
+            <a:avLst>
+              <a:gd name="adj" fmla="val 12000"/>
+            </a:avLst>
+          </a:prstGeom>
+          <a:solidFill>
+            <a:srgbClr val="095292"/>
+          </a:solidFill>
+          <a:ln>
+            <a:noFill/>
+          </a:ln>
+        </p:spPr>
+        <p:style>
+          <a:lnRef idx="1">
+            <a:schemeClr val="accent1"/>
+          </a:lnRef>
+          <a:fillRef idx="3">
+            <a:schemeClr val="accent1"/>
+          </a:fillRef>
+          <a:effectRef idx="2">
+            <a:schemeClr val="accent1"/>
+          </a:effectRef>
+          <a:fontRef idx="minor">
+            <a:schemeClr val="lt1"/>
+          </a:fontRef>
+        </p:style>
+        <p:txBody>
+          <a:bodyPr rtlCol="0" anchor="ctr"/>
+          <a:lstStyle/>
+          <a:p>
+            <a:pPr algn="ctr"/>
+          </a:p>
+        </p:txBody>
+      </p:sp>
+      <p:sp>
+        <p:nvSpPr>
+          <p:cNvPr id="19" name="TextBox 18"/>
+          <p:cNvSpPr txBox="1"/>
+          <p:nvPr/>
+        </p:nvSpPr>
+        <p:spPr>
+          <a:xfrm>
+            <a:off x="594360" y="4617720"/>
+            <a:ext cx="438912" cy="438912"/>
+          </a:xfrm>
+          <a:prstGeom prst="rect">
+            <a:avLst/>
+          </a:prstGeom>
+          <a:noFill/>
+        </p:spPr>
+        <p:txBody>
+          <a:bodyPr wrap="square" anchor="ctr"/>
+          <a:lstStyle/>
+          <a:p>
+            <a:pPr algn="ctr"/>
+            <a:r>
+              <a:rPr sz="1600" b="1" i="0">
+                <a:solidFill>
+                  <a:srgbClr val="FFFFFF"/>
+                </a:solidFill>
+                <a:latin typeface="Calibri"/>
+              </a:rPr>
+              <a:t>4</a:t>
+            </a:r>
+          </a:p>
+        </p:txBody>
+      </p:sp>
+      <p:sp>
+        <p:nvSpPr>
+          <p:cNvPr id="20" name="TextBox 19"/>
+          <p:cNvSpPr txBox="1"/>
+          <p:nvPr/>
+        </p:nvSpPr>
+        <p:spPr>
+          <a:xfrm>
+            <a:off x="1188720" y="4453128"/>
+            <a:ext cx="10271455" cy="786384"/>
+          </a:xfrm>
+          <a:prstGeom prst="rect">
+            <a:avLst/>
+          </a:prstGeom>
+          <a:noFill/>
+        </p:spPr>
+        <p:txBody>
+          <a:bodyPr wrap="square" anchor="ctr"/>
+          <a:lstStyle/>
+          <a:p>
+            <a:r>
+              <a:rPr sz="1400" b="1" i="0">
+                <a:solidFill>
+                  <a:srgbClr val="095292"/>
+                </a:solidFill>
+                <a:latin typeface="Calibri"/>
+              </a:rPr>
+              <a:t>Conecte el boton con addActionListener de manera que el cuerpo del listener tenga maximo cinco lineas: leer los getText(), llamar al controlador, refrescar el area, limpiar campos y mostrar el JOptionPane; declare el controlador como atributo de la ventana, nunca dentro del listener.</a:t>
+            </a:r>
+          </a:p>
+        </p:txBody>
+      </p:sp>
+      <p:sp>
+        <p:nvSpPr>
+          <p:cNvPr id="21" name="Rounded Rectangle 20"/>
+          <p:cNvSpPr/>
+          <p:nvPr/>
+        </p:nvSpPr>
+        <p:spPr>
+          <a:xfrm>
+            <a:off x="457200" y="5404104"/>
+            <a:ext cx="11277295" cy="950976"/>
+          </a:xfrm>
+          <a:prstGeom prst="roundRect">
+            <a:avLst>
+              <a:gd name="adj" fmla="val 12000"/>
+            </a:avLst>
+          </a:prstGeom>
+          <a:solidFill>
+            <a:srgbClr val="F2F2F2"/>
+          </a:solidFill>
+          <a:ln>
+            <a:noFill/>
+          </a:ln>
+        </p:spPr>
+        <p:style>
+          <a:lnRef idx="1">
+            <a:schemeClr val="accent1"/>
+          </a:lnRef>
+          <a:fillRef idx="3">
+            <a:schemeClr val="accent1"/>
+          </a:fillRef>
+          <a:effectRef idx="2">
+            <a:schemeClr val="accent1"/>
+          </a:effectRef>
+          <a:fontRef idx="minor">
+            <a:schemeClr val="lt1"/>
+          </a:fontRef>
+        </p:style>
+        <p:txBody>
+          <a:bodyPr rtlCol="0" anchor="ctr"/>
+          <a:lstStyle/>
+          <a:p>
+            <a:pPr algn="ctr"/>
+          </a:p>
+        </p:txBody>
+      </p:sp>
+      <p:sp>
+        <p:nvSpPr>
+          <p:cNvPr id="22" name="Rounded Rectangle 21"/>
+          <p:cNvSpPr/>
+          <p:nvPr/>
+        </p:nvSpPr>
+        <p:spPr>
+          <a:xfrm>
+            <a:off x="594360" y="5660136"/>
+            <a:ext cx="438912" cy="438912"/>
+          </a:xfrm>
+          <a:prstGeom prst="roundRect">
+            <a:avLst>
+              <a:gd name="adj" fmla="val 12000"/>
+            </a:avLst>
+          </a:prstGeom>
+          <a:solidFill>
+            <a:srgbClr val="095292"/>
+          </a:solidFill>
+          <a:ln>
+            <a:noFill/>
+          </a:ln>
+        </p:spPr>
+        <p:style>
+          <a:lnRef idx="1">
+            <a:schemeClr val="accent1"/>
+          </a:lnRef>
+          <a:fillRef idx="3">
+            <a:schemeClr val="accent1"/>
+          </a:fillRef>
+          <a:effectRef idx="2">
+            <a:schemeClr val="accent1"/>
+          </a:effectRef>
+          <a:fontRef idx="minor">
+            <a:schemeClr val="lt1"/>
+          </a:fontRef>
+        </p:style>
+        <p:txBody>
+          <a:bodyPr rtlCol="0" anchor="ctr"/>
+          <a:lstStyle/>
+          <a:p>
+            <a:pPr algn="ctr"/>
+          </a:p>
+        </p:txBody>
+      </p:sp>
+      <p:sp>
+        <p:nvSpPr>
+          <p:cNvPr id="23" name="TextBox 22"/>
+          <p:cNvSpPr txBox="1"/>
+          <p:nvPr/>
+        </p:nvSpPr>
+        <p:spPr>
+          <a:xfrm>
+            <a:off x="594360" y="5660136"/>
+            <a:ext cx="438912" cy="438912"/>
+          </a:xfrm>
+          <a:prstGeom prst="rect">
+            <a:avLst/>
+          </a:prstGeom>
+          <a:noFill/>
+        </p:spPr>
+        <p:txBody>
+          <a:bodyPr wrap="square" anchor="ctr"/>
+          <a:lstStyle/>
+          <a:p>
+            <a:pPr algn="ctr"/>
+            <a:r>
+              <a:rPr sz="1600" b="1" i="0">
+                <a:solidFill>
+                  <a:srgbClr val="FFFFFF"/>
+                </a:solidFill>
+                <a:latin typeface="Calibri"/>
+              </a:rPr>
+              <a:t>5</a:t>
+            </a:r>
+          </a:p>
+        </p:txBody>
+      </p:sp>
+      <p:sp>
+        <p:nvSpPr>
+          <p:cNvPr id="24" name="TextBox 23"/>
+          <p:cNvSpPr txBox="1"/>
+          <p:nvPr/>
+        </p:nvSpPr>
+        <p:spPr>
+          <a:xfrm>
+            <a:off x="1188720" y="5495544"/>
+            <a:ext cx="10271455" cy="786384"/>
+          </a:xfrm>
+          <a:prstGeom prst="rect">
+            <a:avLst/>
+          </a:prstGeom>
+          <a:noFill/>
+        </p:spPr>
+        <p:txBody>
+          <a:bodyPr wrap="square" anchor="ctr"/>
+          <a:lstStyle/>
+          <a:p>
+            <a:r>
+              <a:rPr sz="1500" b="1" i="0">
+                <a:solidFill>
+                  <a:srgbClr val="095292"/>
+                </a:solidFill>
+                <a:latin typeface="Calibri"/>
+              </a:rPr>
+              <a:t>Pruebe y capture evidencia de tres casos: (a) registro valido de M-001 Kira, (b) edad escrita como 'tres', (c) ID repetido M-001; guarde las tres capturas, exporte el proyecto comprimido y subalo a la plataforma del curso.</a:t>
+            </a:r>
+          </a:p>
+        </p:txBody>
+      </p:sp>
+      <p:sp>
+        <p:nvSpPr>
+          <p:cNvPr id="25" name="TextBox 24"/>
+          <p:cNvSpPr txBox="1"/>
+          <p:nvPr/>
+        </p:nvSpPr>
+        <p:spPr>
+          <a:xfrm>
+            <a:off x="11185855" y="6473952"/>
+            <a:ext cx="640080" cy="274320"/>
+          </a:xfrm>
+          <a:prstGeom prst="rect">
+            <a:avLst/>
+          </a:prstGeom>
+          <a:noFill/>
+        </p:spPr>
+        <p:txBody>
+          <a:bodyPr wrap="square">
+            <a:spAutoFit/>
+          </a:bodyPr>
+          <a:lstStyle/>
+          <a:p>
+            <a:pPr algn="r"/>
+            <a:r>
+              <a:rPr sz="1100" b="0" i="0">
+                <a:solidFill>
+                  <a:srgbClr val="666666"/>
+                </a:solidFill>
+                <a:latin typeface="Calibri"/>
+              </a:rPr>
+              <a:t>13</a:t>
+            </a:r>
+          </a:p>
+        </p:txBody>
+      </p:sp>
+    </p:spTree>
+  </p:cSld>
+  <p:clrMapOvr>
+    <a:masterClrMapping/>
+  </p:clrMapOvr>
+</p:sld>
+</file>
+
+<file path=ppt/slides/slide14.xml><?xml version="1.0" encoding="utf-8"?>
+<p:sld xmlns:a="http://schemas.openxmlformats.org/drawingml/2006/main" xmlns:p="http://schemas.openxmlformats.org/presentationml/2006/main" xmlns:r="http://schemas.openxmlformats.org/officeDocument/2006/relationships">
+  <p:cSld>
+    <p:bg>
+      <p:bgPr>
+        <a:solidFill>
+          <a:srgbClr val="FFFFFF"/>
+        </a:solidFill>
+        <a:effectLst/>
+      </p:bgPr>
+    </p:bg>
+    <p:spTree>
+      <p:nvGrpSpPr>
+        <p:cNvPr id="1" name=""/>
+        <p:cNvGrpSpPr/>
+        <p:nvPr/>
+      </p:nvGrpSpPr>
+      <p:grpSpPr/>
+      <p:sp>
+        <p:nvSpPr>
+          <p:cNvPr id="2" name="Rectangle 1"/>
+          <p:cNvSpPr/>
+          <p:nvPr/>
+        </p:nvSpPr>
+        <p:spPr>
+          <a:xfrm>
+            <a:off x="0" y="0"/>
+            <a:ext cx="12191695" cy="960120"/>
+          </a:xfrm>
+          <a:prstGeom prst="rect">
+            <a:avLst/>
+          </a:prstGeom>
+          <a:solidFill>
+            <a:srgbClr val="095292"/>
+          </a:solidFill>
+          <a:ln>
+            <a:noFill/>
+          </a:ln>
+        </p:spPr>
+        <p:style>
+          <a:lnRef idx="1">
+            <a:schemeClr val="accent1"/>
+          </a:lnRef>
+          <a:fillRef idx="3">
+            <a:schemeClr val="accent1"/>
+          </a:fillRef>
+          <a:effectRef idx="2">
+            <a:schemeClr val="accent1"/>
+          </a:effectRef>
+          <a:fontRef idx="minor">
+            <a:schemeClr val="lt1"/>
+          </a:fontRef>
+        </p:style>
+        <p:txBody>
+          <a:bodyPr rtlCol="0" anchor="ctr"/>
+          <a:lstStyle/>
+          <a:p>
+            <a:pPr algn="ctr"/>
+          </a:p>
+        </p:txBody>
+      </p:sp>
+      <p:sp>
+        <p:nvSpPr>
+          <p:cNvPr id="3" name="Rectangle 2"/>
+          <p:cNvSpPr/>
+          <p:nvPr/>
+        </p:nvSpPr>
+        <p:spPr>
+          <a:xfrm>
+            <a:off x="0" y="960120"/>
+            <a:ext cx="12191695" cy="41148"/>
+          </a:xfrm>
+          <a:prstGeom prst="rect">
+            <a:avLst/>
+          </a:prstGeom>
+          <a:solidFill>
+            <a:srgbClr val="FFD000"/>
+          </a:solidFill>
+          <a:ln>
+            <a:noFill/>
+          </a:ln>
+        </p:spPr>
+        <p:style>
+          <a:lnRef idx="1">
+            <a:schemeClr val="accent1"/>
+          </a:lnRef>
+          <a:fillRef idx="3">
+            <a:schemeClr val="accent1"/>
+          </a:fillRef>
+          <a:effectRef idx="2">
+            <a:schemeClr val="accent1"/>
+          </a:effectRef>
+          <a:fontRef idx="minor">
+            <a:schemeClr val="lt1"/>
+          </a:fontRef>
+        </p:style>
+        <p:txBody>
+          <a:bodyPr rtlCol="0" anchor="ctr"/>
+          <a:lstStyle/>
+          <a:p>
+            <a:pPr algn="ctr"/>
+          </a:p>
+        </p:txBody>
+      </p:sp>
+      <p:sp>
+        <p:nvSpPr>
+          <p:cNvPr id="4" name="TextBox 3"/>
+          <p:cNvSpPr txBox="1"/>
+          <p:nvPr/>
+        </p:nvSpPr>
+        <p:spPr>
+          <a:xfrm>
+            <a:off x="457200" y="164592"/>
+            <a:ext cx="11277295" cy="502920"/>
+          </a:xfrm>
+          <a:prstGeom prst="rect">
+            <a:avLst/>
+          </a:prstGeom>
+          <a:noFill/>
+        </p:spPr>
+        <p:txBody>
+          <a:bodyPr wrap="square">
+            <a:spAutoFit/>
+          </a:bodyPr>
+          <a:lstStyle/>
+          <a:p>
+            <a:r>
+              <a:rPr sz="2600" b="1" i="0">
+                <a:solidFill>
+                  <a:srgbClr val="FFFFFF"/>
+                </a:solidFill>
+                <a:latin typeface="Calibri"/>
+              </a:rPr>
+              <a:t>Antes de entregar — autochequeo</a:t>
+            </a:r>
+          </a:p>
+        </p:txBody>
+      </p:sp>
+      <p:sp>
+        <p:nvSpPr>
+          <p:cNvPr id="5" name="Rounded Rectangle 4"/>
+          <p:cNvSpPr/>
+          <p:nvPr/>
+        </p:nvSpPr>
+        <p:spPr>
+          <a:xfrm>
+            <a:off x="457200" y="1261872"/>
+            <a:ext cx="11277295" cy="566928"/>
+          </a:xfrm>
+          <a:prstGeom prst="roundRect">
+            <a:avLst>
+              <a:gd name="adj" fmla="val 12000"/>
+            </a:avLst>
+          </a:prstGeom>
+          <a:solidFill>
+            <a:srgbClr val="F2F2F2"/>
+          </a:solidFill>
+          <a:ln>
+            <a:noFill/>
+          </a:ln>
+        </p:spPr>
+        <p:style>
+          <a:lnRef idx="1">
+            <a:schemeClr val="accent1"/>
+          </a:lnRef>
+          <a:fillRef idx="3">
+            <a:schemeClr val="accent1"/>
+          </a:fillRef>
+          <a:effectRef idx="2">
+            <a:schemeClr val="accent1"/>
+          </a:effectRef>
+          <a:fontRef idx="minor">
+            <a:schemeClr val="lt1"/>
+          </a:fontRef>
+        </p:style>
+        <p:txBody>
+          <a:bodyPr rtlCol="0" anchor="ctr"/>
+          <a:lstStyle/>
+          <a:p>
+            <a:pPr algn="ctr"/>
+          </a:p>
+        </p:txBody>
+      </p:sp>
+      <p:sp>
+        <p:nvSpPr>
+          <p:cNvPr id="6" name="Rectangle 5"/>
+          <p:cNvSpPr/>
+          <p:nvPr/>
+        </p:nvSpPr>
+        <p:spPr>
+          <a:xfrm>
+            <a:off x="640080" y="1408175"/>
+            <a:ext cx="274320" cy="274320"/>
+          </a:xfrm>
+          <a:prstGeom prst="rect">
+            <a:avLst/>
+          </a:prstGeom>
+          <a:solidFill>
+            <a:srgbClr val="FFFFFF"/>
+          </a:solidFill>
+          <a:ln>
+            <a:solidFill>
+              <a:srgbClr val="333333"/>
+            </a:solidFill>
+          </a:ln>
+        </p:spPr>
+        <p:style>
+          <a:lnRef idx="1">
+            <a:schemeClr val="accent1"/>
+          </a:lnRef>
+          <a:fillRef idx="3">
+            <a:schemeClr val="accent1"/>
+          </a:fillRef>
+          <a:effectRef idx="2">
+            <a:schemeClr val="accent1"/>
+          </a:effectRef>
+          <a:fontRef idx="minor">
+            <a:schemeClr val="lt1"/>
+          </a:fontRef>
+        </p:style>
+        <p:txBody>
+          <a:bodyPr rtlCol="0" anchor="ctr"/>
+          <a:lstStyle/>
+          <a:p>
+            <a:pPr algn="ctr"/>
+          </a:p>
+        </p:txBody>
+      </p:sp>
+      <p:sp>
+        <p:nvSpPr>
+          <p:cNvPr id="7" name="Rectangle 6"/>
+          <p:cNvSpPr/>
+          <p:nvPr/>
+        </p:nvSpPr>
+        <p:spPr>
+          <a:xfrm>
+            <a:off x="640080" y="1408175"/>
+            <a:ext cx="73152" cy="274320"/>
+          </a:xfrm>
+          <a:prstGeom prst="rect">
+            <a:avLst/>
+          </a:prstGeom>
+          <a:solidFill>
+            <a:srgbClr val="269CCB"/>
+          </a:solidFill>
+          <a:ln>
+            <a:noFill/>
+          </a:ln>
+        </p:spPr>
+        <p:style>
+          <a:lnRef idx="1">
+            <a:schemeClr val="accent1"/>
+          </a:lnRef>
+          <a:fillRef idx="3">
+            <a:schemeClr val="accent1"/>
+          </a:fillRef>
+          <a:effectRef idx="2">
+            <a:schemeClr val="accent1"/>
+          </a:effectRef>
+          <a:fontRef idx="minor">
+            <a:schemeClr val="lt1"/>
+          </a:fontRef>
+        </p:style>
+        <p:txBody>
+          <a:bodyPr rtlCol="0" anchor="ctr"/>
+          <a:lstStyle/>
+          <a:p>
+            <a:pPr algn="ctr"/>
+          </a:p>
+        </p:txBody>
+      </p:sp>
+      <p:sp>
+        <p:nvSpPr>
+          <p:cNvPr id="8" name="TextBox 7"/>
+          <p:cNvSpPr txBox="1"/>
+          <p:nvPr/>
+        </p:nvSpPr>
+        <p:spPr>
+          <a:xfrm>
+            <a:off x="1097280" y="1353312"/>
+            <a:ext cx="10362895" cy="402336"/>
+          </a:xfrm>
+          <a:prstGeom prst="rect">
+            <a:avLst/>
+          </a:prstGeom>
+          <a:noFill/>
+        </p:spPr>
+        <p:txBody>
+          <a:bodyPr wrap="square" anchor="ctr"/>
+          <a:lstStyle/>
+          <a:p>
+            <a:r>
+              <a:rPr sz="1500" b="0" i="0">
+                <a:solidFill>
+                  <a:srgbClr val="333333"/>
+                </a:solidFill>
+                <a:latin typeface="Calibri"/>
+              </a:rPr>
+              <a:t>Si oprime el boton dos veces y el listado siempre muestra un solo registro: en que linea exacta se esta creando el ArrayList y cuantas veces se ejecuta esa linea?</a:t>
+            </a:r>
+          </a:p>
+        </p:txBody>
+      </p:sp>
+      <p:sp>
+        <p:nvSpPr>
+          <p:cNvPr id="9" name="Rounded Rectangle 8"/>
+          <p:cNvSpPr/>
+          <p:nvPr/>
+        </p:nvSpPr>
+        <p:spPr>
+          <a:xfrm>
+            <a:off x="457200" y="1938528"/>
+            <a:ext cx="11277295" cy="566928"/>
+          </a:xfrm>
+          <a:prstGeom prst="roundRect">
+            <a:avLst>
+              <a:gd name="adj" fmla="val 12000"/>
+            </a:avLst>
+          </a:prstGeom>
+          <a:solidFill>
+            <a:srgbClr val="F2F2F2"/>
+          </a:solidFill>
+          <a:ln>
+            <a:noFill/>
+          </a:ln>
+        </p:spPr>
+        <p:style>
+          <a:lnRef idx="1">
+            <a:schemeClr val="accent1"/>
+          </a:lnRef>
+          <a:fillRef idx="3">
+            <a:schemeClr val="accent1"/>
+          </a:fillRef>
+          <a:effectRef idx="2">
+            <a:schemeClr val="accent1"/>
+          </a:effectRef>
+          <a:fontRef idx="minor">
+            <a:schemeClr val="lt1"/>
+          </a:fontRef>
+        </p:style>
+        <p:txBody>
+          <a:bodyPr rtlCol="0" anchor="ctr"/>
+          <a:lstStyle/>
+          <a:p>
+            <a:pPr algn="ctr"/>
+          </a:p>
+        </p:txBody>
+      </p:sp>
+      <p:sp>
+        <p:nvSpPr>
+          <p:cNvPr id="10" name="Rectangle 9"/>
+          <p:cNvSpPr/>
+          <p:nvPr/>
+        </p:nvSpPr>
+        <p:spPr>
+          <a:xfrm>
+            <a:off x="640080" y="2084832"/>
+            <a:ext cx="274320" cy="274320"/>
+          </a:xfrm>
+          <a:prstGeom prst="rect">
+            <a:avLst/>
+          </a:prstGeom>
+          <a:solidFill>
+            <a:srgbClr val="FFFFFF"/>
+          </a:solidFill>
+          <a:ln>
+            <a:solidFill>
+              <a:srgbClr val="333333"/>
+            </a:solidFill>
+          </a:ln>
+        </p:spPr>
+        <p:style>
+          <a:lnRef idx="1">
+            <a:schemeClr val="accent1"/>
+          </a:lnRef>
+          <a:fillRef idx="3">
+            <a:schemeClr val="accent1"/>
+          </a:fillRef>
+          <a:effectRef idx="2">
+            <a:schemeClr val="accent1"/>
+          </a:effectRef>
+          <a:fontRef idx="minor">
+            <a:schemeClr val="lt1"/>
+          </a:fontRef>
+        </p:style>
+        <p:txBody>
+          <a:bodyPr rtlCol="0" anchor="ctr"/>
+          <a:lstStyle/>
+          <a:p>
+            <a:pPr algn="ctr"/>
+          </a:p>
+        </p:txBody>
+      </p:sp>
+      <p:sp>
+        <p:nvSpPr>
+          <p:cNvPr id="11" name="Rectangle 10"/>
+          <p:cNvSpPr/>
+          <p:nvPr/>
+        </p:nvSpPr>
+        <p:spPr>
+          <a:xfrm>
+            <a:off x="640080" y="2084832"/>
+            <a:ext cx="73152" cy="274320"/>
+          </a:xfrm>
+          <a:prstGeom prst="rect">
+            <a:avLst/>
+          </a:prstGeom>
+          <a:solidFill>
+            <a:srgbClr val="269CCB"/>
+          </a:solidFill>
+          <a:ln>
+            <a:noFill/>
+          </a:ln>
+        </p:spPr>
+        <p:style>
+          <a:lnRef idx="1">
+            <a:schemeClr val="accent1"/>
+          </a:lnRef>
+          <a:fillRef idx="3">
+            <a:schemeClr val="accent1"/>
+          </a:fillRef>
+          <a:effectRef idx="2">
+            <a:schemeClr val="accent1"/>
+          </a:effectRef>
+          <a:fontRef idx="minor">
+            <a:schemeClr val="lt1"/>
+          </a:fontRef>
+        </p:style>
+        <p:txBody>
+          <a:bodyPr rtlCol="0" anchor="ctr"/>
+          <a:lstStyle/>
+          <a:p>
+            <a:pPr algn="ctr"/>
+          </a:p>
+        </p:txBody>
+      </p:sp>
+      <p:sp>
+        <p:nvSpPr>
+          <p:cNvPr id="12" name="TextBox 11"/>
+          <p:cNvSpPr txBox="1"/>
+          <p:nvPr/>
+        </p:nvSpPr>
+        <p:spPr>
+          <a:xfrm>
+            <a:off x="1097280" y="2029968"/>
+            <a:ext cx="10362895" cy="402336"/>
+          </a:xfrm>
+          <a:prstGeom prst="rect">
+            <a:avLst/>
+          </a:prstGeom>
+          <a:noFill/>
+        </p:spPr>
+        <p:txBody>
+          <a:bodyPr wrap="square" anchor="ctr"/>
+          <a:lstStyle/>
+          <a:p>
+            <a:r>
+              <a:rPr sz="1500" b="0" i="0">
+                <a:solidFill>
+                  <a:srgbClr val="333333"/>
+                </a:solidFill>
+                <a:latin typeface="Calibri"/>
+              </a:rPr>
+              <a:t>Si borra el import de javax.swing de su controlador, el proyecto sigue compilando? Que le dice esa respuesta sobre donde quedo la logica?</a:t>
+            </a:r>
+          </a:p>
+        </p:txBody>
+      </p:sp>
+      <p:sp>
+        <p:nvSpPr>
+          <p:cNvPr id="13" name="Rounded Rectangle 12"/>
+          <p:cNvSpPr/>
+          <p:nvPr/>
+        </p:nvSpPr>
+        <p:spPr>
+          <a:xfrm>
+            <a:off x="457200" y="2615184"/>
+            <a:ext cx="11277295" cy="566928"/>
+          </a:xfrm>
+          <a:prstGeom prst="roundRect">
+            <a:avLst>
+              <a:gd name="adj" fmla="val 12000"/>
+            </a:avLst>
+          </a:prstGeom>
+          <a:solidFill>
+            <a:srgbClr val="F2F2F2"/>
+          </a:solidFill>
+          <a:ln>
+            <a:noFill/>
+          </a:ln>
+        </p:spPr>
+        <p:style>
+          <a:lnRef idx="1">
+            <a:schemeClr val="accent1"/>
+          </a:lnRef>
+          <a:fillRef idx="3">
+            <a:schemeClr val="accent1"/>
+          </a:fillRef>
+          <a:effectRef idx="2">
+            <a:schemeClr val="accent1"/>
+          </a:effectRef>
+          <a:fontRef idx="minor">
+            <a:schemeClr val="lt1"/>
+          </a:fontRef>
+        </p:style>
+        <p:txBody>
+          <a:bodyPr rtlCol="0" anchor="ctr"/>
+          <a:lstStyle/>
+          <a:p>
+            <a:pPr algn="ctr"/>
+          </a:p>
+        </p:txBody>
+      </p:sp>
+      <p:sp>
+        <p:nvSpPr>
+          <p:cNvPr id="14" name="Rectangle 13"/>
+          <p:cNvSpPr/>
+          <p:nvPr/>
+        </p:nvSpPr>
+        <p:spPr>
+          <a:xfrm>
+            <a:off x="640080" y="2761488"/>
+            <a:ext cx="274320" cy="274320"/>
+          </a:xfrm>
+          <a:prstGeom prst="rect">
+            <a:avLst/>
+          </a:prstGeom>
+          <a:solidFill>
+            <a:srgbClr val="FFFFFF"/>
+          </a:solidFill>
+          <a:ln>
+            <a:solidFill>
+              <a:srgbClr val="333333"/>
+            </a:solidFill>
+          </a:ln>
+        </p:spPr>
+        <p:style>
+          <a:lnRef idx="1">
+            <a:schemeClr val="accent1"/>
+          </a:lnRef>
+          <a:fillRef idx="3">
+            <a:schemeClr val="accent1"/>
+          </a:fillRef>
+          <a:effectRef idx="2">
+            <a:schemeClr val="accent1"/>
+          </a:effectRef>
+          <a:fontRef idx="minor">
+            <a:schemeClr val="lt1"/>
+          </a:fontRef>
+        </p:style>
+        <p:txBody>
+          <a:bodyPr rtlCol="0" anchor="ctr"/>
+          <a:lstStyle/>
+          <a:p>
+            <a:pPr algn="ctr"/>
+          </a:p>
+        </p:txBody>
+      </p:sp>
+      <p:sp>
+        <p:nvSpPr>
+          <p:cNvPr id="15" name="Rectangle 14"/>
+          <p:cNvSpPr/>
+          <p:nvPr/>
+        </p:nvSpPr>
+        <p:spPr>
+          <a:xfrm>
+            <a:off x="640080" y="2761488"/>
+            <a:ext cx="73152" cy="274320"/>
+          </a:xfrm>
+          <a:prstGeom prst="rect">
+            <a:avLst/>
+          </a:prstGeom>
+          <a:solidFill>
+            <a:srgbClr val="269CCB"/>
+          </a:solidFill>
+          <a:ln>
+            <a:noFill/>
+          </a:ln>
+        </p:spPr>
+        <p:style>
+          <a:lnRef idx="1">
+            <a:schemeClr val="accent1"/>
+          </a:lnRef>
+          <a:fillRef idx="3">
+            <a:schemeClr val="accent1"/>
+          </a:fillRef>
+          <a:effectRef idx="2">
+            <a:schemeClr val="accent1"/>
+          </a:effectRef>
+          <a:fontRef idx="minor">
+            <a:schemeClr val="lt1"/>
+          </a:fontRef>
+        </p:style>
+        <p:txBody>
+          <a:bodyPr rtlCol="0" anchor="ctr"/>
+          <a:lstStyle/>
+          <a:p>
+            <a:pPr algn="ctr"/>
+          </a:p>
+        </p:txBody>
+      </p:sp>
+      <p:sp>
+        <p:nvSpPr>
+          <p:cNvPr id="16" name="TextBox 15"/>
+          <p:cNvSpPr txBox="1"/>
+          <p:nvPr/>
+        </p:nvSpPr>
+        <p:spPr>
+          <a:xfrm>
+            <a:off x="1097280" y="2706624"/>
+            <a:ext cx="10362895" cy="402336"/>
+          </a:xfrm>
+          <a:prstGeom prst="rect">
+            <a:avLst/>
+          </a:prstGeom>
+          <a:noFill/>
+        </p:spPr>
+        <p:txBody>
+          <a:bodyPr wrap="square" anchor="ctr"/>
+          <a:lstStyle/>
+          <a:p>
+            <a:r>
+              <a:rPr sz="1500" b="0" i="0">
+                <a:solidFill>
+                  <a:srgbClr val="333333"/>
+                </a:solidFill>
+                <a:latin typeface="Calibri"/>
+              </a:rPr>
+              <a:t>Cuando la edad llega como 'tres', quien deberia darse cuenta primero del problema (el JTextField, el controlador o el usuario) y en que orden viajan la excepcion y el mensaje?</a:t>
+            </a:r>
+          </a:p>
+        </p:txBody>
+      </p:sp>
+      <p:sp>
+        <p:nvSpPr>
+          <p:cNvPr id="17" name="TextBox 16"/>
+          <p:cNvSpPr txBox="1"/>
+          <p:nvPr/>
+        </p:nvSpPr>
+        <p:spPr>
+          <a:xfrm>
+            <a:off x="11185855" y="6473952"/>
+            <a:ext cx="640080" cy="274320"/>
+          </a:xfrm>
+          <a:prstGeom prst="rect">
+            <a:avLst/>
+          </a:prstGeom>
+          <a:noFill/>
+        </p:spPr>
+        <p:txBody>
+          <a:bodyPr wrap="square">
+            <a:spAutoFit/>
+          </a:bodyPr>
+          <a:lstStyle/>
+          <a:p>
+            <a:pPr algn="r"/>
+            <a:r>
+              <a:rPr sz="1100" b="0" i="0">
+                <a:solidFill>
+                  <a:srgbClr val="666666"/>
+                </a:solidFill>
+                <a:latin typeface="Calibri"/>
+              </a:rPr>
+              <a:t>14</a:t>
+            </a:r>
+          </a:p>
+        </p:txBody>
+      </p:sp>
+    </p:spTree>
+  </p:cSld>
+  <p:clrMapOvr>
+    <a:masterClrMapping/>
+  </p:clrMapOvr>
+</p:sld>
+</file>
+
+<file path=ppt/slides/slide15.xml><?xml version="1.0" encoding="utf-8"?>
+<p:sld xmlns:a="http://schemas.openxmlformats.org/drawingml/2006/main" xmlns:p="http://schemas.openxmlformats.org/presentationml/2006/main" xmlns:r="http://schemas.openxmlformats.org/officeDocument/2006/relationships">
+  <p:cSld>
+    <p:bg>
+      <p:bgPr>
+        <a:solidFill>
+          <a:srgbClr val="FFFFFF"/>
+        </a:solidFill>
+        <a:effectLst/>
+      </p:bgPr>
+    </p:bg>
+    <p:spTree>
+      <p:nvGrpSpPr>
+        <p:cNvPr id="1" name=""/>
+        <p:cNvGrpSpPr/>
+        <p:nvPr/>
+      </p:nvGrpSpPr>
+      <p:grpSpPr/>
+      <p:sp>
+        <p:nvSpPr>
+          <p:cNvPr id="2" name="Rectangle 1"/>
+          <p:cNvSpPr/>
+          <p:nvPr/>
+        </p:nvSpPr>
+        <p:spPr>
+          <a:xfrm>
+            <a:off x="0" y="0"/>
+            <a:ext cx="12191695" cy="960120"/>
+          </a:xfrm>
+          <a:prstGeom prst="rect">
+            <a:avLst/>
+          </a:prstGeom>
+          <a:solidFill>
+            <a:srgbClr val="095292"/>
+          </a:solidFill>
+          <a:ln>
+            <a:noFill/>
+          </a:ln>
+        </p:spPr>
+        <p:style>
+          <a:lnRef idx="1">
+            <a:schemeClr val="accent1"/>
+          </a:lnRef>
+          <a:fillRef idx="3">
+            <a:schemeClr val="accent1"/>
+          </a:fillRef>
+          <a:effectRef idx="2">
+            <a:schemeClr val="accent1"/>
+          </a:effectRef>
+          <a:fontRef idx="minor">
+            <a:schemeClr val="lt1"/>
+          </a:fontRef>
+        </p:style>
+        <p:txBody>
+          <a:bodyPr rtlCol="0" anchor="ctr"/>
+          <a:lstStyle/>
+          <a:p>
+            <a:pPr algn="ctr"/>
+          </a:p>
+        </p:txBody>
+      </p:sp>
+      <p:sp>
+        <p:nvSpPr>
+          <p:cNvPr id="3" name="Rectangle 2"/>
+          <p:cNvSpPr/>
+          <p:nvPr/>
+        </p:nvSpPr>
+        <p:spPr>
+          <a:xfrm>
+            <a:off x="0" y="960120"/>
+            <a:ext cx="12191695" cy="41148"/>
+          </a:xfrm>
+          <a:prstGeom prst="rect">
+            <a:avLst/>
+          </a:prstGeom>
+          <a:solidFill>
+            <a:srgbClr val="FFD000"/>
+          </a:solidFill>
+          <a:ln>
+            <a:noFill/>
+          </a:ln>
+        </p:spPr>
+        <p:style>
+          <a:lnRef idx="1">
+            <a:schemeClr val="accent1"/>
+          </a:lnRef>
+          <a:fillRef idx="3">
+            <a:schemeClr val="accent1"/>
+          </a:fillRef>
+          <a:effectRef idx="2">
+            <a:schemeClr val="accent1"/>
+          </a:effectRef>
+          <a:fontRef idx="minor">
+            <a:schemeClr val="lt1"/>
+          </a:fontRef>
+        </p:style>
+        <p:txBody>
+          <a:bodyPr rtlCol="0" anchor="ctr"/>
+          <a:lstStyle/>
+          <a:p>
+            <a:pPr algn="ctr"/>
+          </a:p>
+        </p:txBody>
+      </p:sp>
+      <p:sp>
+        <p:nvSpPr>
+          <p:cNvPr id="4" name="TextBox 3"/>
+          <p:cNvSpPr txBox="1"/>
+          <p:nvPr/>
+        </p:nvSpPr>
+        <p:spPr>
+          <a:xfrm>
+            <a:off x="457200" y="164592"/>
+            <a:ext cx="11277295" cy="502920"/>
+          </a:xfrm>
+          <a:prstGeom prst="rect">
+            <a:avLst/>
+          </a:prstGeom>
+          <a:noFill/>
+        </p:spPr>
+        <p:txBody>
+          <a:bodyPr wrap="square">
+            <a:spAutoFit/>
+          </a:bodyPr>
+          <a:lstStyle/>
+          <a:p>
+            <a:r>
+              <a:rPr sz="2600" b="1" i="0">
+                <a:solidFill>
+                  <a:srgbClr val="FFFFFF"/>
+                </a:solidFill>
+                <a:latin typeface="Calibri"/>
+              </a:rPr>
+              <a:t>Criterios de exito / entregable</a:t>
+            </a:r>
+          </a:p>
+        </p:txBody>
+      </p:sp>
+      <p:sp>
+        <p:nvSpPr>
+          <p:cNvPr id="5" name="TextBox 4"/>
+          <p:cNvSpPr txBox="1"/>
+          <p:nvPr/>
+        </p:nvSpPr>
+        <p:spPr>
+          <a:xfrm>
+            <a:off x="457200" y="1170432"/>
+            <a:ext cx="11277295" cy="5230368"/>
+          </a:xfrm>
+          <a:prstGeom prst="rect">
+            <a:avLst/>
+          </a:prstGeom>
+          <a:noFill/>
+        </p:spPr>
+        <p:txBody>
+          <a:bodyPr wrap="square">
+            <a:spAutoFit/>
+          </a:bodyPr>
+          <a:lstStyle/>
+          <a:p>
+            <a:pPr>
+              <a:spcAft>
+                <a:spcPts val="800"/>
+              </a:spcAft>
+            </a:pPr>
+            <a:r>
+              <a:rPr sz="2000" b="0" i="0">
+                <a:solidFill>
+                  <a:srgbClr val="333333"/>
+                </a:solidFill>
+                <a:latin typeface="Calibri"/>
+              </a:rPr>
+              <a:t>–   </a:t>
+            </a:r>
+            <a:r>
+              <a:rPr sz="2000" b="1" i="0">
+                <a:solidFill>
+                  <a:srgbClr val="333333"/>
+                </a:solidFill>
+                <a:latin typeface="Calibri"/>
+              </a:rPr>
+              <a:t>Entregable:</a:t>
+            </a:r>
+            <a:r>
+              <a:rPr sz="2000" b="0" i="0">
+                <a:solidFill>
+                  <a:srgbClr val="333333"/>
+                </a:solidFill>
+                <a:latin typeface="Calibri"/>
+              </a:rPr>
+              <a:t> Proyecto VetCare con la ventana de registro operativa y la clase ControladorRegistro separada de la vista, comprimido y subido a la plataforma del curso.</a:t>
+            </a:r>
+          </a:p>
+          <a:p>
+            <a:pPr>
+              <a:spcAft>
+                <a:spcPts val="800"/>
+              </a:spcAft>
+            </a:pPr>
+            <a:r>
+              <a:rPr sz="2000" b="0" i="0">
+                <a:solidFill>
+                  <a:srgbClr val="333333"/>
+                </a:solidFill>
+                <a:latin typeface="Calibri"/>
+              </a:rPr>
+              <a:t>–   </a:t>
+            </a:r>
+            <a:r>
+              <a:rPr sz="2000" b="1" i="0">
+                <a:solidFill>
+                  <a:srgbClr val="333333"/>
+                </a:solidFill>
+                <a:latin typeface="Calibri"/>
+              </a:rPr>
+              <a:t>Exito:</a:t>
+            </a:r>
+            <a:r>
+              <a:rPr sz="2000" b="0" i="0">
+                <a:solidFill>
+                  <a:srgbClr val="333333"/>
+                </a:solidFill>
+                <a:latin typeface="Calibri"/>
+              </a:rPr>
+              <a:t> Al oprimir 'Registrar mascota' la mascota aparece en el listado y el total aumenta en uno por cada registro exitoso.</a:t>
+            </a:r>
+          </a:p>
+          <a:p>
+            <a:pPr>
+              <a:spcAft>
+                <a:spcPts val="800"/>
+              </a:spcAft>
+            </a:pPr>
+            <a:r>
+              <a:rPr sz="2000" b="0" i="0">
+                <a:solidFill>
+                  <a:srgbClr val="333333"/>
+                </a:solidFill>
+                <a:latin typeface="Calibri"/>
+              </a:rPr>
+              <a:t>–   </a:t>
+            </a:r>
+            <a:r>
+              <a:rPr sz="2000" b="1" i="0">
+                <a:solidFill>
+                  <a:srgbClr val="333333"/>
+                </a:solidFill>
+                <a:latin typeface="Calibri"/>
+              </a:rPr>
+              <a:t>Exito:</a:t>
+            </a:r>
+            <a:r>
+              <a:rPr sz="2000" b="0" i="0">
+                <a:solidFill>
+                  <a:srgbClr val="333333"/>
+                </a:solidFill>
+                <a:latin typeface="Calibri"/>
+              </a:rPr>
+              <a:t> Ninguna clase de los paquetes modelo o servicio importa javax.swing, y el cuerpo del listener no contiene ninguna validacion ni conversion de datos.</a:t>
+            </a:r>
+          </a:p>
+          <a:p>
+            <a:pPr>
+              <a:spcAft>
+                <a:spcPts val="800"/>
+              </a:spcAft>
+            </a:pPr>
+            <a:r>
+              <a:rPr sz="2000" b="0" i="0">
+                <a:solidFill>
+                  <a:srgbClr val="333333"/>
+                </a:solidFill>
+                <a:latin typeface="Calibri"/>
+              </a:rPr>
+              <a:t>–   </a:t>
+            </a:r>
+            <a:r>
+              <a:rPr sz="2000" b="1" i="0">
+                <a:solidFill>
+                  <a:srgbClr val="333333"/>
+                </a:solidFill>
+                <a:latin typeface="Calibri"/>
+              </a:rPr>
+              <a:t>Exito:</a:t>
+            </a:r>
+            <a:r>
+              <a:rPr sz="2000" b="0" i="0">
+                <a:solidFill>
+                  <a:srgbClr val="333333"/>
+                </a:solidFill>
+                <a:latin typeface="Calibri"/>
+              </a:rPr>
+              <a:t> Escribir 'tres' en el campo edad muestra un mensaje entendible en un JOptionPane y la aplicacion sigue funcionando, sin traza roja en la consola de VS Code.</a:t>
+            </a:r>
+          </a:p>
+          <a:p>
+            <a:pPr>
+              <a:spcAft>
+                <a:spcPts val="800"/>
+              </a:spcAft>
+            </a:pPr>
+            <a:r>
+              <a:rPr sz="2000" b="0" i="0">
+                <a:solidFill>
+                  <a:srgbClr val="333333"/>
+                </a:solidFill>
+                <a:latin typeface="Calibri"/>
+              </a:rPr>
+              <a:t>–   </a:t>
+            </a:r>
+            <a:r>
+              <a:rPr sz="2000" b="1" i="0">
+                <a:solidFill>
+                  <a:srgbClr val="333333"/>
+                </a:solidFill>
+                <a:latin typeface="Calibri"/>
+              </a:rPr>
+              <a:t>Exito:</a:t>
+            </a:r>
+            <a:r>
+              <a:rPr sz="2000" b="0" i="0">
+                <a:solidFill>
+                  <a:srgbClr val="333333"/>
+                </a:solidFill>
+                <a:latin typeface="Calibri"/>
+              </a:rPr>
+              <a:t> Intentar registrar un ID que ya existe es rechazado con mensaje y la lista no queda con dos mascotas con el mismo ID.</a:t>
+            </a:r>
+          </a:p>
+          <a:p>
+            <a:pPr>
+              <a:spcAft>
+                <a:spcPts val="800"/>
+              </a:spcAft>
+            </a:pPr>
+            <a:r>
+              <a:rPr sz="2000" b="0" i="0">
+                <a:solidFill>
+                  <a:srgbClr val="333333"/>
+                </a:solidFill>
+                <a:latin typeface="Calibri"/>
+              </a:rPr>
+              <a:t>–   </a:t>
+            </a:r>
+            <a:r>
+              <a:rPr sz="2000" b="1" i="0">
+                <a:solidFill>
+                  <a:srgbClr val="333333"/>
+                </a:solidFill>
+                <a:latin typeface="Calibri"/>
+              </a:rPr>
+              <a:t>Entrega en la plataforma del curso</a:t>
+            </a:r>
+            <a:r>
+              <a:rPr sz="2000" b="0" i="0">
+                <a:solidFill>
+                  <a:srgbClr val="333333"/>
+                </a:solidFill>
+                <a:latin typeface="Calibri"/>
+              </a:rPr>
+              <a:t> — en la fecha que indique el docente.</a:t>
+            </a:r>
+          </a:p>
+        </p:txBody>
+      </p:sp>
+      <p:sp>
+        <p:nvSpPr>
+          <p:cNvPr id="6" name="TextBox 5"/>
+          <p:cNvSpPr txBox="1"/>
+          <p:nvPr/>
+        </p:nvSpPr>
+        <p:spPr>
+          <a:xfrm>
+            <a:off x="11185855" y="6473952"/>
+            <a:ext cx="640080" cy="274320"/>
+          </a:xfrm>
+          <a:prstGeom prst="rect">
+            <a:avLst/>
+          </a:prstGeom>
+          <a:noFill/>
+        </p:spPr>
+        <p:txBody>
+          <a:bodyPr wrap="square">
+            <a:spAutoFit/>
+          </a:bodyPr>
+          <a:lstStyle/>
+          <a:p>
+            <a:pPr algn="r"/>
+            <a:r>
+              <a:rPr sz="1100" b="0" i="0">
+                <a:solidFill>
+                  <a:srgbClr val="666666"/>
+                </a:solidFill>
+                <a:latin typeface="Calibri"/>
+              </a:rPr>
+              <a:t>15</a:t>
+            </a:r>
+          </a:p>
+        </p:txBody>
+      </p:sp>
+    </p:spTree>
+  </p:cSld>
+  <p:clrMapOvr>
+    <a:masterClrMapping/>
+  </p:clrMapOvr>
+</p:sld>
+</file>
+
+<file path=ppt/slides/slide16.xml><?xml version="1.0" encoding="utf-8"?>
+<p:sld xmlns:a="http://schemas.openxmlformats.org/drawingml/2006/main" xmlns:p="http://schemas.openxmlformats.org/presentationml/2006/main" xmlns:r="http://schemas.openxmlformats.org/officeDocument/2006/relationships">
+  <p:cSld>
+    <p:bg>
+      <p:bgPr>
+        <a:solidFill>
+          <a:srgbClr val="FFFFFF"/>
+        </a:solidFill>
+        <a:effectLst/>
+      </p:bgPr>
+    </p:bg>
+    <p:spTree>
+      <p:nvGrpSpPr>
+        <p:cNvPr id="1" name=""/>
+        <p:cNvGrpSpPr/>
+        <p:nvPr/>
+      </p:nvGrpSpPr>
+      <p:grpSpPr/>
+      <p:sp>
+        <p:nvSpPr>
+          <p:cNvPr id="2" name="Rectangle 1"/>
+          <p:cNvSpPr/>
+          <p:nvPr/>
+        </p:nvSpPr>
+        <p:spPr>
+          <a:xfrm>
+            <a:off x="0" y="0"/>
+            <a:ext cx="12191695" cy="960120"/>
+          </a:xfrm>
+          <a:prstGeom prst="rect">
+            <a:avLst/>
+          </a:prstGeom>
+          <a:solidFill>
+            <a:srgbClr val="095292"/>
+          </a:solidFill>
+          <a:ln>
+            <a:noFill/>
+          </a:ln>
+        </p:spPr>
+        <p:style>
+          <a:lnRef idx="1">
+            <a:schemeClr val="accent1"/>
+          </a:lnRef>
+          <a:fillRef idx="3">
+            <a:schemeClr val="accent1"/>
+          </a:fillRef>
+          <a:effectRef idx="2">
+            <a:schemeClr val="accent1"/>
+          </a:effectRef>
+          <a:fontRef idx="minor">
+            <a:schemeClr val="lt1"/>
+          </a:fontRef>
+        </p:style>
+        <p:txBody>
+          <a:bodyPr rtlCol="0" anchor="ctr"/>
+          <a:lstStyle/>
+          <a:p>
+            <a:pPr algn="ctr"/>
+          </a:p>
+        </p:txBody>
+      </p:sp>
+      <p:sp>
+        <p:nvSpPr>
+          <p:cNvPr id="3" name="Rectangle 2"/>
+          <p:cNvSpPr/>
+          <p:nvPr/>
+        </p:nvSpPr>
+        <p:spPr>
+          <a:xfrm>
+            <a:off x="0" y="960120"/>
+            <a:ext cx="12191695" cy="41148"/>
+          </a:xfrm>
+          <a:prstGeom prst="rect">
+            <a:avLst/>
+          </a:prstGeom>
+          <a:solidFill>
+            <a:srgbClr val="FFD000"/>
+          </a:solidFill>
+          <a:ln>
+            <a:noFill/>
+          </a:ln>
+        </p:spPr>
+        <p:style>
+          <a:lnRef idx="1">
+            <a:schemeClr val="accent1"/>
+          </a:lnRef>
+          <a:fillRef idx="3">
+            <a:schemeClr val="accent1"/>
+          </a:fillRef>
+          <a:effectRef idx="2">
+            <a:schemeClr val="accent1"/>
+          </a:effectRef>
+          <a:fontRef idx="minor">
+            <a:schemeClr val="lt1"/>
+          </a:fontRef>
+        </p:style>
+        <p:txBody>
+          <a:bodyPr rtlCol="0" anchor="ctr"/>
+          <a:lstStyle/>
+          <a:p>
+            <a:pPr algn="ctr"/>
+          </a:p>
+        </p:txBody>
+      </p:sp>
+      <p:sp>
+        <p:nvSpPr>
+          <p:cNvPr id="4" name="TextBox 3"/>
+          <p:cNvSpPr txBox="1"/>
+          <p:nvPr/>
+        </p:nvSpPr>
+        <p:spPr>
+          <a:xfrm>
+            <a:off x="457200" y="164592"/>
+            <a:ext cx="11277295" cy="502920"/>
+          </a:xfrm>
+          <a:prstGeom prst="rect">
+            <a:avLst/>
+          </a:prstGeom>
+          <a:noFill/>
+        </p:spPr>
+        <p:txBody>
+          <a:bodyPr wrap="square">
+            <a:spAutoFit/>
+          </a:bodyPr>
+          <a:lstStyle/>
+          <a:p>
+            <a:r>
+              <a:rPr sz="2600" b="1" i="0">
+                <a:solidFill>
+                  <a:srgbClr val="FFFFFF"/>
+                </a:solidFill>
+                <a:latin typeface="Calibri"/>
+              </a:rPr>
+              <a:t>Para el PI esta semana</a:t>
+            </a:r>
+          </a:p>
+        </p:txBody>
+      </p:sp>
+      <p:sp>
+        <p:nvSpPr>
+          <p:cNvPr id="5" name="Rounded Rectangle 4"/>
+          <p:cNvSpPr/>
+          <p:nvPr/>
+        </p:nvSpPr>
+        <p:spPr>
+          <a:xfrm>
+            <a:off x="457200" y="1261872"/>
+            <a:ext cx="11277295" cy="1051560"/>
+          </a:xfrm>
+          <a:prstGeom prst="roundRect">
+            <a:avLst>
+              <a:gd name="adj" fmla="val 12000"/>
+            </a:avLst>
+          </a:prstGeom>
+          <a:solidFill>
+            <a:srgbClr val="E8F4FA"/>
+          </a:solidFill>
+          <a:ln>
+            <a:noFill/>
+          </a:ln>
+        </p:spPr>
+        <p:style>
+          <a:lnRef idx="1">
+            <a:schemeClr val="accent1"/>
+          </a:lnRef>
+          <a:fillRef idx="3">
+            <a:schemeClr val="accent1"/>
+          </a:fillRef>
+          <a:effectRef idx="2">
+            <a:schemeClr val="accent1"/>
+          </a:effectRef>
+          <a:fontRef idx="minor">
+            <a:schemeClr val="lt1"/>
+          </a:fontRef>
+        </p:style>
+        <p:txBody>
+          <a:bodyPr rtlCol="0" anchor="ctr"/>
+          <a:lstStyle/>
+          <a:p>
+            <a:pPr algn="ctr"/>
+          </a:p>
+        </p:txBody>
+      </p:sp>
+      <p:sp>
+        <p:nvSpPr>
+          <p:cNvPr id="6" name="Rectangle 5"/>
+          <p:cNvSpPr/>
+          <p:nvPr/>
+        </p:nvSpPr>
+        <p:spPr>
+          <a:xfrm>
+            <a:off x="457200" y="1261872"/>
+            <a:ext cx="128016" cy="1051560"/>
+          </a:xfrm>
+          <a:prstGeom prst="rect">
+            <a:avLst/>
+          </a:prstGeom>
+          <a:solidFill>
+            <a:srgbClr val="269CCB"/>
+          </a:solidFill>
+          <a:ln>
+            <a:noFill/>
+          </a:ln>
+        </p:spPr>
+        <p:style>
+          <a:lnRef idx="1">
+            <a:schemeClr val="accent1"/>
+          </a:lnRef>
+          <a:fillRef idx="3">
+            <a:schemeClr val="accent1"/>
+          </a:fillRef>
+          <a:effectRef idx="2">
+            <a:schemeClr val="accent1"/>
+          </a:effectRef>
+          <a:fontRef idx="minor">
+            <a:schemeClr val="lt1"/>
+          </a:fontRef>
+        </p:style>
+        <p:txBody>
+          <a:bodyPr rtlCol="0" anchor="ctr"/>
+          <a:lstStyle/>
+          <a:p>
+            <a:pPr algn="ctr"/>
+          </a:p>
+        </p:txBody>
+      </p:sp>
+      <p:sp>
+        <p:nvSpPr>
+          <p:cNvPr id="7" name="TextBox 6"/>
+          <p:cNvSpPr txBox="1"/>
+          <p:nvPr/>
+        </p:nvSpPr>
+        <p:spPr>
+          <a:xfrm>
+            <a:off x="777240" y="1399031"/>
+            <a:ext cx="10774375" cy="822959"/>
+          </a:xfrm>
+          <a:prstGeom prst="rect">
+            <a:avLst/>
+          </a:prstGeom>
+          <a:noFill/>
+        </p:spPr>
+        <p:txBody>
+          <a:bodyPr wrap="square">
+            <a:spAutoFit/>
+          </a:bodyPr>
+          <a:lstStyle/>
+          <a:p>
+            <a:r>
+              <a:rPr sz="1200" b="1" i="0">
+                <a:solidFill>
+                  <a:srgbClr val="269CCB"/>
+                </a:solidFill>
+                <a:latin typeface="Calibri"/>
+              </a:rPr>
+              <a:t>Info</a:t>
+            </a:r>
+          </a:p>
+          <a:p>
+            <a:pPr>
+              <a:spcBef>
+                <a:spcPts val="400"/>
+              </a:spcBef>
+            </a:pPr>
+            <a:r>
+              <a:rPr sz="1400" b="0" i="0">
+                <a:solidFill>
+                  <a:srgbClr val="333333"/>
+                </a:solidFill>
+                <a:latin typeface="Calibri"/>
+              </a:rPr>
+              <a:t>Hito: El formulario de VetCare queda conectado: al oprimir 'Registrar mascota' el objeto entra al ArrayList y el listado en pantalla se actualiza.</a:t>
+            </a:r>
+          </a:p>
+        </p:txBody>
+      </p:sp>
+      <p:sp>
+        <p:nvSpPr>
+          <p:cNvPr id="8" name="Rounded Rectangle 7"/>
+          <p:cNvSpPr/>
+          <p:nvPr/>
+        </p:nvSpPr>
+        <p:spPr>
+          <a:xfrm>
+            <a:off x="457200" y="2478024"/>
+            <a:ext cx="11277295" cy="1051560"/>
+          </a:xfrm>
+          <a:prstGeom prst="roundRect">
+            <a:avLst>
+              <a:gd name="adj" fmla="val 12000"/>
+            </a:avLst>
+          </a:prstGeom>
+          <a:solidFill>
+            <a:srgbClr val="FFF8E1"/>
+          </a:solidFill>
+          <a:ln>
+            <a:noFill/>
+          </a:ln>
+        </p:spPr>
+        <p:style>
+          <a:lnRef idx="1">
+            <a:schemeClr val="accent1"/>
+          </a:lnRef>
+          <a:fillRef idx="3">
+            <a:schemeClr val="accent1"/>
+          </a:fillRef>
+          <a:effectRef idx="2">
+            <a:schemeClr val="accent1"/>
+          </a:effectRef>
+          <a:fontRef idx="minor">
+            <a:schemeClr val="lt1"/>
+          </a:fontRef>
+        </p:style>
+        <p:txBody>
+          <a:bodyPr rtlCol="0" anchor="ctr"/>
+          <a:lstStyle/>
+          <a:p>
+            <a:pPr algn="ctr"/>
+          </a:p>
+        </p:txBody>
+      </p:sp>
+      <p:sp>
+        <p:nvSpPr>
+          <p:cNvPr id="9" name="Rectangle 8"/>
+          <p:cNvSpPr/>
+          <p:nvPr/>
+        </p:nvSpPr>
+        <p:spPr>
+          <a:xfrm>
+            <a:off x="457200" y="2478024"/>
+            <a:ext cx="128016" cy="1051560"/>
+          </a:xfrm>
+          <a:prstGeom prst="rect">
+            <a:avLst/>
+          </a:prstGeom>
+          <a:solidFill>
+            <a:srgbClr val="FFD000"/>
+          </a:solidFill>
+          <a:ln>
+            <a:noFill/>
+          </a:ln>
+        </p:spPr>
+        <p:style>
+          <a:lnRef idx="1">
+            <a:schemeClr val="accent1"/>
+          </a:lnRef>
+          <a:fillRef idx="3">
+            <a:schemeClr val="accent1"/>
+          </a:fillRef>
+          <a:effectRef idx="2">
+            <a:schemeClr val="accent1"/>
+          </a:effectRef>
+          <a:fontRef idx="minor">
+            <a:schemeClr val="lt1"/>
+          </a:fontRef>
+        </p:style>
+        <p:txBody>
+          <a:bodyPr rtlCol="0" anchor="ctr"/>
+          <a:lstStyle/>
+          <a:p>
+            <a:pPr algn="ctr"/>
+          </a:p>
+        </p:txBody>
+      </p:sp>
+      <p:sp>
+        <p:nvSpPr>
+          <p:cNvPr id="10" name="TextBox 9"/>
+          <p:cNvSpPr txBox="1"/>
+          <p:nvPr/>
+        </p:nvSpPr>
+        <p:spPr>
+          <a:xfrm>
+            <a:off x="777240" y="2615184"/>
+            <a:ext cx="10774375" cy="822959"/>
+          </a:xfrm>
+          <a:prstGeom prst="rect">
+            <a:avLst/>
+          </a:prstGeom>
+          <a:noFill/>
+        </p:spPr>
+        <p:txBody>
+          <a:bodyPr wrap="square">
+            <a:spAutoFit/>
+          </a:bodyPr>
+          <a:lstStyle/>
+          <a:p>
+            <a:r>
+              <a:rPr sz="1200" b="1" i="0">
+                <a:solidFill>
+                  <a:srgbClr val="FFD000"/>
+                </a:solidFill>
+                <a:latin typeface="Calibri"/>
+              </a:rPr>
+              <a:t>Aclaración</a:t>
+            </a:r>
+          </a:p>
+          <a:p>
+            <a:pPr>
+              <a:spcBef>
+                <a:spcPts val="400"/>
+              </a:spcBef>
+            </a:pPr>
+            <a:r>
+              <a:rPr sz="1400" b="0" i="0">
+                <a:solidFill>
+                  <a:srgbClr val="333333"/>
+                </a:solidFill>
+                <a:latin typeface="Calibri"/>
+              </a:rPr>
+              <a:t>Enunciado completo: Clases/Proyecto Integrador/ (VetCare).</a:t>
+            </a:r>
+          </a:p>
+        </p:txBody>
+      </p:sp>
+      <p:sp>
+        <p:nvSpPr>
+          <p:cNvPr id="11" name="Rounded Rectangle 10"/>
+          <p:cNvSpPr/>
+          <p:nvPr/>
+        </p:nvSpPr>
+        <p:spPr>
+          <a:xfrm>
+            <a:off x="457200" y="3694176"/>
+            <a:ext cx="11277295" cy="1051560"/>
+          </a:xfrm>
+          <a:prstGeom prst="roundRect">
+            <a:avLst>
+              <a:gd name="adj" fmla="val 12000"/>
+            </a:avLst>
+          </a:prstGeom>
+          <a:solidFill>
+            <a:srgbClr val="FBE4E4"/>
+          </a:solidFill>
+          <a:ln>
+            <a:noFill/>
+          </a:ln>
+        </p:spPr>
+        <p:style>
+          <a:lnRef idx="1">
+            <a:schemeClr val="accent1"/>
+          </a:lnRef>
+          <a:fillRef idx="3">
+            <a:schemeClr val="accent1"/>
+          </a:fillRef>
+          <a:effectRef idx="2">
+            <a:schemeClr val="accent1"/>
+          </a:effectRef>
+          <a:fontRef idx="minor">
+            <a:schemeClr val="lt1"/>
+          </a:fontRef>
+        </p:style>
+        <p:txBody>
+          <a:bodyPr rtlCol="0" anchor="ctr"/>
+          <a:lstStyle/>
+          <a:p>
+            <a:pPr algn="ctr"/>
+          </a:p>
+        </p:txBody>
+      </p:sp>
+      <p:sp>
+        <p:nvSpPr>
+          <p:cNvPr id="12" name="Rectangle 11"/>
+          <p:cNvSpPr/>
+          <p:nvPr/>
+        </p:nvSpPr>
+        <p:spPr>
+          <a:xfrm>
+            <a:off x="457200" y="3694176"/>
+            <a:ext cx="128016" cy="1051560"/>
+          </a:xfrm>
+          <a:prstGeom prst="rect">
+            <a:avLst/>
+          </a:prstGeom>
+          <a:solidFill>
+            <a:srgbClr val="A02030"/>
+          </a:solidFill>
+          <a:ln>
+            <a:noFill/>
+          </a:ln>
+        </p:spPr>
+        <p:style>
+          <a:lnRef idx="1">
+            <a:schemeClr val="accent1"/>
+          </a:lnRef>
+          <a:fillRef idx="3">
+            <a:schemeClr val="accent1"/>
+          </a:fillRef>
+          <a:effectRef idx="2">
+            <a:schemeClr val="accent1"/>
+          </a:effectRef>
+          <a:fontRef idx="minor">
+            <a:schemeClr val="lt1"/>
+          </a:fontRef>
+        </p:style>
+        <p:txBody>
+          <a:bodyPr rtlCol="0" anchor="ctr"/>
+          <a:lstStyle/>
+          <a:p>
+            <a:pPr algn="ctr"/>
+          </a:p>
+        </p:txBody>
+      </p:sp>
+      <p:sp>
+        <p:nvSpPr>
+          <p:cNvPr id="13" name="TextBox 12"/>
+          <p:cNvSpPr txBox="1"/>
+          <p:nvPr/>
+        </p:nvSpPr>
+        <p:spPr>
+          <a:xfrm>
+            <a:off x="777240" y="3831336"/>
+            <a:ext cx="10774375" cy="822959"/>
+          </a:xfrm>
+          <a:prstGeom prst="rect">
+            <a:avLst/>
+          </a:prstGeom>
+          <a:noFill/>
+        </p:spPr>
+        <p:txBody>
+          <a:bodyPr wrap="square">
+            <a:spAutoFit/>
+          </a:bodyPr>
+          <a:lstStyle/>
+          <a:p>
+            <a:r>
+              <a:rPr sz="1200" b="1" i="0">
+                <a:solidFill>
+                  <a:srgbClr val="A02030"/>
+                </a:solidFill>
+                <a:latin typeface="Calibri"/>
+              </a:rPr>
+              <a:t>Atención</a:t>
+            </a:r>
+          </a:p>
+          <a:p>
+            <a:pPr>
+              <a:spcBef>
+                <a:spcPts val="400"/>
+              </a:spcBef>
+            </a:pPr>
+            <a:r>
+              <a:rPr sz="1400" b="0" i="0">
+                <a:solidFill>
+                  <a:srgbClr val="333333"/>
+                </a:solidFill>
+                <a:latin typeface="Calibri"/>
+              </a:rPr>
+              <a:t>Entrega del taller, si el docente lo asigna · en la fecha que indique el docente.</a:t>
+            </a:r>
+          </a:p>
+        </p:txBody>
+      </p:sp>
+      <p:sp>
+        <p:nvSpPr>
+          <p:cNvPr id="14" name="TextBox 13"/>
+          <p:cNvSpPr txBox="1"/>
+          <p:nvPr/>
+        </p:nvSpPr>
+        <p:spPr>
+          <a:xfrm>
+            <a:off x="11185855" y="6473952"/>
+            <a:ext cx="640080" cy="274320"/>
+          </a:xfrm>
+          <a:prstGeom prst="rect">
+            <a:avLst/>
+          </a:prstGeom>
+          <a:noFill/>
+        </p:spPr>
+        <p:txBody>
+          <a:bodyPr wrap="square">
+            <a:spAutoFit/>
+          </a:bodyPr>
+          <a:lstStyle/>
+          <a:p>
+            <a:pPr algn="r"/>
+            <a:r>
+              <a:rPr sz="1100" b="0" i="0">
+                <a:solidFill>
+                  <a:srgbClr val="666666"/>
+                </a:solidFill>
+                <a:latin typeface="Calibri"/>
+              </a:rPr>
+              <a:t>16</a:t>
+            </a:r>
+          </a:p>
+        </p:txBody>
+      </p:sp>
+    </p:spTree>
+  </p:cSld>
+  <p:clrMapOvr>
+    <a:masterClrMapping/>
+  </p:clrMapOvr>
+</p:sld>
+</file>
+
+<file path=ppt/slides/slide17.xml><?xml version="1.0" encoding="utf-8"?>
+<p:sld xmlns:a="http://schemas.openxmlformats.org/drawingml/2006/main" xmlns:p="http://schemas.openxmlformats.org/presentationml/2006/main" xmlns:r="http://schemas.openxmlformats.org/officeDocument/2006/relationships">
+  <p:cSld>
+    <p:bg>
+      <p:bgPr>
+        <a:solidFill>
+          <a:srgbClr val="FFFFFF"/>
+        </a:solidFill>
+        <a:effectLst/>
+      </p:bgPr>
+    </p:bg>
+    <p:spTree>
+      <p:nvGrpSpPr>
+        <p:cNvPr id="1" name=""/>
+        <p:cNvGrpSpPr/>
+        <p:nvPr/>
+      </p:nvGrpSpPr>
+      <p:grpSpPr/>
+      <p:sp>
+        <p:nvSpPr>
+          <p:cNvPr id="2" name="Rectangle 1"/>
+          <p:cNvSpPr/>
+          <p:nvPr/>
+        </p:nvSpPr>
+        <p:spPr>
+          <a:xfrm>
+            <a:off x="0" y="0"/>
             <a:ext cx="12191695" cy="164592"/>
           </a:xfrm>
           <a:prstGeom prst="rect">
@@ -6712,7 +8482,7 @@
                 </a:solidFill>
                 <a:latin typeface="Calibri"/>
               </a:rPr>
-              <a:t>Teoria Core</a:t>
+              <a:t>Hasta ahora los programas de VetCare corrian en linea recta: el main...</a:t>
             </a:r>
           </a:p>
         </p:txBody>
@@ -6751,7 +8521,7 @@
                 </a:solidFill>
                 <a:latin typeface="Calibri"/>
               </a:rPr>
-              <a:t>–   Hasta ahora los programas de VetCare corrian en linea recta: el main llamaba un metodo, ese metodo llamaba a otro…</a:t>
+              <a:t>–   Hasta ahora los programas de VetCare corrian en linea recta: el main llamaba un metodo, ese metodo llamaba a otro y el programa terminaba.</a:t>
             </a:r>
           </a:p>
           <a:p>
@@ -6767,7 +8537,7 @@
                 </a:solidFill>
                 <a:latin typeface="Calibri"/>
               </a:rPr>
-              <a:t>–   ActionListener es una interfaz de java.awt.event que tiene un solo metodo: void actionPerformed(ActionEvent e)</a:t>
+              <a:t>–   Una aplicacion con ventanas no funciona asi.</a:t>
             </a:r>
           </a:p>
           <a:p>
@@ -6783,7 +8553,7 @@
                 </a:solidFill>
                 <a:latin typeface="Calibri"/>
               </a:rPr>
-              <a:t>–   Separar la logica de la interfaz significa que la ventana no conoce reglas de negocio y que las reglas no saben…</a:t>
+              <a:t>–   Cuando usted hace setVisible(true), Swing arranca un hilo especial llamado EDT (Event Dispatch Thread) que se queda vivo esperando que el usuario haga algo: mover el mouse, escribir en un campo, oprimir un boton.</a:t>
             </a:r>
           </a:p>
           <a:p>
@@ -6799,7 +8569,7 @@
                 </a:solidFill>
                 <a:latin typeface="Calibri"/>
               </a:rPr>
-              <a:t>–   Vale la pena desarmar en camara lenta lo que ocurre en un click de 'Registrar mascota'. Primero la vista lee texto…</a:t>
+              <a:t>–   Cada una de esas acciones se convierte en un objeto de evento que entra a una cola, y Swing va sacando esos eventos uno por uno y le avisa al objeto que previamente dijo 'a mi me interesa ese boton'.</a:t>
             </a:r>
           </a:p>
           <a:p>
@@ -6815,7 +8585,23 @@
                 </a:solidFill>
                 <a:latin typeface="Calibri"/>
               </a:rPr>
-              <a:t>–   Dos detalles mas que le van a servir</a:t>
+              <a:t>–   Eso es programacion dirigida por eventos: usted ya no decide cuando corre su codigo; usted lo deja escrito y registrado, y quien decide cuando se ejecuta es la recepcionista de Huellitas el dia que oprima 'Registrar mascota'.</a:t>
+            </a:r>
+          </a:p>
+          <a:p>
+            <a:pPr>
+              <a:spcAft>
+                <a:spcPts val="800"/>
+              </a:spcAft>
+            </a:pPr>
+            <a:r>
+              <a:rPr sz="2000" b="0" i="0">
+                <a:solidFill>
+                  <a:srgbClr val="333333"/>
+                </a:solidFill>
+                <a:latin typeface="Calibri"/>
+              </a:rPr>
+              <a:t>–   Por eso el metodo que guarda la mascota nunca aparece llamado desde el main: aparece registrado, no llamado, y esa diferencia es la que hay que entender hoy.</a:t>
             </a:r>
           </a:p>
         </p:txBody>
@@ -6996,141 +8782,21 @@
                 </a:solidFill>
                 <a:latin typeface="Calibri"/>
               </a:rPr>
-              <a:t>El listener que solo lee, delega y muestra</a:t>
-            </a:r>
-          </a:p>
-        </p:txBody>
-      </p:sp>
-      <p:sp>
-        <p:nvSpPr>
-          <p:cNvPr id="5" name="Rounded Rectangle 4"/>
-          <p:cNvSpPr/>
-          <p:nvPr/>
-        </p:nvSpPr>
-        <p:spPr>
-          <a:xfrm>
-            <a:off x="457200" y="1261872"/>
-            <a:ext cx="11277295" cy="4773168"/>
-          </a:xfrm>
-          <a:prstGeom prst="roundRect">
-            <a:avLst>
-              <a:gd name="adj" fmla="val 12000"/>
-            </a:avLst>
-          </a:prstGeom>
-          <a:solidFill>
-            <a:srgbClr val="1E2A38"/>
-          </a:solidFill>
-          <a:ln>
-            <a:noFill/>
-          </a:ln>
-        </p:spPr>
-        <p:style>
-          <a:lnRef idx="1">
-            <a:schemeClr val="accent1"/>
-          </a:lnRef>
-          <a:fillRef idx="3">
-            <a:schemeClr val="accent1"/>
-          </a:fillRef>
-          <a:effectRef idx="2">
-            <a:schemeClr val="accent1"/>
-          </a:effectRef>
-          <a:fontRef idx="minor">
-            <a:schemeClr val="lt1"/>
-          </a:fontRef>
-        </p:style>
-        <p:txBody>
-          <a:bodyPr rtlCol="0" anchor="ctr"/>
-          <a:lstStyle/>
-          <a:p>
-            <a:pPr algn="ctr"/>
-          </a:p>
-        </p:txBody>
-      </p:sp>
-      <p:sp>
-        <p:nvSpPr>
-          <p:cNvPr id="6" name="Rectangle 5"/>
-          <p:cNvSpPr/>
-          <p:nvPr/>
-        </p:nvSpPr>
-        <p:spPr>
-          <a:xfrm>
-            <a:off x="457200" y="1261872"/>
-            <a:ext cx="11277295" cy="320040"/>
-          </a:xfrm>
-          <a:prstGeom prst="rect">
-            <a:avLst/>
-          </a:prstGeom>
-          <a:solidFill>
-            <a:srgbClr val="095292"/>
-          </a:solidFill>
-          <a:ln>
-            <a:noFill/>
-          </a:ln>
-        </p:spPr>
-        <p:style>
-          <a:lnRef idx="1">
-            <a:schemeClr val="accent1"/>
-          </a:lnRef>
-          <a:fillRef idx="3">
-            <a:schemeClr val="accent1"/>
-          </a:fillRef>
-          <a:effectRef idx="2">
-            <a:schemeClr val="accent1"/>
-          </a:effectRef>
-          <a:fontRef idx="minor">
-            <a:schemeClr val="lt1"/>
-          </a:fontRef>
-        </p:style>
-        <p:txBody>
-          <a:bodyPr rtlCol="0" anchor="ctr"/>
-          <a:lstStyle/>
-          <a:p>
-            <a:pPr algn="ctr"/>
-          </a:p>
-        </p:txBody>
-      </p:sp>
-      <p:sp>
-        <p:nvSpPr>
-          <p:cNvPr id="7" name="TextBox 6"/>
+              <a:t>ActionListener es una interfaz de java.awt.event que tiene un solo...</a:t>
+            </a:r>
+          </a:p>
+        </p:txBody>
+      </p:sp>
+      <p:sp>
+        <p:nvSpPr>
+          <p:cNvPr id="5" name="TextBox 4"/>
           <p:cNvSpPr txBox="1"/>
           <p:nvPr/>
         </p:nvSpPr>
         <p:spPr>
           <a:xfrm>
-            <a:off x="685800" y="1307592"/>
-            <a:ext cx="10820095" cy="256032"/>
-          </a:xfrm>
-          <a:prstGeom prst="rect">
-            <a:avLst/>
-          </a:prstGeom>
-          <a:noFill/>
-        </p:spPr>
-        <p:txBody>
-          <a:bodyPr wrap="square" anchor="ctr"/>
-          <a:lstStyle/>
-          <a:p>
-            <a:r>
-              <a:rPr sz="1000" b="1" i="0">
-                <a:solidFill>
-                  <a:srgbClr val="269CCB"/>
-                </a:solidFill>
-                <a:latin typeface="Calibri"/>
-              </a:rPr>
-              <a:t>● ● ●</a:t>
-            </a:r>
-          </a:p>
-        </p:txBody>
-      </p:sp>
-      <p:sp>
-        <p:nvSpPr>
-          <p:cNvPr id="8" name="TextBox 7"/>
-          <p:cNvSpPr txBox="1"/>
-          <p:nvPr/>
-        </p:nvSpPr>
-        <p:spPr>
-          <a:xfrm>
-            <a:off x="777240" y="1719072"/>
-            <a:ext cx="10637215" cy="4133087"/>
+            <a:off x="457200" y="1170432"/>
+            <a:ext cx="11277295" cy="5230368"/>
           </a:xfrm>
           <a:prstGeom prst="rect">
             <a:avLst/>
@@ -7145,315 +8811,136 @@
           <a:p>
             <a:pPr>
               <a:spcAft>
-                <a:spcPts val="342"/>
+                <a:spcPts val="800"/>
               </a:spcAft>
             </a:pPr>
             <a:r>
-              <a:rPr sz="1200" b="0" i="0">
-                <a:solidFill>
-                  <a:srgbClr val="FFFFFF"/>
-                </a:solidFill>
-                <a:latin typeface="Calibri"/>
-              </a:rPr>
-              <a:t>private final ControladorRegistro controlador =</a:t>
+              <a:rPr sz="1900" b="0" i="0">
+                <a:solidFill>
+                  <a:srgbClr val="333333"/>
+                </a:solidFill>
+                <a:latin typeface="Calibri"/>
+              </a:rPr>
+              <a:t>–   ActionListener es una interfaz de java.awt.event que tiene un solo metodo: void actionPerformed(ActionEvent e).</a:t>
             </a:r>
           </a:p>
           <a:p>
             <a:pPr>
               <a:spcAft>
-                <a:spcPts val="342"/>
+                <a:spcPts val="800"/>
               </a:spcAft>
             </a:pPr>
             <a:r>
-              <a:rPr sz="1200" b="0" i="0">
-                <a:solidFill>
-                  <a:srgbClr val="FFFFFF"/>
-                </a:solidFill>
-                <a:latin typeface="Calibri"/>
-              </a:rPr>
-              <a:t>        new ControladorRegistro(new RepositorioMascotas());  // ATRIBUTO: una sola vez</a:t>
+              <a:rPr sz="1900" b="0" i="0">
+                <a:solidFill>
+                  <a:srgbClr val="333333"/>
+                </a:solidFill>
+                <a:latin typeface="Calibri"/>
+              </a:rPr>
+              <a:t>–   Implementarla es firmar un contrato que dice 'yo se reaccionar a una accion'.</a:t>
             </a:r>
           </a:p>
           <a:p>
             <a:pPr>
               <a:spcAft>
-                <a:spcPts val="342"/>
+                <a:spcPts val="800"/>
               </a:spcAft>
             </a:pPr>
             <a:r>
-              <a:rPr sz="1200" b="0" i="0">
-                <a:solidFill>
-                  <a:srgbClr val="FFFFFF"/>
-                </a:solidFill>
-                <a:latin typeface="Calibri"/>
-              </a:rPr>
-              <a:t/>
+              <a:rPr sz="1900" b="0" i="0">
+                <a:solidFill>
+                  <a:srgbClr val="333333"/>
+                </a:solidFill>
+                <a:latin typeface="Calibri"/>
+              </a:rPr>
+              <a:t>–   El registro se hace con btnRegistrar.addActionListener(objetoQueEscucha): desde esa linea el boton guarda una referencia a su objeto y, cuando lo oprimen</a:t>
             </a:r>
           </a:p>
           <a:p>
             <a:pPr>
               <a:spcAft>
-                <a:spcPts val="342"/>
+                <a:spcPts val="800"/>
               </a:spcAft>
             </a:pPr>
             <a:r>
-              <a:rPr sz="1200" b="0" i="0">
-                <a:solidFill>
-                  <a:srgbClr val="FFFFFF"/>
-                </a:solidFill>
-                <a:latin typeface="Calibri"/>
-              </a:rPr>
-              <a:t>btnRegistrar.addActionListener(new ActionListener() {        // se registra, no se llama</a:t>
+              <a:rPr sz="1900" b="0" i="0">
+                <a:solidFill>
+                  <a:srgbClr val="333333"/>
+                </a:solidFill>
+                <a:latin typeface="Calibri"/>
+              </a:rPr>
+              <a:t>–   Swing invoca actionPerformed pasandole un ActionEvent con informacion del disparo (quien lo genero, en que instante, con que comando).</a:t>
             </a:r>
           </a:p>
           <a:p>
             <a:pPr>
               <a:spcAft>
-                <a:spcPts val="342"/>
+                <a:spcPts val="800"/>
               </a:spcAft>
             </a:pPr>
             <a:r>
-              <a:rPr sz="1200" b="0" i="0">
-                <a:solidFill>
-                  <a:srgbClr val="FFFFFF"/>
-                </a:solidFill>
-                <a:latin typeface="Calibri"/>
-              </a:rPr>
-              <a:t>    @Override</a:t>
+              <a:rPr sz="1900" b="0" i="0">
+                <a:solidFill>
+                  <a:srgbClr val="333333"/>
+                </a:solidFill>
+                <a:latin typeface="Calibri"/>
+              </a:rPr>
+              <a:t>–   Hay tres formas validas de escribirlo en Java y conviene mostrarlas todas: una clase aparte que implements ActionListener</a:t>
             </a:r>
           </a:p>
           <a:p>
             <a:pPr>
               <a:spcAft>
-                <a:spcPts val="342"/>
+                <a:spcPts val="800"/>
               </a:spcAft>
             </a:pPr>
             <a:r>
-              <a:rPr sz="1200" b="0" i="0">
-                <a:solidFill>
-                  <a:srgbClr val="FFFFFF"/>
-                </a:solidFill>
-                <a:latin typeface="Calibri"/>
-              </a:rPr>
-              <a:t>    public void actionPerformed(ActionEvent e) {             // lo invoca Swing, en el EDT</a:t>
+              <a:rPr sz="1900" b="0" i="0">
+                <a:solidFill>
+                  <a:srgbClr val="333333"/>
+                </a:solidFill>
+                <a:latin typeface="Calibri"/>
+              </a:rPr>
+              <a:t>–   Una clase anonima escrita ahi mismo con new ActionListener() {... }, o una expresion lambda e -&gt; registrar() si el proyecto esta en Java 8 o superior.</a:t>
             </a:r>
           </a:p>
           <a:p>
             <a:pPr>
               <a:spcAft>
-                <a:spcPts val="342"/>
+                <a:spcPts val="800"/>
               </a:spcAft>
             </a:pPr>
             <a:r>
-              <a:rPr sz="1200" b="0" i="0">
-                <a:solidFill>
-                  <a:srgbClr val="FFFFFF"/>
-                </a:solidFill>
-                <a:latin typeface="Calibri"/>
-              </a:rPr>
-              <a:t>        try {</a:t>
+              <a:rPr sz="1900" b="0" i="0">
+                <a:solidFill>
+                  <a:srgbClr val="333333"/>
+                </a:solidFill>
+                <a:latin typeface="Calibri"/>
+              </a:rPr>
+              <a:t>–   Un detalle practico que confunde a medio salon: la lambda solo sirve si la interfaz tiene UN solo metodo abstracto, que es el caso de ActionListener.</a:t>
             </a:r>
           </a:p>
           <a:p>
             <a:pPr>
               <a:spcAft>
-                <a:spcPts val="342"/>
+                <a:spcPts val="800"/>
               </a:spcAft>
             </a:pPr>
             <a:r>
-              <a:rPr sz="1200" b="0" i="0">
-                <a:solidFill>
-                  <a:srgbClr val="FFFFFF"/>
-                </a:solidFill>
-                <a:latin typeface="Calibri"/>
-              </a:rPr>
-              <a:t>            Mascota m = controlador.registrarMascota(        // la regla vive afuera</a:t>
-            </a:r>
-          </a:p>
-          <a:p>
-            <a:pPr>
-              <a:spcAft>
-                <a:spcPts val="342"/>
-              </a:spcAft>
-            </a:pPr>
-            <a:r>
-              <a:rPr sz="1200" b="0" i="0">
-                <a:solidFill>
-                  <a:srgbClr val="FFFFFF"/>
-                </a:solidFill>
-                <a:latin typeface="Calibri"/>
-              </a:rPr>
-              <a:t>                    txtId.getText(), txtNombre.getText(),</a:t>
-            </a:r>
-          </a:p>
-          <a:p>
-            <a:pPr>
-              <a:spcAft>
-                <a:spcPts val="342"/>
-              </a:spcAft>
-            </a:pPr>
-            <a:r>
-              <a:rPr sz="1200" b="0" i="0">
-                <a:solidFill>
-                  <a:srgbClr val="FFFFFF"/>
-                </a:solidFill>
-                <a:latin typeface="Calibri"/>
-              </a:rPr>
-              <a:t>                    txtEspecie.getText(), txtEdad.getText());</a:t>
-            </a:r>
-          </a:p>
-          <a:p>
-            <a:pPr>
-              <a:spcAft>
-                <a:spcPts val="342"/>
-              </a:spcAft>
-            </a:pPr>
-            <a:r>
-              <a:rPr sz="1200" b="0" i="0">
-                <a:solidFill>
-                  <a:srgbClr val="FFFFFF"/>
-                </a:solidFill>
-                <a:latin typeface="Calibri"/>
-              </a:rPr>
-              <a:t>            areaListado.setText(controlador.reporteListado());</a:t>
-            </a:r>
-          </a:p>
-          <a:p>
-            <a:pPr>
-              <a:spcAft>
-                <a:spcPts val="342"/>
-              </a:spcAft>
-            </a:pPr>
-            <a:r>
-              <a:rPr sz="1200" b="0" i="0">
-                <a:solidFill>
-                  <a:srgbClr val="FFFFFF"/>
-                </a:solidFill>
-                <a:latin typeface="Calibri"/>
-              </a:rPr>
-              <a:t>            JOptionPane.showMessageDialog(null, "Guardada: " + m.getNombre());</a:t>
-            </a:r>
-          </a:p>
-          <a:p>
-            <a:pPr>
-              <a:spcAft>
-                <a:spcPts val="342"/>
-              </a:spcAft>
-            </a:pPr>
-            <a:r>
-              <a:rPr sz="1200" b="0" i="0">
-                <a:solidFill>
-                  <a:srgbClr val="FFFFFF"/>
-                </a:solidFill>
-                <a:latin typeface="Calibri"/>
-              </a:rPr>
-              <a:t>        } catch (IllegalArgumentException ex) {              // el error no tumba la app</a:t>
-            </a:r>
-          </a:p>
-          <a:p>
-            <a:pPr>
-              <a:spcAft>
-                <a:spcPts val="342"/>
-              </a:spcAft>
-            </a:pPr>
-            <a:r>
-              <a:rPr sz="1200" b="0" i="0">
-                <a:solidFill>
-                  <a:srgbClr val="FFFFFF"/>
-                </a:solidFill>
-                <a:latin typeface="Calibri"/>
-              </a:rPr>
-              <a:t>            JOptionPane.showMessageDialog(null, ex.getMessage());</a:t>
-            </a:r>
-          </a:p>
-          <a:p>
-            <a:pPr>
-              <a:spcAft>
-                <a:spcPts val="342"/>
-              </a:spcAft>
-            </a:pPr>
-            <a:r>
-              <a:rPr sz="1200" b="0" i="0">
-                <a:solidFill>
-                  <a:srgbClr val="FFFFFF"/>
-                </a:solidFill>
-                <a:latin typeface="Calibri"/>
-              </a:rPr>
-              <a:t>        }</a:t>
-            </a:r>
-          </a:p>
-          <a:p>
-            <a:pPr>
-              <a:spcAft>
-                <a:spcPts val="342"/>
-              </a:spcAft>
-            </a:pPr>
-            <a:r>
-              <a:rPr sz="1200" b="0" i="0">
-                <a:solidFill>
-                  <a:srgbClr val="FFFFFF"/>
-                </a:solidFill>
-                <a:latin typeface="Calibri"/>
-              </a:rPr>
-              <a:t>    }</a:t>
-            </a:r>
-          </a:p>
-          <a:p>
-            <a:pPr>
-              <a:spcAft>
-                <a:spcPts val="342"/>
-              </a:spcAft>
-            </a:pPr>
-            <a:r>
-              <a:rPr sz="1200" b="0" i="0">
-                <a:solidFill>
-                  <a:srgbClr val="FFFFFF"/>
-                </a:solidFill>
-                <a:latin typeface="Calibri"/>
-              </a:rPr>
-              <a:t>});</a:t>
-            </a:r>
-          </a:p>
-        </p:txBody>
-      </p:sp>
-      <p:sp>
-        <p:nvSpPr>
-          <p:cNvPr id="9" name="TextBox 8"/>
-          <p:cNvSpPr txBox="1"/>
-          <p:nvPr/>
-        </p:nvSpPr>
-        <p:spPr>
-          <a:xfrm>
-            <a:off x="457200" y="6080760"/>
-            <a:ext cx="11277295" cy="320040"/>
-          </a:xfrm>
-          <a:prstGeom prst="rect">
-            <a:avLst/>
-          </a:prstGeom>
-          <a:noFill/>
-        </p:spPr>
-        <p:txBody>
-          <a:bodyPr wrap="square">
-            <a:spAutoFit/>
-          </a:bodyPr>
-          <a:lstStyle/>
-          <a:p>
-            <a:pPr algn="ctr"/>
-            <a:r>
-              <a:rPr sz="1200" b="0" i="1">
-                <a:solidFill>
-                  <a:srgbClr val="666666"/>
-                </a:solidFill>
-                <a:latin typeface="Calibri"/>
-              </a:rPr>
-              <a:t>El boton no sabe reglas: lee texto, delega en el controlador y muestra el resultado o el error.</a:t>
-            </a:r>
-          </a:p>
-        </p:txBody>
-      </p:sp>
-      <p:sp>
-        <p:nvSpPr>
-          <p:cNvPr id="10" name="TextBox 9"/>
+              <a:rPr sz="1900" b="0" i="0">
+                <a:solidFill>
+                  <a:srgbClr val="333333"/>
+                </a:solidFill>
+                <a:latin typeface="Calibri"/>
+              </a:rPr>
+              <a:t>–   Con una de dos metodos no compila, y el mensaje del editor no lo dice con esas palabras y ahi adentro va su llamada.</a:t>
+            </a:r>
+          </a:p>
+        </p:txBody>
+      </p:sp>
+      <p:sp>
+        <p:nvSpPr>
+          <p:cNvPr id="6" name="TextBox 5"/>
           <p:cNvSpPr txBox="1"/>
           <p:nvPr/>
         </p:nvSpPr>
@@ -7627,7 +9114,7 @@
                 </a:solidFill>
                 <a:latin typeface="Calibri"/>
               </a:rPr>
-              <a:t>Demo del dia</a:t>
+              <a:t>Separar la logica de la interfaz significa que la ventana no conoce...</a:t>
             </a:r>
           </a:p>
         </p:txBody>
@@ -7666,25 +9153,7 @@
                 </a:solidFill>
                 <a:latin typeface="Calibri"/>
               </a:rPr>
-              <a:t>–   </a:t>
-            </a:r>
-            <a:r>
-              <a:rPr sz="2000" b="1" i="0">
-                <a:solidFill>
-                  <a:srgbClr val="333333"/>
-                </a:solidFill>
-                <a:latin typeface="Calibri"/>
-              </a:rPr>
-              <a:t>Herramienta:</a:t>
-            </a:r>
-            <a:r>
-              <a:rPr sz="2000" b="0" i="0">
-                <a:solidFill>
-                  <a:srgbClr val="333333"/>
-                </a:solidFill>
-                <a:latin typeface="Calibri"/>
-              </a:rPr>
-              <a:t> Visual Studio Code (Java)</a:t>
+              <a:t>–   Separar la logica de la interfaz significa que la ventana no conoce reglas de negocio y que las reglas no saben que existe una ventana.</a:t>
             </a:r>
           </a:p>
           <a:p>
@@ -7700,25 +9169,7 @@
                 </a:solidFill>
                 <a:latin typeface="Calibri"/>
               </a:rPr>
-              <a:t>–   </a:t>
-            </a:r>
-            <a:r>
-              <a:rPr sz="2000" b="1" i="0">
-                <a:solidFill>
-                  <a:srgbClr val="333333"/>
-                </a:solidFill>
-                <a:latin typeface="Calibri"/>
-              </a:rPr>
-              <a:t>Demo:</a:t>
-            </a:r>
-            <a:r>
-              <a:rPr sz="2000" b="0" i="0">
-                <a:solidFill>
-                  <a:srgbClr val="333333"/>
-                </a:solidFill>
-                <a:latin typeface="Calibri"/>
-              </a:rPr>
-              <a:t> El docente oprime el boton de la ventana ya corriendo y muestra en vivo como la mascota pasa del formulario al ArrayList, incluyendo que pasa cuando la edad se escribe como texto.</a:t>
+              <a:t>–   En VetCare vamos a tener tres capas claras: el modelo (Mascota, Dueno, Cita), que solo guarda datos y comportamiento propio</a:t>
             </a:r>
           </a:p>
           <a:p>
@@ -7734,7 +9185,71 @@
                 </a:solidFill>
                 <a:latin typeface="Calibri"/>
               </a:rPr>
-              <a:t>–   Mismo dominio VetCare — no otro ejemplo.</a:t>
+              <a:t>–   El servicio o controlador (ControladorRegistro, RepositorioMascotas), donde viven las validaciones, la busqueda por ID y el ArrayList; y la vista (VentanaRegistroMascota), que unicamente pinta campos, lee texto y muestra mensajes.</a:t>
+            </a:r>
+          </a:p>
+          <a:p>
+            <a:pPr>
+              <a:spcAft>
+                <a:spcPts val="800"/>
+              </a:spcAft>
+            </a:pPr>
+            <a:r>
+              <a:rPr sz="2000" b="0" i="0">
+                <a:solidFill>
+                  <a:srgbClr val="333333"/>
+                </a:solidFill>
+                <a:latin typeface="Calibri"/>
+              </a:rPr>
+              <a:t>–   La prueba acida es esta pregunta: si mañana Huellitas pide la misma funcionalidad en consola, o migramos a JavaFX, cuanto codigo hay que reescribir?</a:t>
+            </a:r>
+          </a:p>
+          <a:p>
+            <a:pPr>
+              <a:spcAft>
+                <a:spcPts val="800"/>
+              </a:spcAft>
+            </a:pPr>
+            <a:r>
+              <a:rPr sz="2000" b="0" i="0">
+                <a:solidFill>
+                  <a:srgbClr val="333333"/>
+                </a:solidFill>
+                <a:latin typeface="Calibri"/>
+              </a:rPr>
+              <a:t>–   Si la respuesta es 'solamente la ventana', el diseño esta bien.</a:t>
+            </a:r>
+          </a:p>
+          <a:p>
+            <a:pPr>
+              <a:spcAft>
+                <a:spcPts val="800"/>
+              </a:spcAft>
+            </a:pPr>
+            <a:r>
+              <a:rPr sz="2000" b="0" i="0">
+                <a:solidFill>
+                  <a:srgbClr val="333333"/>
+                </a:solidFill>
+                <a:latin typeface="Calibri"/>
+              </a:rPr>
+              <a:t>–   Si toca reescribir todo porque la conversion de la edad estaba adentro del boton, el diseño esta mal.</a:t>
+            </a:r>
+          </a:p>
+          <a:p>
+            <a:pPr>
+              <a:spcAft>
+                <a:spcPts val="800"/>
+              </a:spcAft>
+            </a:pPr>
+            <a:r>
+              <a:rPr sz="2000" b="0" i="0">
+                <a:solidFill>
+                  <a:srgbClr val="333333"/>
+                </a:solidFill>
+                <a:latin typeface="Calibri"/>
+              </a:rPr>
+              <a:t>–   Y hay una razon adicional que se vuelve evidente en la clase 8: a un ControladorRegistro se le pueden hacer pruebas automaticas; a un boton no se le puede.</a:t>
             </a:r>
           </a:p>
         </p:txBody>
@@ -7915,7 +9430,7 @@
                 </a:solidFill>
                 <a:latin typeface="Calibri"/>
               </a:rPr>
-              <a:t>Taller PI — por que importa</a:t>
+              <a:t>Vale la pena desarmar en camara lenta lo que ocurre en un click de...</a:t>
             </a:r>
           </a:p>
         </p:txBody>
@@ -7954,25 +9469,7 @@
                 </a:solidFill>
                 <a:latin typeface="Calibri"/>
               </a:rPr>
-              <a:t>–   </a:t>
-            </a:r>
-            <a:r>
-              <a:rPr sz="2000" b="1" i="0">
-                <a:solidFill>
-                  <a:srgbClr val="333333"/>
-                </a:solidFill>
-                <a:latin typeface="Calibri"/>
-              </a:rPr>
-              <a:t>Por que importa al PI:</a:t>
-            </a:r>
-            <a:r>
-              <a:rPr sz="2000" b="0" i="0">
-                <a:solidFill>
-                  <a:srgbClr val="333333"/>
-                </a:solidFill>
-                <a:latin typeface="Calibri"/>
-              </a:rPr>
-              <a:t> el PI exige interfaz grafica y manejo de errores con try-catch; hoy es la clase donde la ventana deja de ser un dibujo bonito y empieza a mover datos reales de la coleccion de mascotas.</a:t>
+              <a:t>–   Vale la pena desarmar en camara lenta lo que ocurre en un click de 'Registrar mascota'.</a:t>
             </a:r>
           </a:p>
           <a:p>
@@ -7988,7 +9485,7 @@
                 </a:solidFill>
                 <a:latin typeface="Calibri"/>
               </a:rPr>
-              <a:t>–   La separacion vista-controlador que hacemos hoy es la que permitira, en la clase 8, escribir pruebas automaticas sin abrir una sola ventana.</a:t>
+              <a:t>–   Primero la vista lee texto crudo: txtId.getText(), txtNombre.getText(), txtEdad.getText(); todo lo que sale de un JTextField es String, incluida la edad.</a:t>
             </a:r>
           </a:p>
           <a:p>
@@ -8004,7 +9501,71 @@
                 </a:solidFill>
                 <a:latin typeface="Calibri"/>
               </a:rPr>
-              <a:t>–   Todo lo que falta del PI (agendar cita, buscar expediente por ID, guardar en archivo) repite exactamente el mismo ciclo: leer, validar, delegar, refrescar.</a:t>
+              <a:t>–   Segundo, ese texto viaja al controlador, que hace el trabajo sucio: recorta espacios con trim(), rechaza campos vacios</a:t>
+            </a:r>
+          </a:p>
+          <a:p>
+            <a:pPr>
+              <a:spcAft>
+                <a:spcPts val="800"/>
+              </a:spcAft>
+            </a:pPr>
+            <a:r>
+              <a:rPr sz="2000" b="0" i="0">
+                <a:solidFill>
+                  <a:srgbClr val="333333"/>
+                </a:solidFill>
+                <a:latin typeface="Calibri"/>
+              </a:rPr>
+              <a:t>–   Convierte la edad con Integer.parseInt dentro de un try-catch porque si la auxiliar escribio 'tres' salta NumberFormatException, y le pregunta al repositorio si ese ID ya existe.</a:t>
+            </a:r>
+          </a:p>
+          <a:p>
+            <a:pPr>
+              <a:spcAft>
+                <a:spcPts val="800"/>
+              </a:spcAft>
+            </a:pPr>
+            <a:r>
+              <a:rPr sz="2000" b="0" i="0">
+                <a:solidFill>
+                  <a:srgbClr val="333333"/>
+                </a:solidFill>
+                <a:latin typeface="Calibri"/>
+              </a:rPr>
+              <a:t>–   Tercero, si algo esta mal el controlador lanza una excepcion con un mensaje entendible para un humano ('La edad debe ser un numero entero'); si todo esta bien, construye el objeto Mascota y lo agrega al ArrayList.</a:t>
+            </a:r>
+          </a:p>
+          <a:p>
+            <a:pPr>
+              <a:spcAft>
+                <a:spcPts val="800"/>
+              </a:spcAft>
+            </a:pPr>
+            <a:r>
+              <a:rPr sz="2000" b="0" i="0">
+                <a:solidFill>
+                  <a:srgbClr val="333333"/>
+                </a:solidFill>
+                <a:latin typeface="Calibri"/>
+              </a:rPr>
+              <a:t>–   Cuarto, la vista atrapa esa excepcion y la convierte en un JOptionPane, o, si no hubo error, limpia los campos y refresca el area de listado.</a:t>
+            </a:r>
+          </a:p>
+          <a:p>
+            <a:pPr>
+              <a:spcAft>
+                <a:spcPts val="800"/>
+              </a:spcAft>
+            </a:pPr>
+            <a:r>
+              <a:rPr sz="2000" b="0" i="0">
+                <a:solidFill>
+                  <a:srgbClr val="333333"/>
+                </a:solidFill>
+                <a:latin typeface="Calibri"/>
+              </a:rPr>
+              <a:t>–   Ese ciclo leer-validar-delegar-refrescar es exactamente el mismo que vamos a repetir despues para agendar citas, para buscar expedientes y para guardar en archivo.</a:t>
             </a:r>
           </a:p>
         </p:txBody>
@@ -8185,7 +9746,7 @@
                 </a:solidFill>
                 <a:latin typeface="Calibri"/>
               </a:rPr>
-              <a:t>Taller PI — punto de partida</a:t>
+              <a:t>Dos detalles mas que le van a servir</a:t>
             </a:r>
           </a:p>
         </p:txBody>
@@ -8224,7 +9785,7 @@
                 </a:solidFill>
                 <a:latin typeface="Calibri"/>
               </a:rPr>
-              <a:t>–   El proyecto VetCare ya tiene la clase Mascota (id, nombre, especie, edad) y un ArrayList que hasta hoy se llenaba con datos quemados dentro del main.</a:t>
+              <a:t>–   Dos detalles mas que le van a servir.</a:t>
             </a:r>
           </a:p>
           <a:p>
@@ -8240,7 +9801,7 @@
                 </a:solidFill>
                 <a:latin typeface="Calibri"/>
               </a:rPr>
-              <a:t>–   La ventana de registro ya existe pero el boton 'Registrar mascota' no hace nada: se oprime y la pantalla queda igualita.</a:t>
+              <a:t>–   El ActionEvent trae e.getSource(), que devuelve el componente que disparo el evento; eso permite que un mismo listener atienda varios botones y decida con un if (e.getSource() == btnBuscar).</a:t>
             </a:r>
           </a:p>
           <a:p>
@@ -8256,7 +9817,87 @@
                 </a:solidFill>
                 <a:latin typeface="Calibri"/>
               </a:rPr>
-              <a:t>–   Datos de partida para las pruebas de hoy: la clinica Huellitas necesita registrar a M-001 Kira (perro, 4), M-002 Michi (gato, 2) y M-003 Rocky (perro, 7).</a:t>
+              <a:t>–   Es comodo, pero uselo con cabeza: si el metodo se llena de ifs, es mas limpio un listener por boton.</a:t>
+            </a:r>
+          </a:p>
+          <a:p>
+            <a:pPr>
+              <a:spcAft>
+                <a:spcPts val="800"/>
+              </a:spcAft>
+            </a:pPr>
+            <a:r>
+              <a:rPr sz="2000" b="0" i="0">
+                <a:solidFill>
+                  <a:srgbClr val="333333"/>
+                </a:solidFill>
+                <a:latin typeface="Calibri"/>
+              </a:rPr>
+              <a:t>–   Ademas de ActionListener existen otros escuchadores que ya vamos a necesitar en VetCare: ItemListener para el JComboBox de especie, ListSelectionListener para cuando el usuario selecciona una fila del listado de mascotas</a:t>
+            </a:r>
+          </a:p>
+          <a:p>
+            <a:pPr>
+              <a:spcAft>
+                <a:spcPts val="800"/>
+              </a:spcAft>
+            </a:pPr>
+            <a:r>
+              <a:rPr sz="2000" b="0" i="0">
+                <a:solidFill>
+                  <a:srgbClr val="333333"/>
+                </a:solidFill>
+                <a:latin typeface="Calibri"/>
+              </a:rPr>
+              <a:t>–   Y WindowListener para preguntar 'desea guardar antes de salir' cuando lleguemos a persistencia.</a:t>
+            </a:r>
+          </a:p>
+          <a:p>
+            <a:pPr>
+              <a:spcAft>
+                <a:spcPts val="800"/>
+              </a:spcAft>
+            </a:pPr>
+            <a:r>
+              <a:rPr sz="2000" b="0" i="0">
+                <a:solidFill>
+                  <a:srgbClr val="333333"/>
+                </a:solidFill>
+                <a:latin typeface="Calibri"/>
+              </a:rPr>
+              <a:t>–   Y una advertencia de rendimiento: todo lo que usted escriba dentro de actionPerformed corre en el EDT, el mismo hilo que dibuja la ventana; si ahi mete una tarea larga, la interfaz se congela y el usuario cree que el programa se colgo.</a:t>
+            </a:r>
+          </a:p>
+          <a:p>
+            <a:pPr>
+              <a:spcAft>
+                <a:spcPts val="800"/>
+              </a:spcAft>
+            </a:pPr>
+            <a:r>
+              <a:rPr sz="2000" b="0" i="0">
+                <a:solidFill>
+                  <a:srgbClr val="333333"/>
+                </a:solidFill>
+                <a:latin typeface="Calibri"/>
+              </a:rPr>
+              <a:t>–   Para eso existe SwingWorker.</a:t>
+            </a:r>
+          </a:p>
+          <a:p>
+            <a:pPr>
+              <a:spcAft>
+                <a:spcPts val="800"/>
+              </a:spcAft>
+            </a:pPr>
+            <a:r>
+              <a:rPr sz="2000" b="0" i="0">
+                <a:solidFill>
+                  <a:srgbClr val="333333"/>
+                </a:solidFill>
+                <a:latin typeface="Calibri"/>
+              </a:rPr>
+              <a:t>–   Por ahora la regla es simple: listeners cortos que solo leen, delegan y muestran.</a:t>
             </a:r>
           </a:p>
         </p:txBody>
@@ -8437,7 +10078,7 @@
                 </a:solidFill>
                 <a:latin typeface="Calibri"/>
               </a:rPr>
-              <a:t>Taller PI — pasos guiados</a:t>
+              <a:t>El listener que solo lee, delega y muestra</a:t>
             </a:r>
           </a:p>
         </p:txBody>
@@ -8450,8 +10091,8 @@
         </p:nvSpPr>
         <p:spPr>
           <a:xfrm>
-            <a:off x="457200" y="1234440"/>
-            <a:ext cx="11277295" cy="950976"/>
+            <a:off x="457200" y="1261872"/>
+            <a:ext cx="11277295" cy="4773168"/>
           </a:xfrm>
           <a:prstGeom prst="roundRect">
             <a:avLst>
@@ -8459,7 +10100,7 @@
             </a:avLst>
           </a:prstGeom>
           <a:solidFill>
-            <a:srgbClr val="F2F2F2"/>
+            <a:srgbClr val="1E2A38"/>
           </a:solidFill>
           <a:ln>
             <a:noFill/>
@@ -8489,19 +10130,17 @@
       </p:sp>
       <p:sp>
         <p:nvSpPr>
-          <p:cNvPr id="6" name="Rounded Rectangle 5"/>
+          <p:cNvPr id="6" name="Rectangle 5"/>
           <p:cNvSpPr/>
           <p:nvPr/>
         </p:nvSpPr>
         <p:spPr>
           <a:xfrm>
-            <a:off x="594360" y="1490472"/>
-            <a:ext cx="438912" cy="438912"/>
-          </a:xfrm>
-          <a:prstGeom prst="roundRect">
-            <a:avLst>
-              <a:gd name="adj" fmla="val 12000"/>
-            </a:avLst>
+            <a:off x="457200" y="1261872"/>
+            <a:ext cx="11277295" cy="320040"/>
+          </a:xfrm>
+          <a:prstGeom prst="rect">
+            <a:avLst/>
           </a:prstGeom>
           <a:solidFill>
             <a:srgbClr val="095292"/>
@@ -8540,8 +10179,8 @@
         </p:nvSpPr>
         <p:spPr>
           <a:xfrm>
-            <a:off x="594360" y="1490472"/>
-            <a:ext cx="438912" cy="438912"/>
+            <a:off x="685800" y="1307592"/>
+            <a:ext cx="10820095" cy="256032"/>
           </a:xfrm>
           <a:prstGeom prst="rect">
             <a:avLst/>
@@ -8552,15 +10191,14 @@
           <a:bodyPr wrap="square" anchor="ctr"/>
           <a:lstStyle/>
           <a:p>
-            <a:pPr algn="ctr"/>
-            <a:r>
-              <a:rPr sz="1600" b="1" i="0">
-                <a:solidFill>
-                  <a:srgbClr val="FFFFFF"/>
-                </a:solidFill>
-                <a:latin typeface="Calibri"/>
-              </a:rPr>
-              <a:t>1</a:t>
+            <a:r>
+              <a:rPr sz="1000" b="1" i="0">
+                <a:solidFill>
+                  <a:srgbClr val="269CCB"/>
+                </a:solidFill>
+                <a:latin typeface="Calibri"/>
+              </a:rPr>
+              <a:t>● ● ●</a:t>
             </a:r>
           </a:p>
         </p:txBody>
@@ -8573,8 +10211,8 @@
         </p:nvSpPr>
         <p:spPr>
           <a:xfrm>
-            <a:off x="1188720" y="1325880"/>
-            <a:ext cx="10271455" cy="786384"/>
+            <a:off x="777240" y="1719072"/>
+            <a:ext cx="10637215" cy="4133087"/>
           </a:xfrm>
           <a:prstGeom prst="rect">
             <a:avLst/>
@@ -8582,644 +10220,322 @@
           <a:noFill/>
         </p:spPr>
         <p:txBody>
-          <a:bodyPr wrap="square" anchor="ctr"/>
-          <a:lstStyle/>
-          <a:p>
-            <a:r>
-              <a:rPr sz="1400" b="1" i="0">
-                <a:solidFill>
-                  <a:srgbClr val="095292"/>
-                </a:solidFill>
-                <a:latin typeface="Calibri"/>
-              </a:rPr>
-              <a:t>Cree el paquete vetcare.vista y dentro la clase VentanaRegistroMascota que extiende JFrame, con los campos ID, nombre, especie y edad, el boton 'Registrar mascota' y un JTextArea de solo lectura para el listado; ejecutela y verifique que abre centrada y que cierra con EXIT_ON_CLOSE.</a:t>
-            </a:r>
-          </a:p>
-        </p:txBody>
-      </p:sp>
-      <p:sp>
-        <p:nvSpPr>
-          <p:cNvPr id="9" name="Rounded Rectangle 8"/>
-          <p:cNvSpPr/>
-          <p:nvPr/>
-        </p:nvSpPr>
-        <p:spPr>
-          <a:xfrm>
-            <a:off x="457200" y="2276856"/>
-            <a:ext cx="11277295" cy="950976"/>
-          </a:xfrm>
-          <a:prstGeom prst="roundRect">
-            <a:avLst>
-              <a:gd name="adj" fmla="val 12000"/>
-            </a:avLst>
-          </a:prstGeom>
-          <a:solidFill>
-            <a:srgbClr val="E8F4FA"/>
-          </a:solidFill>
-          <a:ln>
-            <a:noFill/>
-          </a:ln>
-        </p:spPr>
-        <p:style>
-          <a:lnRef idx="1">
-            <a:schemeClr val="accent1"/>
-          </a:lnRef>
-          <a:fillRef idx="3">
-            <a:schemeClr val="accent1"/>
-          </a:fillRef>
-          <a:effectRef idx="2">
-            <a:schemeClr val="accent1"/>
-          </a:effectRef>
-          <a:fontRef idx="minor">
-            <a:schemeClr val="lt1"/>
-          </a:fontRef>
-        </p:style>
-        <p:txBody>
-          <a:bodyPr rtlCol="0" anchor="ctr"/>
+          <a:bodyPr wrap="square">
+            <a:spAutoFit/>
+          </a:bodyPr>
+          <a:lstStyle/>
+          <a:p>
+            <a:pPr>
+              <a:spcAft>
+                <a:spcPts val="342"/>
+              </a:spcAft>
+            </a:pPr>
+            <a:r>
+              <a:rPr sz="1200" b="0" i="0">
+                <a:solidFill>
+                  <a:srgbClr val="FFFFFF"/>
+                </a:solidFill>
+                <a:latin typeface="Calibri"/>
+              </a:rPr>
+              <a:t>private final ControladorRegistro controlador =</a:t>
+            </a:r>
+          </a:p>
+          <a:p>
+            <a:pPr>
+              <a:spcAft>
+                <a:spcPts val="342"/>
+              </a:spcAft>
+            </a:pPr>
+            <a:r>
+              <a:rPr sz="1200" b="0" i="0">
+                <a:solidFill>
+                  <a:srgbClr val="FFFFFF"/>
+                </a:solidFill>
+                <a:latin typeface="Calibri"/>
+              </a:rPr>
+              <a:t>        new ControladorRegistro(new RepositorioMascotas());  // ATRIBUTO: una sola vez</a:t>
+            </a:r>
+          </a:p>
+          <a:p>
+            <a:pPr>
+              <a:spcAft>
+                <a:spcPts val="342"/>
+              </a:spcAft>
+            </a:pPr>
+            <a:r>
+              <a:rPr sz="1200" b="0" i="0">
+                <a:solidFill>
+                  <a:srgbClr val="FFFFFF"/>
+                </a:solidFill>
+                <a:latin typeface="Calibri"/>
+              </a:rPr>
+              <a:t/>
+            </a:r>
+          </a:p>
+          <a:p>
+            <a:pPr>
+              <a:spcAft>
+                <a:spcPts val="342"/>
+              </a:spcAft>
+            </a:pPr>
+            <a:r>
+              <a:rPr sz="1200" b="0" i="0">
+                <a:solidFill>
+                  <a:srgbClr val="FFFFFF"/>
+                </a:solidFill>
+                <a:latin typeface="Calibri"/>
+              </a:rPr>
+              <a:t>btnRegistrar.addActionListener(new ActionListener() {        // se registra, no se llama</a:t>
+            </a:r>
+          </a:p>
+          <a:p>
+            <a:pPr>
+              <a:spcAft>
+                <a:spcPts val="342"/>
+              </a:spcAft>
+            </a:pPr>
+            <a:r>
+              <a:rPr sz="1200" b="0" i="0">
+                <a:solidFill>
+                  <a:srgbClr val="FFFFFF"/>
+                </a:solidFill>
+                <a:latin typeface="Calibri"/>
+              </a:rPr>
+              <a:t>    @Override</a:t>
+            </a:r>
+          </a:p>
+          <a:p>
+            <a:pPr>
+              <a:spcAft>
+                <a:spcPts val="342"/>
+              </a:spcAft>
+            </a:pPr>
+            <a:r>
+              <a:rPr sz="1200" b="0" i="0">
+                <a:solidFill>
+                  <a:srgbClr val="FFFFFF"/>
+                </a:solidFill>
+                <a:latin typeface="Calibri"/>
+              </a:rPr>
+              <a:t>    public void actionPerformed(ActionEvent e) {             // lo invoca Swing, en el EDT</a:t>
+            </a:r>
+          </a:p>
+          <a:p>
+            <a:pPr>
+              <a:spcAft>
+                <a:spcPts val="342"/>
+              </a:spcAft>
+            </a:pPr>
+            <a:r>
+              <a:rPr sz="1200" b="0" i="0">
+                <a:solidFill>
+                  <a:srgbClr val="FFFFFF"/>
+                </a:solidFill>
+                <a:latin typeface="Calibri"/>
+              </a:rPr>
+              <a:t>        try {</a:t>
+            </a:r>
+          </a:p>
+          <a:p>
+            <a:pPr>
+              <a:spcAft>
+                <a:spcPts val="342"/>
+              </a:spcAft>
+            </a:pPr>
+            <a:r>
+              <a:rPr sz="1200" b="0" i="0">
+                <a:solidFill>
+                  <a:srgbClr val="FFFFFF"/>
+                </a:solidFill>
+                <a:latin typeface="Calibri"/>
+              </a:rPr>
+              <a:t>            Mascota m = controlador.registrarMascota(        // la regla vive afuera</a:t>
+            </a:r>
+          </a:p>
+          <a:p>
+            <a:pPr>
+              <a:spcAft>
+                <a:spcPts val="342"/>
+              </a:spcAft>
+            </a:pPr>
+            <a:r>
+              <a:rPr sz="1200" b="0" i="0">
+                <a:solidFill>
+                  <a:srgbClr val="FFFFFF"/>
+                </a:solidFill>
+                <a:latin typeface="Calibri"/>
+              </a:rPr>
+              <a:t>                    txtId.getText(), txtNombre.getText(),</a:t>
+            </a:r>
+          </a:p>
+          <a:p>
+            <a:pPr>
+              <a:spcAft>
+                <a:spcPts val="342"/>
+              </a:spcAft>
+            </a:pPr>
+            <a:r>
+              <a:rPr sz="1200" b="0" i="0">
+                <a:solidFill>
+                  <a:srgbClr val="FFFFFF"/>
+                </a:solidFill>
+                <a:latin typeface="Calibri"/>
+              </a:rPr>
+              <a:t>                    txtEspecie.getText(), txtEdad.getText());</a:t>
+            </a:r>
+          </a:p>
+          <a:p>
+            <a:pPr>
+              <a:spcAft>
+                <a:spcPts val="342"/>
+              </a:spcAft>
+            </a:pPr>
+            <a:r>
+              <a:rPr sz="1200" b="0" i="0">
+                <a:solidFill>
+                  <a:srgbClr val="FFFFFF"/>
+                </a:solidFill>
+                <a:latin typeface="Calibri"/>
+              </a:rPr>
+              <a:t>            areaListado.setText(controlador.reporteListado());</a:t>
+            </a:r>
+          </a:p>
+          <a:p>
+            <a:pPr>
+              <a:spcAft>
+                <a:spcPts val="342"/>
+              </a:spcAft>
+            </a:pPr>
+            <a:r>
+              <a:rPr sz="1200" b="0" i="0">
+                <a:solidFill>
+                  <a:srgbClr val="FFFFFF"/>
+                </a:solidFill>
+                <a:latin typeface="Calibri"/>
+              </a:rPr>
+              <a:t>            JOptionPane.showMessageDialog(null, "Guardada: " + m.getNombre());</a:t>
+            </a:r>
+          </a:p>
+          <a:p>
+            <a:pPr>
+              <a:spcAft>
+                <a:spcPts val="342"/>
+              </a:spcAft>
+            </a:pPr>
+            <a:r>
+              <a:rPr sz="1200" b="0" i="0">
+                <a:solidFill>
+                  <a:srgbClr val="FFFFFF"/>
+                </a:solidFill>
+                <a:latin typeface="Calibri"/>
+              </a:rPr>
+              <a:t>        } catch (IllegalArgumentException ex) {              // el error no tumba la app</a:t>
+            </a:r>
+          </a:p>
+          <a:p>
+            <a:pPr>
+              <a:spcAft>
+                <a:spcPts val="342"/>
+              </a:spcAft>
+            </a:pPr>
+            <a:r>
+              <a:rPr sz="1200" b="0" i="0">
+                <a:solidFill>
+                  <a:srgbClr val="FFFFFF"/>
+                </a:solidFill>
+                <a:latin typeface="Calibri"/>
+              </a:rPr>
+              <a:t>            JOptionPane.showMessageDialog(null, ex.getMessage());</a:t>
+            </a:r>
+          </a:p>
+          <a:p>
+            <a:pPr>
+              <a:spcAft>
+                <a:spcPts val="342"/>
+              </a:spcAft>
+            </a:pPr>
+            <a:r>
+              <a:rPr sz="1200" b="0" i="0">
+                <a:solidFill>
+                  <a:srgbClr val="FFFFFF"/>
+                </a:solidFill>
+                <a:latin typeface="Calibri"/>
+              </a:rPr>
+              <a:t>        }</a:t>
+            </a:r>
+          </a:p>
+          <a:p>
+            <a:pPr>
+              <a:spcAft>
+                <a:spcPts val="342"/>
+              </a:spcAft>
+            </a:pPr>
+            <a:r>
+              <a:rPr sz="1200" b="0" i="0">
+                <a:solidFill>
+                  <a:srgbClr val="FFFFFF"/>
+                </a:solidFill>
+                <a:latin typeface="Calibri"/>
+              </a:rPr>
+              <a:t>    }</a:t>
+            </a:r>
+          </a:p>
+          <a:p>
+            <a:pPr>
+              <a:spcAft>
+                <a:spcPts val="342"/>
+              </a:spcAft>
+            </a:pPr>
+            <a:r>
+              <a:rPr sz="1200" b="0" i="0">
+                <a:solidFill>
+                  <a:srgbClr val="FFFFFF"/>
+                </a:solidFill>
+                <a:latin typeface="Calibri"/>
+              </a:rPr>
+              <a:t>});</a:t>
+            </a:r>
+          </a:p>
+        </p:txBody>
+      </p:sp>
+      <p:sp>
+        <p:nvSpPr>
+          <p:cNvPr id="9" name="TextBox 8"/>
+          <p:cNvSpPr txBox="1"/>
+          <p:nvPr/>
+        </p:nvSpPr>
+        <p:spPr>
+          <a:xfrm>
+            <a:off x="457200" y="6080760"/>
+            <a:ext cx="11277295" cy="320040"/>
+          </a:xfrm>
+          <a:prstGeom prst="rect">
+            <a:avLst/>
+          </a:prstGeom>
+          <a:noFill/>
+        </p:spPr>
+        <p:txBody>
+          <a:bodyPr wrap="square">
+            <a:spAutoFit/>
+          </a:bodyPr>
           <a:lstStyle/>
           <a:p>
             <a:pPr algn="ctr"/>
-          </a:p>
-        </p:txBody>
-      </p:sp>
-      <p:sp>
-        <p:nvSpPr>
-          <p:cNvPr id="10" name="Rounded Rectangle 9"/>
-          <p:cNvSpPr/>
-          <p:nvPr/>
-        </p:nvSpPr>
-        <p:spPr>
-          <a:xfrm>
-            <a:off x="594360" y="2532888"/>
-            <a:ext cx="438912" cy="438912"/>
-          </a:xfrm>
-          <a:prstGeom prst="roundRect">
-            <a:avLst>
-              <a:gd name="adj" fmla="val 12000"/>
-            </a:avLst>
-          </a:prstGeom>
-          <a:solidFill>
-            <a:srgbClr val="095292"/>
-          </a:solidFill>
-          <a:ln>
-            <a:noFill/>
-          </a:ln>
-        </p:spPr>
-        <p:style>
-          <a:lnRef idx="1">
-            <a:schemeClr val="accent1"/>
-          </a:lnRef>
-          <a:fillRef idx="3">
-            <a:schemeClr val="accent1"/>
-          </a:fillRef>
-          <a:effectRef idx="2">
-            <a:schemeClr val="accent1"/>
-          </a:effectRef>
-          <a:fontRef idx="minor">
-            <a:schemeClr val="lt1"/>
-          </a:fontRef>
-        </p:style>
-        <p:txBody>
-          <a:bodyPr rtlCol="0" anchor="ctr"/>
-          <a:lstStyle/>
-          <a:p>
-            <a:pPr algn="ctr"/>
-          </a:p>
-        </p:txBody>
-      </p:sp>
-      <p:sp>
-        <p:nvSpPr>
-          <p:cNvPr id="11" name="TextBox 10"/>
-          <p:cNvSpPr txBox="1"/>
-          <p:nvPr/>
-        </p:nvSpPr>
-        <p:spPr>
-          <a:xfrm>
-            <a:off x="594360" y="2532888"/>
-            <a:ext cx="438912" cy="438912"/>
-          </a:xfrm>
-          <a:prstGeom prst="rect">
-            <a:avLst/>
-          </a:prstGeom>
-          <a:noFill/>
-        </p:spPr>
-        <p:txBody>
-          <a:bodyPr wrap="square" anchor="ctr"/>
-          <a:lstStyle/>
-          <a:p>
-            <a:pPr algn="ctr"/>
-            <a:r>
-              <a:rPr sz="1600" b="1" i="0">
-                <a:solidFill>
-                  <a:srgbClr val="FFFFFF"/>
-                </a:solidFill>
-                <a:latin typeface="Calibri"/>
-              </a:rPr>
-              <a:t>2</a:t>
-            </a:r>
-          </a:p>
-        </p:txBody>
-      </p:sp>
-      <p:sp>
-        <p:nvSpPr>
-          <p:cNvPr id="12" name="TextBox 11"/>
-          <p:cNvSpPr txBox="1"/>
-          <p:nvPr/>
-        </p:nvSpPr>
-        <p:spPr>
-          <a:xfrm>
-            <a:off x="1188720" y="2368296"/>
-            <a:ext cx="10271455" cy="786384"/>
-          </a:xfrm>
-          <a:prstGeom prst="rect">
-            <a:avLst/>
-          </a:prstGeom>
-          <a:noFill/>
-        </p:spPr>
-        <p:txBody>
-          <a:bodyPr wrap="square" anchor="ctr"/>
-          <a:lstStyle/>
-          <a:p>
-            <a:r>
-              <a:rPr sz="1400" b="1" i="0">
-                <a:solidFill>
-                  <a:srgbClr val="095292"/>
-                </a:solidFill>
-                <a:latin typeface="Calibri"/>
-              </a:rPr>
-              <a:t>Deje Mascota en vetcare.modelo y cree en vetcare.servicio la clase RepositorioMascotas con un ArrayList&lt;Mascota&gt; privado y los metodos registrar, buscarPorId, listar y total; compruebe con Ctrl+F que ninguna de esas dos clases tiene un import de javax.swing.</a:t>
-            </a:r>
-          </a:p>
-        </p:txBody>
-      </p:sp>
-      <p:sp>
-        <p:nvSpPr>
-          <p:cNvPr id="13" name="Rounded Rectangle 12"/>
-          <p:cNvSpPr/>
-          <p:nvPr/>
-        </p:nvSpPr>
-        <p:spPr>
-          <a:xfrm>
-            <a:off x="457200" y="3319272"/>
-            <a:ext cx="11277295" cy="950976"/>
-          </a:xfrm>
-          <a:prstGeom prst="roundRect">
-            <a:avLst>
-              <a:gd name="adj" fmla="val 12000"/>
-            </a:avLst>
-          </a:prstGeom>
-          <a:solidFill>
-            <a:srgbClr val="F2F2F2"/>
-          </a:solidFill>
-          <a:ln>
-            <a:noFill/>
-          </a:ln>
-        </p:spPr>
-        <p:style>
-          <a:lnRef idx="1">
-            <a:schemeClr val="accent1"/>
-          </a:lnRef>
-          <a:fillRef idx="3">
-            <a:schemeClr val="accent1"/>
-          </a:fillRef>
-          <a:effectRef idx="2">
-            <a:schemeClr val="accent1"/>
-          </a:effectRef>
-          <a:fontRef idx="minor">
-            <a:schemeClr val="lt1"/>
-          </a:fontRef>
-        </p:style>
-        <p:txBody>
-          <a:bodyPr rtlCol="0" anchor="ctr"/>
-          <a:lstStyle/>
-          <a:p>
-            <a:pPr algn="ctr"/>
-          </a:p>
-        </p:txBody>
-      </p:sp>
-      <p:sp>
-        <p:nvSpPr>
-          <p:cNvPr id="14" name="Rounded Rectangle 13"/>
-          <p:cNvSpPr/>
-          <p:nvPr/>
-        </p:nvSpPr>
-        <p:spPr>
-          <a:xfrm>
-            <a:off x="594360" y="3575304"/>
-            <a:ext cx="438912" cy="438912"/>
-          </a:xfrm>
-          <a:prstGeom prst="roundRect">
-            <a:avLst>
-              <a:gd name="adj" fmla="val 12000"/>
-            </a:avLst>
-          </a:prstGeom>
-          <a:solidFill>
-            <a:srgbClr val="095292"/>
-          </a:solidFill>
-          <a:ln>
-            <a:noFill/>
-          </a:ln>
-        </p:spPr>
-        <p:style>
-          <a:lnRef idx="1">
-            <a:schemeClr val="accent1"/>
-          </a:lnRef>
-          <a:fillRef idx="3">
-            <a:schemeClr val="accent1"/>
-          </a:fillRef>
-          <a:effectRef idx="2">
-            <a:schemeClr val="accent1"/>
-          </a:effectRef>
-          <a:fontRef idx="minor">
-            <a:schemeClr val="lt1"/>
-          </a:fontRef>
-        </p:style>
-        <p:txBody>
-          <a:bodyPr rtlCol="0" anchor="ctr"/>
-          <a:lstStyle/>
-          <a:p>
-            <a:pPr algn="ctr"/>
-          </a:p>
-        </p:txBody>
-      </p:sp>
-      <p:sp>
-        <p:nvSpPr>
-          <p:cNvPr id="15" name="TextBox 14"/>
-          <p:cNvSpPr txBox="1"/>
-          <p:nvPr/>
-        </p:nvSpPr>
-        <p:spPr>
-          <a:xfrm>
-            <a:off x="594360" y="3575304"/>
-            <a:ext cx="438912" cy="438912"/>
-          </a:xfrm>
-          <a:prstGeom prst="rect">
-            <a:avLst/>
-          </a:prstGeom>
-          <a:noFill/>
-        </p:spPr>
-        <p:txBody>
-          <a:bodyPr wrap="square" anchor="ctr"/>
-          <a:lstStyle/>
-          <a:p>
-            <a:pPr algn="ctr"/>
-            <a:r>
-              <a:rPr sz="1600" b="1" i="0">
-                <a:solidFill>
-                  <a:srgbClr val="FFFFFF"/>
-                </a:solidFill>
-                <a:latin typeface="Calibri"/>
-              </a:rPr>
-              <a:t>3</a:t>
-            </a:r>
-          </a:p>
-        </p:txBody>
-      </p:sp>
-      <p:sp>
-        <p:nvSpPr>
-          <p:cNvPr id="16" name="TextBox 15"/>
-          <p:cNvSpPr txBox="1"/>
-          <p:nvPr/>
-        </p:nvSpPr>
-        <p:spPr>
-          <a:xfrm>
-            <a:off x="1188720" y="3410712"/>
-            <a:ext cx="10271455" cy="786384"/>
-          </a:xfrm>
-          <a:prstGeom prst="rect">
-            <a:avLst/>
-          </a:prstGeom>
-          <a:noFill/>
-        </p:spPr>
-        <p:txBody>
-          <a:bodyPr wrap="square" anchor="ctr"/>
-          <a:lstStyle/>
-          <a:p>
-            <a:r>
-              <a:rPr sz="1400" b="1" i="0">
-                <a:solidFill>
-                  <a:srgbClr val="095292"/>
-                </a:solidFill>
-                <a:latin typeface="Calibri"/>
-              </a:rPr>
-              <a:t>Cree ControladorRegistro con el metodo registrarMascota(String id, String nombre, String especie, String edadTexto) que valide obligatorios, convierta la edad con Integer.parseInt dentro de try-catch y lance IllegalArgumentException con mensajes en español; el repositorio debe recibirse por el constructor, no crearse adentro del metodo.</a:t>
-            </a:r>
-          </a:p>
-        </p:txBody>
-      </p:sp>
-      <p:sp>
-        <p:nvSpPr>
-          <p:cNvPr id="17" name="Rounded Rectangle 16"/>
-          <p:cNvSpPr/>
-          <p:nvPr/>
-        </p:nvSpPr>
-        <p:spPr>
-          <a:xfrm>
-            <a:off x="457200" y="4361688"/>
-            <a:ext cx="11277295" cy="950976"/>
-          </a:xfrm>
-          <a:prstGeom prst="roundRect">
-            <a:avLst>
-              <a:gd name="adj" fmla="val 12000"/>
-            </a:avLst>
-          </a:prstGeom>
-          <a:solidFill>
-            <a:srgbClr val="E8F4FA"/>
-          </a:solidFill>
-          <a:ln>
-            <a:noFill/>
-          </a:ln>
-        </p:spPr>
-        <p:style>
-          <a:lnRef idx="1">
-            <a:schemeClr val="accent1"/>
-          </a:lnRef>
-          <a:fillRef idx="3">
-            <a:schemeClr val="accent1"/>
-          </a:fillRef>
-          <a:effectRef idx="2">
-            <a:schemeClr val="accent1"/>
-          </a:effectRef>
-          <a:fontRef idx="minor">
-            <a:schemeClr val="lt1"/>
-          </a:fontRef>
-        </p:style>
-        <p:txBody>
-          <a:bodyPr rtlCol="0" anchor="ctr"/>
-          <a:lstStyle/>
-          <a:p>
-            <a:pPr algn="ctr"/>
-          </a:p>
-        </p:txBody>
-      </p:sp>
-      <p:sp>
-        <p:nvSpPr>
-          <p:cNvPr id="18" name="Rounded Rectangle 17"/>
-          <p:cNvSpPr/>
-          <p:nvPr/>
-        </p:nvSpPr>
-        <p:spPr>
-          <a:xfrm>
-            <a:off x="594360" y="4617720"/>
-            <a:ext cx="438912" cy="438912"/>
-          </a:xfrm>
-          <a:prstGeom prst="roundRect">
-            <a:avLst>
-              <a:gd name="adj" fmla="val 12000"/>
-            </a:avLst>
-          </a:prstGeom>
-          <a:solidFill>
-            <a:srgbClr val="095292"/>
-          </a:solidFill>
-          <a:ln>
-            <a:noFill/>
-          </a:ln>
-        </p:spPr>
-        <p:style>
-          <a:lnRef idx="1">
-            <a:schemeClr val="accent1"/>
-          </a:lnRef>
-          <a:fillRef idx="3">
-            <a:schemeClr val="accent1"/>
-          </a:fillRef>
-          <a:effectRef idx="2">
-            <a:schemeClr val="accent1"/>
-          </a:effectRef>
-          <a:fontRef idx="minor">
-            <a:schemeClr val="lt1"/>
-          </a:fontRef>
-        </p:style>
-        <p:txBody>
-          <a:bodyPr rtlCol="0" anchor="ctr"/>
-          <a:lstStyle/>
-          <a:p>
-            <a:pPr algn="ctr"/>
-          </a:p>
-        </p:txBody>
-      </p:sp>
-      <p:sp>
-        <p:nvSpPr>
-          <p:cNvPr id="19" name="TextBox 18"/>
-          <p:cNvSpPr txBox="1"/>
-          <p:nvPr/>
-        </p:nvSpPr>
-        <p:spPr>
-          <a:xfrm>
-            <a:off x="594360" y="4617720"/>
-            <a:ext cx="438912" cy="438912"/>
-          </a:xfrm>
-          <a:prstGeom prst="rect">
-            <a:avLst/>
-          </a:prstGeom>
-          <a:noFill/>
-        </p:spPr>
-        <p:txBody>
-          <a:bodyPr wrap="square" anchor="ctr"/>
-          <a:lstStyle/>
-          <a:p>
-            <a:pPr algn="ctr"/>
-            <a:r>
-              <a:rPr sz="1600" b="1" i="0">
-                <a:solidFill>
-                  <a:srgbClr val="FFFFFF"/>
-                </a:solidFill>
-                <a:latin typeface="Calibri"/>
-              </a:rPr>
-              <a:t>4</a:t>
-            </a:r>
-          </a:p>
-        </p:txBody>
-      </p:sp>
-      <p:sp>
-        <p:nvSpPr>
-          <p:cNvPr id="20" name="TextBox 19"/>
-          <p:cNvSpPr txBox="1"/>
-          <p:nvPr/>
-        </p:nvSpPr>
-        <p:spPr>
-          <a:xfrm>
-            <a:off x="1188720" y="4453128"/>
-            <a:ext cx="10271455" cy="786384"/>
-          </a:xfrm>
-          <a:prstGeom prst="rect">
-            <a:avLst/>
-          </a:prstGeom>
-          <a:noFill/>
-        </p:spPr>
-        <p:txBody>
-          <a:bodyPr wrap="square" anchor="ctr"/>
-          <a:lstStyle/>
-          <a:p>
-            <a:r>
-              <a:rPr sz="1400" b="1" i="0">
-                <a:solidFill>
-                  <a:srgbClr val="095292"/>
-                </a:solidFill>
-                <a:latin typeface="Calibri"/>
-              </a:rPr>
-              <a:t>Conecte el boton con addActionListener de manera que el cuerpo del listener tenga maximo cinco lineas: leer los getText(), llamar al controlador, refrescar el area, limpiar campos y mostrar el JOptionPane; declare el controlador como atributo de la ventana, nunca dentro del listener.</a:t>
-            </a:r>
-          </a:p>
-        </p:txBody>
-      </p:sp>
-      <p:sp>
-        <p:nvSpPr>
-          <p:cNvPr id="21" name="Rounded Rectangle 20"/>
-          <p:cNvSpPr/>
-          <p:nvPr/>
-        </p:nvSpPr>
-        <p:spPr>
-          <a:xfrm>
-            <a:off x="457200" y="5404104"/>
-            <a:ext cx="11277295" cy="950976"/>
-          </a:xfrm>
-          <a:prstGeom prst="roundRect">
-            <a:avLst>
-              <a:gd name="adj" fmla="val 12000"/>
-            </a:avLst>
-          </a:prstGeom>
-          <a:solidFill>
-            <a:srgbClr val="F2F2F2"/>
-          </a:solidFill>
-          <a:ln>
-            <a:noFill/>
-          </a:ln>
-        </p:spPr>
-        <p:style>
-          <a:lnRef idx="1">
-            <a:schemeClr val="accent1"/>
-          </a:lnRef>
-          <a:fillRef idx="3">
-            <a:schemeClr val="accent1"/>
-          </a:fillRef>
-          <a:effectRef idx="2">
-            <a:schemeClr val="accent1"/>
-          </a:effectRef>
-          <a:fontRef idx="minor">
-            <a:schemeClr val="lt1"/>
-          </a:fontRef>
-        </p:style>
-        <p:txBody>
-          <a:bodyPr rtlCol="0" anchor="ctr"/>
-          <a:lstStyle/>
-          <a:p>
-            <a:pPr algn="ctr"/>
-          </a:p>
-        </p:txBody>
-      </p:sp>
-      <p:sp>
-        <p:nvSpPr>
-          <p:cNvPr id="22" name="Rounded Rectangle 21"/>
-          <p:cNvSpPr/>
-          <p:nvPr/>
-        </p:nvSpPr>
-        <p:spPr>
-          <a:xfrm>
-            <a:off x="594360" y="5660136"/>
-            <a:ext cx="438912" cy="438912"/>
-          </a:xfrm>
-          <a:prstGeom prst="roundRect">
-            <a:avLst>
-              <a:gd name="adj" fmla="val 12000"/>
-            </a:avLst>
-          </a:prstGeom>
-          <a:solidFill>
-            <a:srgbClr val="095292"/>
-          </a:solidFill>
-          <a:ln>
-            <a:noFill/>
-          </a:ln>
-        </p:spPr>
-        <p:style>
-          <a:lnRef idx="1">
-            <a:schemeClr val="accent1"/>
-          </a:lnRef>
-          <a:fillRef idx="3">
-            <a:schemeClr val="accent1"/>
-          </a:fillRef>
-          <a:effectRef idx="2">
-            <a:schemeClr val="accent1"/>
-          </a:effectRef>
-          <a:fontRef idx="minor">
-            <a:schemeClr val="lt1"/>
-          </a:fontRef>
-        </p:style>
-        <p:txBody>
-          <a:bodyPr rtlCol="0" anchor="ctr"/>
-          <a:lstStyle/>
-          <a:p>
-            <a:pPr algn="ctr"/>
-          </a:p>
-        </p:txBody>
-      </p:sp>
-      <p:sp>
-        <p:nvSpPr>
-          <p:cNvPr id="23" name="TextBox 22"/>
-          <p:cNvSpPr txBox="1"/>
-          <p:nvPr/>
-        </p:nvSpPr>
-        <p:spPr>
-          <a:xfrm>
-            <a:off x="594360" y="5660136"/>
-            <a:ext cx="438912" cy="438912"/>
-          </a:xfrm>
-          <a:prstGeom prst="rect">
-            <a:avLst/>
-          </a:prstGeom>
-          <a:noFill/>
-        </p:spPr>
-        <p:txBody>
-          <a:bodyPr wrap="square" anchor="ctr"/>
-          <a:lstStyle/>
-          <a:p>
-            <a:pPr algn="ctr"/>
-            <a:r>
-              <a:rPr sz="1600" b="1" i="0">
-                <a:solidFill>
-                  <a:srgbClr val="FFFFFF"/>
-                </a:solidFill>
-                <a:latin typeface="Calibri"/>
-              </a:rPr>
-              <a:t>5</a:t>
-            </a:r>
-          </a:p>
-        </p:txBody>
-      </p:sp>
-      <p:sp>
-        <p:nvSpPr>
-          <p:cNvPr id="24" name="TextBox 23"/>
-          <p:cNvSpPr txBox="1"/>
-          <p:nvPr/>
-        </p:nvSpPr>
-        <p:spPr>
-          <a:xfrm>
-            <a:off x="1188720" y="5495544"/>
-            <a:ext cx="10271455" cy="786384"/>
-          </a:xfrm>
-          <a:prstGeom prst="rect">
-            <a:avLst/>
-          </a:prstGeom>
-          <a:noFill/>
-        </p:spPr>
-        <p:txBody>
-          <a:bodyPr wrap="square" anchor="ctr"/>
-          <a:lstStyle/>
-          <a:p>
-            <a:r>
-              <a:rPr sz="1500" b="1" i="0">
-                <a:solidFill>
-                  <a:srgbClr val="095292"/>
-                </a:solidFill>
-                <a:latin typeface="Calibri"/>
-              </a:rPr>
-              <a:t>Pruebe y capture evidencia de tres casos: (a) registro valido de M-001 Kira, (b) edad escrita como 'tres', (c) ID repetido M-001; guarde las tres capturas, exporte el proyecto comprimido y subalo a la plataforma del curso.</a:t>
-            </a:r>
-          </a:p>
-        </p:txBody>
-      </p:sp>
-      <p:sp>
-        <p:nvSpPr>
-          <p:cNvPr id="25" name="TextBox 24"/>
+            <a:r>
+              <a:rPr sz="1200" b="0" i="1">
+                <a:solidFill>
+                  <a:srgbClr val="666666"/>
+                </a:solidFill>
+                <a:latin typeface="Calibri"/>
+              </a:rPr>
+              <a:t>El boton no sabe reglas: lee texto, delega en el controlador y muestra el resultado o el error.</a:t>
+            </a:r>
+          </a:p>
+        </p:txBody>
+      </p:sp>
+      <p:sp>
+        <p:nvSpPr>
+          <p:cNvPr id="10" name="TextBox 9"/>
           <p:cNvSpPr txBox="1"/>
           <p:nvPr/>
         </p:nvSpPr>

--- a/Programacion II/Clases/Clase 6 - Eventos y controladores ActionListener/Presentacion.pptx
+++ b/Programacion II/Clases/Clase 6 - Eventos y controladores ActionListener/Presentacion.pptx
@@ -9,38 +9,32 @@
     <p:sldId id="257" r:id="rId8"/>
     <p:sldId id="258" r:id="rId9"/>
     <p:sldId id="259" r:id="rId10"/>
-    <p:sldId id="260" r:id="rId11"/>
-    <p:sldId id="261" r:id="rId12"/>
-    <p:sldId id="262" r:id="rId13"/>
-    <p:sldId id="263" r:id="rId14"/>
-    <p:sldId id="264" r:id="rId15"/>
-    <p:sldId id="265" r:id="rId16"/>
-    <p:sldId id="266" r:id="rId17"/>
-    <p:sldId id="267" r:id="rId18"/>
-    <p:sldId id="268" r:id="rId19"/>
-    <p:sldId id="269" r:id="rId20"/>
-    <p:sldId id="270" r:id="rId21"/>
-    <p:sldId id="271" r:id="rId22"/>
-    <p:sldId id="272" r:id="rId23"/>
-    <p:sldId id="273" r:id="rId24"/>
-    <p:sldId id="274" r:id="rId25"/>
-    <p:sldId id="275" r:id="rId26"/>
-    <p:sldId id="276" r:id="rId27"/>
-    <p:sldId id="277" r:id="rId28"/>
-    <p:sldId id="278" r:id="rId29"/>
-    <p:sldId id="279" r:id="rId30"/>
-    <p:sldId id="280" r:id="rId31"/>
-    <p:sldId id="281" r:id="rId32"/>
-    <p:sldId id="282" r:id="rId33"/>
-    <p:sldId id="283" r:id="rId34"/>
-    <p:sldId id="284" r:id="rId35"/>
-    <p:sldId id="285" r:id="rId36"/>
-    <p:sldId id="286" r:id="rId37"/>
-    <p:sldId id="287" r:id="rId38"/>
-    <p:sldId id="288" r:id="rId39"/>
-    <p:sldId id="289" r:id="rId40"/>
-    <p:sldId id="290" r:id="rId41"/>
-    <p:sldId id="291" r:id="rId42"/>
+    <p:sldId id="260" r:id="rId12"/>
+    <p:sldId id="261" r:id="rId13"/>
+    <p:sldId id="262" r:id="rId14"/>
+    <p:sldId id="263" r:id="rId15"/>
+    <p:sldId id="264" r:id="rId16"/>
+    <p:sldId id="265" r:id="rId17"/>
+    <p:sldId id="266" r:id="rId18"/>
+    <p:sldId id="267" r:id="rId19"/>
+    <p:sldId id="268" r:id="rId20"/>
+    <p:sldId id="269" r:id="rId21"/>
+    <p:sldId id="270" r:id="rId22"/>
+    <p:sldId id="271" r:id="rId23"/>
+    <p:sldId id="272" r:id="rId24"/>
+    <p:sldId id="273" r:id="rId25"/>
+    <p:sldId id="274" r:id="rId26"/>
+    <p:sldId id="275" r:id="rId27"/>
+    <p:sldId id="276" r:id="rId28"/>
+    <p:sldId id="277" r:id="rId29"/>
+    <p:sldId id="278" r:id="rId30"/>
+    <p:sldId id="279" r:id="rId31"/>
+    <p:sldId id="280" r:id="rId32"/>
+    <p:sldId id="281" r:id="rId33"/>
+    <p:sldId id="282" r:id="rId34"/>
+    <p:sldId id="283" r:id="rId35"/>
+    <p:sldId id="284" r:id="rId36"/>
+    <p:sldId id="285" r:id="rId37"/>
   </p:sldIdLst>
   <p:sldSz cx="12191695" cy="6858000" type="screen4x3"/>
   <p:notesSz cx="6858000" cy="9144000"/>
@@ -140,6 +134,742 @@
     </a:lvl9pPr>
   </p:defaultTextStyle>
 </p:presentation>
+</file>
+
+<file path=ppt/notesMasters/notesMaster1.xml><?xml version="1.0" encoding="utf-8"?>
+<p:notesMaster xmlns:a="http://schemas.openxmlformats.org/drawingml/2006/main" xmlns:p="http://schemas.openxmlformats.org/presentationml/2006/main" xmlns:r="http://schemas.openxmlformats.org/officeDocument/2006/relationships">
+  <p:cSld>
+    <p:bg>
+      <p:bgRef idx="1001">
+        <a:schemeClr val="bg1"/>
+      </p:bgRef>
+    </p:bg>
+    <p:spTree>
+      <p:nvGrpSpPr>
+        <p:cNvPr id="1" name=""/>
+        <p:cNvGrpSpPr/>
+        <p:nvPr/>
+      </p:nvGrpSpPr>
+      <p:grpSpPr>
+        <a:xfrm>
+          <a:off x="0" y="0"/>
+          <a:ext cx="0" cy="0"/>
+          <a:chOff x="0" y="0"/>
+          <a:chExt cx="0" cy="0"/>
+        </a:xfrm>
+      </p:grpSpPr>
+      <p:sp>
+        <p:nvSpPr>
+          <p:cNvPr id="2" name="Header Placeholder 1"/>
+          <p:cNvSpPr>
+            <a:spLocks noGrp="1"/>
+          </p:cNvSpPr>
+          <p:nvPr>
+            <p:ph type="hdr" sz="quarter"/>
+          </p:nvPr>
+        </p:nvSpPr>
+        <p:spPr>
+          <a:xfrm>
+            <a:off x="0" y="0"/>
+            <a:ext cx="2971800" cy="457200"/>
+          </a:xfrm>
+          <a:prstGeom prst="rect">
+            <a:avLst/>
+          </a:prstGeom>
+        </p:spPr>
+        <p:txBody>
+          <a:bodyPr vert="horz" lIns="91440" tIns="45720" rIns="91440" bIns="45720" rtlCol="0"/>
+          <a:lstStyle>
+            <a:lvl1pPr algn="l">
+              <a:defRPr sz="1200"/>
+            </a:lvl1pPr>
+          </a:lstStyle>
+          <a:p>
+            <a:endParaRPr lang="en-US"/>
+          </a:p>
+        </p:txBody>
+      </p:sp>
+      <p:sp>
+        <p:nvSpPr>
+          <p:cNvPr id="3" name="Date Placeholder 2"/>
+          <p:cNvSpPr>
+            <a:spLocks noGrp="1"/>
+          </p:cNvSpPr>
+          <p:nvPr>
+            <p:ph type="dt" idx="1"/>
+          </p:nvPr>
+        </p:nvSpPr>
+        <p:spPr>
+          <a:xfrm>
+            <a:off x="3884613" y="0"/>
+            <a:ext cx="2971800" cy="457200"/>
+          </a:xfrm>
+          <a:prstGeom prst="rect">
+            <a:avLst/>
+          </a:prstGeom>
+        </p:spPr>
+        <p:txBody>
+          <a:bodyPr vert="horz" lIns="91440" tIns="45720" rIns="91440" bIns="45720" rtlCol="0"/>
+          <a:lstStyle>
+            <a:lvl1pPr algn="r">
+              <a:defRPr sz="1200"/>
+            </a:lvl1pPr>
+          </a:lstStyle>
+          <a:p>
+            <a:fld id="{0F89C1C7-3DCD-1040-A9CF-14679D8B5DDD}" type="datetimeFigureOut">
+              <a:rPr lang="en-US" smtClean="0"/>
+              <a:t>10/17/16</a:t>
+            </a:fld>
+            <a:endParaRPr lang="en-US"/>
+          </a:p>
+        </p:txBody>
+      </p:sp>
+      <p:sp>
+        <p:nvSpPr>
+          <p:cNvPr id="4" name="Slide Image Placeholder 3"/>
+          <p:cNvSpPr>
+            <a:spLocks noGrp="1" noRot="1" noChangeAspect="1"/>
+          </p:cNvSpPr>
+          <p:nvPr>
+            <p:ph type="sldImg" idx="2"/>
+          </p:nvPr>
+        </p:nvSpPr>
+        <p:spPr>
+          <a:xfrm>
+            <a:off x="1143000" y="685800"/>
+            <a:ext cx="4572000" cy="3429000"/>
+          </a:xfrm>
+          <a:prstGeom prst="rect">
+            <a:avLst/>
+          </a:prstGeom>
+          <a:noFill/>
+          <a:ln w="12700">
+            <a:solidFill>
+              <a:prstClr val="black"/>
+            </a:solidFill>
+          </a:ln>
+        </p:spPr>
+        <p:txBody>
+          <a:bodyPr vert="horz" lIns="91440" tIns="45720" rIns="91440" bIns="45720" rtlCol="0" anchor="ctr"/>
+          <a:lstStyle/>
+          <a:p>
+            <a:endParaRPr lang="en-US"/>
+          </a:p>
+        </p:txBody>
+      </p:sp>
+      <p:sp>
+        <p:nvSpPr>
+          <p:cNvPr id="5" name="Notes Placeholder 4"/>
+          <p:cNvSpPr>
+            <a:spLocks noGrp="1"/>
+          </p:cNvSpPr>
+          <p:nvPr>
+            <p:ph type="body" sz="quarter" idx="3"/>
+          </p:nvPr>
+        </p:nvSpPr>
+        <p:spPr>
+          <a:xfrm>
+            <a:off x="685800" y="4343400"/>
+            <a:ext cx="5486400" cy="4114800"/>
+          </a:xfrm>
+          <a:prstGeom prst="rect">
+            <a:avLst/>
+          </a:prstGeom>
+        </p:spPr>
+        <p:txBody>
+          <a:bodyPr vert="horz" lIns="91440" tIns="45720" rIns="91440" bIns="45720" rtlCol="0"/>
+          <a:lstStyle/>
+          <a:p>
+            <a:pPr lvl="0"/>
+            <a:r>
+              <a:rPr lang="en-US" smtClean="0"/>
+              <a:t>Click to edit Master text styles</a:t>
+            </a:r>
+          </a:p>
+          <a:p>
+            <a:pPr lvl="1"/>
+            <a:r>
+              <a:rPr lang="en-US" smtClean="0"/>
+              <a:t>Second level</a:t>
+            </a:r>
+          </a:p>
+          <a:p>
+            <a:pPr lvl="2"/>
+            <a:r>
+              <a:rPr lang="en-US" smtClean="0"/>
+              <a:t>Third level</a:t>
+            </a:r>
+          </a:p>
+          <a:p>
+            <a:pPr lvl="3"/>
+            <a:r>
+              <a:rPr lang="en-US" smtClean="0"/>
+              <a:t>Fourth level</a:t>
+            </a:r>
+          </a:p>
+          <a:p>
+            <a:pPr lvl="4"/>
+            <a:r>
+              <a:rPr lang="en-US" smtClean="0"/>
+              <a:t>Fifth level</a:t>
+            </a:r>
+            <a:endParaRPr lang="en-US"/>
+          </a:p>
+        </p:txBody>
+      </p:sp>
+      <p:sp>
+        <p:nvSpPr>
+          <p:cNvPr id="6" name="Footer Placeholder 5"/>
+          <p:cNvSpPr>
+            <a:spLocks noGrp="1"/>
+          </p:cNvSpPr>
+          <p:nvPr>
+            <p:ph type="ftr" sz="quarter" idx="4"/>
+          </p:nvPr>
+        </p:nvSpPr>
+        <p:spPr>
+          <a:xfrm>
+            <a:off x="0" y="8685213"/>
+            <a:ext cx="2971800" cy="457200"/>
+          </a:xfrm>
+          <a:prstGeom prst="rect">
+            <a:avLst/>
+          </a:prstGeom>
+        </p:spPr>
+        <p:txBody>
+          <a:bodyPr vert="horz" lIns="91440" tIns="45720" rIns="91440" bIns="45720" rtlCol="0" anchor="b"/>
+          <a:lstStyle>
+            <a:lvl1pPr algn="l">
+              <a:defRPr sz="1200"/>
+            </a:lvl1pPr>
+          </a:lstStyle>
+          <a:p>
+            <a:endParaRPr lang="en-US"/>
+          </a:p>
+        </p:txBody>
+      </p:sp>
+      <p:sp>
+        <p:nvSpPr>
+          <p:cNvPr id="7" name="Slide Number Placeholder 6"/>
+          <p:cNvSpPr>
+            <a:spLocks noGrp="1"/>
+          </p:cNvSpPr>
+          <p:nvPr>
+            <p:ph type="sldNum" sz="quarter" idx="5"/>
+          </p:nvPr>
+        </p:nvSpPr>
+        <p:spPr>
+          <a:xfrm>
+            <a:off x="3884613" y="8685213"/>
+            <a:ext cx="2971800" cy="457200"/>
+          </a:xfrm>
+          <a:prstGeom prst="rect">
+            <a:avLst/>
+          </a:prstGeom>
+        </p:spPr>
+        <p:txBody>
+          <a:bodyPr vert="horz" lIns="91440" tIns="45720" rIns="91440" bIns="45720" rtlCol="0" anchor="b"/>
+          <a:lstStyle>
+            <a:lvl1pPr algn="r">
+              <a:defRPr sz="1200"/>
+            </a:lvl1pPr>
+          </a:lstStyle>
+          <a:p>
+            <a:fld id="{BB5E49A5-4136-284D-997B-48E1D791AD67}" type="slidenum">
+              <a:rPr lang="en-US" smtClean="0"/>
+              <a:t>‹#›</a:t>
+            </a:fld>
+            <a:endParaRPr lang="en-US"/>
+          </a:p>
+        </p:txBody>
+      </p:sp>
+    </p:spTree>
+    <p:extLst>
+      <p:ext uri="{BB962C8B-B14F-4D97-AF65-F5344CB8AC3E}">
+        <p14:creationId xmlns:p14="http://schemas.microsoft.com/office/powerpoint/2010/main" val="2623252185"/>
+      </p:ext>
+    </p:extLst>
+  </p:cSld>
+  <p:clrMap bg1="lt1" tx1="dk1" bg2="lt2" tx2="dk2" accent1="accent1" accent2="accent2" accent3="accent3" accent4="accent4" accent5="accent5" accent6="accent6" hlink="hlink" folHlink="folHlink"/>
+  <p:notesStyle>
+    <a:lvl1pPr marL="0" algn="l" defTabSz="457200" rtl="0" eaLnBrk="1" latinLnBrk="0" hangingPunct="1">
+      <a:defRPr sz="1200" kern="1200">
+        <a:solidFill>
+          <a:schemeClr val="tx1"/>
+        </a:solidFill>
+        <a:latin typeface="+mn-lt"/>
+        <a:ea typeface="+mn-ea"/>
+        <a:cs typeface="+mn-cs"/>
+      </a:defRPr>
+    </a:lvl1pPr>
+    <a:lvl2pPr marL="457200" algn="l" defTabSz="457200" rtl="0" eaLnBrk="1" latinLnBrk="0" hangingPunct="1">
+      <a:defRPr sz="1200" kern="1200">
+        <a:solidFill>
+          <a:schemeClr val="tx1"/>
+        </a:solidFill>
+        <a:latin typeface="+mn-lt"/>
+        <a:ea typeface="+mn-ea"/>
+        <a:cs typeface="+mn-cs"/>
+      </a:defRPr>
+    </a:lvl2pPr>
+    <a:lvl3pPr marL="914400" algn="l" defTabSz="457200" rtl="0" eaLnBrk="1" latinLnBrk="0" hangingPunct="1">
+      <a:defRPr sz="1200" kern="1200">
+        <a:solidFill>
+          <a:schemeClr val="tx1"/>
+        </a:solidFill>
+        <a:latin typeface="+mn-lt"/>
+        <a:ea typeface="+mn-ea"/>
+        <a:cs typeface="+mn-cs"/>
+      </a:defRPr>
+    </a:lvl3pPr>
+    <a:lvl4pPr marL="1371600" algn="l" defTabSz="457200" rtl="0" eaLnBrk="1" latinLnBrk="0" hangingPunct="1">
+      <a:defRPr sz="1200" kern="1200">
+        <a:solidFill>
+          <a:schemeClr val="tx1"/>
+        </a:solidFill>
+        <a:latin typeface="+mn-lt"/>
+        <a:ea typeface="+mn-ea"/>
+        <a:cs typeface="+mn-cs"/>
+      </a:defRPr>
+    </a:lvl4pPr>
+    <a:lvl5pPr marL="1828800" algn="l" defTabSz="457200" rtl="0" eaLnBrk="1" latinLnBrk="0" hangingPunct="1">
+      <a:defRPr sz="1200" kern="1200">
+        <a:solidFill>
+          <a:schemeClr val="tx1"/>
+        </a:solidFill>
+        <a:latin typeface="+mn-lt"/>
+        <a:ea typeface="+mn-ea"/>
+        <a:cs typeface="+mn-cs"/>
+      </a:defRPr>
+    </a:lvl5pPr>
+    <a:lvl6pPr marL="2286000" algn="l" defTabSz="457200" rtl="0" eaLnBrk="1" latinLnBrk="0" hangingPunct="1">
+      <a:defRPr sz="1200" kern="1200">
+        <a:solidFill>
+          <a:schemeClr val="tx1"/>
+        </a:solidFill>
+        <a:latin typeface="+mn-lt"/>
+        <a:ea typeface="+mn-ea"/>
+        <a:cs typeface="+mn-cs"/>
+      </a:defRPr>
+    </a:lvl6pPr>
+    <a:lvl7pPr marL="2743200" algn="l" defTabSz="457200" rtl="0" eaLnBrk="1" latinLnBrk="0" hangingPunct="1">
+      <a:defRPr sz="1200" kern="1200">
+        <a:solidFill>
+          <a:schemeClr val="tx1"/>
+        </a:solidFill>
+        <a:latin typeface="+mn-lt"/>
+        <a:ea typeface="+mn-ea"/>
+        <a:cs typeface="+mn-cs"/>
+      </a:defRPr>
+    </a:lvl7pPr>
+    <a:lvl8pPr marL="3200400" algn="l" defTabSz="457200" rtl="0" eaLnBrk="1" latinLnBrk="0" hangingPunct="1">
+      <a:defRPr sz="1200" kern="1200">
+        <a:solidFill>
+          <a:schemeClr val="tx1"/>
+        </a:solidFill>
+        <a:latin typeface="+mn-lt"/>
+        <a:ea typeface="+mn-ea"/>
+        <a:cs typeface="+mn-cs"/>
+      </a:defRPr>
+    </a:lvl8pPr>
+    <a:lvl9pPr marL="3657600" algn="l" defTabSz="457200" rtl="0" eaLnBrk="1" latinLnBrk="0" hangingPunct="1">
+      <a:defRPr sz="1200" kern="1200">
+        <a:solidFill>
+          <a:schemeClr val="tx1"/>
+        </a:solidFill>
+        <a:latin typeface="+mn-lt"/>
+        <a:ea typeface="+mn-ea"/>
+        <a:cs typeface="+mn-cs"/>
+      </a:defRPr>
+    </a:lvl9pPr>
+  </p:notesStyle>
+</p:notesMaster>
+</file>
+
+<file path=ppt/notesSlides/notesSlide1.xml><?xml version="1.0" encoding="utf-8"?>
+<p:notes xmlns:a="http://schemas.openxmlformats.org/drawingml/2006/main" xmlns:p="http://schemas.openxmlformats.org/presentationml/2006/main" xmlns:r="http://schemas.openxmlformats.org/officeDocument/2006/relationships">
+  <p:cSld>
+    <p:spTree>
+      <p:nvGrpSpPr>
+        <p:cNvPr id="1" name=""/>
+        <p:cNvGrpSpPr/>
+        <p:nvPr/>
+      </p:nvGrpSpPr>
+      <p:grpSpPr>
+        <a:xfrm>
+          <a:off x="0" y="0"/>
+          <a:ext cx="0" cy="0"/>
+          <a:chOff x="0" y="0"/>
+          <a:chExt cx="0" cy="0"/>
+        </a:xfrm>
+      </p:grpSpPr>
+      <p:sp>
+        <p:nvSpPr>
+          <p:cNvPr id="2" name="Slide Image Placeholder 1"/>
+          <p:cNvSpPr>
+            <a:spLocks noGrp="1"/>
+          </p:cNvSpPr>
+          <p:nvPr>
+            <p:ph type="sldImg" idx="2"/>
+          </p:nvPr>
+        </p:nvSpPr>
+        <p:spPr/>
+      </p:sp>
+      <p:sp>
+        <p:nvSpPr>
+          <p:cNvPr id="3" name="Notes Placeholder 2"/>
+          <p:cNvSpPr>
+            <a:spLocks noGrp="1"/>
+          </p:cNvSpPr>
+          <p:nvPr>
+            <p:ph type="body" idx="3" sz="quarter"/>
+          </p:nvPr>
+        </p:nvSpPr>
+        <p:spPr/>
+        <p:txBody>
+          <a:bodyPr/>
+          <a:lstStyle/>
+          <a:p>
+            <a:r>
+              <a:t>Una aplicacion con ventanas no funciona asi.</a:t>
+            </a:r>
+          </a:p>
+          <a:p/>
+          <a:p>
+            <a:r>
+              <a:t>Cada una de esas acciones se convierte en un objeto de evento que entra a una cola, y Swing va sacando esos eventos uno por uno y le avisa al objeto que previamente dijo 'a mi me interesa ese boton'.</a:t>
+            </a:r>
+          </a:p>
+          <a:p/>
+          <a:p>
+            <a:r>
+              <a:t>Eso es programacion dirigida por eventos: usted ya no decide cuando corre su codigo; usted lo deja escrito y registrado, y quien decide cuando se ejecuta es la recepcionista de Huellitas el dia que oprima 'Registrar mascota'.</a:t>
+            </a:r>
+          </a:p>
+          <a:p/>
+          <a:p>
+            <a:r>
+              <a:t>Por eso el metodo que guarda la mascota nunca aparece llamado desde el main: aparece registrado, no llamado, y esa diferencia es la que hay que entender hoy.</a:t>
+            </a:r>
+          </a:p>
+        </p:txBody>
+      </p:sp>
+      <p:sp>
+        <p:nvSpPr>
+          <p:cNvPr id="4" name="Slide Number Placeholder 3"/>
+          <p:cNvSpPr>
+            <a:spLocks noGrp="1"/>
+          </p:cNvSpPr>
+          <p:nvPr>
+            <p:ph type="sldNum" idx="5" sz="quarter"/>
+          </p:nvPr>
+        </p:nvSpPr>
+        <p:spPr/>
+      </p:sp>
+    </p:spTree>
+  </p:cSld>
+  <p:clrMapOvr>
+    <a:masterClrMapping/>
+  </p:clrMapOvr>
+</p:notes>
+</file>
+
+<file path=ppt/notesSlides/notesSlide2.xml><?xml version="1.0" encoding="utf-8"?>
+<p:notes xmlns:a="http://schemas.openxmlformats.org/drawingml/2006/main" xmlns:p="http://schemas.openxmlformats.org/presentationml/2006/main" xmlns:r="http://schemas.openxmlformats.org/officeDocument/2006/relationships">
+  <p:cSld>
+    <p:spTree>
+      <p:nvGrpSpPr>
+        <p:cNvPr id="1" name=""/>
+        <p:cNvGrpSpPr/>
+        <p:nvPr/>
+      </p:nvGrpSpPr>
+      <p:grpSpPr>
+        <a:xfrm>
+          <a:off x="0" y="0"/>
+          <a:ext cx="0" cy="0"/>
+          <a:chOff x="0" y="0"/>
+          <a:chExt cx="0" cy="0"/>
+        </a:xfrm>
+      </p:grpSpPr>
+      <p:sp>
+        <p:nvSpPr>
+          <p:cNvPr id="2" name="Slide Image Placeholder 1"/>
+          <p:cNvSpPr>
+            <a:spLocks noGrp="1"/>
+          </p:cNvSpPr>
+          <p:nvPr>
+            <p:ph type="sldImg" idx="2"/>
+          </p:nvPr>
+        </p:nvSpPr>
+        <p:spPr/>
+      </p:sp>
+      <p:sp>
+        <p:nvSpPr>
+          <p:cNvPr id="3" name="Notes Placeholder 2"/>
+          <p:cNvSpPr>
+            <a:spLocks noGrp="1"/>
+          </p:cNvSpPr>
+          <p:nvPr>
+            <p:ph type="body" idx="3" sz="quarter"/>
+          </p:nvPr>
+        </p:nvSpPr>
+        <p:spPr/>
+        <p:txBody>
+          <a:bodyPr/>
+          <a:lstStyle/>
+          <a:p>
+            <a:r>
+              <a:t>Con una de dos metodos no compila, y el mensaje del editor no lo dice con esas palabras y ahi adentro va su llamada.</a:t>
+            </a:r>
+          </a:p>
+        </p:txBody>
+      </p:sp>
+      <p:sp>
+        <p:nvSpPr>
+          <p:cNvPr id="4" name="Slide Number Placeholder 3"/>
+          <p:cNvSpPr>
+            <a:spLocks noGrp="1"/>
+          </p:cNvSpPr>
+          <p:nvPr>
+            <p:ph type="sldNum" idx="5" sz="quarter"/>
+          </p:nvPr>
+        </p:nvSpPr>
+        <p:spPr/>
+      </p:sp>
+    </p:spTree>
+  </p:cSld>
+  <p:clrMapOvr>
+    <a:masterClrMapping/>
+  </p:clrMapOvr>
+</p:notes>
+</file>
+
+<file path=ppt/notesSlides/notesSlide3.xml><?xml version="1.0" encoding="utf-8"?>
+<p:notes xmlns:a="http://schemas.openxmlformats.org/drawingml/2006/main" xmlns:p="http://schemas.openxmlformats.org/presentationml/2006/main" xmlns:r="http://schemas.openxmlformats.org/officeDocument/2006/relationships">
+  <p:cSld>
+    <p:spTree>
+      <p:nvGrpSpPr>
+        <p:cNvPr id="1" name=""/>
+        <p:cNvGrpSpPr/>
+        <p:nvPr/>
+      </p:nvGrpSpPr>
+      <p:grpSpPr>
+        <a:xfrm>
+          <a:off x="0" y="0"/>
+          <a:ext cx="0" cy="0"/>
+          <a:chOff x="0" y="0"/>
+          <a:chExt cx="0" cy="0"/>
+        </a:xfrm>
+      </p:grpSpPr>
+      <p:sp>
+        <p:nvSpPr>
+          <p:cNvPr id="2" name="Slide Image Placeholder 1"/>
+          <p:cNvSpPr>
+            <a:spLocks noGrp="1"/>
+          </p:cNvSpPr>
+          <p:nvPr>
+            <p:ph type="sldImg" idx="2"/>
+          </p:nvPr>
+        </p:nvSpPr>
+        <p:spPr/>
+      </p:sp>
+      <p:sp>
+        <p:nvSpPr>
+          <p:cNvPr id="3" name="Notes Placeholder 2"/>
+          <p:cNvSpPr>
+            <a:spLocks noGrp="1"/>
+          </p:cNvSpPr>
+          <p:nvPr>
+            <p:ph type="body" idx="3" sz="quarter"/>
+          </p:nvPr>
+        </p:nvSpPr>
+        <p:spPr/>
+        <p:txBody>
+          <a:bodyPr/>
+          <a:lstStyle/>
+          <a:p>
+            <a:r>
+              <a:t>Separar la logica de la interfaz significa que la ventana no conoce reglas de negocio y que las reglas no saben que existe una ventana.</a:t>
+            </a:r>
+          </a:p>
+          <a:p/>
+          <a:p>
+            <a:r>
+              <a:t>Si toca reescribir todo porque la conversion de la edad estaba adentro del boton, el diseño esta mal.</a:t>
+            </a:r>
+          </a:p>
+        </p:txBody>
+      </p:sp>
+      <p:sp>
+        <p:nvSpPr>
+          <p:cNvPr id="4" name="Slide Number Placeholder 3"/>
+          <p:cNvSpPr>
+            <a:spLocks noGrp="1"/>
+          </p:cNvSpPr>
+          <p:nvPr>
+            <p:ph type="sldNum" idx="5" sz="quarter"/>
+          </p:nvPr>
+        </p:nvSpPr>
+        <p:spPr/>
+      </p:sp>
+    </p:spTree>
+  </p:cSld>
+  <p:clrMapOvr>
+    <a:masterClrMapping/>
+  </p:clrMapOvr>
+</p:notes>
+</file>
+
+<file path=ppt/notesSlides/notesSlide4.xml><?xml version="1.0" encoding="utf-8"?>
+<p:notes xmlns:a="http://schemas.openxmlformats.org/drawingml/2006/main" xmlns:p="http://schemas.openxmlformats.org/presentationml/2006/main" xmlns:r="http://schemas.openxmlformats.org/officeDocument/2006/relationships">
+  <p:cSld>
+    <p:spTree>
+      <p:nvGrpSpPr>
+        <p:cNvPr id="1" name=""/>
+        <p:cNvGrpSpPr/>
+        <p:nvPr/>
+      </p:nvGrpSpPr>
+      <p:grpSpPr>
+        <a:xfrm>
+          <a:off x="0" y="0"/>
+          <a:ext cx="0" cy="0"/>
+          <a:chOff x="0" y="0"/>
+          <a:chExt cx="0" cy="0"/>
+        </a:xfrm>
+      </p:grpSpPr>
+      <p:sp>
+        <p:nvSpPr>
+          <p:cNvPr id="2" name="Slide Image Placeholder 1"/>
+          <p:cNvSpPr>
+            <a:spLocks noGrp="1"/>
+          </p:cNvSpPr>
+          <p:nvPr>
+            <p:ph type="sldImg" idx="2"/>
+          </p:nvPr>
+        </p:nvSpPr>
+        <p:spPr/>
+      </p:sp>
+      <p:sp>
+        <p:nvSpPr>
+          <p:cNvPr id="3" name="Notes Placeholder 2"/>
+          <p:cNvSpPr>
+            <a:spLocks noGrp="1"/>
+          </p:cNvSpPr>
+          <p:nvPr>
+            <p:ph type="body" idx="3" sz="quarter"/>
+          </p:nvPr>
+        </p:nvSpPr>
+        <p:spPr/>
+        <p:txBody>
+          <a:bodyPr/>
+          <a:lstStyle/>
+          <a:p>
+            <a:r>
+              <a:t>Vale la pena desarmar en camara lenta lo que ocurre en un click de 'Registrar mascota'.</a:t>
+            </a:r>
+          </a:p>
+          <a:p/>
+          <a:p>
+            <a:r>
+              <a:t>Cuarto, la vista atrapa esa excepcion y la convierte en un JOptionPane, o, si no hubo error, limpia los campos y refresca el area de listado.</a:t>
+            </a:r>
+          </a:p>
+        </p:txBody>
+      </p:sp>
+      <p:sp>
+        <p:nvSpPr>
+          <p:cNvPr id="4" name="Slide Number Placeholder 3"/>
+          <p:cNvSpPr>
+            <a:spLocks noGrp="1"/>
+          </p:cNvSpPr>
+          <p:nvPr>
+            <p:ph type="sldNum" idx="5" sz="quarter"/>
+          </p:nvPr>
+        </p:nvSpPr>
+        <p:spPr/>
+      </p:sp>
+    </p:spTree>
+  </p:cSld>
+  <p:clrMapOvr>
+    <a:masterClrMapping/>
+  </p:clrMapOvr>
+</p:notes>
+</file>
+
+<file path=ppt/notesSlides/notesSlide5.xml><?xml version="1.0" encoding="utf-8"?>
+<p:notes xmlns:a="http://schemas.openxmlformats.org/drawingml/2006/main" xmlns:p="http://schemas.openxmlformats.org/presentationml/2006/main" xmlns:r="http://schemas.openxmlformats.org/officeDocument/2006/relationships">
+  <p:cSld>
+    <p:spTree>
+      <p:nvGrpSpPr>
+        <p:cNvPr id="1" name=""/>
+        <p:cNvGrpSpPr/>
+        <p:nvPr/>
+      </p:nvGrpSpPr>
+      <p:grpSpPr>
+        <a:xfrm>
+          <a:off x="0" y="0"/>
+          <a:ext cx="0" cy="0"/>
+          <a:chOff x="0" y="0"/>
+          <a:chExt cx="0" cy="0"/>
+        </a:xfrm>
+      </p:grpSpPr>
+      <p:sp>
+        <p:nvSpPr>
+          <p:cNvPr id="2" name="Slide Image Placeholder 1"/>
+          <p:cNvSpPr>
+            <a:spLocks noGrp="1"/>
+          </p:cNvSpPr>
+          <p:nvPr>
+            <p:ph type="sldImg" idx="2"/>
+          </p:nvPr>
+        </p:nvSpPr>
+        <p:spPr/>
+      </p:sp>
+      <p:sp>
+        <p:nvSpPr>
+          <p:cNvPr id="3" name="Notes Placeholder 2"/>
+          <p:cNvSpPr>
+            <a:spLocks noGrp="1"/>
+          </p:cNvSpPr>
+          <p:nvPr>
+            <p:ph type="body" idx="3" sz="quarter"/>
+          </p:nvPr>
+        </p:nvSpPr>
+        <p:spPr/>
+        <p:txBody>
+          <a:bodyPr/>
+          <a:lstStyle/>
+          <a:p>
+            <a:r>
+              <a:t>Dos detalles mas que le van a servir.</a:t>
+            </a:r>
+          </a:p>
+          <a:p/>
+          <a:p>
+            <a:r>
+              <a:t>Para eso existe SwingWorker.</a:t>
+            </a:r>
+          </a:p>
+        </p:txBody>
+      </p:sp>
+      <p:sp>
+        <p:nvSpPr>
+          <p:cNvPr id="4" name="Slide Number Placeholder 3"/>
+          <p:cNvSpPr>
+            <a:spLocks noGrp="1"/>
+          </p:cNvSpPr>
+          <p:nvPr>
+            <p:ph type="sldNum" idx="5" sz="quarter"/>
+          </p:nvPr>
+        </p:nvSpPr>
+        <p:spPr/>
+      </p:sp>
+    </p:spTree>
+  </p:cSld>
+  <p:clrMapOvr>
+    <a:masterClrMapping/>
+  </p:clrMapOvr>
+</p:notes>
 </file>
 
 <file path=ppt/slideLayouts/slideLayout1.xml><?xml version="1.0" encoding="utf-8"?>
@@ -7969,7 +8699,7 @@
                 </a:solidFill>
                 <a:latin typeface="Calibri"/>
               </a:rPr>
-              <a:t>Encuadre de hoy · Objetivo del PI</a:t>
+              <a:t>Encuadre de hoy</a:t>
             </a:r>
           </a:p>
         </p:txBody>
@@ -8017,7 +8747,7 @@
                 </a:solidFill>
                 <a:latin typeface="Calibri"/>
               </a:rPr>
-              <a:t>Hoy avanzamos VetCare en:</a:t>
+              <a:t>Tema de hoy:</a:t>
             </a:r>
             <a:r>
               <a:rPr sz="2000" b="0" i="0">
@@ -8026,7 +8756,7 @@
                 </a:solidFill>
                 <a:latin typeface="Calibri"/>
               </a:rPr>
-              <a:t> El formulario de VetCare queda conectado: al oprimir 'Registrar mascota' el objeto entra al ArrayList y el listado en pantalla se actualiza.</a:t>
+              <a:t> Eventos y controladores · ActionListener — El boton que de verdad guarda</a:t>
             </a:r>
           </a:p>
           <a:p>
@@ -8085,41 +8815,23 @@
                 </a:solidFill>
                 <a:latin typeface="Calibri"/>
               </a:rPr>
-              <a:t>–   </a:t>
-            </a:r>
-            <a:r>
-              <a:rPr sz="2000" b="1" i="0">
+              <a:t>–   Primero el concepto, despues el codigo que lo muestra y la demo en vivo.</a:t>
+            </a:r>
+          </a:p>
+          <a:p>
+            <a:pPr>
+              <a:spcAft>
+                <a:spcPts val="800"/>
+              </a:spcAft>
+            </a:pPr>
+            <a:r>
+              <a:rPr sz="2000" b="0" i="0">
                 <a:solidFill>
                   <a:srgbClr val="333333"/>
                 </a:solidFill>
                 <a:latin typeface="Calibri"/>
               </a:rPr>
-              <a:t>Entregable de hoy:</a:t>
-            </a:r>
-            <a:r>
-              <a:rPr sz="2000" b="0" i="0">
-                <a:solidFill>
-                  <a:srgbClr val="333333"/>
-                </a:solidFill>
-                <a:latin typeface="Calibri"/>
-              </a:rPr>
-              <a:t> Proyecto VetCare con la ventana de registro operativa y la clase ControladorRegistro separada de la vista, comprimido y subido a la plataforma del curso.</a:t>
-            </a:r>
-          </a:p>
-          <a:p>
-            <a:pPr>
-              <a:spcAft>
-                <a:spcPts val="800"/>
-              </a:spcAft>
-            </a:pPr>
-            <a:r>
-              <a:rPr sz="2000" b="0" i="0">
-                <a:solidFill>
-                  <a:srgbClr val="333333"/>
-                </a:solidFill>
-                <a:latin typeface="Calibri"/>
-              </a:rPr>
-              <a:t>–   La teoria esta al servicio del producto: al salir, VetCare avanzo.</a:t>
+              <a:t>–   Todo con el mismo dominio: la clinica veterinaria Huellitas (VetCare).</a:t>
             </a:r>
           </a:p>
         </p:txBody>
@@ -13615,7 +14327,7 @@
                 </a:solidFill>
                 <a:latin typeface="Calibri"/>
               </a:rPr>
-              <a:t>Encuadre y repaso del avance</a:t>
+              <a:t>Encuadre y repaso de la clase anterior</a:t>
             </a:r>
           </a:p>
         </p:txBody>
@@ -13960,7 +14672,7 @@
                 </a:solidFill>
                 <a:latin typeface="Calibri"/>
               </a:rPr>
-              <a:t>Taller guiado = avance del PI</a:t>
+              <a:t>Practica (opcional, guia en la carpeta)</a:t>
             </a:r>
           </a:p>
         </p:txBody>
@@ -14075,7 +14787,7 @@
                 </a:solidFill>
                 <a:latin typeface="Calibri"/>
               </a:rPr>
-              <a:t>Criterios de exito y cierre</a:t>
+              <a:t>Repaso de conceptos y cierre</a:t>
             </a:r>
           </a:p>
         </p:txBody>
@@ -14203,3163 +14915,6 @@
         <p:spPr>
           <a:xfrm>
             <a:off x="0" y="0"/>
-            <a:ext cx="12191695" cy="960120"/>
-          </a:xfrm>
-          <a:prstGeom prst="rect">
-            <a:avLst/>
-          </a:prstGeom>
-          <a:solidFill>
-            <a:srgbClr val="095292"/>
-          </a:solidFill>
-          <a:ln>
-            <a:noFill/>
-          </a:ln>
-        </p:spPr>
-        <p:style>
-          <a:lnRef idx="1">
-            <a:schemeClr val="accent1"/>
-          </a:lnRef>
-          <a:fillRef idx="3">
-            <a:schemeClr val="accent1"/>
-          </a:fillRef>
-          <a:effectRef idx="2">
-            <a:schemeClr val="accent1"/>
-          </a:effectRef>
-          <a:fontRef idx="minor">
-            <a:schemeClr val="lt1"/>
-          </a:fontRef>
-        </p:style>
-        <p:txBody>
-          <a:bodyPr rtlCol="0" anchor="ctr"/>
-          <a:lstStyle/>
-          <a:p>
-            <a:pPr algn="ctr"/>
-          </a:p>
-        </p:txBody>
-      </p:sp>
-      <p:sp>
-        <p:nvSpPr>
-          <p:cNvPr id="3" name="Rectangle 2"/>
-          <p:cNvSpPr/>
-          <p:nvPr/>
-        </p:nvSpPr>
-        <p:spPr>
-          <a:xfrm>
-            <a:off x="0" y="960120"/>
-            <a:ext cx="12191695" cy="41148"/>
-          </a:xfrm>
-          <a:prstGeom prst="rect">
-            <a:avLst/>
-          </a:prstGeom>
-          <a:solidFill>
-            <a:srgbClr val="FFD000"/>
-          </a:solidFill>
-          <a:ln>
-            <a:noFill/>
-          </a:ln>
-        </p:spPr>
-        <p:style>
-          <a:lnRef idx="1">
-            <a:schemeClr val="accent1"/>
-          </a:lnRef>
-          <a:fillRef idx="3">
-            <a:schemeClr val="accent1"/>
-          </a:fillRef>
-          <a:effectRef idx="2">
-            <a:schemeClr val="accent1"/>
-          </a:effectRef>
-          <a:fontRef idx="minor">
-            <a:schemeClr val="lt1"/>
-          </a:fontRef>
-        </p:style>
-        <p:txBody>
-          <a:bodyPr rtlCol="0" anchor="ctr"/>
-          <a:lstStyle/>
-          <a:p>
-            <a:pPr algn="ctr"/>
-          </a:p>
-        </p:txBody>
-      </p:sp>
-      <p:sp>
-        <p:nvSpPr>
-          <p:cNvPr id="4" name="TextBox 3"/>
-          <p:cNvSpPr txBox="1"/>
-          <p:nvPr/>
-        </p:nvSpPr>
-        <p:spPr>
-          <a:xfrm>
-            <a:off x="457200" y="164592"/>
-            <a:ext cx="11277295" cy="502920"/>
-          </a:xfrm>
-          <a:prstGeom prst="rect">
-            <a:avLst/>
-          </a:prstGeom>
-          <a:noFill/>
-        </p:spPr>
-        <p:txBody>
-          <a:bodyPr wrap="square">
-            <a:spAutoFit/>
-          </a:bodyPr>
-          <a:lstStyle/>
-          <a:p>
-            <a:r>
-              <a:rPr sz="2600" b="1" i="0">
-                <a:solidFill>
-                  <a:srgbClr val="FFFFFF"/>
-                </a:solidFill>
-                <a:latin typeface="Calibri"/>
-              </a:rPr>
-              <a:t>Taller PI — por que importa</a:t>
-            </a:r>
-          </a:p>
-        </p:txBody>
-      </p:sp>
-      <p:sp>
-        <p:nvSpPr>
-          <p:cNvPr id="5" name="TextBox 4"/>
-          <p:cNvSpPr txBox="1"/>
-          <p:nvPr/>
-        </p:nvSpPr>
-        <p:spPr>
-          <a:xfrm>
-            <a:off x="457200" y="1170432"/>
-            <a:ext cx="11277295" cy="5230368"/>
-          </a:xfrm>
-          <a:prstGeom prst="rect">
-            <a:avLst/>
-          </a:prstGeom>
-          <a:noFill/>
-        </p:spPr>
-        <p:txBody>
-          <a:bodyPr wrap="square">
-            <a:spAutoFit/>
-          </a:bodyPr>
-          <a:lstStyle/>
-          <a:p>
-            <a:pPr>
-              <a:spcAft>
-                <a:spcPts val="800"/>
-              </a:spcAft>
-            </a:pPr>
-            <a:r>
-              <a:rPr sz="2000" b="0" i="0">
-                <a:solidFill>
-                  <a:srgbClr val="333333"/>
-                </a:solidFill>
-                <a:latin typeface="Calibri"/>
-              </a:rPr>
-              <a:t>–   </a:t>
-            </a:r>
-            <a:r>
-              <a:rPr sz="2000" b="1" i="0">
-                <a:solidFill>
-                  <a:srgbClr val="333333"/>
-                </a:solidFill>
-                <a:latin typeface="Calibri"/>
-              </a:rPr>
-              <a:t>Por que importa al PI:</a:t>
-            </a:r>
-            <a:r>
-              <a:rPr sz="2000" b="0" i="0">
-                <a:solidFill>
-                  <a:srgbClr val="333333"/>
-                </a:solidFill>
-                <a:latin typeface="Calibri"/>
-              </a:rPr>
-              <a:t> el PI exige interfaz grafica y manejo de errores con try-catch; hoy es la clase donde la ventana deja de ser un dibujo bonito y empieza a mover datos reales de la coleccion de mascotas.</a:t>
-            </a:r>
-          </a:p>
-          <a:p>
-            <a:pPr>
-              <a:spcAft>
-                <a:spcPts val="800"/>
-              </a:spcAft>
-            </a:pPr>
-            <a:r>
-              <a:rPr sz="2000" b="0" i="0">
-                <a:solidFill>
-                  <a:srgbClr val="333333"/>
-                </a:solidFill>
-                <a:latin typeface="Calibri"/>
-              </a:rPr>
-              <a:t>–   La separacion vista-controlador que hacemos hoy es la que permitira, en la clase 8, escribir pruebas automaticas sin abrir una sola ventana.</a:t>
-            </a:r>
-          </a:p>
-          <a:p>
-            <a:pPr>
-              <a:spcAft>
-                <a:spcPts val="800"/>
-              </a:spcAft>
-            </a:pPr>
-            <a:r>
-              <a:rPr sz="2000" b="0" i="0">
-                <a:solidFill>
-                  <a:srgbClr val="333333"/>
-                </a:solidFill>
-                <a:latin typeface="Calibri"/>
-              </a:rPr>
-              <a:t>–   Todo lo que falta del PI (agendar cita, buscar expediente por ID, guardar en archivo) repite exactamente el mismo ciclo: leer, validar, delegar, refrescar.</a:t>
-            </a:r>
-          </a:p>
-        </p:txBody>
-      </p:sp>
-      <p:sp>
-        <p:nvSpPr>
-          <p:cNvPr id="6" name="TextBox 5"/>
-          <p:cNvSpPr txBox="1"/>
-          <p:nvPr/>
-        </p:nvSpPr>
-        <p:spPr>
-          <a:xfrm>
-            <a:off x="11185855" y="6473952"/>
-            <a:ext cx="640080" cy="274320"/>
-          </a:xfrm>
-          <a:prstGeom prst="rect">
-            <a:avLst/>
-          </a:prstGeom>
-          <a:noFill/>
-        </p:spPr>
-        <p:txBody>
-          <a:bodyPr wrap="square">
-            <a:spAutoFit/>
-          </a:bodyPr>
-          <a:lstStyle/>
-          <a:p>
-            <a:pPr algn="r"/>
-            <a:r>
-              <a:rPr sz="1100" b="0" i="0">
-                <a:solidFill>
-                  <a:srgbClr val="666666"/>
-                </a:solidFill>
-                <a:latin typeface="Calibri"/>
-              </a:rPr>
-              <a:t>30</a:t>
-            </a:r>
-          </a:p>
-        </p:txBody>
-      </p:sp>
-    </p:spTree>
-  </p:cSld>
-  <p:clrMapOvr>
-    <a:masterClrMapping/>
-  </p:clrMapOvr>
-</p:sld>
-</file>
-
-<file path=ppt/slides/slide31.xml><?xml version="1.0" encoding="utf-8"?>
-<p:sld xmlns:a="http://schemas.openxmlformats.org/drawingml/2006/main" xmlns:p="http://schemas.openxmlformats.org/presentationml/2006/main" xmlns:r="http://schemas.openxmlformats.org/officeDocument/2006/relationships">
-  <p:cSld>
-    <p:bg>
-      <p:bgPr>
-        <a:solidFill>
-          <a:srgbClr val="FFFFFF"/>
-        </a:solidFill>
-        <a:effectLst/>
-      </p:bgPr>
-    </p:bg>
-    <p:spTree>
-      <p:nvGrpSpPr>
-        <p:cNvPr id="1" name=""/>
-        <p:cNvGrpSpPr/>
-        <p:nvPr/>
-      </p:nvGrpSpPr>
-      <p:grpSpPr/>
-      <p:sp>
-        <p:nvSpPr>
-          <p:cNvPr id="2" name="Rectangle 1"/>
-          <p:cNvSpPr/>
-          <p:nvPr/>
-        </p:nvSpPr>
-        <p:spPr>
-          <a:xfrm>
-            <a:off x="0" y="0"/>
-            <a:ext cx="12191695" cy="960120"/>
-          </a:xfrm>
-          <a:prstGeom prst="rect">
-            <a:avLst/>
-          </a:prstGeom>
-          <a:solidFill>
-            <a:srgbClr val="095292"/>
-          </a:solidFill>
-          <a:ln>
-            <a:noFill/>
-          </a:ln>
-        </p:spPr>
-        <p:style>
-          <a:lnRef idx="1">
-            <a:schemeClr val="accent1"/>
-          </a:lnRef>
-          <a:fillRef idx="3">
-            <a:schemeClr val="accent1"/>
-          </a:fillRef>
-          <a:effectRef idx="2">
-            <a:schemeClr val="accent1"/>
-          </a:effectRef>
-          <a:fontRef idx="minor">
-            <a:schemeClr val="lt1"/>
-          </a:fontRef>
-        </p:style>
-        <p:txBody>
-          <a:bodyPr rtlCol="0" anchor="ctr"/>
-          <a:lstStyle/>
-          <a:p>
-            <a:pPr algn="ctr"/>
-          </a:p>
-        </p:txBody>
-      </p:sp>
-      <p:sp>
-        <p:nvSpPr>
-          <p:cNvPr id="3" name="Rectangle 2"/>
-          <p:cNvSpPr/>
-          <p:nvPr/>
-        </p:nvSpPr>
-        <p:spPr>
-          <a:xfrm>
-            <a:off x="0" y="960120"/>
-            <a:ext cx="12191695" cy="41148"/>
-          </a:xfrm>
-          <a:prstGeom prst="rect">
-            <a:avLst/>
-          </a:prstGeom>
-          <a:solidFill>
-            <a:srgbClr val="FFD000"/>
-          </a:solidFill>
-          <a:ln>
-            <a:noFill/>
-          </a:ln>
-        </p:spPr>
-        <p:style>
-          <a:lnRef idx="1">
-            <a:schemeClr val="accent1"/>
-          </a:lnRef>
-          <a:fillRef idx="3">
-            <a:schemeClr val="accent1"/>
-          </a:fillRef>
-          <a:effectRef idx="2">
-            <a:schemeClr val="accent1"/>
-          </a:effectRef>
-          <a:fontRef idx="minor">
-            <a:schemeClr val="lt1"/>
-          </a:fontRef>
-        </p:style>
-        <p:txBody>
-          <a:bodyPr rtlCol="0" anchor="ctr"/>
-          <a:lstStyle/>
-          <a:p>
-            <a:pPr algn="ctr"/>
-          </a:p>
-        </p:txBody>
-      </p:sp>
-      <p:sp>
-        <p:nvSpPr>
-          <p:cNvPr id="4" name="TextBox 3"/>
-          <p:cNvSpPr txBox="1"/>
-          <p:nvPr/>
-        </p:nvSpPr>
-        <p:spPr>
-          <a:xfrm>
-            <a:off x="457200" y="164592"/>
-            <a:ext cx="11277295" cy="502920"/>
-          </a:xfrm>
-          <a:prstGeom prst="rect">
-            <a:avLst/>
-          </a:prstGeom>
-          <a:noFill/>
-        </p:spPr>
-        <p:txBody>
-          <a:bodyPr wrap="square">
-            <a:spAutoFit/>
-          </a:bodyPr>
-          <a:lstStyle/>
-          <a:p>
-            <a:r>
-              <a:rPr sz="2600" b="1" i="0">
-                <a:solidFill>
-                  <a:srgbClr val="FFFFFF"/>
-                </a:solidFill>
-                <a:latin typeface="Calibri"/>
-              </a:rPr>
-              <a:t>Taller PI — punto de partida</a:t>
-            </a:r>
-          </a:p>
-        </p:txBody>
-      </p:sp>
-      <p:sp>
-        <p:nvSpPr>
-          <p:cNvPr id="5" name="TextBox 4"/>
-          <p:cNvSpPr txBox="1"/>
-          <p:nvPr/>
-        </p:nvSpPr>
-        <p:spPr>
-          <a:xfrm>
-            <a:off x="457200" y="1170432"/>
-            <a:ext cx="11277295" cy="5230368"/>
-          </a:xfrm>
-          <a:prstGeom prst="rect">
-            <a:avLst/>
-          </a:prstGeom>
-          <a:noFill/>
-        </p:spPr>
-        <p:txBody>
-          <a:bodyPr wrap="square">
-            <a:spAutoFit/>
-          </a:bodyPr>
-          <a:lstStyle/>
-          <a:p>
-            <a:pPr>
-              <a:spcAft>
-                <a:spcPts val="800"/>
-              </a:spcAft>
-            </a:pPr>
-            <a:r>
-              <a:rPr sz="2000" b="0" i="0">
-                <a:solidFill>
-                  <a:srgbClr val="333333"/>
-                </a:solidFill>
-                <a:latin typeface="Calibri"/>
-              </a:rPr>
-              <a:t>–   El proyecto VetCare ya tiene la clase Mascota (id, nombre, especie, edad) y un ArrayList que hasta hoy se llenaba con datos quemados dentro del main.</a:t>
-            </a:r>
-          </a:p>
-          <a:p>
-            <a:pPr>
-              <a:spcAft>
-                <a:spcPts val="800"/>
-              </a:spcAft>
-            </a:pPr>
-            <a:r>
-              <a:rPr sz="2000" b="0" i="0">
-                <a:solidFill>
-                  <a:srgbClr val="333333"/>
-                </a:solidFill>
-                <a:latin typeface="Calibri"/>
-              </a:rPr>
-              <a:t>–   La ventana de registro ya existe pero el boton 'Registrar mascota' no hace nada: se oprime y la pantalla queda igualita.</a:t>
-            </a:r>
-          </a:p>
-          <a:p>
-            <a:pPr>
-              <a:spcAft>
-                <a:spcPts val="800"/>
-              </a:spcAft>
-            </a:pPr>
-            <a:r>
-              <a:rPr sz="2000" b="0" i="0">
-                <a:solidFill>
-                  <a:srgbClr val="333333"/>
-                </a:solidFill>
-                <a:latin typeface="Calibri"/>
-              </a:rPr>
-              <a:t>–   Datos de partida para las pruebas de hoy: la clinica Huellitas necesita registrar a M-001 Kira (perro, 4), M-002 Michi (gato, 2) y M-003 Rocky (perro, 7).</a:t>
-            </a:r>
-          </a:p>
-        </p:txBody>
-      </p:sp>
-      <p:sp>
-        <p:nvSpPr>
-          <p:cNvPr id="6" name="TextBox 5"/>
-          <p:cNvSpPr txBox="1"/>
-          <p:nvPr/>
-        </p:nvSpPr>
-        <p:spPr>
-          <a:xfrm>
-            <a:off x="11185855" y="6473952"/>
-            <a:ext cx="640080" cy="274320"/>
-          </a:xfrm>
-          <a:prstGeom prst="rect">
-            <a:avLst/>
-          </a:prstGeom>
-          <a:noFill/>
-        </p:spPr>
-        <p:txBody>
-          <a:bodyPr wrap="square">
-            <a:spAutoFit/>
-          </a:bodyPr>
-          <a:lstStyle/>
-          <a:p>
-            <a:pPr algn="r"/>
-            <a:r>
-              <a:rPr sz="1100" b="0" i="0">
-                <a:solidFill>
-                  <a:srgbClr val="666666"/>
-                </a:solidFill>
-                <a:latin typeface="Calibri"/>
-              </a:rPr>
-              <a:t>31</a:t>
-            </a:r>
-          </a:p>
-        </p:txBody>
-      </p:sp>
-    </p:spTree>
-  </p:cSld>
-  <p:clrMapOvr>
-    <a:masterClrMapping/>
-  </p:clrMapOvr>
-</p:sld>
-</file>
-
-<file path=ppt/slides/slide32.xml><?xml version="1.0" encoding="utf-8"?>
-<p:sld xmlns:a="http://schemas.openxmlformats.org/drawingml/2006/main" xmlns:p="http://schemas.openxmlformats.org/presentationml/2006/main" xmlns:r="http://schemas.openxmlformats.org/officeDocument/2006/relationships">
-  <p:cSld>
-    <p:bg>
-      <p:bgPr>
-        <a:solidFill>
-          <a:srgbClr val="FFFFFF"/>
-        </a:solidFill>
-        <a:effectLst/>
-      </p:bgPr>
-    </p:bg>
-    <p:spTree>
-      <p:nvGrpSpPr>
-        <p:cNvPr id="1" name=""/>
-        <p:cNvGrpSpPr/>
-        <p:nvPr/>
-      </p:nvGrpSpPr>
-      <p:grpSpPr/>
-      <p:sp>
-        <p:nvSpPr>
-          <p:cNvPr id="2" name="Rectangle 1"/>
-          <p:cNvSpPr/>
-          <p:nvPr/>
-        </p:nvSpPr>
-        <p:spPr>
-          <a:xfrm>
-            <a:off x="0" y="0"/>
-            <a:ext cx="12191695" cy="960120"/>
-          </a:xfrm>
-          <a:prstGeom prst="rect">
-            <a:avLst/>
-          </a:prstGeom>
-          <a:solidFill>
-            <a:srgbClr val="095292"/>
-          </a:solidFill>
-          <a:ln>
-            <a:noFill/>
-          </a:ln>
-        </p:spPr>
-        <p:style>
-          <a:lnRef idx="1">
-            <a:schemeClr val="accent1"/>
-          </a:lnRef>
-          <a:fillRef idx="3">
-            <a:schemeClr val="accent1"/>
-          </a:fillRef>
-          <a:effectRef idx="2">
-            <a:schemeClr val="accent1"/>
-          </a:effectRef>
-          <a:fontRef idx="minor">
-            <a:schemeClr val="lt1"/>
-          </a:fontRef>
-        </p:style>
-        <p:txBody>
-          <a:bodyPr rtlCol="0" anchor="ctr"/>
-          <a:lstStyle/>
-          <a:p>
-            <a:pPr algn="ctr"/>
-          </a:p>
-        </p:txBody>
-      </p:sp>
-      <p:sp>
-        <p:nvSpPr>
-          <p:cNvPr id="3" name="Rectangle 2"/>
-          <p:cNvSpPr/>
-          <p:nvPr/>
-        </p:nvSpPr>
-        <p:spPr>
-          <a:xfrm>
-            <a:off x="0" y="960120"/>
-            <a:ext cx="12191695" cy="41148"/>
-          </a:xfrm>
-          <a:prstGeom prst="rect">
-            <a:avLst/>
-          </a:prstGeom>
-          <a:solidFill>
-            <a:srgbClr val="FFD000"/>
-          </a:solidFill>
-          <a:ln>
-            <a:noFill/>
-          </a:ln>
-        </p:spPr>
-        <p:style>
-          <a:lnRef idx="1">
-            <a:schemeClr val="accent1"/>
-          </a:lnRef>
-          <a:fillRef idx="3">
-            <a:schemeClr val="accent1"/>
-          </a:fillRef>
-          <a:effectRef idx="2">
-            <a:schemeClr val="accent1"/>
-          </a:effectRef>
-          <a:fontRef idx="minor">
-            <a:schemeClr val="lt1"/>
-          </a:fontRef>
-        </p:style>
-        <p:txBody>
-          <a:bodyPr rtlCol="0" anchor="ctr"/>
-          <a:lstStyle/>
-          <a:p>
-            <a:pPr algn="ctr"/>
-          </a:p>
-        </p:txBody>
-      </p:sp>
-      <p:sp>
-        <p:nvSpPr>
-          <p:cNvPr id="4" name="TextBox 3"/>
-          <p:cNvSpPr txBox="1"/>
-          <p:nvPr/>
-        </p:nvSpPr>
-        <p:spPr>
-          <a:xfrm>
-            <a:off x="457200" y="164592"/>
-            <a:ext cx="11277295" cy="502920"/>
-          </a:xfrm>
-          <a:prstGeom prst="rect">
-            <a:avLst/>
-          </a:prstGeom>
-          <a:noFill/>
-        </p:spPr>
-        <p:txBody>
-          <a:bodyPr wrap="square">
-            <a:spAutoFit/>
-          </a:bodyPr>
-          <a:lstStyle/>
-          <a:p>
-            <a:r>
-              <a:rPr sz="2600" b="1" i="0">
-                <a:solidFill>
-                  <a:srgbClr val="FFFFFF"/>
-                </a:solidFill>
-                <a:latin typeface="Calibri"/>
-              </a:rPr>
-              <a:t>Taller PI — pasos guiados</a:t>
-            </a:r>
-          </a:p>
-        </p:txBody>
-      </p:sp>
-      <p:sp>
-        <p:nvSpPr>
-          <p:cNvPr id="5" name="Rounded Rectangle 4"/>
-          <p:cNvSpPr/>
-          <p:nvPr/>
-        </p:nvSpPr>
-        <p:spPr>
-          <a:xfrm>
-            <a:off x="457200" y="1234440"/>
-            <a:ext cx="11277295" cy="950976"/>
-          </a:xfrm>
-          <a:prstGeom prst="roundRect">
-            <a:avLst>
-              <a:gd name="adj" fmla="val 12000"/>
-            </a:avLst>
-          </a:prstGeom>
-          <a:solidFill>
-            <a:srgbClr val="F2F2F2"/>
-          </a:solidFill>
-          <a:ln>
-            <a:noFill/>
-          </a:ln>
-        </p:spPr>
-        <p:style>
-          <a:lnRef idx="1">
-            <a:schemeClr val="accent1"/>
-          </a:lnRef>
-          <a:fillRef idx="3">
-            <a:schemeClr val="accent1"/>
-          </a:fillRef>
-          <a:effectRef idx="2">
-            <a:schemeClr val="accent1"/>
-          </a:effectRef>
-          <a:fontRef idx="minor">
-            <a:schemeClr val="lt1"/>
-          </a:fontRef>
-        </p:style>
-        <p:txBody>
-          <a:bodyPr rtlCol="0" anchor="ctr"/>
-          <a:lstStyle/>
-          <a:p>
-            <a:pPr algn="ctr"/>
-          </a:p>
-        </p:txBody>
-      </p:sp>
-      <p:sp>
-        <p:nvSpPr>
-          <p:cNvPr id="6" name="Rounded Rectangle 5"/>
-          <p:cNvSpPr/>
-          <p:nvPr/>
-        </p:nvSpPr>
-        <p:spPr>
-          <a:xfrm>
-            <a:off x="594360" y="1490472"/>
-            <a:ext cx="438912" cy="438912"/>
-          </a:xfrm>
-          <a:prstGeom prst="roundRect">
-            <a:avLst>
-              <a:gd name="adj" fmla="val 12000"/>
-            </a:avLst>
-          </a:prstGeom>
-          <a:solidFill>
-            <a:srgbClr val="095292"/>
-          </a:solidFill>
-          <a:ln>
-            <a:noFill/>
-          </a:ln>
-        </p:spPr>
-        <p:style>
-          <a:lnRef idx="1">
-            <a:schemeClr val="accent1"/>
-          </a:lnRef>
-          <a:fillRef idx="3">
-            <a:schemeClr val="accent1"/>
-          </a:fillRef>
-          <a:effectRef idx="2">
-            <a:schemeClr val="accent1"/>
-          </a:effectRef>
-          <a:fontRef idx="minor">
-            <a:schemeClr val="lt1"/>
-          </a:fontRef>
-        </p:style>
-        <p:txBody>
-          <a:bodyPr rtlCol="0" anchor="ctr"/>
-          <a:lstStyle/>
-          <a:p>
-            <a:pPr algn="ctr"/>
-          </a:p>
-        </p:txBody>
-      </p:sp>
-      <p:sp>
-        <p:nvSpPr>
-          <p:cNvPr id="7" name="TextBox 6"/>
-          <p:cNvSpPr txBox="1"/>
-          <p:nvPr/>
-        </p:nvSpPr>
-        <p:spPr>
-          <a:xfrm>
-            <a:off x="594360" y="1490472"/>
-            <a:ext cx="438912" cy="438912"/>
-          </a:xfrm>
-          <a:prstGeom prst="rect">
-            <a:avLst/>
-          </a:prstGeom>
-          <a:noFill/>
-        </p:spPr>
-        <p:txBody>
-          <a:bodyPr wrap="square" anchor="ctr"/>
-          <a:lstStyle/>
-          <a:p>
-            <a:pPr algn="ctr"/>
-            <a:r>
-              <a:rPr sz="1600" b="1" i="0">
-                <a:solidFill>
-                  <a:srgbClr val="FFFFFF"/>
-                </a:solidFill>
-                <a:latin typeface="Calibri"/>
-              </a:rPr>
-              <a:t>1</a:t>
-            </a:r>
-          </a:p>
-        </p:txBody>
-      </p:sp>
-      <p:sp>
-        <p:nvSpPr>
-          <p:cNvPr id="8" name="TextBox 7"/>
-          <p:cNvSpPr txBox="1"/>
-          <p:nvPr/>
-        </p:nvSpPr>
-        <p:spPr>
-          <a:xfrm>
-            <a:off x="1188720" y="1325880"/>
-            <a:ext cx="10271455" cy="786384"/>
-          </a:xfrm>
-          <a:prstGeom prst="rect">
-            <a:avLst/>
-          </a:prstGeom>
-          <a:noFill/>
-        </p:spPr>
-        <p:txBody>
-          <a:bodyPr wrap="square" anchor="ctr"/>
-          <a:lstStyle/>
-          <a:p>
-            <a:r>
-              <a:rPr sz="1400" b="1" i="0">
-                <a:solidFill>
-                  <a:srgbClr val="095292"/>
-                </a:solidFill>
-                <a:latin typeface="Calibri"/>
-              </a:rPr>
-              <a:t>Cree el paquete vetcare.vista y dentro la clase VentanaRegistroMascota que extiende JFrame, con los campos ID, nombre, especie y edad, el boton 'Registrar mascota' y un JTextArea de solo lectura para el listado; ejecutela y verifique que abre centrada y que cierra con EXIT_ON_CLOSE.</a:t>
-            </a:r>
-          </a:p>
-        </p:txBody>
-      </p:sp>
-      <p:sp>
-        <p:nvSpPr>
-          <p:cNvPr id="9" name="Rounded Rectangle 8"/>
-          <p:cNvSpPr/>
-          <p:nvPr/>
-        </p:nvSpPr>
-        <p:spPr>
-          <a:xfrm>
-            <a:off x="457200" y="2276856"/>
-            <a:ext cx="11277295" cy="950976"/>
-          </a:xfrm>
-          <a:prstGeom prst="roundRect">
-            <a:avLst>
-              <a:gd name="adj" fmla="val 12000"/>
-            </a:avLst>
-          </a:prstGeom>
-          <a:solidFill>
-            <a:srgbClr val="E8F4FA"/>
-          </a:solidFill>
-          <a:ln>
-            <a:noFill/>
-          </a:ln>
-        </p:spPr>
-        <p:style>
-          <a:lnRef idx="1">
-            <a:schemeClr val="accent1"/>
-          </a:lnRef>
-          <a:fillRef idx="3">
-            <a:schemeClr val="accent1"/>
-          </a:fillRef>
-          <a:effectRef idx="2">
-            <a:schemeClr val="accent1"/>
-          </a:effectRef>
-          <a:fontRef idx="minor">
-            <a:schemeClr val="lt1"/>
-          </a:fontRef>
-        </p:style>
-        <p:txBody>
-          <a:bodyPr rtlCol="0" anchor="ctr"/>
-          <a:lstStyle/>
-          <a:p>
-            <a:pPr algn="ctr"/>
-          </a:p>
-        </p:txBody>
-      </p:sp>
-      <p:sp>
-        <p:nvSpPr>
-          <p:cNvPr id="10" name="Rounded Rectangle 9"/>
-          <p:cNvSpPr/>
-          <p:nvPr/>
-        </p:nvSpPr>
-        <p:spPr>
-          <a:xfrm>
-            <a:off x="594360" y="2532888"/>
-            <a:ext cx="438912" cy="438912"/>
-          </a:xfrm>
-          <a:prstGeom prst="roundRect">
-            <a:avLst>
-              <a:gd name="adj" fmla="val 12000"/>
-            </a:avLst>
-          </a:prstGeom>
-          <a:solidFill>
-            <a:srgbClr val="095292"/>
-          </a:solidFill>
-          <a:ln>
-            <a:noFill/>
-          </a:ln>
-        </p:spPr>
-        <p:style>
-          <a:lnRef idx="1">
-            <a:schemeClr val="accent1"/>
-          </a:lnRef>
-          <a:fillRef idx="3">
-            <a:schemeClr val="accent1"/>
-          </a:fillRef>
-          <a:effectRef idx="2">
-            <a:schemeClr val="accent1"/>
-          </a:effectRef>
-          <a:fontRef idx="minor">
-            <a:schemeClr val="lt1"/>
-          </a:fontRef>
-        </p:style>
-        <p:txBody>
-          <a:bodyPr rtlCol="0" anchor="ctr"/>
-          <a:lstStyle/>
-          <a:p>
-            <a:pPr algn="ctr"/>
-          </a:p>
-        </p:txBody>
-      </p:sp>
-      <p:sp>
-        <p:nvSpPr>
-          <p:cNvPr id="11" name="TextBox 10"/>
-          <p:cNvSpPr txBox="1"/>
-          <p:nvPr/>
-        </p:nvSpPr>
-        <p:spPr>
-          <a:xfrm>
-            <a:off x="594360" y="2532888"/>
-            <a:ext cx="438912" cy="438912"/>
-          </a:xfrm>
-          <a:prstGeom prst="rect">
-            <a:avLst/>
-          </a:prstGeom>
-          <a:noFill/>
-        </p:spPr>
-        <p:txBody>
-          <a:bodyPr wrap="square" anchor="ctr"/>
-          <a:lstStyle/>
-          <a:p>
-            <a:pPr algn="ctr"/>
-            <a:r>
-              <a:rPr sz="1600" b="1" i="0">
-                <a:solidFill>
-                  <a:srgbClr val="FFFFFF"/>
-                </a:solidFill>
-                <a:latin typeface="Calibri"/>
-              </a:rPr>
-              <a:t>2</a:t>
-            </a:r>
-          </a:p>
-        </p:txBody>
-      </p:sp>
-      <p:sp>
-        <p:nvSpPr>
-          <p:cNvPr id="12" name="TextBox 11"/>
-          <p:cNvSpPr txBox="1"/>
-          <p:nvPr/>
-        </p:nvSpPr>
-        <p:spPr>
-          <a:xfrm>
-            <a:off x="1188720" y="2368296"/>
-            <a:ext cx="10271455" cy="786384"/>
-          </a:xfrm>
-          <a:prstGeom prst="rect">
-            <a:avLst/>
-          </a:prstGeom>
-          <a:noFill/>
-        </p:spPr>
-        <p:txBody>
-          <a:bodyPr wrap="square" anchor="ctr"/>
-          <a:lstStyle/>
-          <a:p>
-            <a:r>
-              <a:rPr sz="1400" b="1" i="0">
-                <a:solidFill>
-                  <a:srgbClr val="095292"/>
-                </a:solidFill>
-                <a:latin typeface="Calibri"/>
-              </a:rPr>
-              <a:t>Deje Mascota en vetcare.modelo y cree en vetcare.servicio la clase RepositorioMascotas con un ArrayList&lt;Mascota&gt; privado y los metodos registrar, buscarPorId, listar y total; compruebe con Ctrl+F que ninguna de esas dos clases tiene un import de javax.swing.</a:t>
-            </a:r>
-          </a:p>
-        </p:txBody>
-      </p:sp>
-      <p:sp>
-        <p:nvSpPr>
-          <p:cNvPr id="13" name="Rounded Rectangle 12"/>
-          <p:cNvSpPr/>
-          <p:nvPr/>
-        </p:nvSpPr>
-        <p:spPr>
-          <a:xfrm>
-            <a:off x="457200" y="3319272"/>
-            <a:ext cx="11277295" cy="950976"/>
-          </a:xfrm>
-          <a:prstGeom prst="roundRect">
-            <a:avLst>
-              <a:gd name="adj" fmla="val 12000"/>
-            </a:avLst>
-          </a:prstGeom>
-          <a:solidFill>
-            <a:srgbClr val="F2F2F2"/>
-          </a:solidFill>
-          <a:ln>
-            <a:noFill/>
-          </a:ln>
-        </p:spPr>
-        <p:style>
-          <a:lnRef idx="1">
-            <a:schemeClr val="accent1"/>
-          </a:lnRef>
-          <a:fillRef idx="3">
-            <a:schemeClr val="accent1"/>
-          </a:fillRef>
-          <a:effectRef idx="2">
-            <a:schemeClr val="accent1"/>
-          </a:effectRef>
-          <a:fontRef idx="minor">
-            <a:schemeClr val="lt1"/>
-          </a:fontRef>
-        </p:style>
-        <p:txBody>
-          <a:bodyPr rtlCol="0" anchor="ctr"/>
-          <a:lstStyle/>
-          <a:p>
-            <a:pPr algn="ctr"/>
-          </a:p>
-        </p:txBody>
-      </p:sp>
-      <p:sp>
-        <p:nvSpPr>
-          <p:cNvPr id="14" name="Rounded Rectangle 13"/>
-          <p:cNvSpPr/>
-          <p:nvPr/>
-        </p:nvSpPr>
-        <p:spPr>
-          <a:xfrm>
-            <a:off x="594360" y="3575304"/>
-            <a:ext cx="438912" cy="438912"/>
-          </a:xfrm>
-          <a:prstGeom prst="roundRect">
-            <a:avLst>
-              <a:gd name="adj" fmla="val 12000"/>
-            </a:avLst>
-          </a:prstGeom>
-          <a:solidFill>
-            <a:srgbClr val="095292"/>
-          </a:solidFill>
-          <a:ln>
-            <a:noFill/>
-          </a:ln>
-        </p:spPr>
-        <p:style>
-          <a:lnRef idx="1">
-            <a:schemeClr val="accent1"/>
-          </a:lnRef>
-          <a:fillRef idx="3">
-            <a:schemeClr val="accent1"/>
-          </a:fillRef>
-          <a:effectRef idx="2">
-            <a:schemeClr val="accent1"/>
-          </a:effectRef>
-          <a:fontRef idx="minor">
-            <a:schemeClr val="lt1"/>
-          </a:fontRef>
-        </p:style>
-        <p:txBody>
-          <a:bodyPr rtlCol="0" anchor="ctr"/>
-          <a:lstStyle/>
-          <a:p>
-            <a:pPr algn="ctr"/>
-          </a:p>
-        </p:txBody>
-      </p:sp>
-      <p:sp>
-        <p:nvSpPr>
-          <p:cNvPr id="15" name="TextBox 14"/>
-          <p:cNvSpPr txBox="1"/>
-          <p:nvPr/>
-        </p:nvSpPr>
-        <p:spPr>
-          <a:xfrm>
-            <a:off x="594360" y="3575304"/>
-            <a:ext cx="438912" cy="438912"/>
-          </a:xfrm>
-          <a:prstGeom prst="rect">
-            <a:avLst/>
-          </a:prstGeom>
-          <a:noFill/>
-        </p:spPr>
-        <p:txBody>
-          <a:bodyPr wrap="square" anchor="ctr"/>
-          <a:lstStyle/>
-          <a:p>
-            <a:pPr algn="ctr"/>
-            <a:r>
-              <a:rPr sz="1600" b="1" i="0">
-                <a:solidFill>
-                  <a:srgbClr val="FFFFFF"/>
-                </a:solidFill>
-                <a:latin typeface="Calibri"/>
-              </a:rPr>
-              <a:t>3</a:t>
-            </a:r>
-          </a:p>
-        </p:txBody>
-      </p:sp>
-      <p:sp>
-        <p:nvSpPr>
-          <p:cNvPr id="16" name="TextBox 15"/>
-          <p:cNvSpPr txBox="1"/>
-          <p:nvPr/>
-        </p:nvSpPr>
-        <p:spPr>
-          <a:xfrm>
-            <a:off x="1188720" y="3410712"/>
-            <a:ext cx="10271455" cy="786384"/>
-          </a:xfrm>
-          <a:prstGeom prst="rect">
-            <a:avLst/>
-          </a:prstGeom>
-          <a:noFill/>
-        </p:spPr>
-        <p:txBody>
-          <a:bodyPr wrap="square" anchor="ctr"/>
-          <a:lstStyle/>
-          <a:p>
-            <a:r>
-              <a:rPr sz="1400" b="1" i="0">
-                <a:solidFill>
-                  <a:srgbClr val="095292"/>
-                </a:solidFill>
-                <a:latin typeface="Calibri"/>
-              </a:rPr>
-              <a:t>Cree ControladorRegistro con el metodo registrarMascota(String id, String nombre, String especie, String edadTexto) que valide obligatorios, convierta la edad con Integer.parseInt dentro de try-catch y lance IllegalArgumentException con mensajes en español; el repositorio debe recibirse por el constructor, no crearse adentro del metodo.</a:t>
-            </a:r>
-          </a:p>
-        </p:txBody>
-      </p:sp>
-      <p:sp>
-        <p:nvSpPr>
-          <p:cNvPr id="17" name="Rounded Rectangle 16"/>
-          <p:cNvSpPr/>
-          <p:nvPr/>
-        </p:nvSpPr>
-        <p:spPr>
-          <a:xfrm>
-            <a:off x="457200" y="4361688"/>
-            <a:ext cx="11277295" cy="950976"/>
-          </a:xfrm>
-          <a:prstGeom prst="roundRect">
-            <a:avLst>
-              <a:gd name="adj" fmla="val 12000"/>
-            </a:avLst>
-          </a:prstGeom>
-          <a:solidFill>
-            <a:srgbClr val="E8F4FA"/>
-          </a:solidFill>
-          <a:ln>
-            <a:noFill/>
-          </a:ln>
-        </p:spPr>
-        <p:style>
-          <a:lnRef idx="1">
-            <a:schemeClr val="accent1"/>
-          </a:lnRef>
-          <a:fillRef idx="3">
-            <a:schemeClr val="accent1"/>
-          </a:fillRef>
-          <a:effectRef idx="2">
-            <a:schemeClr val="accent1"/>
-          </a:effectRef>
-          <a:fontRef idx="minor">
-            <a:schemeClr val="lt1"/>
-          </a:fontRef>
-        </p:style>
-        <p:txBody>
-          <a:bodyPr rtlCol="0" anchor="ctr"/>
-          <a:lstStyle/>
-          <a:p>
-            <a:pPr algn="ctr"/>
-          </a:p>
-        </p:txBody>
-      </p:sp>
-      <p:sp>
-        <p:nvSpPr>
-          <p:cNvPr id="18" name="Rounded Rectangle 17"/>
-          <p:cNvSpPr/>
-          <p:nvPr/>
-        </p:nvSpPr>
-        <p:spPr>
-          <a:xfrm>
-            <a:off x="594360" y="4617720"/>
-            <a:ext cx="438912" cy="438912"/>
-          </a:xfrm>
-          <a:prstGeom prst="roundRect">
-            <a:avLst>
-              <a:gd name="adj" fmla="val 12000"/>
-            </a:avLst>
-          </a:prstGeom>
-          <a:solidFill>
-            <a:srgbClr val="095292"/>
-          </a:solidFill>
-          <a:ln>
-            <a:noFill/>
-          </a:ln>
-        </p:spPr>
-        <p:style>
-          <a:lnRef idx="1">
-            <a:schemeClr val="accent1"/>
-          </a:lnRef>
-          <a:fillRef idx="3">
-            <a:schemeClr val="accent1"/>
-          </a:fillRef>
-          <a:effectRef idx="2">
-            <a:schemeClr val="accent1"/>
-          </a:effectRef>
-          <a:fontRef idx="minor">
-            <a:schemeClr val="lt1"/>
-          </a:fontRef>
-        </p:style>
-        <p:txBody>
-          <a:bodyPr rtlCol="0" anchor="ctr"/>
-          <a:lstStyle/>
-          <a:p>
-            <a:pPr algn="ctr"/>
-          </a:p>
-        </p:txBody>
-      </p:sp>
-      <p:sp>
-        <p:nvSpPr>
-          <p:cNvPr id="19" name="TextBox 18"/>
-          <p:cNvSpPr txBox="1"/>
-          <p:nvPr/>
-        </p:nvSpPr>
-        <p:spPr>
-          <a:xfrm>
-            <a:off x="594360" y="4617720"/>
-            <a:ext cx="438912" cy="438912"/>
-          </a:xfrm>
-          <a:prstGeom prst="rect">
-            <a:avLst/>
-          </a:prstGeom>
-          <a:noFill/>
-        </p:spPr>
-        <p:txBody>
-          <a:bodyPr wrap="square" anchor="ctr"/>
-          <a:lstStyle/>
-          <a:p>
-            <a:pPr algn="ctr"/>
-            <a:r>
-              <a:rPr sz="1600" b="1" i="0">
-                <a:solidFill>
-                  <a:srgbClr val="FFFFFF"/>
-                </a:solidFill>
-                <a:latin typeface="Calibri"/>
-              </a:rPr>
-              <a:t>4</a:t>
-            </a:r>
-          </a:p>
-        </p:txBody>
-      </p:sp>
-      <p:sp>
-        <p:nvSpPr>
-          <p:cNvPr id="20" name="TextBox 19"/>
-          <p:cNvSpPr txBox="1"/>
-          <p:nvPr/>
-        </p:nvSpPr>
-        <p:spPr>
-          <a:xfrm>
-            <a:off x="1188720" y="4453128"/>
-            <a:ext cx="10271455" cy="786384"/>
-          </a:xfrm>
-          <a:prstGeom prst="rect">
-            <a:avLst/>
-          </a:prstGeom>
-          <a:noFill/>
-        </p:spPr>
-        <p:txBody>
-          <a:bodyPr wrap="square" anchor="ctr"/>
-          <a:lstStyle/>
-          <a:p>
-            <a:r>
-              <a:rPr sz="1400" b="1" i="0">
-                <a:solidFill>
-                  <a:srgbClr val="095292"/>
-                </a:solidFill>
-                <a:latin typeface="Calibri"/>
-              </a:rPr>
-              <a:t>Conecte el boton con addActionListener de manera que el cuerpo del listener tenga maximo cinco lineas: leer los getText(), llamar al controlador, refrescar el area, limpiar campos y mostrar el JOptionPane; declare el controlador como atributo de la ventana, nunca dentro del listener.</a:t>
-            </a:r>
-          </a:p>
-        </p:txBody>
-      </p:sp>
-      <p:sp>
-        <p:nvSpPr>
-          <p:cNvPr id="21" name="Rounded Rectangle 20"/>
-          <p:cNvSpPr/>
-          <p:nvPr/>
-        </p:nvSpPr>
-        <p:spPr>
-          <a:xfrm>
-            <a:off x="457200" y="5404104"/>
-            <a:ext cx="11277295" cy="950976"/>
-          </a:xfrm>
-          <a:prstGeom prst="roundRect">
-            <a:avLst>
-              <a:gd name="adj" fmla="val 12000"/>
-            </a:avLst>
-          </a:prstGeom>
-          <a:solidFill>
-            <a:srgbClr val="F2F2F2"/>
-          </a:solidFill>
-          <a:ln>
-            <a:noFill/>
-          </a:ln>
-        </p:spPr>
-        <p:style>
-          <a:lnRef idx="1">
-            <a:schemeClr val="accent1"/>
-          </a:lnRef>
-          <a:fillRef idx="3">
-            <a:schemeClr val="accent1"/>
-          </a:fillRef>
-          <a:effectRef idx="2">
-            <a:schemeClr val="accent1"/>
-          </a:effectRef>
-          <a:fontRef idx="minor">
-            <a:schemeClr val="lt1"/>
-          </a:fontRef>
-        </p:style>
-        <p:txBody>
-          <a:bodyPr rtlCol="0" anchor="ctr"/>
-          <a:lstStyle/>
-          <a:p>
-            <a:pPr algn="ctr"/>
-          </a:p>
-        </p:txBody>
-      </p:sp>
-      <p:sp>
-        <p:nvSpPr>
-          <p:cNvPr id="22" name="Rounded Rectangle 21"/>
-          <p:cNvSpPr/>
-          <p:nvPr/>
-        </p:nvSpPr>
-        <p:spPr>
-          <a:xfrm>
-            <a:off x="594360" y="5660136"/>
-            <a:ext cx="438912" cy="438912"/>
-          </a:xfrm>
-          <a:prstGeom prst="roundRect">
-            <a:avLst>
-              <a:gd name="adj" fmla="val 12000"/>
-            </a:avLst>
-          </a:prstGeom>
-          <a:solidFill>
-            <a:srgbClr val="095292"/>
-          </a:solidFill>
-          <a:ln>
-            <a:noFill/>
-          </a:ln>
-        </p:spPr>
-        <p:style>
-          <a:lnRef idx="1">
-            <a:schemeClr val="accent1"/>
-          </a:lnRef>
-          <a:fillRef idx="3">
-            <a:schemeClr val="accent1"/>
-          </a:fillRef>
-          <a:effectRef idx="2">
-            <a:schemeClr val="accent1"/>
-          </a:effectRef>
-          <a:fontRef idx="minor">
-            <a:schemeClr val="lt1"/>
-          </a:fontRef>
-        </p:style>
-        <p:txBody>
-          <a:bodyPr rtlCol="0" anchor="ctr"/>
-          <a:lstStyle/>
-          <a:p>
-            <a:pPr algn="ctr"/>
-          </a:p>
-        </p:txBody>
-      </p:sp>
-      <p:sp>
-        <p:nvSpPr>
-          <p:cNvPr id="23" name="TextBox 22"/>
-          <p:cNvSpPr txBox="1"/>
-          <p:nvPr/>
-        </p:nvSpPr>
-        <p:spPr>
-          <a:xfrm>
-            <a:off x="594360" y="5660136"/>
-            <a:ext cx="438912" cy="438912"/>
-          </a:xfrm>
-          <a:prstGeom prst="rect">
-            <a:avLst/>
-          </a:prstGeom>
-          <a:noFill/>
-        </p:spPr>
-        <p:txBody>
-          <a:bodyPr wrap="square" anchor="ctr"/>
-          <a:lstStyle/>
-          <a:p>
-            <a:pPr algn="ctr"/>
-            <a:r>
-              <a:rPr sz="1600" b="1" i="0">
-                <a:solidFill>
-                  <a:srgbClr val="FFFFFF"/>
-                </a:solidFill>
-                <a:latin typeface="Calibri"/>
-              </a:rPr>
-              <a:t>5</a:t>
-            </a:r>
-          </a:p>
-        </p:txBody>
-      </p:sp>
-      <p:sp>
-        <p:nvSpPr>
-          <p:cNvPr id="24" name="TextBox 23"/>
-          <p:cNvSpPr txBox="1"/>
-          <p:nvPr/>
-        </p:nvSpPr>
-        <p:spPr>
-          <a:xfrm>
-            <a:off x="1188720" y="5495544"/>
-            <a:ext cx="10271455" cy="786384"/>
-          </a:xfrm>
-          <a:prstGeom prst="rect">
-            <a:avLst/>
-          </a:prstGeom>
-          <a:noFill/>
-        </p:spPr>
-        <p:txBody>
-          <a:bodyPr wrap="square" anchor="ctr"/>
-          <a:lstStyle/>
-          <a:p>
-            <a:r>
-              <a:rPr sz="1500" b="1" i="0">
-                <a:solidFill>
-                  <a:srgbClr val="095292"/>
-                </a:solidFill>
-                <a:latin typeface="Calibri"/>
-              </a:rPr>
-              <a:t>Pruebe y capture evidencia de tres casos: (a) registro valido de M-001 Kira, (b) edad escrita como 'tres', (c) ID repetido M-001; guarde las tres capturas, exporte el proyecto comprimido y subalo a la plataforma del curso.</a:t>
-            </a:r>
-          </a:p>
-        </p:txBody>
-      </p:sp>
-      <p:sp>
-        <p:nvSpPr>
-          <p:cNvPr id="25" name="TextBox 24"/>
-          <p:cNvSpPr txBox="1"/>
-          <p:nvPr/>
-        </p:nvSpPr>
-        <p:spPr>
-          <a:xfrm>
-            <a:off x="11185855" y="6473952"/>
-            <a:ext cx="640080" cy="274320"/>
-          </a:xfrm>
-          <a:prstGeom prst="rect">
-            <a:avLst/>
-          </a:prstGeom>
-          <a:noFill/>
-        </p:spPr>
-        <p:txBody>
-          <a:bodyPr wrap="square">
-            <a:spAutoFit/>
-          </a:bodyPr>
-          <a:lstStyle/>
-          <a:p>
-            <a:pPr algn="r"/>
-            <a:r>
-              <a:rPr sz="1100" b="0" i="0">
-                <a:solidFill>
-                  <a:srgbClr val="666666"/>
-                </a:solidFill>
-                <a:latin typeface="Calibri"/>
-              </a:rPr>
-              <a:t>32</a:t>
-            </a:r>
-          </a:p>
-        </p:txBody>
-      </p:sp>
-    </p:spTree>
-  </p:cSld>
-  <p:clrMapOvr>
-    <a:masterClrMapping/>
-  </p:clrMapOvr>
-</p:sld>
-</file>
-
-<file path=ppt/slides/slide33.xml><?xml version="1.0" encoding="utf-8"?>
-<p:sld xmlns:a="http://schemas.openxmlformats.org/drawingml/2006/main" xmlns:p="http://schemas.openxmlformats.org/presentationml/2006/main" xmlns:r="http://schemas.openxmlformats.org/officeDocument/2006/relationships">
-  <p:cSld>
-    <p:bg>
-      <p:bgPr>
-        <a:solidFill>
-          <a:srgbClr val="FFFFFF"/>
-        </a:solidFill>
-        <a:effectLst/>
-      </p:bgPr>
-    </p:bg>
-    <p:spTree>
-      <p:nvGrpSpPr>
-        <p:cNvPr id="1" name=""/>
-        <p:cNvGrpSpPr/>
-        <p:nvPr/>
-      </p:nvGrpSpPr>
-      <p:grpSpPr/>
-      <p:sp>
-        <p:nvSpPr>
-          <p:cNvPr id="2" name="Rectangle 1"/>
-          <p:cNvSpPr/>
-          <p:nvPr/>
-        </p:nvSpPr>
-        <p:spPr>
-          <a:xfrm>
-            <a:off x="0" y="0"/>
-            <a:ext cx="12191695" cy="960120"/>
-          </a:xfrm>
-          <a:prstGeom prst="rect">
-            <a:avLst/>
-          </a:prstGeom>
-          <a:solidFill>
-            <a:srgbClr val="095292"/>
-          </a:solidFill>
-          <a:ln>
-            <a:noFill/>
-          </a:ln>
-        </p:spPr>
-        <p:style>
-          <a:lnRef idx="1">
-            <a:schemeClr val="accent1"/>
-          </a:lnRef>
-          <a:fillRef idx="3">
-            <a:schemeClr val="accent1"/>
-          </a:fillRef>
-          <a:effectRef idx="2">
-            <a:schemeClr val="accent1"/>
-          </a:effectRef>
-          <a:fontRef idx="minor">
-            <a:schemeClr val="lt1"/>
-          </a:fontRef>
-        </p:style>
-        <p:txBody>
-          <a:bodyPr rtlCol="0" anchor="ctr"/>
-          <a:lstStyle/>
-          <a:p>
-            <a:pPr algn="ctr"/>
-          </a:p>
-        </p:txBody>
-      </p:sp>
-      <p:sp>
-        <p:nvSpPr>
-          <p:cNvPr id="3" name="Rectangle 2"/>
-          <p:cNvSpPr/>
-          <p:nvPr/>
-        </p:nvSpPr>
-        <p:spPr>
-          <a:xfrm>
-            <a:off x="0" y="960120"/>
-            <a:ext cx="12191695" cy="41148"/>
-          </a:xfrm>
-          <a:prstGeom prst="rect">
-            <a:avLst/>
-          </a:prstGeom>
-          <a:solidFill>
-            <a:srgbClr val="FFD000"/>
-          </a:solidFill>
-          <a:ln>
-            <a:noFill/>
-          </a:ln>
-        </p:spPr>
-        <p:style>
-          <a:lnRef idx="1">
-            <a:schemeClr val="accent1"/>
-          </a:lnRef>
-          <a:fillRef idx="3">
-            <a:schemeClr val="accent1"/>
-          </a:fillRef>
-          <a:effectRef idx="2">
-            <a:schemeClr val="accent1"/>
-          </a:effectRef>
-          <a:fontRef idx="minor">
-            <a:schemeClr val="lt1"/>
-          </a:fontRef>
-        </p:style>
-        <p:txBody>
-          <a:bodyPr rtlCol="0" anchor="ctr"/>
-          <a:lstStyle/>
-          <a:p>
-            <a:pPr algn="ctr"/>
-          </a:p>
-        </p:txBody>
-      </p:sp>
-      <p:sp>
-        <p:nvSpPr>
-          <p:cNvPr id="4" name="TextBox 3"/>
-          <p:cNvSpPr txBox="1"/>
-          <p:nvPr/>
-        </p:nvSpPr>
-        <p:spPr>
-          <a:xfrm>
-            <a:off x="457200" y="164592"/>
-            <a:ext cx="11277295" cy="502920"/>
-          </a:xfrm>
-          <a:prstGeom prst="rect">
-            <a:avLst/>
-          </a:prstGeom>
-          <a:noFill/>
-        </p:spPr>
-        <p:txBody>
-          <a:bodyPr wrap="square">
-            <a:spAutoFit/>
-          </a:bodyPr>
-          <a:lstStyle/>
-          <a:p>
-            <a:r>
-              <a:rPr sz="2600" b="1" i="0">
-                <a:solidFill>
-                  <a:srgbClr val="FFFFFF"/>
-                </a:solidFill>
-                <a:latin typeface="Calibri"/>
-              </a:rPr>
-              <a:t>Antes de entregar — autochequeo</a:t>
-            </a:r>
-          </a:p>
-        </p:txBody>
-      </p:sp>
-      <p:sp>
-        <p:nvSpPr>
-          <p:cNvPr id="5" name="Rounded Rectangle 4"/>
-          <p:cNvSpPr/>
-          <p:nvPr/>
-        </p:nvSpPr>
-        <p:spPr>
-          <a:xfrm>
-            <a:off x="457200" y="1261872"/>
-            <a:ext cx="11277295" cy="566928"/>
-          </a:xfrm>
-          <a:prstGeom prst="roundRect">
-            <a:avLst>
-              <a:gd name="adj" fmla="val 12000"/>
-            </a:avLst>
-          </a:prstGeom>
-          <a:solidFill>
-            <a:srgbClr val="F2F2F2"/>
-          </a:solidFill>
-          <a:ln>
-            <a:noFill/>
-          </a:ln>
-        </p:spPr>
-        <p:style>
-          <a:lnRef idx="1">
-            <a:schemeClr val="accent1"/>
-          </a:lnRef>
-          <a:fillRef idx="3">
-            <a:schemeClr val="accent1"/>
-          </a:fillRef>
-          <a:effectRef idx="2">
-            <a:schemeClr val="accent1"/>
-          </a:effectRef>
-          <a:fontRef idx="minor">
-            <a:schemeClr val="lt1"/>
-          </a:fontRef>
-        </p:style>
-        <p:txBody>
-          <a:bodyPr rtlCol="0" anchor="ctr"/>
-          <a:lstStyle/>
-          <a:p>
-            <a:pPr algn="ctr"/>
-          </a:p>
-        </p:txBody>
-      </p:sp>
-      <p:sp>
-        <p:nvSpPr>
-          <p:cNvPr id="6" name="Rectangle 5"/>
-          <p:cNvSpPr/>
-          <p:nvPr/>
-        </p:nvSpPr>
-        <p:spPr>
-          <a:xfrm>
-            <a:off x="640080" y="1408175"/>
-            <a:ext cx="274320" cy="274320"/>
-          </a:xfrm>
-          <a:prstGeom prst="rect">
-            <a:avLst/>
-          </a:prstGeom>
-          <a:solidFill>
-            <a:srgbClr val="FFFFFF"/>
-          </a:solidFill>
-          <a:ln>
-            <a:solidFill>
-              <a:srgbClr val="333333"/>
-            </a:solidFill>
-          </a:ln>
-        </p:spPr>
-        <p:style>
-          <a:lnRef idx="1">
-            <a:schemeClr val="accent1"/>
-          </a:lnRef>
-          <a:fillRef idx="3">
-            <a:schemeClr val="accent1"/>
-          </a:fillRef>
-          <a:effectRef idx="2">
-            <a:schemeClr val="accent1"/>
-          </a:effectRef>
-          <a:fontRef idx="minor">
-            <a:schemeClr val="lt1"/>
-          </a:fontRef>
-        </p:style>
-        <p:txBody>
-          <a:bodyPr rtlCol="0" anchor="ctr"/>
-          <a:lstStyle/>
-          <a:p>
-            <a:pPr algn="ctr"/>
-          </a:p>
-        </p:txBody>
-      </p:sp>
-      <p:sp>
-        <p:nvSpPr>
-          <p:cNvPr id="7" name="Rectangle 6"/>
-          <p:cNvSpPr/>
-          <p:nvPr/>
-        </p:nvSpPr>
-        <p:spPr>
-          <a:xfrm>
-            <a:off x="640080" y="1408175"/>
-            <a:ext cx="73152" cy="274320"/>
-          </a:xfrm>
-          <a:prstGeom prst="rect">
-            <a:avLst/>
-          </a:prstGeom>
-          <a:solidFill>
-            <a:srgbClr val="269CCB"/>
-          </a:solidFill>
-          <a:ln>
-            <a:noFill/>
-          </a:ln>
-        </p:spPr>
-        <p:style>
-          <a:lnRef idx="1">
-            <a:schemeClr val="accent1"/>
-          </a:lnRef>
-          <a:fillRef idx="3">
-            <a:schemeClr val="accent1"/>
-          </a:fillRef>
-          <a:effectRef idx="2">
-            <a:schemeClr val="accent1"/>
-          </a:effectRef>
-          <a:fontRef idx="minor">
-            <a:schemeClr val="lt1"/>
-          </a:fontRef>
-        </p:style>
-        <p:txBody>
-          <a:bodyPr rtlCol="0" anchor="ctr"/>
-          <a:lstStyle/>
-          <a:p>
-            <a:pPr algn="ctr"/>
-          </a:p>
-        </p:txBody>
-      </p:sp>
-      <p:sp>
-        <p:nvSpPr>
-          <p:cNvPr id="8" name="TextBox 7"/>
-          <p:cNvSpPr txBox="1"/>
-          <p:nvPr/>
-        </p:nvSpPr>
-        <p:spPr>
-          <a:xfrm>
-            <a:off x="1097280" y="1353312"/>
-            <a:ext cx="10362895" cy="402336"/>
-          </a:xfrm>
-          <a:prstGeom prst="rect">
-            <a:avLst/>
-          </a:prstGeom>
-          <a:noFill/>
-        </p:spPr>
-        <p:txBody>
-          <a:bodyPr wrap="square" anchor="ctr"/>
-          <a:lstStyle/>
-          <a:p>
-            <a:r>
-              <a:rPr sz="1500" b="0" i="0">
-                <a:solidFill>
-                  <a:srgbClr val="333333"/>
-                </a:solidFill>
-                <a:latin typeface="Calibri"/>
-              </a:rPr>
-              <a:t>Si oprime el boton dos veces y el listado siempre muestra un solo registro: en que linea exacta se esta creando el ArrayList y cuantas veces se ejecuta esa linea?</a:t>
-            </a:r>
-          </a:p>
-        </p:txBody>
-      </p:sp>
-      <p:sp>
-        <p:nvSpPr>
-          <p:cNvPr id="9" name="Rounded Rectangle 8"/>
-          <p:cNvSpPr/>
-          <p:nvPr/>
-        </p:nvSpPr>
-        <p:spPr>
-          <a:xfrm>
-            <a:off x="457200" y="1938528"/>
-            <a:ext cx="11277295" cy="566928"/>
-          </a:xfrm>
-          <a:prstGeom prst="roundRect">
-            <a:avLst>
-              <a:gd name="adj" fmla="val 12000"/>
-            </a:avLst>
-          </a:prstGeom>
-          <a:solidFill>
-            <a:srgbClr val="F2F2F2"/>
-          </a:solidFill>
-          <a:ln>
-            <a:noFill/>
-          </a:ln>
-        </p:spPr>
-        <p:style>
-          <a:lnRef idx="1">
-            <a:schemeClr val="accent1"/>
-          </a:lnRef>
-          <a:fillRef idx="3">
-            <a:schemeClr val="accent1"/>
-          </a:fillRef>
-          <a:effectRef idx="2">
-            <a:schemeClr val="accent1"/>
-          </a:effectRef>
-          <a:fontRef idx="minor">
-            <a:schemeClr val="lt1"/>
-          </a:fontRef>
-        </p:style>
-        <p:txBody>
-          <a:bodyPr rtlCol="0" anchor="ctr"/>
-          <a:lstStyle/>
-          <a:p>
-            <a:pPr algn="ctr"/>
-          </a:p>
-        </p:txBody>
-      </p:sp>
-      <p:sp>
-        <p:nvSpPr>
-          <p:cNvPr id="10" name="Rectangle 9"/>
-          <p:cNvSpPr/>
-          <p:nvPr/>
-        </p:nvSpPr>
-        <p:spPr>
-          <a:xfrm>
-            <a:off x="640080" y="2084832"/>
-            <a:ext cx="274320" cy="274320"/>
-          </a:xfrm>
-          <a:prstGeom prst="rect">
-            <a:avLst/>
-          </a:prstGeom>
-          <a:solidFill>
-            <a:srgbClr val="FFFFFF"/>
-          </a:solidFill>
-          <a:ln>
-            <a:solidFill>
-              <a:srgbClr val="333333"/>
-            </a:solidFill>
-          </a:ln>
-        </p:spPr>
-        <p:style>
-          <a:lnRef idx="1">
-            <a:schemeClr val="accent1"/>
-          </a:lnRef>
-          <a:fillRef idx="3">
-            <a:schemeClr val="accent1"/>
-          </a:fillRef>
-          <a:effectRef idx="2">
-            <a:schemeClr val="accent1"/>
-          </a:effectRef>
-          <a:fontRef idx="minor">
-            <a:schemeClr val="lt1"/>
-          </a:fontRef>
-        </p:style>
-        <p:txBody>
-          <a:bodyPr rtlCol="0" anchor="ctr"/>
-          <a:lstStyle/>
-          <a:p>
-            <a:pPr algn="ctr"/>
-          </a:p>
-        </p:txBody>
-      </p:sp>
-      <p:sp>
-        <p:nvSpPr>
-          <p:cNvPr id="11" name="Rectangle 10"/>
-          <p:cNvSpPr/>
-          <p:nvPr/>
-        </p:nvSpPr>
-        <p:spPr>
-          <a:xfrm>
-            <a:off x="640080" y="2084832"/>
-            <a:ext cx="73152" cy="274320"/>
-          </a:xfrm>
-          <a:prstGeom prst="rect">
-            <a:avLst/>
-          </a:prstGeom>
-          <a:solidFill>
-            <a:srgbClr val="269CCB"/>
-          </a:solidFill>
-          <a:ln>
-            <a:noFill/>
-          </a:ln>
-        </p:spPr>
-        <p:style>
-          <a:lnRef idx="1">
-            <a:schemeClr val="accent1"/>
-          </a:lnRef>
-          <a:fillRef idx="3">
-            <a:schemeClr val="accent1"/>
-          </a:fillRef>
-          <a:effectRef idx="2">
-            <a:schemeClr val="accent1"/>
-          </a:effectRef>
-          <a:fontRef idx="minor">
-            <a:schemeClr val="lt1"/>
-          </a:fontRef>
-        </p:style>
-        <p:txBody>
-          <a:bodyPr rtlCol="0" anchor="ctr"/>
-          <a:lstStyle/>
-          <a:p>
-            <a:pPr algn="ctr"/>
-          </a:p>
-        </p:txBody>
-      </p:sp>
-      <p:sp>
-        <p:nvSpPr>
-          <p:cNvPr id="12" name="TextBox 11"/>
-          <p:cNvSpPr txBox="1"/>
-          <p:nvPr/>
-        </p:nvSpPr>
-        <p:spPr>
-          <a:xfrm>
-            <a:off x="1097280" y="2029968"/>
-            <a:ext cx="10362895" cy="402336"/>
-          </a:xfrm>
-          <a:prstGeom prst="rect">
-            <a:avLst/>
-          </a:prstGeom>
-          <a:noFill/>
-        </p:spPr>
-        <p:txBody>
-          <a:bodyPr wrap="square" anchor="ctr"/>
-          <a:lstStyle/>
-          <a:p>
-            <a:r>
-              <a:rPr sz="1500" b="0" i="0">
-                <a:solidFill>
-                  <a:srgbClr val="333333"/>
-                </a:solidFill>
-                <a:latin typeface="Calibri"/>
-              </a:rPr>
-              <a:t>Si borra el import de javax.swing de su controlador, el proyecto sigue compilando? Que le dice esa respuesta sobre donde quedo la logica?</a:t>
-            </a:r>
-          </a:p>
-        </p:txBody>
-      </p:sp>
-      <p:sp>
-        <p:nvSpPr>
-          <p:cNvPr id="13" name="Rounded Rectangle 12"/>
-          <p:cNvSpPr/>
-          <p:nvPr/>
-        </p:nvSpPr>
-        <p:spPr>
-          <a:xfrm>
-            <a:off x="457200" y="2615184"/>
-            <a:ext cx="11277295" cy="566928"/>
-          </a:xfrm>
-          <a:prstGeom prst="roundRect">
-            <a:avLst>
-              <a:gd name="adj" fmla="val 12000"/>
-            </a:avLst>
-          </a:prstGeom>
-          <a:solidFill>
-            <a:srgbClr val="F2F2F2"/>
-          </a:solidFill>
-          <a:ln>
-            <a:noFill/>
-          </a:ln>
-        </p:spPr>
-        <p:style>
-          <a:lnRef idx="1">
-            <a:schemeClr val="accent1"/>
-          </a:lnRef>
-          <a:fillRef idx="3">
-            <a:schemeClr val="accent1"/>
-          </a:fillRef>
-          <a:effectRef idx="2">
-            <a:schemeClr val="accent1"/>
-          </a:effectRef>
-          <a:fontRef idx="minor">
-            <a:schemeClr val="lt1"/>
-          </a:fontRef>
-        </p:style>
-        <p:txBody>
-          <a:bodyPr rtlCol="0" anchor="ctr"/>
-          <a:lstStyle/>
-          <a:p>
-            <a:pPr algn="ctr"/>
-          </a:p>
-        </p:txBody>
-      </p:sp>
-      <p:sp>
-        <p:nvSpPr>
-          <p:cNvPr id="14" name="Rectangle 13"/>
-          <p:cNvSpPr/>
-          <p:nvPr/>
-        </p:nvSpPr>
-        <p:spPr>
-          <a:xfrm>
-            <a:off x="640080" y="2761488"/>
-            <a:ext cx="274320" cy="274320"/>
-          </a:xfrm>
-          <a:prstGeom prst="rect">
-            <a:avLst/>
-          </a:prstGeom>
-          <a:solidFill>
-            <a:srgbClr val="FFFFFF"/>
-          </a:solidFill>
-          <a:ln>
-            <a:solidFill>
-              <a:srgbClr val="333333"/>
-            </a:solidFill>
-          </a:ln>
-        </p:spPr>
-        <p:style>
-          <a:lnRef idx="1">
-            <a:schemeClr val="accent1"/>
-          </a:lnRef>
-          <a:fillRef idx="3">
-            <a:schemeClr val="accent1"/>
-          </a:fillRef>
-          <a:effectRef idx="2">
-            <a:schemeClr val="accent1"/>
-          </a:effectRef>
-          <a:fontRef idx="minor">
-            <a:schemeClr val="lt1"/>
-          </a:fontRef>
-        </p:style>
-        <p:txBody>
-          <a:bodyPr rtlCol="0" anchor="ctr"/>
-          <a:lstStyle/>
-          <a:p>
-            <a:pPr algn="ctr"/>
-          </a:p>
-        </p:txBody>
-      </p:sp>
-      <p:sp>
-        <p:nvSpPr>
-          <p:cNvPr id="15" name="Rectangle 14"/>
-          <p:cNvSpPr/>
-          <p:nvPr/>
-        </p:nvSpPr>
-        <p:spPr>
-          <a:xfrm>
-            <a:off x="640080" y="2761488"/>
-            <a:ext cx="73152" cy="274320"/>
-          </a:xfrm>
-          <a:prstGeom prst="rect">
-            <a:avLst/>
-          </a:prstGeom>
-          <a:solidFill>
-            <a:srgbClr val="269CCB"/>
-          </a:solidFill>
-          <a:ln>
-            <a:noFill/>
-          </a:ln>
-        </p:spPr>
-        <p:style>
-          <a:lnRef idx="1">
-            <a:schemeClr val="accent1"/>
-          </a:lnRef>
-          <a:fillRef idx="3">
-            <a:schemeClr val="accent1"/>
-          </a:fillRef>
-          <a:effectRef idx="2">
-            <a:schemeClr val="accent1"/>
-          </a:effectRef>
-          <a:fontRef idx="minor">
-            <a:schemeClr val="lt1"/>
-          </a:fontRef>
-        </p:style>
-        <p:txBody>
-          <a:bodyPr rtlCol="0" anchor="ctr"/>
-          <a:lstStyle/>
-          <a:p>
-            <a:pPr algn="ctr"/>
-          </a:p>
-        </p:txBody>
-      </p:sp>
-      <p:sp>
-        <p:nvSpPr>
-          <p:cNvPr id="16" name="TextBox 15"/>
-          <p:cNvSpPr txBox="1"/>
-          <p:nvPr/>
-        </p:nvSpPr>
-        <p:spPr>
-          <a:xfrm>
-            <a:off x="1097280" y="2706624"/>
-            <a:ext cx="10362895" cy="402336"/>
-          </a:xfrm>
-          <a:prstGeom prst="rect">
-            <a:avLst/>
-          </a:prstGeom>
-          <a:noFill/>
-        </p:spPr>
-        <p:txBody>
-          <a:bodyPr wrap="square" anchor="ctr"/>
-          <a:lstStyle/>
-          <a:p>
-            <a:r>
-              <a:rPr sz="1500" b="0" i="0">
-                <a:solidFill>
-                  <a:srgbClr val="333333"/>
-                </a:solidFill>
-                <a:latin typeface="Calibri"/>
-              </a:rPr>
-              <a:t>Cuando la edad llega como 'tres', quien deberia darse cuenta primero del problema (el JTextField, el controlador o el usuario) y en que orden viajan la excepcion y el mensaje?</a:t>
-            </a:r>
-          </a:p>
-        </p:txBody>
-      </p:sp>
-      <p:sp>
-        <p:nvSpPr>
-          <p:cNvPr id="17" name="TextBox 16"/>
-          <p:cNvSpPr txBox="1"/>
-          <p:nvPr/>
-        </p:nvSpPr>
-        <p:spPr>
-          <a:xfrm>
-            <a:off x="11185855" y="6473952"/>
-            <a:ext cx="640080" cy="274320"/>
-          </a:xfrm>
-          <a:prstGeom prst="rect">
-            <a:avLst/>
-          </a:prstGeom>
-          <a:noFill/>
-        </p:spPr>
-        <p:txBody>
-          <a:bodyPr wrap="square">
-            <a:spAutoFit/>
-          </a:bodyPr>
-          <a:lstStyle/>
-          <a:p>
-            <a:pPr algn="r"/>
-            <a:r>
-              <a:rPr sz="1100" b="0" i="0">
-                <a:solidFill>
-                  <a:srgbClr val="666666"/>
-                </a:solidFill>
-                <a:latin typeface="Calibri"/>
-              </a:rPr>
-              <a:t>33</a:t>
-            </a:r>
-          </a:p>
-        </p:txBody>
-      </p:sp>
-    </p:spTree>
-  </p:cSld>
-  <p:clrMapOvr>
-    <a:masterClrMapping/>
-  </p:clrMapOvr>
-</p:sld>
-</file>
-
-<file path=ppt/slides/slide34.xml><?xml version="1.0" encoding="utf-8"?>
-<p:sld xmlns:a="http://schemas.openxmlformats.org/drawingml/2006/main" xmlns:p="http://schemas.openxmlformats.org/presentationml/2006/main" xmlns:r="http://schemas.openxmlformats.org/officeDocument/2006/relationships">
-  <p:cSld>
-    <p:bg>
-      <p:bgPr>
-        <a:solidFill>
-          <a:srgbClr val="FFFFFF"/>
-        </a:solidFill>
-        <a:effectLst/>
-      </p:bgPr>
-    </p:bg>
-    <p:spTree>
-      <p:nvGrpSpPr>
-        <p:cNvPr id="1" name=""/>
-        <p:cNvGrpSpPr/>
-        <p:nvPr/>
-      </p:nvGrpSpPr>
-      <p:grpSpPr/>
-      <p:sp>
-        <p:nvSpPr>
-          <p:cNvPr id="2" name="Rectangle 1"/>
-          <p:cNvSpPr/>
-          <p:nvPr/>
-        </p:nvSpPr>
-        <p:spPr>
-          <a:xfrm>
-            <a:off x="0" y="0"/>
-            <a:ext cx="12191695" cy="960120"/>
-          </a:xfrm>
-          <a:prstGeom prst="rect">
-            <a:avLst/>
-          </a:prstGeom>
-          <a:solidFill>
-            <a:srgbClr val="095292"/>
-          </a:solidFill>
-          <a:ln>
-            <a:noFill/>
-          </a:ln>
-        </p:spPr>
-        <p:style>
-          <a:lnRef idx="1">
-            <a:schemeClr val="accent1"/>
-          </a:lnRef>
-          <a:fillRef idx="3">
-            <a:schemeClr val="accent1"/>
-          </a:fillRef>
-          <a:effectRef idx="2">
-            <a:schemeClr val="accent1"/>
-          </a:effectRef>
-          <a:fontRef idx="minor">
-            <a:schemeClr val="lt1"/>
-          </a:fontRef>
-        </p:style>
-        <p:txBody>
-          <a:bodyPr rtlCol="0" anchor="ctr"/>
-          <a:lstStyle/>
-          <a:p>
-            <a:pPr algn="ctr"/>
-          </a:p>
-        </p:txBody>
-      </p:sp>
-      <p:sp>
-        <p:nvSpPr>
-          <p:cNvPr id="3" name="Rectangle 2"/>
-          <p:cNvSpPr/>
-          <p:nvPr/>
-        </p:nvSpPr>
-        <p:spPr>
-          <a:xfrm>
-            <a:off x="0" y="960120"/>
-            <a:ext cx="12191695" cy="41148"/>
-          </a:xfrm>
-          <a:prstGeom prst="rect">
-            <a:avLst/>
-          </a:prstGeom>
-          <a:solidFill>
-            <a:srgbClr val="FFD000"/>
-          </a:solidFill>
-          <a:ln>
-            <a:noFill/>
-          </a:ln>
-        </p:spPr>
-        <p:style>
-          <a:lnRef idx="1">
-            <a:schemeClr val="accent1"/>
-          </a:lnRef>
-          <a:fillRef idx="3">
-            <a:schemeClr val="accent1"/>
-          </a:fillRef>
-          <a:effectRef idx="2">
-            <a:schemeClr val="accent1"/>
-          </a:effectRef>
-          <a:fontRef idx="minor">
-            <a:schemeClr val="lt1"/>
-          </a:fontRef>
-        </p:style>
-        <p:txBody>
-          <a:bodyPr rtlCol="0" anchor="ctr"/>
-          <a:lstStyle/>
-          <a:p>
-            <a:pPr algn="ctr"/>
-          </a:p>
-        </p:txBody>
-      </p:sp>
-      <p:sp>
-        <p:nvSpPr>
-          <p:cNvPr id="4" name="TextBox 3"/>
-          <p:cNvSpPr txBox="1"/>
-          <p:nvPr/>
-        </p:nvSpPr>
-        <p:spPr>
-          <a:xfrm>
-            <a:off x="457200" y="164592"/>
-            <a:ext cx="11277295" cy="502920"/>
-          </a:xfrm>
-          <a:prstGeom prst="rect">
-            <a:avLst/>
-          </a:prstGeom>
-          <a:noFill/>
-        </p:spPr>
-        <p:txBody>
-          <a:bodyPr wrap="square">
-            <a:spAutoFit/>
-          </a:bodyPr>
-          <a:lstStyle/>
-          <a:p>
-            <a:r>
-              <a:rPr sz="2600" b="1" i="0">
-                <a:solidFill>
-                  <a:srgbClr val="FFFFFF"/>
-                </a:solidFill>
-                <a:latin typeface="Calibri"/>
-              </a:rPr>
-              <a:t>Criterios de exito / entregable</a:t>
-            </a:r>
-          </a:p>
-        </p:txBody>
-      </p:sp>
-      <p:sp>
-        <p:nvSpPr>
-          <p:cNvPr id="5" name="TextBox 4"/>
-          <p:cNvSpPr txBox="1"/>
-          <p:nvPr/>
-        </p:nvSpPr>
-        <p:spPr>
-          <a:xfrm>
-            <a:off x="457200" y="1170432"/>
-            <a:ext cx="11277295" cy="5230368"/>
-          </a:xfrm>
-          <a:prstGeom prst="rect">
-            <a:avLst/>
-          </a:prstGeom>
-          <a:noFill/>
-        </p:spPr>
-        <p:txBody>
-          <a:bodyPr wrap="square">
-            <a:spAutoFit/>
-          </a:bodyPr>
-          <a:lstStyle/>
-          <a:p>
-            <a:pPr>
-              <a:spcAft>
-                <a:spcPts val="800"/>
-              </a:spcAft>
-            </a:pPr>
-            <a:r>
-              <a:rPr sz="2000" b="0" i="0">
-                <a:solidFill>
-                  <a:srgbClr val="333333"/>
-                </a:solidFill>
-                <a:latin typeface="Calibri"/>
-              </a:rPr>
-              <a:t>–   </a:t>
-            </a:r>
-            <a:r>
-              <a:rPr sz="2000" b="1" i="0">
-                <a:solidFill>
-                  <a:srgbClr val="333333"/>
-                </a:solidFill>
-                <a:latin typeface="Calibri"/>
-              </a:rPr>
-              <a:t>Entregable:</a:t>
-            </a:r>
-            <a:r>
-              <a:rPr sz="2000" b="0" i="0">
-                <a:solidFill>
-                  <a:srgbClr val="333333"/>
-                </a:solidFill>
-                <a:latin typeface="Calibri"/>
-              </a:rPr>
-              <a:t> Proyecto VetCare con la ventana de registro operativa y la clase ControladorRegistro separada de la vista, comprimido y subido a la plataforma del curso.</a:t>
-            </a:r>
-          </a:p>
-          <a:p>
-            <a:pPr>
-              <a:spcAft>
-                <a:spcPts val="800"/>
-              </a:spcAft>
-            </a:pPr>
-            <a:r>
-              <a:rPr sz="2000" b="0" i="0">
-                <a:solidFill>
-                  <a:srgbClr val="333333"/>
-                </a:solidFill>
-                <a:latin typeface="Calibri"/>
-              </a:rPr>
-              <a:t>–   </a:t>
-            </a:r>
-            <a:r>
-              <a:rPr sz="2000" b="1" i="0">
-                <a:solidFill>
-                  <a:srgbClr val="333333"/>
-                </a:solidFill>
-                <a:latin typeface="Calibri"/>
-              </a:rPr>
-              <a:t>Exito:</a:t>
-            </a:r>
-            <a:r>
-              <a:rPr sz="2000" b="0" i="0">
-                <a:solidFill>
-                  <a:srgbClr val="333333"/>
-                </a:solidFill>
-                <a:latin typeface="Calibri"/>
-              </a:rPr>
-              <a:t> Al oprimir 'Registrar mascota' la mascota aparece en el listado y el total aumenta en uno por cada registro exitoso.</a:t>
-            </a:r>
-          </a:p>
-          <a:p>
-            <a:pPr>
-              <a:spcAft>
-                <a:spcPts val="800"/>
-              </a:spcAft>
-            </a:pPr>
-            <a:r>
-              <a:rPr sz="2000" b="0" i="0">
-                <a:solidFill>
-                  <a:srgbClr val="333333"/>
-                </a:solidFill>
-                <a:latin typeface="Calibri"/>
-              </a:rPr>
-              <a:t>–   </a:t>
-            </a:r>
-            <a:r>
-              <a:rPr sz="2000" b="1" i="0">
-                <a:solidFill>
-                  <a:srgbClr val="333333"/>
-                </a:solidFill>
-                <a:latin typeface="Calibri"/>
-              </a:rPr>
-              <a:t>Exito:</a:t>
-            </a:r>
-            <a:r>
-              <a:rPr sz="2000" b="0" i="0">
-                <a:solidFill>
-                  <a:srgbClr val="333333"/>
-                </a:solidFill>
-                <a:latin typeface="Calibri"/>
-              </a:rPr>
-              <a:t> Ninguna clase de los paquetes modelo o servicio importa javax.swing, y el cuerpo del listener no contiene ninguna validacion ni conversion de datos.</a:t>
-            </a:r>
-          </a:p>
-          <a:p>
-            <a:pPr>
-              <a:spcAft>
-                <a:spcPts val="800"/>
-              </a:spcAft>
-            </a:pPr>
-            <a:r>
-              <a:rPr sz="2000" b="0" i="0">
-                <a:solidFill>
-                  <a:srgbClr val="333333"/>
-                </a:solidFill>
-                <a:latin typeface="Calibri"/>
-              </a:rPr>
-              <a:t>–   </a:t>
-            </a:r>
-            <a:r>
-              <a:rPr sz="2000" b="1" i="0">
-                <a:solidFill>
-                  <a:srgbClr val="333333"/>
-                </a:solidFill>
-                <a:latin typeface="Calibri"/>
-              </a:rPr>
-              <a:t>Exito:</a:t>
-            </a:r>
-            <a:r>
-              <a:rPr sz="2000" b="0" i="0">
-                <a:solidFill>
-                  <a:srgbClr val="333333"/>
-                </a:solidFill>
-                <a:latin typeface="Calibri"/>
-              </a:rPr>
-              <a:t> Escribir 'tres' en el campo edad muestra un mensaje entendible en un JOptionPane y la aplicacion sigue funcionando, sin traza roja en la consola de VS Code.</a:t>
-            </a:r>
-          </a:p>
-          <a:p>
-            <a:pPr>
-              <a:spcAft>
-                <a:spcPts val="800"/>
-              </a:spcAft>
-            </a:pPr>
-            <a:r>
-              <a:rPr sz="2000" b="0" i="0">
-                <a:solidFill>
-                  <a:srgbClr val="333333"/>
-                </a:solidFill>
-                <a:latin typeface="Calibri"/>
-              </a:rPr>
-              <a:t>–   </a:t>
-            </a:r>
-            <a:r>
-              <a:rPr sz="2000" b="1" i="0">
-                <a:solidFill>
-                  <a:srgbClr val="333333"/>
-                </a:solidFill>
-                <a:latin typeface="Calibri"/>
-              </a:rPr>
-              <a:t>Exito:</a:t>
-            </a:r>
-            <a:r>
-              <a:rPr sz="2000" b="0" i="0">
-                <a:solidFill>
-                  <a:srgbClr val="333333"/>
-                </a:solidFill>
-                <a:latin typeface="Calibri"/>
-              </a:rPr>
-              <a:t> Intentar registrar un ID que ya existe es rechazado con mensaje y la lista no queda con dos mascotas con el mismo ID.</a:t>
-            </a:r>
-          </a:p>
-          <a:p>
-            <a:pPr>
-              <a:spcAft>
-                <a:spcPts val="800"/>
-              </a:spcAft>
-            </a:pPr>
-            <a:r>
-              <a:rPr sz="2000" b="0" i="0">
-                <a:solidFill>
-                  <a:srgbClr val="333333"/>
-                </a:solidFill>
-                <a:latin typeface="Calibri"/>
-              </a:rPr>
-              <a:t>–   </a:t>
-            </a:r>
-            <a:r>
-              <a:rPr sz="2000" b="1" i="0">
-                <a:solidFill>
-                  <a:srgbClr val="333333"/>
-                </a:solidFill>
-                <a:latin typeface="Calibri"/>
-              </a:rPr>
-              <a:t>Entrega en la plataforma del curso</a:t>
-            </a:r>
-            <a:r>
-              <a:rPr sz="2000" b="0" i="0">
-                <a:solidFill>
-                  <a:srgbClr val="333333"/>
-                </a:solidFill>
-                <a:latin typeface="Calibri"/>
-              </a:rPr>
-              <a:t> — en la fecha que indique el docente.</a:t>
-            </a:r>
-          </a:p>
-        </p:txBody>
-      </p:sp>
-      <p:sp>
-        <p:nvSpPr>
-          <p:cNvPr id="6" name="TextBox 5"/>
-          <p:cNvSpPr txBox="1"/>
-          <p:nvPr/>
-        </p:nvSpPr>
-        <p:spPr>
-          <a:xfrm>
-            <a:off x="11185855" y="6473952"/>
-            <a:ext cx="640080" cy="274320"/>
-          </a:xfrm>
-          <a:prstGeom prst="rect">
-            <a:avLst/>
-          </a:prstGeom>
-          <a:noFill/>
-        </p:spPr>
-        <p:txBody>
-          <a:bodyPr wrap="square">
-            <a:spAutoFit/>
-          </a:bodyPr>
-          <a:lstStyle/>
-          <a:p>
-            <a:pPr algn="r"/>
-            <a:r>
-              <a:rPr sz="1100" b="0" i="0">
-                <a:solidFill>
-                  <a:srgbClr val="666666"/>
-                </a:solidFill>
-                <a:latin typeface="Calibri"/>
-              </a:rPr>
-              <a:t>34</a:t>
-            </a:r>
-          </a:p>
-        </p:txBody>
-      </p:sp>
-    </p:spTree>
-  </p:cSld>
-  <p:clrMapOvr>
-    <a:masterClrMapping/>
-  </p:clrMapOvr>
-</p:sld>
-</file>
-
-<file path=ppt/slides/slide35.xml><?xml version="1.0" encoding="utf-8"?>
-<p:sld xmlns:a="http://schemas.openxmlformats.org/drawingml/2006/main" xmlns:p="http://schemas.openxmlformats.org/presentationml/2006/main" xmlns:r="http://schemas.openxmlformats.org/officeDocument/2006/relationships">
-  <p:cSld>
-    <p:bg>
-      <p:bgPr>
-        <a:solidFill>
-          <a:srgbClr val="FFFFFF"/>
-        </a:solidFill>
-        <a:effectLst/>
-      </p:bgPr>
-    </p:bg>
-    <p:spTree>
-      <p:nvGrpSpPr>
-        <p:cNvPr id="1" name=""/>
-        <p:cNvGrpSpPr/>
-        <p:nvPr/>
-      </p:nvGrpSpPr>
-      <p:grpSpPr/>
-      <p:sp>
-        <p:nvSpPr>
-          <p:cNvPr id="2" name="Rectangle 1"/>
-          <p:cNvSpPr/>
-          <p:nvPr/>
-        </p:nvSpPr>
-        <p:spPr>
-          <a:xfrm>
-            <a:off x="0" y="0"/>
-            <a:ext cx="12191695" cy="960120"/>
-          </a:xfrm>
-          <a:prstGeom prst="rect">
-            <a:avLst/>
-          </a:prstGeom>
-          <a:solidFill>
-            <a:srgbClr val="095292"/>
-          </a:solidFill>
-          <a:ln>
-            <a:noFill/>
-          </a:ln>
-        </p:spPr>
-        <p:style>
-          <a:lnRef idx="1">
-            <a:schemeClr val="accent1"/>
-          </a:lnRef>
-          <a:fillRef idx="3">
-            <a:schemeClr val="accent1"/>
-          </a:fillRef>
-          <a:effectRef idx="2">
-            <a:schemeClr val="accent1"/>
-          </a:effectRef>
-          <a:fontRef idx="minor">
-            <a:schemeClr val="lt1"/>
-          </a:fontRef>
-        </p:style>
-        <p:txBody>
-          <a:bodyPr rtlCol="0" anchor="ctr"/>
-          <a:lstStyle/>
-          <a:p>
-            <a:pPr algn="ctr"/>
-          </a:p>
-        </p:txBody>
-      </p:sp>
-      <p:sp>
-        <p:nvSpPr>
-          <p:cNvPr id="3" name="Rectangle 2"/>
-          <p:cNvSpPr/>
-          <p:nvPr/>
-        </p:nvSpPr>
-        <p:spPr>
-          <a:xfrm>
-            <a:off x="0" y="960120"/>
-            <a:ext cx="12191695" cy="41148"/>
-          </a:xfrm>
-          <a:prstGeom prst="rect">
-            <a:avLst/>
-          </a:prstGeom>
-          <a:solidFill>
-            <a:srgbClr val="FFD000"/>
-          </a:solidFill>
-          <a:ln>
-            <a:noFill/>
-          </a:ln>
-        </p:spPr>
-        <p:style>
-          <a:lnRef idx="1">
-            <a:schemeClr val="accent1"/>
-          </a:lnRef>
-          <a:fillRef idx="3">
-            <a:schemeClr val="accent1"/>
-          </a:fillRef>
-          <a:effectRef idx="2">
-            <a:schemeClr val="accent1"/>
-          </a:effectRef>
-          <a:fontRef idx="minor">
-            <a:schemeClr val="lt1"/>
-          </a:fontRef>
-        </p:style>
-        <p:txBody>
-          <a:bodyPr rtlCol="0" anchor="ctr"/>
-          <a:lstStyle/>
-          <a:p>
-            <a:pPr algn="ctr"/>
-          </a:p>
-        </p:txBody>
-      </p:sp>
-      <p:sp>
-        <p:nvSpPr>
-          <p:cNvPr id="4" name="TextBox 3"/>
-          <p:cNvSpPr txBox="1"/>
-          <p:nvPr/>
-        </p:nvSpPr>
-        <p:spPr>
-          <a:xfrm>
-            <a:off x="457200" y="164592"/>
-            <a:ext cx="11277295" cy="502920"/>
-          </a:xfrm>
-          <a:prstGeom prst="rect">
-            <a:avLst/>
-          </a:prstGeom>
-          <a:noFill/>
-        </p:spPr>
-        <p:txBody>
-          <a:bodyPr wrap="square">
-            <a:spAutoFit/>
-          </a:bodyPr>
-          <a:lstStyle/>
-          <a:p>
-            <a:r>
-              <a:rPr sz="2600" b="1" i="0">
-                <a:solidFill>
-                  <a:srgbClr val="FFFFFF"/>
-                </a:solidFill>
-                <a:latin typeface="Calibri"/>
-              </a:rPr>
-              <a:t>Para el PI esta semana</a:t>
-            </a:r>
-          </a:p>
-        </p:txBody>
-      </p:sp>
-      <p:sp>
-        <p:nvSpPr>
-          <p:cNvPr id="5" name="Rounded Rectangle 4"/>
-          <p:cNvSpPr/>
-          <p:nvPr/>
-        </p:nvSpPr>
-        <p:spPr>
-          <a:xfrm>
-            <a:off x="457200" y="1261872"/>
-            <a:ext cx="11277295" cy="1051560"/>
-          </a:xfrm>
-          <a:prstGeom prst="roundRect">
-            <a:avLst>
-              <a:gd name="adj" fmla="val 12000"/>
-            </a:avLst>
-          </a:prstGeom>
-          <a:solidFill>
-            <a:srgbClr val="E8F4FA"/>
-          </a:solidFill>
-          <a:ln>
-            <a:noFill/>
-          </a:ln>
-        </p:spPr>
-        <p:style>
-          <a:lnRef idx="1">
-            <a:schemeClr val="accent1"/>
-          </a:lnRef>
-          <a:fillRef idx="3">
-            <a:schemeClr val="accent1"/>
-          </a:fillRef>
-          <a:effectRef idx="2">
-            <a:schemeClr val="accent1"/>
-          </a:effectRef>
-          <a:fontRef idx="minor">
-            <a:schemeClr val="lt1"/>
-          </a:fontRef>
-        </p:style>
-        <p:txBody>
-          <a:bodyPr rtlCol="0" anchor="ctr"/>
-          <a:lstStyle/>
-          <a:p>
-            <a:pPr algn="ctr"/>
-          </a:p>
-        </p:txBody>
-      </p:sp>
-      <p:sp>
-        <p:nvSpPr>
-          <p:cNvPr id="6" name="Rectangle 5"/>
-          <p:cNvSpPr/>
-          <p:nvPr/>
-        </p:nvSpPr>
-        <p:spPr>
-          <a:xfrm>
-            <a:off x="457200" y="1261872"/>
-            <a:ext cx="128016" cy="1051560"/>
-          </a:xfrm>
-          <a:prstGeom prst="rect">
-            <a:avLst/>
-          </a:prstGeom>
-          <a:solidFill>
-            <a:srgbClr val="269CCB"/>
-          </a:solidFill>
-          <a:ln>
-            <a:noFill/>
-          </a:ln>
-        </p:spPr>
-        <p:style>
-          <a:lnRef idx="1">
-            <a:schemeClr val="accent1"/>
-          </a:lnRef>
-          <a:fillRef idx="3">
-            <a:schemeClr val="accent1"/>
-          </a:fillRef>
-          <a:effectRef idx="2">
-            <a:schemeClr val="accent1"/>
-          </a:effectRef>
-          <a:fontRef idx="minor">
-            <a:schemeClr val="lt1"/>
-          </a:fontRef>
-        </p:style>
-        <p:txBody>
-          <a:bodyPr rtlCol="0" anchor="ctr"/>
-          <a:lstStyle/>
-          <a:p>
-            <a:pPr algn="ctr"/>
-          </a:p>
-        </p:txBody>
-      </p:sp>
-      <p:sp>
-        <p:nvSpPr>
-          <p:cNvPr id="7" name="TextBox 6"/>
-          <p:cNvSpPr txBox="1"/>
-          <p:nvPr/>
-        </p:nvSpPr>
-        <p:spPr>
-          <a:xfrm>
-            <a:off x="777240" y="1399031"/>
-            <a:ext cx="10774375" cy="822959"/>
-          </a:xfrm>
-          <a:prstGeom prst="rect">
-            <a:avLst/>
-          </a:prstGeom>
-          <a:noFill/>
-        </p:spPr>
-        <p:txBody>
-          <a:bodyPr wrap="square">
-            <a:spAutoFit/>
-          </a:bodyPr>
-          <a:lstStyle/>
-          <a:p>
-            <a:r>
-              <a:rPr sz="1200" b="1" i="0">
-                <a:solidFill>
-                  <a:srgbClr val="269CCB"/>
-                </a:solidFill>
-                <a:latin typeface="Calibri"/>
-              </a:rPr>
-              <a:t>Info</a:t>
-            </a:r>
-          </a:p>
-          <a:p>
-            <a:pPr>
-              <a:spcBef>
-                <a:spcPts val="400"/>
-              </a:spcBef>
-            </a:pPr>
-            <a:r>
-              <a:rPr sz="1400" b="0" i="0">
-                <a:solidFill>
-                  <a:srgbClr val="333333"/>
-                </a:solidFill>
-                <a:latin typeface="Calibri"/>
-              </a:rPr>
-              <a:t>Hito: El formulario de VetCare queda conectado: al oprimir 'Registrar mascota' el objeto entra al ArrayList y el listado en pantalla se actualiza.</a:t>
-            </a:r>
-          </a:p>
-        </p:txBody>
-      </p:sp>
-      <p:sp>
-        <p:nvSpPr>
-          <p:cNvPr id="8" name="Rounded Rectangle 7"/>
-          <p:cNvSpPr/>
-          <p:nvPr/>
-        </p:nvSpPr>
-        <p:spPr>
-          <a:xfrm>
-            <a:off x="457200" y="2478024"/>
-            <a:ext cx="11277295" cy="1051560"/>
-          </a:xfrm>
-          <a:prstGeom prst="roundRect">
-            <a:avLst>
-              <a:gd name="adj" fmla="val 12000"/>
-            </a:avLst>
-          </a:prstGeom>
-          <a:solidFill>
-            <a:srgbClr val="FFF8E1"/>
-          </a:solidFill>
-          <a:ln>
-            <a:noFill/>
-          </a:ln>
-        </p:spPr>
-        <p:style>
-          <a:lnRef idx="1">
-            <a:schemeClr val="accent1"/>
-          </a:lnRef>
-          <a:fillRef idx="3">
-            <a:schemeClr val="accent1"/>
-          </a:fillRef>
-          <a:effectRef idx="2">
-            <a:schemeClr val="accent1"/>
-          </a:effectRef>
-          <a:fontRef idx="minor">
-            <a:schemeClr val="lt1"/>
-          </a:fontRef>
-        </p:style>
-        <p:txBody>
-          <a:bodyPr rtlCol="0" anchor="ctr"/>
-          <a:lstStyle/>
-          <a:p>
-            <a:pPr algn="ctr"/>
-          </a:p>
-        </p:txBody>
-      </p:sp>
-      <p:sp>
-        <p:nvSpPr>
-          <p:cNvPr id="9" name="Rectangle 8"/>
-          <p:cNvSpPr/>
-          <p:nvPr/>
-        </p:nvSpPr>
-        <p:spPr>
-          <a:xfrm>
-            <a:off x="457200" y="2478024"/>
-            <a:ext cx="128016" cy="1051560"/>
-          </a:xfrm>
-          <a:prstGeom prst="rect">
-            <a:avLst/>
-          </a:prstGeom>
-          <a:solidFill>
-            <a:srgbClr val="FFD000"/>
-          </a:solidFill>
-          <a:ln>
-            <a:noFill/>
-          </a:ln>
-        </p:spPr>
-        <p:style>
-          <a:lnRef idx="1">
-            <a:schemeClr val="accent1"/>
-          </a:lnRef>
-          <a:fillRef idx="3">
-            <a:schemeClr val="accent1"/>
-          </a:fillRef>
-          <a:effectRef idx="2">
-            <a:schemeClr val="accent1"/>
-          </a:effectRef>
-          <a:fontRef idx="minor">
-            <a:schemeClr val="lt1"/>
-          </a:fontRef>
-        </p:style>
-        <p:txBody>
-          <a:bodyPr rtlCol="0" anchor="ctr"/>
-          <a:lstStyle/>
-          <a:p>
-            <a:pPr algn="ctr"/>
-          </a:p>
-        </p:txBody>
-      </p:sp>
-      <p:sp>
-        <p:nvSpPr>
-          <p:cNvPr id="10" name="TextBox 9"/>
-          <p:cNvSpPr txBox="1"/>
-          <p:nvPr/>
-        </p:nvSpPr>
-        <p:spPr>
-          <a:xfrm>
-            <a:off x="777240" y="2615184"/>
-            <a:ext cx="10774375" cy="822959"/>
-          </a:xfrm>
-          <a:prstGeom prst="rect">
-            <a:avLst/>
-          </a:prstGeom>
-          <a:noFill/>
-        </p:spPr>
-        <p:txBody>
-          <a:bodyPr wrap="square">
-            <a:spAutoFit/>
-          </a:bodyPr>
-          <a:lstStyle/>
-          <a:p>
-            <a:r>
-              <a:rPr sz="1200" b="1" i="0">
-                <a:solidFill>
-                  <a:srgbClr val="FFD000"/>
-                </a:solidFill>
-                <a:latin typeface="Calibri"/>
-              </a:rPr>
-              <a:t>Aclaración</a:t>
-            </a:r>
-          </a:p>
-          <a:p>
-            <a:pPr>
-              <a:spcBef>
-                <a:spcPts val="400"/>
-              </a:spcBef>
-            </a:pPr>
-            <a:r>
-              <a:rPr sz="1400" b="0" i="0">
-                <a:solidFill>
-                  <a:srgbClr val="333333"/>
-                </a:solidFill>
-                <a:latin typeface="Calibri"/>
-              </a:rPr>
-              <a:t>Enunciado completo: Clases/Proyecto Integrador/ (VetCare).</a:t>
-            </a:r>
-          </a:p>
-        </p:txBody>
-      </p:sp>
-      <p:sp>
-        <p:nvSpPr>
-          <p:cNvPr id="11" name="Rounded Rectangle 10"/>
-          <p:cNvSpPr/>
-          <p:nvPr/>
-        </p:nvSpPr>
-        <p:spPr>
-          <a:xfrm>
-            <a:off x="457200" y="3694176"/>
-            <a:ext cx="11277295" cy="1051560"/>
-          </a:xfrm>
-          <a:prstGeom prst="roundRect">
-            <a:avLst>
-              <a:gd name="adj" fmla="val 12000"/>
-            </a:avLst>
-          </a:prstGeom>
-          <a:solidFill>
-            <a:srgbClr val="FBE4E4"/>
-          </a:solidFill>
-          <a:ln>
-            <a:noFill/>
-          </a:ln>
-        </p:spPr>
-        <p:style>
-          <a:lnRef idx="1">
-            <a:schemeClr val="accent1"/>
-          </a:lnRef>
-          <a:fillRef idx="3">
-            <a:schemeClr val="accent1"/>
-          </a:fillRef>
-          <a:effectRef idx="2">
-            <a:schemeClr val="accent1"/>
-          </a:effectRef>
-          <a:fontRef idx="minor">
-            <a:schemeClr val="lt1"/>
-          </a:fontRef>
-        </p:style>
-        <p:txBody>
-          <a:bodyPr rtlCol="0" anchor="ctr"/>
-          <a:lstStyle/>
-          <a:p>
-            <a:pPr algn="ctr"/>
-          </a:p>
-        </p:txBody>
-      </p:sp>
-      <p:sp>
-        <p:nvSpPr>
-          <p:cNvPr id="12" name="Rectangle 11"/>
-          <p:cNvSpPr/>
-          <p:nvPr/>
-        </p:nvSpPr>
-        <p:spPr>
-          <a:xfrm>
-            <a:off x="457200" y="3694176"/>
-            <a:ext cx="128016" cy="1051560"/>
-          </a:xfrm>
-          <a:prstGeom prst="rect">
-            <a:avLst/>
-          </a:prstGeom>
-          <a:solidFill>
-            <a:srgbClr val="A02030"/>
-          </a:solidFill>
-          <a:ln>
-            <a:noFill/>
-          </a:ln>
-        </p:spPr>
-        <p:style>
-          <a:lnRef idx="1">
-            <a:schemeClr val="accent1"/>
-          </a:lnRef>
-          <a:fillRef idx="3">
-            <a:schemeClr val="accent1"/>
-          </a:fillRef>
-          <a:effectRef idx="2">
-            <a:schemeClr val="accent1"/>
-          </a:effectRef>
-          <a:fontRef idx="minor">
-            <a:schemeClr val="lt1"/>
-          </a:fontRef>
-        </p:style>
-        <p:txBody>
-          <a:bodyPr rtlCol="0" anchor="ctr"/>
-          <a:lstStyle/>
-          <a:p>
-            <a:pPr algn="ctr"/>
-          </a:p>
-        </p:txBody>
-      </p:sp>
-      <p:sp>
-        <p:nvSpPr>
-          <p:cNvPr id="13" name="TextBox 12"/>
-          <p:cNvSpPr txBox="1"/>
-          <p:nvPr/>
-        </p:nvSpPr>
-        <p:spPr>
-          <a:xfrm>
-            <a:off x="777240" y="3831336"/>
-            <a:ext cx="10774375" cy="822959"/>
-          </a:xfrm>
-          <a:prstGeom prst="rect">
-            <a:avLst/>
-          </a:prstGeom>
-          <a:noFill/>
-        </p:spPr>
-        <p:txBody>
-          <a:bodyPr wrap="square">
-            <a:spAutoFit/>
-          </a:bodyPr>
-          <a:lstStyle/>
-          <a:p>
-            <a:r>
-              <a:rPr sz="1200" b="1" i="0">
-                <a:solidFill>
-                  <a:srgbClr val="A02030"/>
-                </a:solidFill>
-                <a:latin typeface="Calibri"/>
-              </a:rPr>
-              <a:t>Atención</a:t>
-            </a:r>
-          </a:p>
-          <a:p>
-            <a:pPr>
-              <a:spcBef>
-                <a:spcPts val="400"/>
-              </a:spcBef>
-            </a:pPr>
-            <a:r>
-              <a:rPr sz="1400" b="0" i="0">
-                <a:solidFill>
-                  <a:srgbClr val="333333"/>
-                </a:solidFill>
-                <a:latin typeface="Calibri"/>
-              </a:rPr>
-              <a:t>Entrega del taller, si el docente lo asigna · en la fecha que indique el docente.</a:t>
-            </a:r>
-          </a:p>
-        </p:txBody>
-      </p:sp>
-      <p:sp>
-        <p:nvSpPr>
-          <p:cNvPr id="14" name="TextBox 13"/>
-          <p:cNvSpPr txBox="1"/>
-          <p:nvPr/>
-        </p:nvSpPr>
-        <p:spPr>
-          <a:xfrm>
-            <a:off x="11185855" y="6473952"/>
-            <a:ext cx="640080" cy="274320"/>
-          </a:xfrm>
-          <a:prstGeom prst="rect">
-            <a:avLst/>
-          </a:prstGeom>
-          <a:noFill/>
-        </p:spPr>
-        <p:txBody>
-          <a:bodyPr wrap="square">
-            <a:spAutoFit/>
-          </a:bodyPr>
-          <a:lstStyle/>
-          <a:p>
-            <a:pPr algn="r"/>
-            <a:r>
-              <a:rPr sz="1100" b="0" i="0">
-                <a:solidFill>
-                  <a:srgbClr val="666666"/>
-                </a:solidFill>
-                <a:latin typeface="Calibri"/>
-              </a:rPr>
-              <a:t>35</a:t>
-            </a:r>
-          </a:p>
-        </p:txBody>
-      </p:sp>
-    </p:spTree>
-  </p:cSld>
-  <p:clrMapOvr>
-    <a:masterClrMapping/>
-  </p:clrMapOvr>
-</p:sld>
-</file>
-
-<file path=ppt/slides/slide36.xml><?xml version="1.0" encoding="utf-8"?>
-<p:sld xmlns:a="http://schemas.openxmlformats.org/drawingml/2006/main" xmlns:p="http://schemas.openxmlformats.org/presentationml/2006/main" xmlns:r="http://schemas.openxmlformats.org/officeDocument/2006/relationships">
-  <p:cSld>
-    <p:bg>
-      <p:bgPr>
-        <a:solidFill>
-          <a:srgbClr val="FFFFFF"/>
-        </a:solidFill>
-        <a:effectLst/>
-      </p:bgPr>
-    </p:bg>
-    <p:spTree>
-      <p:nvGrpSpPr>
-        <p:cNvPr id="1" name=""/>
-        <p:cNvGrpSpPr/>
-        <p:nvPr/>
-      </p:nvGrpSpPr>
-      <p:grpSpPr/>
-      <p:sp>
-        <p:nvSpPr>
-          <p:cNvPr id="2" name="Rectangle 1"/>
-          <p:cNvSpPr/>
-          <p:nvPr/>
-        </p:nvSpPr>
-        <p:spPr>
-          <a:xfrm>
-            <a:off x="0" y="0"/>
             <a:ext cx="12191695" cy="164592"/>
           </a:xfrm>
           <a:prstGeom prst="rect">
@@ -17446,7 +15001,7 @@
                 </a:solidFill>
                 <a:latin typeface="Calibri"/>
               </a:rPr>
-              <a:t>Clase 6 · VetCare avanza</a:t>
+              <a:t>Clase 6 · Eventos y controladores · ActionListener</a:t>
             </a:r>
           </a:p>
         </p:txBody>
@@ -17485,7 +15040,7 @@
                 </a:solidFill>
                 <a:latin typeface="Calibri"/>
               </a:rPr>
-              <a:t>El formulario de VetCare queda conectado: al oprimir 'Registrar mascota' el objeto entra al ArrayList y el listado en pantalla se actualiza.</a:t>
+              <a:t>El boton que de verdad guarda</a:t>
             </a:r>
           </a:p>
           <a:p>
@@ -17501,7 +15056,7 @@
                 </a:solidFill>
                 <a:latin typeface="Calibri"/>
               </a:rPr>
-              <a:t>Entregable: Proyecto VetCare con la ventana de registro operativa y la clase ControladorRegistro separada de la vista, comprimido y subido a la plataforma del curso.</a:t>
+              <a:t>Repasa las laminas de concepto y el codigo de la demo</a:t>
             </a:r>
           </a:p>
           <a:p>
@@ -17517,7 +15072,7 @@
                 </a:solidFill>
                 <a:latin typeface="Calibri"/>
               </a:rPr>
-              <a:t>Siguiente clase: continuamos el hilo del PI</a:t>
+              <a:t>Siguiente clase: continuamos el hilo del tema</a:t>
             </a:r>
           </a:p>
         </p:txBody>
@@ -19411,4 +16966,324 @@
   </a:objectDefaults>
   <a:extraClrSchemeLst/>
 </a:theme>
+</file>
+
+<file path=ppt/theme/theme2.xml><?xml version="1.0" encoding="utf-8"?>
+<a:theme xmlns:a="http://schemas.openxmlformats.org/drawingml/2006/main" name="Office Theme">
+  <a:themeElements>
+    <a:clrScheme name="Office">
+      <a:dk1>
+        <a:sysClr val="windowText" lastClr="000000"/>
+      </a:dk1>
+      <a:lt1>
+        <a:sysClr val="window" lastClr="FFFFFF"/>
+      </a:lt1>
+      <a:dk2>
+        <a:srgbClr val="1F497D"/>
+      </a:dk2>
+      <a:lt2>
+        <a:srgbClr val="EEECE1"/>
+      </a:lt2>
+      <a:accent1>
+        <a:srgbClr val="4F81BD"/>
+      </a:accent1>
+      <a:accent2>
+        <a:srgbClr val="C0504D"/>
+      </a:accent2>
+      <a:accent3>
+        <a:srgbClr val="9BBB59"/>
+      </a:accent3>
+      <a:accent4>
+        <a:srgbClr val="8064A2"/>
+      </a:accent4>
+      <a:accent5>
+        <a:srgbClr val="4BACC6"/>
+      </a:accent5>
+      <a:accent6>
+        <a:srgbClr val="F79646"/>
+      </a:accent6>
+      <a:hlink>
+        <a:srgbClr val="0000FF"/>
+      </a:hlink>
+      <a:folHlink>
+        <a:srgbClr val="800080"/>
+      </a:folHlink>
+    </a:clrScheme>
+    <a:fontScheme name="Office">
+      <a:majorFont>
+        <a:latin typeface="Calibri"/>
+        <a:ea typeface=""/>
+        <a:cs typeface=""/>
+        <a:font script="Jpan" typeface="ＭＳ Ｐゴシック"/>
+        <a:font script="Hang" typeface="맑은 고딕"/>
+        <a:font script="Hans" typeface="宋体"/>
+        <a:font script="Hant" typeface="新細明體"/>
+        <a:font script="Arab" typeface="Times New Roman"/>
+        <a:font script="Hebr" typeface="Times New Roman"/>
+        <a:font script="Thai" typeface="Angsana New"/>
+        <a:font script="Ethi" typeface="Nyala"/>
+        <a:font script="Beng" typeface="Vrinda"/>
+        <a:font script="Gujr" typeface="Shruti"/>
+        <a:font script="Khmr" typeface="MoolBoran"/>
+        <a:font script="Knda" typeface="Tunga"/>
+        <a:font script="Guru" typeface="Raavi"/>
+        <a:font script="Cans" typeface="Euphemia"/>
+        <a:font script="Cher" typeface="Plantagenet Cherokee"/>
+        <a:font script="Yiii" typeface="Microsoft Yi Baiti"/>
+        <a:font script="Tibt" typeface="Microsoft Himalaya"/>
+        <a:font script="Thaa" typeface="MV Boli"/>
+        <a:font script="Deva" typeface="Mangal"/>
+        <a:font script="Telu" typeface="Gautami"/>
+        <a:font script="Taml" typeface="Latha"/>
+        <a:font script="Syrc" typeface="Estrangelo Edessa"/>
+        <a:font script="Orya" typeface="Kalinga"/>
+        <a:font script="Mlym" typeface="Kartika"/>
+        <a:font script="Laoo" typeface="DokChampa"/>
+        <a:font script="Sinh" typeface="Iskoola Pota"/>
+        <a:font script="Mong" typeface="Mongolian Baiti"/>
+        <a:font script="Viet" typeface="Times New Roman"/>
+        <a:font script="Uigh" typeface="Microsoft Uighur"/>
+        <a:font script="Geor" typeface="Sylfaen"/>
+      </a:majorFont>
+      <a:minorFont>
+        <a:latin typeface="Calibri"/>
+        <a:ea typeface=""/>
+        <a:cs typeface=""/>
+        <a:font script="Jpan" typeface="ＭＳ Ｐゴシック"/>
+        <a:font script="Hang" typeface="맑은 고딕"/>
+        <a:font script="Hans" typeface="宋体"/>
+        <a:font script="Hant" typeface="新細明體"/>
+        <a:font script="Arab" typeface="Arial"/>
+        <a:font script="Hebr" typeface="Arial"/>
+        <a:font script="Thai" typeface="Cordia New"/>
+        <a:font script="Ethi" typeface="Nyala"/>
+        <a:font script="Beng" typeface="Vrinda"/>
+        <a:font script="Gujr" typeface="Shruti"/>
+        <a:font script="Khmr" typeface="DaunPenh"/>
+        <a:font script="Knda" typeface="Tunga"/>
+        <a:font script="Guru" typeface="Raavi"/>
+        <a:font script="Cans" typeface="Euphemia"/>
+        <a:font script="Cher" typeface="Plantagenet Cherokee"/>
+        <a:font script="Yiii" typeface="Microsoft Yi Baiti"/>
+        <a:font script="Tibt" typeface="Microsoft Himalaya"/>
+        <a:font script="Thaa" typeface="MV Boli"/>
+        <a:font script="Deva" typeface="Mangal"/>
+        <a:font script="Telu" typeface="Gautami"/>
+        <a:font script="Taml" typeface="Latha"/>
+        <a:font script="Syrc" typeface="Estrangelo Edessa"/>
+        <a:font script="Orya" typeface="Kalinga"/>
+        <a:font script="Mlym" typeface="Kartika"/>
+        <a:font script="Laoo" typeface="DokChampa"/>
+        <a:font script="Sinh" typeface="Iskoola Pota"/>
+        <a:font script="Mong" typeface="Mongolian Baiti"/>
+        <a:font script="Viet" typeface="Arial"/>
+        <a:font script="Uigh" typeface="Microsoft Uighur"/>
+        <a:font script="Geor" typeface="Sylfaen"/>
+      </a:minorFont>
+    </a:fontScheme>
+    <a:fmtScheme name="Office">
+      <a:fillStyleLst>
+        <a:solidFill>
+          <a:schemeClr val="phClr"/>
+        </a:solidFill>
+        <a:gradFill rotWithShape="1">
+          <a:gsLst>
+            <a:gs pos="0">
+              <a:schemeClr val="phClr">
+                <a:tint val="50000"/>
+                <a:satMod val="300000"/>
+              </a:schemeClr>
+            </a:gs>
+            <a:gs pos="35000">
+              <a:schemeClr val="phClr">
+                <a:tint val="37000"/>
+                <a:satMod val="300000"/>
+              </a:schemeClr>
+            </a:gs>
+            <a:gs pos="100000">
+              <a:schemeClr val="phClr">
+                <a:tint val="15000"/>
+                <a:satMod val="350000"/>
+              </a:schemeClr>
+            </a:gs>
+          </a:gsLst>
+          <a:lin ang="16200000" scaled="1"/>
+        </a:gradFill>
+        <a:gradFill rotWithShape="1">
+          <a:gsLst>
+            <a:gs pos="0">
+              <a:schemeClr val="phClr">
+                <a:tint val="100000"/>
+                <a:shade val="100000"/>
+                <a:satMod val="130000"/>
+              </a:schemeClr>
+            </a:gs>
+            <a:gs pos="100000">
+              <a:schemeClr val="phClr">
+                <a:tint val="50000"/>
+                <a:shade val="100000"/>
+                <a:satMod val="350000"/>
+              </a:schemeClr>
+            </a:gs>
+          </a:gsLst>
+          <a:lin ang="16200000" scaled="0"/>
+        </a:gradFill>
+      </a:fillStyleLst>
+      <a:lnStyleLst>
+        <a:ln w="9525" cap="flat" cmpd="sng" algn="ctr">
+          <a:solidFill>
+            <a:schemeClr val="phClr">
+              <a:shade val="95000"/>
+              <a:satMod val="105000"/>
+            </a:schemeClr>
+          </a:solidFill>
+          <a:prstDash val="solid"/>
+        </a:ln>
+        <a:ln w="25400" cap="flat" cmpd="sng" algn="ctr">
+          <a:solidFill>
+            <a:schemeClr val="phClr"/>
+          </a:solidFill>
+          <a:prstDash val="solid"/>
+        </a:ln>
+        <a:ln w="38100" cap="flat" cmpd="sng" algn="ctr">
+          <a:solidFill>
+            <a:schemeClr val="phClr"/>
+          </a:solidFill>
+          <a:prstDash val="solid"/>
+        </a:ln>
+      </a:lnStyleLst>
+      <a:effectStyleLst>
+        <a:effectStyle>
+          <a:effectLst>
+            <a:outerShdw blurRad="40000" dist="20000" dir="5400000" rotWithShape="0">
+              <a:srgbClr val="000000">
+                <a:alpha val="38000"/>
+              </a:srgbClr>
+            </a:outerShdw>
+          </a:effectLst>
+        </a:effectStyle>
+        <a:effectStyle>
+          <a:effectLst>
+            <a:outerShdw blurRad="40000" dist="23000" dir="5400000" rotWithShape="0">
+              <a:srgbClr val="000000">
+                <a:alpha val="35000"/>
+              </a:srgbClr>
+            </a:outerShdw>
+          </a:effectLst>
+        </a:effectStyle>
+        <a:effectStyle>
+          <a:effectLst>
+            <a:outerShdw blurRad="40000" dist="23000" dir="5400000" rotWithShape="0">
+              <a:srgbClr val="000000">
+                <a:alpha val="35000"/>
+              </a:srgbClr>
+            </a:outerShdw>
+          </a:effectLst>
+          <a:scene3d>
+            <a:camera prst="orthographicFront">
+              <a:rot lat="0" lon="0" rev="0"/>
+            </a:camera>
+            <a:lightRig rig="threePt" dir="t">
+              <a:rot lat="0" lon="0" rev="1200000"/>
+            </a:lightRig>
+          </a:scene3d>
+          <a:sp3d>
+            <a:bevelT w="63500" h="25400"/>
+          </a:sp3d>
+        </a:effectStyle>
+      </a:effectStyleLst>
+      <a:bgFillStyleLst>
+        <a:solidFill>
+          <a:schemeClr val="phClr"/>
+        </a:solidFill>
+        <a:gradFill rotWithShape="1">
+          <a:gsLst>
+            <a:gs pos="0">
+              <a:schemeClr val="phClr">
+                <a:tint val="40000"/>
+                <a:satMod val="350000"/>
+              </a:schemeClr>
+            </a:gs>
+            <a:gs pos="40000">
+              <a:schemeClr val="phClr">
+                <a:tint val="45000"/>
+                <a:shade val="99000"/>
+                <a:satMod val="350000"/>
+              </a:schemeClr>
+            </a:gs>
+            <a:gs pos="100000">
+              <a:schemeClr val="phClr">
+                <a:shade val="20000"/>
+                <a:satMod val="255000"/>
+              </a:schemeClr>
+            </a:gs>
+          </a:gsLst>
+          <a:path path="circle">
+            <a:fillToRect l="50000" t="-80000" r="50000" b="180000"/>
+          </a:path>
+        </a:gradFill>
+        <a:gradFill rotWithShape="1">
+          <a:gsLst>
+            <a:gs pos="0">
+              <a:schemeClr val="phClr">
+                <a:tint val="80000"/>
+                <a:satMod val="300000"/>
+              </a:schemeClr>
+            </a:gs>
+            <a:gs pos="100000">
+              <a:schemeClr val="phClr">
+                <a:shade val="30000"/>
+                <a:satMod val="200000"/>
+              </a:schemeClr>
+            </a:gs>
+          </a:gsLst>
+          <a:path path="circle">
+            <a:fillToRect l="50000" t="50000" r="50000" b="50000"/>
+          </a:path>
+        </a:gradFill>
+      </a:bgFillStyleLst>
+    </a:fmtScheme>
+  </a:themeElements>
+  <a:objectDefaults>
+    <a:spDef>
+      <a:spPr/>
+      <a:bodyPr/>
+      <a:lstStyle/>
+      <a:style>
+        <a:lnRef idx="1">
+          <a:schemeClr val="accent1"/>
+        </a:lnRef>
+        <a:fillRef idx="3">
+          <a:schemeClr val="accent1"/>
+        </a:fillRef>
+        <a:effectRef idx="2">
+          <a:schemeClr val="accent1"/>
+        </a:effectRef>
+        <a:fontRef idx="minor">
+          <a:schemeClr val="lt1"/>
+        </a:fontRef>
+      </a:style>
+    </a:spDef>
+    <a:lnDef>
+      <a:spPr/>
+      <a:bodyPr/>
+      <a:lstStyle/>
+      <a:style>
+        <a:lnRef idx="2">
+          <a:schemeClr val="accent1"/>
+        </a:lnRef>
+        <a:fillRef idx="0">
+          <a:schemeClr val="accent1"/>
+        </a:fillRef>
+        <a:effectRef idx="1">
+          <a:schemeClr val="accent1"/>
+        </a:effectRef>
+        <a:fontRef idx="minor">
+          <a:schemeClr val="tx1"/>
+        </a:fontRef>
+      </a:style>
+    </a:lnDef>
+  </a:objectDefaults>
+  <a:extraClrSchemeLst/>
+</a:theme>
 </file>
--- a/Programacion II/Clases/Clase 6 - Eventos y controladores ActionListener/Presentacion.pptx
+++ b/Programacion II/Clases/Clase 6 - Eventos y controladores ActionListener/Presentacion.pptx
@@ -543,7 +543,7 @@
           <a:p/>
           <a:p>
             <a:r>
-              <a:t>Eso es programacion dirigida por eventos: usted ya no decide cuando corre su codigo; usted lo deja escrito y registrado, y quien decide cuando se ejecuta es la recepcionista de Huellitas el dia que oprima 'Registrar mascota'.</a:t>
+              <a:t>Eso es programacion dirigida por eventos: usted ya no decide cuando corre su codigo; usted lo deja escrito y registrado, y quien decide cuando se ejecuta es la recepcionista de la clinica el dia que oprima 'Registrar mascota'.</a:t>
             </a:r>
           </a:p>
           <a:p/>
@@ -4442,7 +4442,7 @@
                 </a:solidFill>
                 <a:latin typeface="Calibri"/>
               </a:rPr>
-              <a:t>–   Ademas de ActionListener existen otros escuchadores que ya vamos a necesitar en VetCare: ItemListener para el JComboBox de especie, ListSelectionListener para cuando el usuario selecciona una fila del listado de mascotas</a:t>
+              <a:t>–   Ademas de ActionListener existen otros escuchadores que ya vamos a necesitar en el sistema de la clinica: ItemListener para el JComboBox de especie, ListSelectionListener para cuando el usuario selecciona una fila del listado de mascotas</a:t>
             </a:r>
           </a:p>
         </p:txBody>
@@ -4875,7 +4875,7 @@
                 </a:solidFill>
                 <a:latin typeface="Calibri"/>
               </a:rPr>
-              <a:t>class VetCareEventosDemo · main()</a:t>
+              <a:t>class ClinicaEventosDemo · main()</a:t>
             </a:r>
           </a:p>
         </p:txBody>
@@ -5034,7 +5034,7 @@
                 </a:solidFill>
                 <a:latin typeface="Calibri"/>
               </a:rPr>
-              <a:t>public class VetCareEventosDemo {</a:t>
+              <a:t>public class ClinicaEventosDemo {</a:t>
             </a:r>
           </a:p>
           <a:p>
@@ -5242,7 +5242,7 @@
                 </a:solidFill>
                 <a:latin typeface="Calibri"/>
               </a:rPr>
-              <a:t>/** Modelo: una mascota del expediente de la clinica Huellitas. */</a:t>
+              <a:t>/** Modelo: una mascota del expediente de la clinica. */</a:t>
             </a:r>
           </a:p>
         </p:txBody>
@@ -5423,7 +5423,7 @@
                 </a:solidFill>
                 <a:latin typeface="Calibri"/>
               </a:rPr>
-              <a:t>VetCareEventosDemo.java — class Mascota</a:t>
+              <a:t>ClinicaEventosDemo.java — class Mascota</a:t>
             </a:r>
           </a:p>
         </p:txBody>
@@ -5859,7 +5859,7 @@
                 </a:solidFill>
                 <a:latin typeface="Calibri"/>
               </a:rPr>
-              <a:t>VetCareEventosDemo.java — Mascota()</a:t>
+              <a:t>ClinicaEventosDemo.java — Mascota()</a:t>
             </a:r>
           </a:p>
         </p:txBody>
@@ -6439,7 +6439,7 @@
                 </a:solidFill>
                 <a:latin typeface="Calibri"/>
               </a:rPr>
-              <a:t>VetCareEventosDemo.java — class RepositorioMascotas</a:t>
+              <a:t>ClinicaEventosDemo.java — class RepositorioMascotas</a:t>
             </a:r>
           </a:p>
         </p:txBody>
@@ -6827,7 +6827,7 @@
                 </a:solidFill>
                 <a:latin typeface="Calibri"/>
               </a:rPr>
-              <a:t>VetCareEventosDemo.java — registrar()</a:t>
+              <a:t>ClinicaEventosDemo.java — registrar()</a:t>
             </a:r>
           </a:p>
         </p:txBody>
@@ -7311,7 +7311,7 @@
                 </a:solidFill>
                 <a:latin typeface="Calibri"/>
               </a:rPr>
-              <a:t>VetCareEventosDemo.java — buscarPorId()</a:t>
+              <a:t>ClinicaEventosDemo.java — buscarPorId()</a:t>
             </a:r>
           </a:p>
         </p:txBody>
@@ -7875,7 +7875,7 @@
                 </a:solidFill>
                 <a:latin typeface="Calibri"/>
               </a:rPr>
-              <a:t>VetCareEventosDemo.java — class ControladorRegistro</a:t>
+              <a:t>ClinicaEventosDemo.java — class ControladorRegistro</a:t>
             </a:r>
           </a:p>
         </p:txBody>
@@ -8263,7 +8263,7 @@
                 </a:solidFill>
                 <a:latin typeface="Calibri"/>
               </a:rPr>
-              <a:t>VetCareEventosDemo.java — ControladorRegistro()</a:t>
+              <a:t>ClinicaEventosDemo.java — ControladorRegistro()</a:t>
             </a:r>
           </a:p>
         </p:txBody>
@@ -8831,7 +8831,7 @@
                 </a:solidFill>
                 <a:latin typeface="Calibri"/>
               </a:rPr>
-              <a:t>–   Todo con el mismo dominio: la clinica veterinaria Huellitas (VetCare).</a:t>
+              <a:t>–   Todo con el mismo dominio: una clinica veterinaria.</a:t>
             </a:r>
           </a:p>
         </p:txBody>
@@ -9012,7 +9012,7 @@
                 </a:solidFill>
                 <a:latin typeface="Calibri"/>
               </a:rPr>
-              <a:t>VetCareEventosDemo.java — registrarMascota() (1/2)</a:t>
+              <a:t>ClinicaEventosDemo.java — registrarMascota() (1/2)</a:t>
             </a:r>
           </a:p>
         </p:txBody>
@@ -9679,7 +9679,7 @@
                 </a:solidFill>
                 <a:latin typeface="Calibri"/>
               </a:rPr>
-              <a:t>VetCareEventosDemo.java — registrarMascota() (2/2)</a:t>
+              <a:t>ClinicaEventosDemo.java — registrarMascota() (2/2)</a:t>
             </a:r>
           </a:p>
         </p:txBody>
@@ -10051,7 +10051,7 @@
                 </a:solidFill>
                 <a:latin typeface="Calibri"/>
               </a:rPr>
-              <a:t>VetCareEventosDemo.java — reporteListado()</a:t>
+              <a:t>ClinicaEventosDemo.java — reporteListado()</a:t>
             </a:r>
           </a:p>
         </p:txBody>
@@ -10551,7 +10551,7 @@
                 </a:solidFill>
                 <a:latin typeface="Calibri"/>
               </a:rPr>
-              <a:t>VetCareEventosDemo.java — class VentanaRegistroMascota</a:t>
+              <a:t>ClinicaEventosDemo.java — class VentanaRegistroMascota</a:t>
             </a:r>
           </a:p>
         </p:txBody>
@@ -11067,7 +11067,7 @@
                 </a:solidFill>
                 <a:latin typeface="Calibri"/>
               </a:rPr>
-              <a:t>VetCareEventosDemo.java — VentanaRegistroMascota() (1/2)</a:t>
+              <a:t>ClinicaEventosDemo.java — VentanaRegistroMascota() (1/2)</a:t>
             </a:r>
           </a:p>
         </p:txBody>
@@ -11242,7 +11242,7 @@
                 </a:solidFill>
                 <a:latin typeface="Calibri"/>
               </a:rPr>
-              <a:t>        super("VetCare - Registro de mascotas");</a:t>
+              <a:t>        super("Clinica - Registro de mascotas");</a:t>
             </a:r>
           </a:p>
           <a:p>
@@ -11734,7 +11734,7 @@
                 </a:solidFill>
                 <a:latin typeface="Calibri"/>
               </a:rPr>
-              <a:t>VetCareEventosDemo.java — VentanaRegistroMascota() (2/2)</a:t>
+              <a:t>ClinicaEventosDemo.java — VentanaRegistroMascota() (2/2)</a:t>
             </a:r>
           </a:p>
         </p:txBody>
@@ -12250,7 +12250,7 @@
                 </a:solidFill>
                 <a:latin typeface="Calibri"/>
               </a:rPr>
-              <a:t>VetCareEventosDemo.java — registrar()</a:t>
+              <a:t>ClinicaEventosDemo.java — registrar()</a:t>
             </a:r>
           </a:p>
         </p:txBody>
@@ -12782,7 +12782,7 @@
                 </a:solidFill>
                 <a:latin typeface="Calibri"/>
               </a:rPr>
-              <a:t>VetCareEventosDemo.java — limpiar()</a:t>
+              <a:t>ClinicaEventosDemo.java — limpiar()</a:t>
             </a:r>
           </a:p>
         </p:txBody>
@@ -13988,7 +13988,7 @@
                 </a:solidFill>
                 <a:latin typeface="Calibri"/>
               </a:rPr>
-              <a:t>–   Mismo dominio VetCare — no otro ejemplo.</a:t>
+              <a:t>–   Mismo dominio de la clinica — no otro ejemplo.</a:t>
             </a:r>
           </a:p>
         </p:txBody>
@@ -14557,7 +14557,7 @@
                 </a:solidFill>
                 <a:latin typeface="Calibri"/>
               </a:rPr>
-              <a:t>Demo en vivo sobre VetCare</a:t>
+              <a:t>Demo en vivo sobre el tema</a:t>
             </a:r>
           </a:p>
         </p:txBody>
@@ -15253,7 +15253,7 @@
                 </a:solidFill>
                 <a:latin typeface="Calibri"/>
               </a:rPr>
-              <a:t>Hasta ahora los programas de VetCare corrian en linea recta: el main...</a:t>
+              <a:t>Hasta ahora los programas del sistema de la clinica corrian en linea...</a:t>
             </a:r>
           </a:p>
         </p:txBody>
@@ -15292,7 +15292,7 @@
                 </a:solidFill>
                 <a:latin typeface="Calibri"/>
               </a:rPr>
-              <a:t>–   Hasta ahora los programas de VetCare corrian en linea recta: el main llamaba un metodo, ese metodo llamaba a otro y el programa terminaba.</a:t>
+              <a:t>–   Hasta ahora los programas del sistema de la clinica corrian en linea recta: el main llamaba un metodo, ese metodo llamaba a otro y el programa terminaba.</a:t>
             </a:r>
           </a:p>
           <a:p>
@@ -16048,7 +16048,7 @@
                 </a:solidFill>
                 <a:latin typeface="Calibri"/>
               </a:rPr>
-              <a:t>–   En VetCare vamos a tener tres capas claras: el modelo (Mascota, Dueno, Cita), que solo guarda datos y comportamiento propio</a:t>
+              <a:t>–   En el sistema de la clinica vamos a tener tres capas claras: el modelo (Mascota, Dueno, Cita), que solo guarda datos y comportamiento propio</a:t>
             </a:r>
           </a:p>
           <a:p>
@@ -16080,7 +16080,7 @@
                 </a:solidFill>
                 <a:latin typeface="Calibri"/>
               </a:rPr>
-              <a:t>–   La prueba acida es esta pregunta: si mañana Huellitas pide la misma funcionalidad en consola, o migramos a JavaFX, cuanto codigo hay que reescribir?</a:t>
+              <a:t>–   La prueba acida es esta pregunta: si mañana la clinica pide la misma funcionalidad en consola, o migramos a JavaFX, cuanto codigo hay que reescribir?</a:t>
             </a:r>
           </a:p>
           <a:p>

--- a/Programacion II/Clases/Clase 6 - Eventos y controladores ActionListener/Presentacion.pptx
+++ b/Programacion II/Clases/Clase 6 - Eventos y controladores ActionListener/Presentacion.pptx
@@ -828,94 +828,6 @@
           <a:p>
             <a:r>
               <a:t>Dos detalles mas que le van a servir. El ActionEvent trae e.getSource(), que devuelve el componente que disparo el evento; eso permite que un mismo listener atienda varios botones y decida con un if (e.getSource() == btnBuscar). Es comodo, pero uselo con cabeza: si el metodo se llena de ifs, es mas limpio un listener por boton. Ademas de ActionListener existen otros escuchadores que ya vamos a necesitar en el sistema de la clinica: ItemListener para el JComboBox de especie, ListSelectionListener para cuando el usuario selecciona una fila del listado de mascotas, y WindowListener para preguntar 'desea guardar antes de salir' cuando lleguemos a persistencia. Y una advertencia de rendimiento: todo lo que usted escriba dentro de actionPerformed corre en el EDT, el mismo hilo que dibuja la ventana; si ahi mete una tarea larga, la interfaz se congela y el usuario cree que el programa se colgo. Para eso existe SwingWorker. Por ahora la regla es simple: listeners cortos que solo leen, delegan y muestran.</a:t>
-            </a:r>
-          </a:p>
-        </p:txBody>
-      </p:sp>
-      <p:sp>
-        <p:nvSpPr>
-          <p:cNvPr id="4" name="Slide Number Placeholder 3"/>
-          <p:cNvSpPr>
-            <a:spLocks noGrp="1"/>
-          </p:cNvSpPr>
-          <p:nvPr>
-            <p:ph type="sldNum" idx="5" sz="quarter"/>
-          </p:nvPr>
-        </p:nvSpPr>
-        <p:spPr/>
-      </p:sp>
-    </p:spTree>
-  </p:cSld>
-  <p:clrMapOvr>
-    <a:masterClrMapping/>
-  </p:clrMapOvr>
-</p:notes>
-</file>
-
-<file path=ppt/notesSlides/notesSlide6.xml><?xml version="1.0" encoding="utf-8"?>
-<p:notes xmlns:a="http://schemas.openxmlformats.org/drawingml/2006/main" xmlns:p="http://schemas.openxmlformats.org/presentationml/2006/main" xmlns:r="http://schemas.openxmlformats.org/officeDocument/2006/relationships">
-  <p:cSld>
-    <p:spTree>
-      <p:nvGrpSpPr>
-        <p:cNvPr id="1" name=""/>
-        <p:cNvGrpSpPr/>
-        <p:nvPr/>
-      </p:nvGrpSpPr>
-      <p:grpSpPr>
-        <a:xfrm>
-          <a:off x="0" y="0"/>
-          <a:ext cx="0" cy="0"/>
-          <a:chOff x="0" y="0"/>
-          <a:chExt cx="0" cy="0"/>
-        </a:xfrm>
-      </p:grpSpPr>
-      <p:sp>
-        <p:nvSpPr>
-          <p:cNvPr id="2" name="Slide Image Placeholder 1"/>
-          <p:cNvSpPr>
-            <a:spLocks noGrp="1"/>
-          </p:cNvSpPr>
-          <p:nvPr>
-            <p:ph type="sldImg" idx="2"/>
-          </p:nvPr>
-        </p:nvSpPr>
-        <p:spPr/>
-      </p:sp>
-      <p:sp>
-        <p:nvSpPr>
-          <p:cNvPr id="3" name="Notes Placeholder 2"/>
-          <p:cNvSpPr>
-            <a:spLocks noGrp="1"/>
-          </p:cNvSpPr>
-          <p:nvPr>
-            <p:ph type="body" idx="3" sz="quarter"/>
-          </p:nvPr>
-        </p:nvSpPr>
-        <p:spPr/>
-        <p:txBody>
-          <a:bodyPr/>
-          <a:lstStyle/>
-          <a:p>
-            <a:r>
-              <a:t>TEXTO COMPLETO DE LA LÁMINA (se proyecta resumido):</a:t>
-            </a:r>
-          </a:p>
-          <a:p/>
-          <a:p>
-            <a:r>
-              <a:t>Herramienta: Visual Studio Code (Java)</a:t>
-            </a:r>
-          </a:p>
-          <a:p/>
-          <a:p>
-            <a:r>
-              <a:t>Demo: El docente oprime el boton de la ventana ya corriendo y muestra en vivo como la mascota pasa del formulario al ArrayList, incluyendo que pasa cuando la edad se escribe como texto.</a:t>
-            </a:r>
-          </a:p>
-          <a:p/>
-          <a:p>
-            <a:r>
-              <a:t>Mismo dominio de la clinica — no otro ejemplo.</a:t>
             </a:r>
           </a:p>
         </p:txBody>
@@ -9758,118 +9670,14 @@
       </p:sp>
       <p:sp>
         <p:nvSpPr>
-          <p:cNvPr id="5" name="Rounded Rectangle 4"/>
-          <p:cNvSpPr/>
-          <p:nvPr/>
-        </p:nvSpPr>
-        <p:spPr>
-          <a:xfrm>
-            <a:off x="5797149" y="1573813"/>
-            <a:ext cx="6010497" cy="4057845"/>
-          </a:xfrm>
-          <a:prstGeom prst="roundRect">
-            <a:avLst>
-              <a:gd name="adj" fmla="val 4000"/>
-            </a:avLst>
-          </a:prstGeom>
-          <a:solidFill>
-            <a:srgbClr val="E8EEF4"/>
-          </a:solidFill>
-          <a:ln>
-            <a:noFill/>
-          </a:ln>
-        </p:spPr>
-        <p:style>
-          <a:lnRef idx="1">
-            <a:schemeClr val="accent1"/>
-          </a:lnRef>
-          <a:fillRef idx="3">
-            <a:schemeClr val="accent1"/>
-          </a:fillRef>
-          <a:effectRef idx="2">
-            <a:schemeClr val="accent1"/>
-          </a:effectRef>
-          <a:fontRef idx="minor">
-            <a:schemeClr val="lt1"/>
-          </a:fontRef>
-        </p:style>
-        <p:txBody>
-          <a:bodyPr rtlCol="0" anchor="ctr"/>
-          <a:lstStyle/>
-          <a:p>
-            <a:pPr algn="ctr"/>
-          </a:p>
-        </p:txBody>
-      </p:sp>
-      <p:pic>
-        <p:nvPicPr>
-          <p:cNvPr id="6" name="Picture 5" descr="remote-control-buttons.jpg"/>
-          <p:cNvPicPr>
-            <a:picLocks noChangeAspect="1"/>
-          </p:cNvPicPr>
-          <p:nvPr/>
-        </p:nvPicPr>
-        <p:blipFill>
-          <a:blip r:embed="rId2"/>
-          <a:stretch>
-            <a:fillRect/>
-          </a:stretch>
-        </p:blipFill>
-        <p:spPr>
-          <a:xfrm>
-            <a:off x="5870301" y="1646965"/>
-            <a:ext cx="5864193" cy="3911541"/>
-          </a:xfrm>
-          <a:prstGeom prst="rect">
-            <a:avLst/>
-          </a:prstGeom>
-        </p:spPr>
-      </p:pic>
-      <p:sp>
-        <p:nvSpPr>
-          <p:cNvPr id="7" name="TextBox 6"/>
+          <p:cNvPr id="5" name="TextBox 4"/>
           <p:cNvSpPr txBox="1"/>
           <p:nvPr/>
         </p:nvSpPr>
         <p:spPr>
           <a:xfrm>
-            <a:off x="5870301" y="5961888"/>
-            <a:ext cx="5864193" cy="320040"/>
-          </a:xfrm>
-          <a:prstGeom prst="rect">
-            <a:avLst/>
-          </a:prstGeom>
-          <a:noFill/>
-        </p:spPr>
-        <p:txBody>
-          <a:bodyPr wrap="square">
-            <a:spAutoFit/>
-          </a:bodyPr>
-          <a:lstStyle/>
-          <a:p>
-            <a:pPr algn="ctr"/>
-            <a:r>
-              <a:rPr sz="1100" b="0" i="1">
-                <a:solidFill>
-                  <a:srgbClr val="666666"/>
-                </a:solidFill>
-                <a:latin typeface="Calibri"/>
-              </a:rPr>
-              <a:t>Foto: Robert Schwarz · Pexels</a:t>
-            </a:r>
-          </a:p>
-        </p:txBody>
-      </p:sp>
-      <p:sp>
-        <p:nvSpPr>
-          <p:cNvPr id="8" name="TextBox 7"/>
-          <p:cNvSpPr txBox="1"/>
-          <p:nvPr/>
-        </p:nvSpPr>
-        <p:spPr>
-          <a:xfrm>
-            <a:off x="457200" y="1353312"/>
-            <a:ext cx="5093061" cy="5047488"/>
+            <a:off x="457200" y="1170432"/>
+            <a:ext cx="11277295" cy="5230368"/>
           </a:xfrm>
           <a:prstGeom prst="rect">
             <a:avLst/>
@@ -9949,7 +9757,7 @@
       </p:sp>
       <p:sp>
         <p:nvSpPr>
-          <p:cNvPr id="9" name="TextBox 8"/>
+          <p:cNvPr id="6" name="TextBox 5"/>
           <p:cNvSpPr txBox="1"/>
           <p:nvPr/>
         </p:nvSpPr>
@@ -10130,118 +9938,14 @@
       </p:sp>
       <p:sp>
         <p:nvSpPr>
-          <p:cNvPr id="5" name="Rounded Rectangle 4"/>
-          <p:cNvSpPr/>
-          <p:nvPr/>
-        </p:nvSpPr>
-        <p:spPr>
-          <a:xfrm>
-            <a:off x="5797149" y="1573813"/>
-            <a:ext cx="6010497" cy="4057845"/>
-          </a:xfrm>
-          <a:prstGeom prst="roundRect">
-            <a:avLst>
-              <a:gd name="adj" fmla="val 4000"/>
-            </a:avLst>
-          </a:prstGeom>
-          <a:solidFill>
-            <a:srgbClr val="E8EEF4"/>
-          </a:solidFill>
-          <a:ln>
-            <a:noFill/>
-          </a:ln>
-        </p:spPr>
-        <p:style>
-          <a:lnRef idx="1">
-            <a:schemeClr val="accent1"/>
-          </a:lnRef>
-          <a:fillRef idx="3">
-            <a:schemeClr val="accent1"/>
-          </a:fillRef>
-          <a:effectRef idx="2">
-            <a:schemeClr val="accent1"/>
-          </a:effectRef>
-          <a:fontRef idx="minor">
-            <a:schemeClr val="lt1"/>
-          </a:fontRef>
-        </p:style>
-        <p:txBody>
-          <a:bodyPr rtlCol="0" anchor="ctr"/>
-          <a:lstStyle/>
-          <a:p>
-            <a:pPr algn="ctr"/>
-          </a:p>
-        </p:txBody>
-      </p:sp>
-      <p:pic>
-        <p:nvPicPr>
-          <p:cNvPr id="6" name="Picture 5" descr="laptop-code-live-demo.jpg"/>
-          <p:cNvPicPr>
-            <a:picLocks noChangeAspect="1"/>
-          </p:cNvPicPr>
-          <p:nvPr/>
-        </p:nvPicPr>
-        <p:blipFill>
-          <a:blip r:embed="rId2"/>
-          <a:stretch>
-            <a:fillRect/>
-          </a:stretch>
-        </p:blipFill>
-        <p:spPr>
-          <a:xfrm>
-            <a:off x="5870301" y="1646965"/>
-            <a:ext cx="5864193" cy="3911541"/>
-          </a:xfrm>
-          <a:prstGeom prst="rect">
-            <a:avLst/>
-          </a:prstGeom>
-        </p:spPr>
-      </p:pic>
-      <p:sp>
-        <p:nvSpPr>
-          <p:cNvPr id="7" name="TextBox 6"/>
+          <p:cNvPr id="5" name="TextBox 4"/>
           <p:cNvSpPr txBox="1"/>
           <p:nvPr/>
         </p:nvSpPr>
         <p:spPr>
           <a:xfrm>
-            <a:off x="5870301" y="5961888"/>
-            <a:ext cx="5864193" cy="320040"/>
-          </a:xfrm>
-          <a:prstGeom prst="rect">
-            <a:avLst/>
-          </a:prstGeom>
-          <a:noFill/>
-        </p:spPr>
-        <p:txBody>
-          <a:bodyPr wrap="square">
-            <a:spAutoFit/>
-          </a:bodyPr>
-          <a:lstStyle/>
-          <a:p>
-            <a:pPr algn="ctr"/>
-            <a:r>
-              <a:rPr sz="1100" b="0" i="1">
-                <a:solidFill>
-                  <a:srgbClr val="666666"/>
-                </a:solidFill>
-                <a:latin typeface="Calibri"/>
-              </a:rPr>
-              <a:t>Foto: olia danilevich · Pexels</a:t>
-            </a:r>
-          </a:p>
-        </p:txBody>
-      </p:sp>
-      <p:sp>
-        <p:nvSpPr>
-          <p:cNvPr id="8" name="TextBox 7"/>
-          <p:cNvSpPr txBox="1"/>
-          <p:nvPr/>
-        </p:nvSpPr>
-        <p:spPr>
-          <a:xfrm>
-            <a:off x="457200" y="1353312"/>
-            <a:ext cx="5093061" cy="5047488"/>
+            <a:off x="457200" y="1170432"/>
+            <a:ext cx="11277295" cy="5230368"/>
           </a:xfrm>
           <a:prstGeom prst="rect">
             <a:avLst/>
@@ -10311,6 +10015,15 @@
               </a:rPr>
               <a:t>Demo:</a:t>
             </a:r>
+            <a:r>
+              <a:rPr sz="2000" b="0" i="0">
+                <a:solidFill>
+                  <a:srgbClr val="333333"/>
+                </a:solidFill>
+                <a:latin typeface="Calibri"/>
+              </a:rPr>
+              <a:t> El docente oprime el boton de la ventana ya corriendo y muestra en vivo como la mascota pasa del formulario al ArrayList, incluyendo que pasa cuando la edad se escribe como texto.</a:t>
+            </a:r>
           </a:p>
           <a:p>
             <a:pPr>
@@ -10332,7 +10045,7 @@
       </p:sp>
       <p:sp>
         <p:nvSpPr>
-          <p:cNvPr id="9" name="TextBox 8"/>
+          <p:cNvPr id="6" name="TextBox 5"/>
           <p:cNvSpPr txBox="1"/>
           <p:nvPr/>
         </p:nvSpPr>
@@ -10745,118 +10458,14 @@
       </p:sp>
       <p:sp>
         <p:nvSpPr>
-          <p:cNvPr id="5" name="Rounded Rectangle 4"/>
-          <p:cNvSpPr/>
-          <p:nvPr/>
-        </p:nvSpPr>
-        <p:spPr>
-          <a:xfrm>
-            <a:off x="5797149" y="1573813"/>
-            <a:ext cx="6010497" cy="4057845"/>
-          </a:xfrm>
-          <a:prstGeom prst="roundRect">
-            <a:avLst>
-              <a:gd name="adj" fmla="val 4000"/>
-            </a:avLst>
-          </a:prstGeom>
-          <a:solidFill>
-            <a:srgbClr val="E8EEF4"/>
-          </a:solidFill>
-          <a:ln>
-            <a:noFill/>
-          </a:ln>
-        </p:spPr>
-        <p:style>
-          <a:lnRef idx="1">
-            <a:schemeClr val="accent1"/>
-          </a:lnRef>
-          <a:fillRef idx="3">
-            <a:schemeClr val="accent1"/>
-          </a:fillRef>
-          <a:effectRef idx="2">
-            <a:schemeClr val="accent1"/>
-          </a:effectRef>
-          <a:fontRef idx="minor">
-            <a:schemeClr val="lt1"/>
-          </a:fontRef>
-        </p:style>
-        <p:txBody>
-          <a:bodyPr rtlCol="0" anchor="ctr"/>
-          <a:lstStyle/>
-          <a:p>
-            <a:pPr algn="ctr"/>
-          </a:p>
-        </p:txBody>
-      </p:sp>
-      <p:pic>
-        <p:nvPicPr>
-          <p:cNvPr id="6" name="Picture 5" descr="notebook-planning-desk-coffee.jpg"/>
-          <p:cNvPicPr>
-            <a:picLocks noChangeAspect="1"/>
-          </p:cNvPicPr>
-          <p:nvPr/>
-        </p:nvPicPr>
-        <p:blipFill>
-          <a:blip r:embed="rId2"/>
-          <a:stretch>
-            <a:fillRect/>
-          </a:stretch>
-        </p:blipFill>
-        <p:spPr>
-          <a:xfrm>
-            <a:off x="5870301" y="1646965"/>
-            <a:ext cx="5864193" cy="3911541"/>
-          </a:xfrm>
-          <a:prstGeom prst="rect">
-            <a:avLst/>
-          </a:prstGeom>
-        </p:spPr>
-      </p:pic>
-      <p:sp>
-        <p:nvSpPr>
-          <p:cNvPr id="7" name="TextBox 6"/>
+          <p:cNvPr id="5" name="TextBox 4"/>
           <p:cNvSpPr txBox="1"/>
           <p:nvPr/>
         </p:nvSpPr>
         <p:spPr>
           <a:xfrm>
-            <a:off x="5870301" y="5961888"/>
-            <a:ext cx="5864193" cy="320040"/>
-          </a:xfrm>
-          <a:prstGeom prst="rect">
-            <a:avLst/>
-          </a:prstGeom>
-          <a:noFill/>
-        </p:spPr>
-        <p:txBody>
-          <a:bodyPr wrap="square">
-            <a:spAutoFit/>
-          </a:bodyPr>
-          <a:lstStyle/>
-          <a:p>
-            <a:pPr algn="ctr"/>
-            <a:r>
-              <a:rPr sz="1100" b="0" i="1">
-                <a:solidFill>
-                  <a:srgbClr val="666666"/>
-                </a:solidFill>
-                <a:latin typeface="Calibri"/>
-              </a:rPr>
-              <a:t>Foto: Cup of  Couple · Pexels</a:t>
-            </a:r>
-          </a:p>
-        </p:txBody>
-      </p:sp>
-      <p:sp>
-        <p:nvSpPr>
-          <p:cNvPr id="8" name="TextBox 7"/>
-          <p:cNvSpPr txBox="1"/>
-          <p:nvPr/>
-        </p:nvSpPr>
-        <p:spPr>
-          <a:xfrm>
-            <a:off x="457200" y="1353312"/>
-            <a:ext cx="5093061" cy="5047488"/>
+            <a:off x="457200" y="1170432"/>
+            <a:ext cx="11277295" cy="5230368"/>
           </a:xfrm>
           <a:prstGeom prst="rect">
             <a:avLst/>
@@ -10981,7 +10590,7 @@
       </p:sp>
       <p:sp>
         <p:nvSpPr>
-          <p:cNvPr id="9" name="TextBox 8"/>
+          <p:cNvPr id="6" name="TextBox 5"/>
           <p:cNvSpPr txBox="1"/>
           <p:nvPr/>
         </p:nvSpPr>

--- a/Programacion II/Clases/Clase 6 - Eventos y controladores ActionListener/Presentacion.pptx
+++ b/Programacion II/Clases/Clase 6 - Eventos y controladores ActionListener/Presentacion.pptx
@@ -828,6 +828,94 @@
           <a:p>
             <a:r>
               <a:t>Dos detalles mas que le van a servir. El ActionEvent trae e.getSource(), que devuelve el componente que disparo el evento; eso permite que un mismo listener atienda varios botones y decida con un if (e.getSource() == btnBuscar). Es comodo, pero uselo con cabeza: si el metodo se llena de ifs, es mas limpio un listener por boton. Ademas de ActionListener existen otros escuchadores que ya vamos a necesitar en el sistema de la clinica: ItemListener para el JComboBox de especie, ListSelectionListener para cuando el usuario selecciona una fila del listado de mascotas, y WindowListener para preguntar 'desea guardar antes de salir' cuando lleguemos a persistencia. Y una advertencia de rendimiento: todo lo que usted escriba dentro de actionPerformed corre en el EDT, el mismo hilo que dibuja la ventana; si ahi mete una tarea larga, la interfaz se congela y el usuario cree que el programa se colgo. Para eso existe SwingWorker. Por ahora la regla es simple: listeners cortos que solo leen, delegan y muestran.</a:t>
+            </a:r>
+          </a:p>
+        </p:txBody>
+      </p:sp>
+      <p:sp>
+        <p:nvSpPr>
+          <p:cNvPr id="4" name="Slide Number Placeholder 3"/>
+          <p:cNvSpPr>
+            <a:spLocks noGrp="1"/>
+          </p:cNvSpPr>
+          <p:nvPr>
+            <p:ph type="sldNum" idx="5" sz="quarter"/>
+          </p:nvPr>
+        </p:nvSpPr>
+        <p:spPr/>
+      </p:sp>
+    </p:spTree>
+  </p:cSld>
+  <p:clrMapOvr>
+    <a:masterClrMapping/>
+  </p:clrMapOvr>
+</p:notes>
+</file>
+
+<file path=ppt/notesSlides/notesSlide6.xml><?xml version="1.0" encoding="utf-8"?>
+<p:notes xmlns:a="http://schemas.openxmlformats.org/drawingml/2006/main" xmlns:p="http://schemas.openxmlformats.org/presentationml/2006/main" xmlns:r="http://schemas.openxmlformats.org/officeDocument/2006/relationships">
+  <p:cSld>
+    <p:spTree>
+      <p:nvGrpSpPr>
+        <p:cNvPr id="1" name=""/>
+        <p:cNvGrpSpPr/>
+        <p:nvPr/>
+      </p:nvGrpSpPr>
+      <p:grpSpPr>
+        <a:xfrm>
+          <a:off x="0" y="0"/>
+          <a:ext cx="0" cy="0"/>
+          <a:chOff x="0" y="0"/>
+          <a:chExt cx="0" cy="0"/>
+        </a:xfrm>
+      </p:grpSpPr>
+      <p:sp>
+        <p:nvSpPr>
+          <p:cNvPr id="2" name="Slide Image Placeholder 1"/>
+          <p:cNvSpPr>
+            <a:spLocks noGrp="1"/>
+          </p:cNvSpPr>
+          <p:nvPr>
+            <p:ph type="sldImg" idx="2"/>
+          </p:nvPr>
+        </p:nvSpPr>
+        <p:spPr/>
+      </p:sp>
+      <p:sp>
+        <p:nvSpPr>
+          <p:cNvPr id="3" name="Notes Placeholder 2"/>
+          <p:cNvSpPr>
+            <a:spLocks noGrp="1"/>
+          </p:cNvSpPr>
+          <p:nvPr>
+            <p:ph type="body" idx="3" sz="quarter"/>
+          </p:nvPr>
+        </p:nvSpPr>
+        <p:spPr/>
+        <p:txBody>
+          <a:bodyPr/>
+          <a:lstStyle/>
+          <a:p>
+            <a:r>
+              <a:t>TEXTO COMPLETO DE LA LÁMINA (se proyecta resumido):</a:t>
+            </a:r>
+          </a:p>
+          <a:p/>
+          <a:p>
+            <a:r>
+              <a:t>Herramienta: Visual Studio Code (Java)</a:t>
+            </a:r>
+          </a:p>
+          <a:p/>
+          <a:p>
+            <a:r>
+              <a:t>Demo: El docente oprime el boton de la ventana ya corriendo y muestra en vivo como la mascota pasa del formulario al ArrayList, incluyendo que pasa cuando la edad se escribe como texto.</a:t>
+            </a:r>
+          </a:p>
+          <a:p/>
+          <a:p>
+            <a:r>
+              <a:t>Mismo dominio de la clinica — no otro ejemplo.</a:t>
             </a:r>
           </a:p>
         </p:txBody>
@@ -9670,14 +9758,83 @@
       </p:sp>
       <p:sp>
         <p:nvSpPr>
-          <p:cNvPr id="5" name="TextBox 4"/>
+          <p:cNvPr id="5" name="Rounded Rectangle 4"/>
+          <p:cNvSpPr/>
+          <p:nvPr/>
+        </p:nvSpPr>
+        <p:spPr>
+          <a:xfrm>
+            <a:off x="5797149" y="1343926"/>
+            <a:ext cx="6010497" cy="4837658"/>
+          </a:xfrm>
+          <a:prstGeom prst="roundRect">
+            <a:avLst>
+              <a:gd name="adj" fmla="val 4000"/>
+            </a:avLst>
+          </a:prstGeom>
+          <a:solidFill>
+            <a:srgbClr val="E8EEF4"/>
+          </a:solidFill>
+          <a:ln>
+            <a:noFill/>
+          </a:ln>
+        </p:spPr>
+        <p:style>
+          <a:lnRef idx="1">
+            <a:schemeClr val="accent1"/>
+          </a:lnRef>
+          <a:fillRef idx="3">
+            <a:schemeClr val="accent1"/>
+          </a:fillRef>
+          <a:effectRef idx="2">
+            <a:schemeClr val="accent1"/>
+          </a:effectRef>
+          <a:fontRef idx="minor">
+            <a:schemeClr val="lt1"/>
+          </a:fontRef>
+        </p:style>
+        <p:txBody>
+          <a:bodyPr rtlCol="0" anchor="ctr"/>
+          <a:lstStyle/>
+          <a:p>
+            <a:pPr algn="ctr"/>
+          </a:p>
+        </p:txBody>
+      </p:sp>
+      <p:pic>
+        <p:nvPicPr>
+          <p:cNvPr id="6" name="Picture 5" descr="ilus-escuchadores-paso1.png"/>
+          <p:cNvPicPr>
+            <a:picLocks noChangeAspect="1"/>
+          </p:cNvPicPr>
+          <p:nvPr/>
+        </p:nvPicPr>
+        <p:blipFill>
+          <a:blip r:embed="rId2"/>
+          <a:stretch>
+            <a:fillRect/>
+          </a:stretch>
+        </p:blipFill>
+        <p:spPr>
+          <a:xfrm>
+            <a:off x="5870301" y="1417078"/>
+            <a:ext cx="5864193" cy="4691354"/>
+          </a:xfrm>
+          <a:prstGeom prst="rect">
+            <a:avLst/>
+          </a:prstGeom>
+        </p:spPr>
+      </p:pic>
+      <p:sp>
+        <p:nvSpPr>
+          <p:cNvPr id="7" name="TextBox 6"/>
           <p:cNvSpPr txBox="1"/>
           <p:nvPr/>
         </p:nvSpPr>
         <p:spPr>
           <a:xfrm>
-            <a:off x="457200" y="1170432"/>
-            <a:ext cx="11277295" cy="5230368"/>
+            <a:off x="457200" y="1353312"/>
+            <a:ext cx="5093061" cy="5047488"/>
           </a:xfrm>
           <a:prstGeom prst="rect">
             <a:avLst/>
@@ -9757,7 +9914,7 @@
       </p:sp>
       <p:sp>
         <p:nvSpPr>
-          <p:cNvPr id="6" name="TextBox 5"/>
+          <p:cNvPr id="8" name="TextBox 7"/>
           <p:cNvSpPr txBox="1"/>
           <p:nvPr/>
         </p:nvSpPr>
@@ -9938,14 +10095,83 @@
       </p:sp>
       <p:sp>
         <p:nvSpPr>
-          <p:cNvPr id="5" name="TextBox 4"/>
+          <p:cNvPr id="5" name="Rounded Rectangle 4"/>
+          <p:cNvSpPr/>
+          <p:nvPr/>
+        </p:nvSpPr>
+        <p:spPr>
+          <a:xfrm>
+            <a:off x="5797149" y="1343926"/>
+            <a:ext cx="6010497" cy="4837658"/>
+          </a:xfrm>
+          <a:prstGeom prst="roundRect">
+            <a:avLst>
+              <a:gd name="adj" fmla="val 4000"/>
+            </a:avLst>
+          </a:prstGeom>
+          <a:solidFill>
+            <a:srgbClr val="E8EEF4"/>
+          </a:solidFill>
+          <a:ln>
+            <a:noFill/>
+          </a:ln>
+        </p:spPr>
+        <p:style>
+          <a:lnRef idx="1">
+            <a:schemeClr val="accent1"/>
+          </a:lnRef>
+          <a:fillRef idx="3">
+            <a:schemeClr val="accent1"/>
+          </a:fillRef>
+          <a:effectRef idx="2">
+            <a:schemeClr val="accent1"/>
+          </a:effectRef>
+          <a:fontRef idx="minor">
+            <a:schemeClr val="lt1"/>
+          </a:fontRef>
+        </p:style>
+        <p:txBody>
+          <a:bodyPr rtlCol="0" anchor="ctr"/>
+          <a:lstStyle/>
+          <a:p>
+            <a:pPr algn="ctr"/>
+          </a:p>
+        </p:txBody>
+      </p:sp>
+      <p:pic>
+        <p:nvPicPr>
+          <p:cNvPr id="6" name="Picture 5" descr="ilus-demo-paso1.png"/>
+          <p:cNvPicPr>
+            <a:picLocks noChangeAspect="1"/>
+          </p:cNvPicPr>
+          <p:nvPr/>
+        </p:nvPicPr>
+        <p:blipFill>
+          <a:blip r:embed="rId2"/>
+          <a:stretch>
+            <a:fillRect/>
+          </a:stretch>
+        </p:blipFill>
+        <p:spPr>
+          <a:xfrm>
+            <a:off x="5870301" y="1417078"/>
+            <a:ext cx="5864193" cy="4691354"/>
+          </a:xfrm>
+          <a:prstGeom prst="rect">
+            <a:avLst/>
+          </a:prstGeom>
+        </p:spPr>
+      </p:pic>
+      <p:sp>
+        <p:nvSpPr>
+          <p:cNvPr id="7" name="TextBox 6"/>
           <p:cNvSpPr txBox="1"/>
           <p:nvPr/>
         </p:nvSpPr>
         <p:spPr>
           <a:xfrm>
-            <a:off x="457200" y="1170432"/>
-            <a:ext cx="11277295" cy="5230368"/>
+            <a:off x="457200" y="1353312"/>
+            <a:ext cx="5093061" cy="5047488"/>
           </a:xfrm>
           <a:prstGeom prst="rect">
             <a:avLst/>
@@ -10022,7 +10248,7 @@
                 </a:solidFill>
                 <a:latin typeface="Calibri"/>
               </a:rPr>
-              <a:t> El docente oprime el boton de la ventana ya corriendo y muestra en vivo como la mascota pasa del formulario al ArrayList, incluyendo que pasa cuando la edad se escribe como texto.</a:t>
+              <a:t> El docente oprime el boton de la ventana ya corriendo y muestra en vivo como la mascota pasa del formulario al ArrayList, incluyendo que…</a:t>
             </a:r>
           </a:p>
           <a:p>
@@ -10045,7 +10271,7 @@
       </p:sp>
       <p:sp>
         <p:nvSpPr>
-          <p:cNvPr id="6" name="TextBox 5"/>
+          <p:cNvPr id="8" name="TextBox 7"/>
           <p:cNvSpPr txBox="1"/>
           <p:nvPr/>
         </p:nvSpPr>
